--- a/examples/demo_dark.pptx
+++ b/examples/demo_dark.pptx
@@ -4485,7 +4485,7 @@
         <p:spPr>
           <a:xfrm>
             <a:off x="685800" y="2011679"/>
-            <a:ext cx="9677095" cy="548640"/>
+            <a:ext cx="9503359" cy="548640"/>
           </a:xfrm>
           <a:prstGeom prst="rect">
             <a:avLst/>
@@ -4519,8 +4519,8 @@
         </p:nvSpPr>
         <p:spPr>
           <a:xfrm>
-            <a:off x="10545775" y="2125979"/>
-            <a:ext cx="1188720" cy="320040"/>
+            <a:off x="10372039" y="2125979"/>
+            <a:ext cx="1362456" cy="320040"/>
           </a:xfrm>
           <a:prstGeom prst="roundRect">
             <a:avLst>
@@ -4721,7 +4721,7 @@
         <p:spPr>
           <a:xfrm>
             <a:off x="685800" y="457200"/>
-            <a:ext cx="9677095" cy="548640"/>
+            <a:ext cx="8735263" cy="548640"/>
           </a:xfrm>
           <a:prstGeom prst="rect">
             <a:avLst/>
@@ -4755,8 +4755,8 @@
         </p:nvSpPr>
         <p:spPr>
           <a:xfrm>
-            <a:off x="10545775" y="571500"/>
-            <a:ext cx="1188720" cy="320040"/>
+            <a:off x="9603943" y="571500"/>
+            <a:ext cx="2130552" cy="320040"/>
           </a:xfrm>
           <a:prstGeom prst="roundRect">
             <a:avLst>
@@ -6421,7 +6421,7 @@
         <p:spPr>
           <a:xfrm>
             <a:off x="685800" y="457200"/>
-            <a:ext cx="9677095" cy="548640"/>
+            <a:ext cx="8927287" cy="548640"/>
           </a:xfrm>
           <a:prstGeom prst="rect">
             <a:avLst/>
@@ -6455,8 +6455,8 @@
         </p:nvSpPr>
         <p:spPr>
           <a:xfrm>
-            <a:off x="10545775" y="571500"/>
-            <a:ext cx="1188720" cy="320040"/>
+            <a:off x="9795967" y="571500"/>
+            <a:ext cx="1938528" cy="320040"/>
           </a:xfrm>
           <a:prstGeom prst="roundRect">
             <a:avLst>
@@ -6943,7 +6943,7 @@
             </a:avLst>
           </a:prstGeom>
           <a:solidFill>
-            <a:srgbClr val="334155"/>
+            <a:srgbClr val="94A3B8"/>
           </a:solidFill>
           <a:ln>
             <a:noFill/>
@@ -7058,7 +7058,7 @@
             </a:avLst>
           </a:prstGeom>
           <a:solidFill>
-            <a:srgbClr val="334155"/>
+            <a:srgbClr val="94A3B8"/>
           </a:solidFill>
           <a:ln>
             <a:noFill/>
@@ -15039,7 +15039,7 @@
         <p:spPr>
           <a:xfrm>
             <a:off x="685800" y="457200"/>
-            <a:ext cx="9677095" cy="548640"/>
+            <a:ext cx="9503359" cy="548640"/>
           </a:xfrm>
           <a:prstGeom prst="rect">
             <a:avLst/>
@@ -15073,8 +15073,8 @@
         </p:nvSpPr>
         <p:spPr>
           <a:xfrm>
-            <a:off x="10545775" y="571500"/>
-            <a:ext cx="1188720" cy="320040"/>
+            <a:off x="10372039" y="571500"/>
+            <a:ext cx="1362456" cy="320040"/>
           </a:xfrm>
           <a:prstGeom prst="roundRect">
             <a:avLst>

--- a/examples/demo_dark.pptx
+++ b/examples/demo_dark.pptx
@@ -16,6 +16,9 @@
     <p:sldId id="264" r:id="rId15"/>
     <p:sldId id="265" r:id="rId16"/>
     <p:sldId id="266" r:id="rId17"/>
+    <p:sldId id="267" r:id="rId18"/>
+    <p:sldId id="268" r:id="rId19"/>
+    <p:sldId id="269" r:id="rId20"/>
   </p:sldIdLst>
   <p:sldSz cx="12191695" cy="6858000" type="screen4x3"/>
   <p:notesSz cx="6858000" cy="9144000"/>
@@ -8019,6 +8022,5880 @@
           </a:graphicData>
         </a:graphic>
       </p:graphicFrame>
+    </p:spTree>
+  </p:cSld>
+  <p:clrMapOvr>
+    <a:masterClrMapping/>
+  </p:clrMapOvr>
+</p:sld>
+</file>
+
+<file path=ppt/slides/slide12.xml><?xml version="1.0" encoding="utf-8"?>
+<p:sld xmlns:a="http://schemas.openxmlformats.org/drawingml/2006/main" xmlns:p="http://schemas.openxmlformats.org/presentationml/2006/main" xmlns:r="http://schemas.openxmlformats.org/officeDocument/2006/relationships">
+  <p:cSld>
+    <p:bg>
+      <p:bgPr>
+        <a:solidFill>
+          <a:srgbClr val="0F172A"/>
+        </a:solidFill>
+        <a:effectLst/>
+      </p:bgPr>
+    </p:bg>
+    <p:spTree>
+      <p:nvGrpSpPr>
+        <p:cNvPr id="1" name=""/>
+        <p:cNvGrpSpPr/>
+        <p:nvPr/>
+      </p:nvGrpSpPr>
+      <p:grpSpPr/>
+      <p:sp>
+        <p:nvSpPr>
+          <p:cNvPr id="2" name="Rectangle 1"/>
+          <p:cNvSpPr/>
+          <p:nvPr/>
+        </p:nvSpPr>
+        <p:spPr>
+          <a:xfrm>
+            <a:off x="457200" y="457200"/>
+            <a:ext cx="45720" cy="548640"/>
+          </a:xfrm>
+          <a:prstGeom prst="rect">
+            <a:avLst/>
+          </a:prstGeom>
+          <a:solidFill>
+            <a:srgbClr val="3B82F6"/>
+          </a:solidFill>
+          <a:ln>
+            <a:noFill/>
+          </a:ln>
+        </p:spPr>
+        <p:style>
+          <a:lnRef idx="1">
+            <a:schemeClr val="accent1"/>
+          </a:lnRef>
+          <a:fillRef idx="3">
+            <a:schemeClr val="accent1"/>
+          </a:fillRef>
+          <a:effectRef idx="2">
+            <a:schemeClr val="accent1"/>
+          </a:effectRef>
+          <a:fontRef idx="minor">
+            <a:schemeClr val="lt1"/>
+          </a:fontRef>
+        </p:style>
+        <p:txBody>
+          <a:bodyPr rtlCol="0" anchor="ctr"/>
+          <a:lstStyle/>
+          <a:p>
+            <a:pPr algn="ctr"/>
+          </a:p>
+        </p:txBody>
+      </p:sp>
+      <p:sp>
+        <p:nvSpPr>
+          <p:cNvPr id="3" name="TextBox 2"/>
+          <p:cNvSpPr txBox="1"/>
+          <p:nvPr/>
+        </p:nvSpPr>
+        <p:spPr>
+          <a:xfrm>
+            <a:off x="685800" y="457200"/>
+            <a:ext cx="9311335" cy="548640"/>
+          </a:xfrm>
+          <a:prstGeom prst="rect">
+            <a:avLst/>
+          </a:prstGeom>
+          <a:noFill/>
+        </p:spPr>
+        <p:txBody>
+          <a:bodyPr wrap="square" lIns="0" tIns="0" rIns="0" bIns="0">
+            <a:spAutoFit/>
+          </a:bodyPr>
+          <a:lstStyle/>
+          <a:p>
+            <a:pPr algn="l"/>
+            <a:r>
+              <a:rPr sz="2800" b="1" i="0">
+                <a:solidFill>
+                  <a:srgbClr val="F8FAFC"/>
+                </a:solidFill>
+                <a:latin typeface="Calibri Light"/>
+              </a:rPr>
+              <a:t>Phase 3 Additions</a:t>
+            </a:r>
+          </a:p>
+        </p:txBody>
+      </p:sp>
+      <p:sp>
+        <p:nvSpPr>
+          <p:cNvPr id="4" name="Rounded Rectangle 3"/>
+          <p:cNvSpPr/>
+          <p:nvPr/>
+        </p:nvSpPr>
+        <p:spPr>
+          <a:xfrm>
+            <a:off x="10180015" y="571500"/>
+            <a:ext cx="1554480" cy="320040"/>
+          </a:xfrm>
+          <a:prstGeom prst="roundRect">
+            <a:avLst>
+              <a:gd name="adj" fmla="val 50000"/>
+            </a:avLst>
+          </a:prstGeom>
+          <a:solidFill>
+            <a:srgbClr val="3B82F6"/>
+          </a:solidFill>
+          <a:ln>
+            <a:noFill/>
+          </a:ln>
+        </p:spPr>
+        <p:style>
+          <a:lnRef idx="1">
+            <a:schemeClr val="accent1"/>
+          </a:lnRef>
+          <a:fillRef idx="3">
+            <a:schemeClr val="accent1"/>
+          </a:fillRef>
+          <a:effectRef idx="2">
+            <a:schemeClr val="accent1"/>
+          </a:effectRef>
+          <a:fontRef idx="minor">
+            <a:schemeClr val="lt1"/>
+          </a:fontRef>
+        </p:style>
+        <p:txBody>
+          <a:bodyPr rtlCol="0" anchor="ctr" wrap="none"/>
+          <a:lstStyle/>
+          <a:p>
+            <a:pPr algn="ctr"/>
+            <a:r>
+              <a:rPr sz="1100" b="1">
+                <a:solidFill>
+                  <a:srgbClr val="FFFFFF"/>
+                </a:solidFill>
+                <a:latin typeface="Calibri"/>
+              </a:rPr>
+              <a:t>Heatmap + Range</a:t>
+            </a:r>
+          </a:p>
+        </p:txBody>
+      </p:sp>
+      <p:sp>
+        <p:nvSpPr>
+          <p:cNvPr id="5" name="TextBox 4"/>
+          <p:cNvSpPr txBox="1"/>
+          <p:nvPr/>
+        </p:nvSpPr>
+        <p:spPr>
+          <a:xfrm>
+            <a:off x="457200" y="1280160"/>
+            <a:ext cx="11277295" cy="320040"/>
+          </a:xfrm>
+          <a:prstGeom prst="rect">
+            <a:avLst/>
+          </a:prstGeom>
+          <a:noFill/>
+        </p:spPr>
+        <p:txBody>
+          <a:bodyPr wrap="square" lIns="0" tIns="0" rIns="0" bIns="0">
+            <a:spAutoFit/>
+          </a:bodyPr>
+          <a:lstStyle/>
+          <a:p>
+            <a:pPr algn="l"/>
+            <a:r>
+              <a:rPr sz="2000" b="1" i="0">
+                <a:solidFill>
+                  <a:srgbClr val="F8FAFC"/>
+                </a:solidFill>
+                <a:latin typeface="Calibri Light"/>
+              </a:rPr>
+              <a:t>Feature Adoption Score by Platform &amp; Quarter (%)</a:t>
+            </a:r>
+          </a:p>
+        </p:txBody>
+      </p:sp>
+      <p:sp>
+        <p:nvSpPr>
+          <p:cNvPr id="6" name="TextBox 5"/>
+          <p:cNvSpPr txBox="1"/>
+          <p:nvPr/>
+        </p:nvSpPr>
+        <p:spPr>
+          <a:xfrm>
+            <a:off x="1463040" y="1600200"/>
+            <a:ext cx="2567863" cy="228600"/>
+          </a:xfrm>
+          <a:prstGeom prst="rect">
+            <a:avLst/>
+          </a:prstGeom>
+          <a:noFill/>
+        </p:spPr>
+        <p:txBody>
+          <a:bodyPr wrap="square" lIns="0" tIns="0" rIns="0" bIns="0">
+            <a:spAutoFit/>
+          </a:bodyPr>
+          <a:lstStyle/>
+          <a:p>
+            <a:pPr algn="ctr"/>
+            <a:r>
+              <a:rPr sz="1100" b="1" i="0">
+                <a:solidFill>
+                  <a:srgbClr val="CBD5E1"/>
+                </a:solidFill>
+                <a:latin typeface="Calibri"/>
+              </a:rPr>
+              <a:t>Q1</a:t>
+            </a:r>
+          </a:p>
+        </p:txBody>
+      </p:sp>
+      <p:sp>
+        <p:nvSpPr>
+          <p:cNvPr id="7" name="TextBox 6"/>
+          <p:cNvSpPr txBox="1"/>
+          <p:nvPr/>
+        </p:nvSpPr>
+        <p:spPr>
+          <a:xfrm>
+            <a:off x="4030903" y="1600200"/>
+            <a:ext cx="2567863" cy="228600"/>
+          </a:xfrm>
+          <a:prstGeom prst="rect">
+            <a:avLst/>
+          </a:prstGeom>
+          <a:noFill/>
+        </p:spPr>
+        <p:txBody>
+          <a:bodyPr wrap="square" lIns="0" tIns="0" rIns="0" bIns="0">
+            <a:spAutoFit/>
+          </a:bodyPr>
+          <a:lstStyle/>
+          <a:p>
+            <a:pPr algn="ctr"/>
+            <a:r>
+              <a:rPr sz="1100" b="1" i="0">
+                <a:solidFill>
+                  <a:srgbClr val="CBD5E1"/>
+                </a:solidFill>
+                <a:latin typeface="Calibri"/>
+              </a:rPr>
+              <a:t>Q2</a:t>
+            </a:r>
+          </a:p>
+        </p:txBody>
+      </p:sp>
+      <p:sp>
+        <p:nvSpPr>
+          <p:cNvPr id="8" name="TextBox 7"/>
+          <p:cNvSpPr txBox="1"/>
+          <p:nvPr/>
+        </p:nvSpPr>
+        <p:spPr>
+          <a:xfrm>
+            <a:off x="6598767" y="1600200"/>
+            <a:ext cx="2567863" cy="228600"/>
+          </a:xfrm>
+          <a:prstGeom prst="rect">
+            <a:avLst/>
+          </a:prstGeom>
+          <a:noFill/>
+        </p:spPr>
+        <p:txBody>
+          <a:bodyPr wrap="square" lIns="0" tIns="0" rIns="0" bIns="0">
+            <a:spAutoFit/>
+          </a:bodyPr>
+          <a:lstStyle/>
+          <a:p>
+            <a:pPr algn="ctr"/>
+            <a:r>
+              <a:rPr sz="1100" b="1" i="0">
+                <a:solidFill>
+                  <a:srgbClr val="CBD5E1"/>
+                </a:solidFill>
+                <a:latin typeface="Calibri"/>
+              </a:rPr>
+              <a:t>Q3</a:t>
+            </a:r>
+          </a:p>
+        </p:txBody>
+      </p:sp>
+      <p:sp>
+        <p:nvSpPr>
+          <p:cNvPr id="9" name="TextBox 8"/>
+          <p:cNvSpPr txBox="1"/>
+          <p:nvPr/>
+        </p:nvSpPr>
+        <p:spPr>
+          <a:xfrm>
+            <a:off x="9166631" y="1600200"/>
+            <a:ext cx="2567863" cy="228600"/>
+          </a:xfrm>
+          <a:prstGeom prst="rect">
+            <a:avLst/>
+          </a:prstGeom>
+          <a:noFill/>
+        </p:spPr>
+        <p:txBody>
+          <a:bodyPr wrap="square" lIns="0" tIns="0" rIns="0" bIns="0">
+            <a:spAutoFit/>
+          </a:bodyPr>
+          <a:lstStyle/>
+          <a:p>
+            <a:pPr algn="ctr"/>
+            <a:r>
+              <a:rPr sz="1100" b="1" i="0">
+                <a:solidFill>
+                  <a:srgbClr val="CBD5E1"/>
+                </a:solidFill>
+                <a:latin typeface="Calibri"/>
+              </a:rPr>
+              <a:t>Q4</a:t>
+            </a:r>
+          </a:p>
+        </p:txBody>
+      </p:sp>
+      <p:sp>
+        <p:nvSpPr>
+          <p:cNvPr id="10" name="TextBox 9"/>
+          <p:cNvSpPr txBox="1"/>
+          <p:nvPr/>
+        </p:nvSpPr>
+        <p:spPr>
+          <a:xfrm>
+            <a:off x="457200" y="1828800"/>
+            <a:ext cx="1005840" cy="292608"/>
+          </a:xfrm>
+          <a:prstGeom prst="rect">
+            <a:avLst/>
+          </a:prstGeom>
+          <a:noFill/>
+        </p:spPr>
+        <p:txBody>
+          <a:bodyPr wrap="square" lIns="0" tIns="0" rIns="0" bIns="0">
+            <a:spAutoFit/>
+          </a:bodyPr>
+          <a:lstStyle/>
+          <a:p>
+            <a:pPr algn="l"/>
+            <a:r>
+              <a:rPr sz="1100" b="0" i="0">
+                <a:solidFill>
+                  <a:srgbClr val="CBD5E1"/>
+                </a:solidFill>
+                <a:latin typeface="Calibri"/>
+              </a:rPr>
+              <a:t>Mobile</a:t>
+            </a:r>
+          </a:p>
+        </p:txBody>
+      </p:sp>
+      <p:sp>
+        <p:nvSpPr>
+          <p:cNvPr id="11" name="Rounded Rectangle 10"/>
+          <p:cNvSpPr/>
+          <p:nvPr/>
+        </p:nvSpPr>
+        <p:spPr>
+          <a:xfrm>
+            <a:off x="1481328" y="1847088"/>
+            <a:ext cx="2531287" cy="256032"/>
+          </a:xfrm>
+          <a:prstGeom prst="roundRect">
+            <a:avLst>
+              <a:gd name="adj" fmla="val 7142"/>
+            </a:avLst>
+          </a:prstGeom>
+          <a:solidFill>
+            <a:srgbClr val="3870CA"/>
+          </a:solidFill>
+          <a:ln>
+            <a:noFill/>
+          </a:ln>
+        </p:spPr>
+        <p:style>
+          <a:lnRef idx="1">
+            <a:schemeClr val="accent1"/>
+          </a:lnRef>
+          <a:fillRef idx="3">
+            <a:schemeClr val="accent1"/>
+          </a:fillRef>
+          <a:effectRef idx="2">
+            <a:schemeClr val="accent1"/>
+          </a:effectRef>
+          <a:fontRef idx="minor">
+            <a:schemeClr val="lt1"/>
+          </a:fontRef>
+        </p:style>
+        <p:txBody>
+          <a:bodyPr rtlCol="0" anchor="ctr"/>
+          <a:lstStyle/>
+          <a:p>
+            <a:pPr algn="ctr"/>
+          </a:p>
+        </p:txBody>
+      </p:sp>
+      <p:sp>
+        <p:nvSpPr>
+          <p:cNvPr id="12" name="TextBox 11"/>
+          <p:cNvSpPr txBox="1"/>
+          <p:nvPr/>
+        </p:nvSpPr>
+        <p:spPr>
+          <a:xfrm>
+            <a:off x="1463040" y="1828800"/>
+            <a:ext cx="2567863" cy="292608"/>
+          </a:xfrm>
+          <a:prstGeom prst="rect">
+            <a:avLst/>
+          </a:prstGeom>
+          <a:noFill/>
+        </p:spPr>
+        <p:txBody>
+          <a:bodyPr wrap="square" lIns="0" tIns="0" rIns="0" bIns="0">
+            <a:spAutoFit/>
+          </a:bodyPr>
+          <a:lstStyle/>
+          <a:p>
+            <a:pPr algn="ctr"/>
+            <a:r>
+              <a:rPr sz="1100" b="1" i="0">
+                <a:solidFill>
+                  <a:srgbClr val="0F172A"/>
+                </a:solidFill>
+                <a:latin typeface="Calibri"/>
+              </a:rPr>
+              <a:t>87</a:t>
+            </a:r>
+          </a:p>
+        </p:txBody>
+      </p:sp>
+      <p:sp>
+        <p:nvSpPr>
+          <p:cNvPr id="13" name="Rounded Rectangle 12"/>
+          <p:cNvSpPr/>
+          <p:nvPr/>
+        </p:nvSpPr>
+        <p:spPr>
+          <a:xfrm>
+            <a:off x="4049191" y="1847088"/>
+            <a:ext cx="2531287" cy="256032"/>
+          </a:xfrm>
+          <a:prstGeom prst="roundRect">
+            <a:avLst>
+              <a:gd name="adj" fmla="val 7142"/>
+            </a:avLst>
+          </a:prstGeom>
+          <a:solidFill>
+            <a:srgbClr val="3976D8"/>
+          </a:solidFill>
+          <a:ln>
+            <a:noFill/>
+          </a:ln>
+        </p:spPr>
+        <p:style>
+          <a:lnRef idx="1">
+            <a:schemeClr val="accent1"/>
+          </a:lnRef>
+          <a:fillRef idx="3">
+            <a:schemeClr val="accent1"/>
+          </a:fillRef>
+          <a:effectRef idx="2">
+            <a:schemeClr val="accent1"/>
+          </a:effectRef>
+          <a:fontRef idx="minor">
+            <a:schemeClr val="lt1"/>
+          </a:fontRef>
+        </p:style>
+        <p:txBody>
+          <a:bodyPr rtlCol="0" anchor="ctr"/>
+          <a:lstStyle/>
+          <a:p>
+            <a:pPr algn="ctr"/>
+          </a:p>
+        </p:txBody>
+      </p:sp>
+      <p:sp>
+        <p:nvSpPr>
+          <p:cNvPr id="14" name="TextBox 13"/>
+          <p:cNvSpPr txBox="1"/>
+          <p:nvPr/>
+        </p:nvSpPr>
+        <p:spPr>
+          <a:xfrm>
+            <a:off x="4030903" y="1828800"/>
+            <a:ext cx="2567863" cy="292608"/>
+          </a:xfrm>
+          <a:prstGeom prst="rect">
+            <a:avLst/>
+          </a:prstGeom>
+          <a:noFill/>
+        </p:spPr>
+        <p:txBody>
+          <a:bodyPr wrap="square" lIns="0" tIns="0" rIns="0" bIns="0">
+            <a:spAutoFit/>
+          </a:bodyPr>
+          <a:lstStyle/>
+          <a:p>
+            <a:pPr algn="ctr"/>
+            <a:r>
+              <a:rPr sz="1100" b="1" i="0">
+                <a:solidFill>
+                  <a:srgbClr val="0F172A"/>
+                </a:solidFill>
+                <a:latin typeface="Calibri"/>
+              </a:rPr>
+              <a:t>91</a:t>
+            </a:r>
+          </a:p>
+        </p:txBody>
+      </p:sp>
+      <p:sp>
+        <p:nvSpPr>
+          <p:cNvPr id="15" name="Rounded Rectangle 14"/>
+          <p:cNvSpPr/>
+          <p:nvPr/>
+        </p:nvSpPr>
+        <p:spPr>
+          <a:xfrm>
+            <a:off x="6617055" y="1847088"/>
+            <a:ext cx="2531287" cy="256032"/>
+          </a:xfrm>
+          <a:prstGeom prst="roundRect">
+            <a:avLst>
+              <a:gd name="adj" fmla="val 7142"/>
+            </a:avLst>
+          </a:prstGeom>
+          <a:solidFill>
+            <a:srgbClr val="3762A9"/>
+          </a:solidFill>
+          <a:ln>
+            <a:noFill/>
+          </a:ln>
+        </p:spPr>
+        <p:style>
+          <a:lnRef idx="1">
+            <a:schemeClr val="accent1"/>
+          </a:lnRef>
+          <a:fillRef idx="3">
+            <a:schemeClr val="accent1"/>
+          </a:fillRef>
+          <a:effectRef idx="2">
+            <a:schemeClr val="accent1"/>
+          </a:effectRef>
+          <a:fontRef idx="minor">
+            <a:schemeClr val="lt1"/>
+          </a:fontRef>
+        </p:style>
+        <p:txBody>
+          <a:bodyPr rtlCol="0" anchor="ctr"/>
+          <a:lstStyle/>
+          <a:p>
+            <a:pPr algn="ctr"/>
+          </a:p>
+        </p:txBody>
+      </p:sp>
+      <p:sp>
+        <p:nvSpPr>
+          <p:cNvPr id="16" name="TextBox 15"/>
+          <p:cNvSpPr txBox="1"/>
+          <p:nvPr/>
+        </p:nvSpPr>
+        <p:spPr>
+          <a:xfrm>
+            <a:off x="6598767" y="1828800"/>
+            <a:ext cx="2567863" cy="292608"/>
+          </a:xfrm>
+          <a:prstGeom prst="rect">
+            <a:avLst/>
+          </a:prstGeom>
+          <a:noFill/>
+        </p:spPr>
+        <p:txBody>
+          <a:bodyPr wrap="square" lIns="0" tIns="0" rIns="0" bIns="0">
+            <a:spAutoFit/>
+          </a:bodyPr>
+          <a:lstStyle/>
+          <a:p>
+            <a:pPr algn="ctr"/>
+            <a:r>
+              <a:rPr sz="1100" b="1" i="0">
+                <a:solidFill>
+                  <a:srgbClr val="F8FAFC"/>
+                </a:solidFill>
+                <a:latin typeface="Calibri"/>
+              </a:rPr>
+              <a:t>78</a:t>
+            </a:r>
+          </a:p>
+        </p:txBody>
+      </p:sp>
+      <p:sp>
+        <p:nvSpPr>
+          <p:cNvPr id="17" name="Rounded Rectangle 16"/>
+          <p:cNvSpPr/>
+          <p:nvPr/>
+        </p:nvSpPr>
+        <p:spPr>
+          <a:xfrm>
+            <a:off x="9184919" y="1847088"/>
+            <a:ext cx="2531287" cy="256032"/>
+          </a:xfrm>
+          <a:prstGeom prst="roundRect">
+            <a:avLst>
+              <a:gd name="adj" fmla="val 7142"/>
+            </a:avLst>
+          </a:prstGeom>
+          <a:solidFill>
+            <a:srgbClr val="3A7CE7"/>
+          </a:solidFill>
+          <a:ln>
+            <a:noFill/>
+          </a:ln>
+        </p:spPr>
+        <p:style>
+          <a:lnRef idx="1">
+            <a:schemeClr val="accent1"/>
+          </a:lnRef>
+          <a:fillRef idx="3">
+            <a:schemeClr val="accent1"/>
+          </a:fillRef>
+          <a:effectRef idx="2">
+            <a:schemeClr val="accent1"/>
+          </a:effectRef>
+          <a:fontRef idx="minor">
+            <a:schemeClr val="lt1"/>
+          </a:fontRef>
+        </p:style>
+        <p:txBody>
+          <a:bodyPr rtlCol="0" anchor="ctr"/>
+          <a:lstStyle/>
+          <a:p>
+            <a:pPr algn="ctr"/>
+          </a:p>
+        </p:txBody>
+      </p:sp>
+      <p:sp>
+        <p:nvSpPr>
+          <p:cNvPr id="18" name="TextBox 17"/>
+          <p:cNvSpPr txBox="1"/>
+          <p:nvPr/>
+        </p:nvSpPr>
+        <p:spPr>
+          <a:xfrm>
+            <a:off x="9166631" y="1828800"/>
+            <a:ext cx="2567863" cy="292608"/>
+          </a:xfrm>
+          <a:prstGeom prst="rect">
+            <a:avLst/>
+          </a:prstGeom>
+          <a:noFill/>
+        </p:spPr>
+        <p:txBody>
+          <a:bodyPr wrap="square" lIns="0" tIns="0" rIns="0" bIns="0">
+            <a:spAutoFit/>
+          </a:bodyPr>
+          <a:lstStyle/>
+          <a:p>
+            <a:pPr algn="ctr"/>
+            <a:r>
+              <a:rPr sz="1100" b="1" i="0">
+                <a:solidFill>
+                  <a:srgbClr val="0F172A"/>
+                </a:solidFill>
+                <a:latin typeface="Calibri"/>
+              </a:rPr>
+              <a:t>95</a:t>
+            </a:r>
+          </a:p>
+        </p:txBody>
+      </p:sp>
+      <p:sp>
+        <p:nvSpPr>
+          <p:cNvPr id="19" name="TextBox 18"/>
+          <p:cNvSpPr txBox="1"/>
+          <p:nvPr/>
+        </p:nvSpPr>
+        <p:spPr>
+          <a:xfrm>
+            <a:off x="457200" y="2121408"/>
+            <a:ext cx="1005840" cy="292608"/>
+          </a:xfrm>
+          <a:prstGeom prst="rect">
+            <a:avLst/>
+          </a:prstGeom>
+          <a:noFill/>
+        </p:spPr>
+        <p:txBody>
+          <a:bodyPr wrap="square" lIns="0" tIns="0" rIns="0" bIns="0">
+            <a:spAutoFit/>
+          </a:bodyPr>
+          <a:lstStyle/>
+          <a:p>
+            <a:pPr algn="l"/>
+            <a:r>
+              <a:rPr sz="1100" b="0" i="0">
+                <a:solidFill>
+                  <a:srgbClr val="CBD5E1"/>
+                </a:solidFill>
+                <a:latin typeface="Calibri"/>
+              </a:rPr>
+              <a:t>Web</a:t>
+            </a:r>
+          </a:p>
+        </p:txBody>
+      </p:sp>
+      <p:sp>
+        <p:nvSpPr>
+          <p:cNvPr id="20" name="Rounded Rectangle 19"/>
+          <p:cNvSpPr/>
+          <p:nvPr/>
+        </p:nvSpPr>
+        <p:spPr>
+          <a:xfrm>
+            <a:off x="1481328" y="2139696"/>
+            <a:ext cx="2531287" cy="256032"/>
+          </a:xfrm>
+          <a:prstGeom prst="roundRect">
+            <a:avLst>
+              <a:gd name="adj" fmla="val 7142"/>
+            </a:avLst>
+          </a:prstGeom>
+          <a:solidFill>
+            <a:srgbClr val="365A93"/>
+          </a:solidFill>
+          <a:ln>
+            <a:noFill/>
+          </a:ln>
+        </p:spPr>
+        <p:style>
+          <a:lnRef idx="1">
+            <a:schemeClr val="accent1"/>
+          </a:lnRef>
+          <a:fillRef idx="3">
+            <a:schemeClr val="accent1"/>
+          </a:fillRef>
+          <a:effectRef idx="2">
+            <a:schemeClr val="accent1"/>
+          </a:effectRef>
+          <a:fontRef idx="minor">
+            <a:schemeClr val="lt1"/>
+          </a:fontRef>
+        </p:style>
+        <p:txBody>
+          <a:bodyPr rtlCol="0" anchor="ctr"/>
+          <a:lstStyle/>
+          <a:p>
+            <a:pPr algn="ctr"/>
+          </a:p>
+        </p:txBody>
+      </p:sp>
+      <p:sp>
+        <p:nvSpPr>
+          <p:cNvPr id="21" name="TextBox 20"/>
+          <p:cNvSpPr txBox="1"/>
+          <p:nvPr/>
+        </p:nvSpPr>
+        <p:spPr>
+          <a:xfrm>
+            <a:off x="1463040" y="2121408"/>
+            <a:ext cx="2567863" cy="292608"/>
+          </a:xfrm>
+          <a:prstGeom prst="rect">
+            <a:avLst/>
+          </a:prstGeom>
+          <a:noFill/>
+        </p:spPr>
+        <p:txBody>
+          <a:bodyPr wrap="square" lIns="0" tIns="0" rIns="0" bIns="0">
+            <a:spAutoFit/>
+          </a:bodyPr>
+          <a:lstStyle/>
+          <a:p>
+            <a:pPr algn="ctr"/>
+            <a:r>
+              <a:rPr sz="1100" b="1" i="0">
+                <a:solidFill>
+                  <a:srgbClr val="F8FAFC"/>
+                </a:solidFill>
+                <a:latin typeface="Calibri"/>
+              </a:rPr>
+              <a:t>72</a:t>
+            </a:r>
+          </a:p>
+        </p:txBody>
+      </p:sp>
+      <p:sp>
+        <p:nvSpPr>
+          <p:cNvPr id="22" name="Rounded Rectangle 21"/>
+          <p:cNvSpPr/>
+          <p:nvPr/>
+        </p:nvSpPr>
+        <p:spPr>
+          <a:xfrm>
+            <a:off x="4049191" y="2139696"/>
+            <a:ext cx="2531287" cy="256032"/>
+          </a:xfrm>
+          <a:prstGeom prst="roundRect">
+            <a:avLst>
+              <a:gd name="adj" fmla="val 7142"/>
+            </a:avLst>
+          </a:prstGeom>
+          <a:solidFill>
+            <a:srgbClr val="355484"/>
+          </a:solidFill>
+          <a:ln>
+            <a:noFill/>
+          </a:ln>
+        </p:spPr>
+        <p:style>
+          <a:lnRef idx="1">
+            <a:schemeClr val="accent1"/>
+          </a:lnRef>
+          <a:fillRef idx="3">
+            <a:schemeClr val="accent1"/>
+          </a:fillRef>
+          <a:effectRef idx="2">
+            <a:schemeClr val="accent1"/>
+          </a:effectRef>
+          <a:fontRef idx="minor">
+            <a:schemeClr val="lt1"/>
+          </a:fontRef>
+        </p:style>
+        <p:txBody>
+          <a:bodyPr rtlCol="0" anchor="ctr"/>
+          <a:lstStyle/>
+          <a:p>
+            <a:pPr algn="ctr"/>
+          </a:p>
+        </p:txBody>
+      </p:sp>
+      <p:sp>
+        <p:nvSpPr>
+          <p:cNvPr id="23" name="TextBox 22"/>
+          <p:cNvSpPr txBox="1"/>
+          <p:nvPr/>
+        </p:nvSpPr>
+        <p:spPr>
+          <a:xfrm>
+            <a:off x="4030903" y="2121408"/>
+            <a:ext cx="2567863" cy="292608"/>
+          </a:xfrm>
+          <a:prstGeom prst="rect">
+            <a:avLst/>
+          </a:prstGeom>
+          <a:noFill/>
+        </p:spPr>
+        <p:txBody>
+          <a:bodyPr wrap="square" lIns="0" tIns="0" rIns="0" bIns="0">
+            <a:spAutoFit/>
+          </a:bodyPr>
+          <a:lstStyle/>
+          <a:p>
+            <a:pPr algn="ctr"/>
+            <a:r>
+              <a:rPr sz="1100" b="1" i="0">
+                <a:solidFill>
+                  <a:srgbClr val="F8FAFC"/>
+                </a:solidFill>
+                <a:latin typeface="Calibri"/>
+              </a:rPr>
+              <a:t>68</a:t>
+            </a:r>
+          </a:p>
+        </p:txBody>
+      </p:sp>
+      <p:sp>
+        <p:nvSpPr>
+          <p:cNvPr id="24" name="Rounded Rectangle 23"/>
+          <p:cNvSpPr/>
+          <p:nvPr/>
+        </p:nvSpPr>
+        <p:spPr>
+          <a:xfrm>
+            <a:off x="6617055" y="2139696"/>
+            <a:ext cx="2531287" cy="256032"/>
+          </a:xfrm>
+          <a:prstGeom prst="roundRect">
+            <a:avLst>
+              <a:gd name="adj" fmla="val 7142"/>
+            </a:avLst>
+          </a:prstGeom>
+          <a:solidFill>
+            <a:srgbClr val="3767B4"/>
+          </a:solidFill>
+          <a:ln>
+            <a:noFill/>
+          </a:ln>
+        </p:spPr>
+        <p:style>
+          <a:lnRef idx="1">
+            <a:schemeClr val="accent1"/>
+          </a:lnRef>
+          <a:fillRef idx="3">
+            <a:schemeClr val="accent1"/>
+          </a:fillRef>
+          <a:effectRef idx="2">
+            <a:schemeClr val="accent1"/>
+          </a:effectRef>
+          <a:fontRef idx="minor">
+            <a:schemeClr val="lt1"/>
+          </a:fontRef>
+        </p:style>
+        <p:txBody>
+          <a:bodyPr rtlCol="0" anchor="ctr"/>
+          <a:lstStyle/>
+          <a:p>
+            <a:pPr algn="ctr"/>
+          </a:p>
+        </p:txBody>
+      </p:sp>
+      <p:sp>
+        <p:nvSpPr>
+          <p:cNvPr id="25" name="TextBox 24"/>
+          <p:cNvSpPr txBox="1"/>
+          <p:nvPr/>
+        </p:nvSpPr>
+        <p:spPr>
+          <a:xfrm>
+            <a:off x="6598767" y="2121408"/>
+            <a:ext cx="2567863" cy="292608"/>
+          </a:xfrm>
+          <a:prstGeom prst="rect">
+            <a:avLst/>
+          </a:prstGeom>
+          <a:noFill/>
+        </p:spPr>
+        <p:txBody>
+          <a:bodyPr wrap="square" lIns="0" tIns="0" rIns="0" bIns="0">
+            <a:spAutoFit/>
+          </a:bodyPr>
+          <a:lstStyle/>
+          <a:p>
+            <a:pPr algn="ctr"/>
+            <a:r>
+              <a:rPr sz="1100" b="1" i="0">
+                <a:solidFill>
+                  <a:srgbClr val="F8FAFC"/>
+                </a:solidFill>
+                <a:latin typeface="Calibri"/>
+              </a:rPr>
+              <a:t>81</a:t>
+            </a:r>
+          </a:p>
+        </p:txBody>
+      </p:sp>
+      <p:sp>
+        <p:nvSpPr>
+          <p:cNvPr id="26" name="Rounded Rectangle 25"/>
+          <p:cNvSpPr/>
+          <p:nvPr/>
+        </p:nvSpPr>
+        <p:spPr>
+          <a:xfrm>
+            <a:off x="9184919" y="2139696"/>
+            <a:ext cx="2531287" cy="256032"/>
+          </a:xfrm>
+          <a:prstGeom prst="roundRect">
+            <a:avLst>
+              <a:gd name="adj" fmla="val 7142"/>
+            </a:avLst>
+          </a:prstGeom>
+          <a:solidFill>
+            <a:srgbClr val="365D9A"/>
+          </a:solidFill>
+          <a:ln>
+            <a:noFill/>
+          </a:ln>
+        </p:spPr>
+        <p:style>
+          <a:lnRef idx="1">
+            <a:schemeClr val="accent1"/>
+          </a:lnRef>
+          <a:fillRef idx="3">
+            <a:schemeClr val="accent1"/>
+          </a:fillRef>
+          <a:effectRef idx="2">
+            <a:schemeClr val="accent1"/>
+          </a:effectRef>
+          <a:fontRef idx="minor">
+            <a:schemeClr val="lt1"/>
+          </a:fontRef>
+        </p:style>
+        <p:txBody>
+          <a:bodyPr rtlCol="0" anchor="ctr"/>
+          <a:lstStyle/>
+          <a:p>
+            <a:pPr algn="ctr"/>
+          </a:p>
+        </p:txBody>
+      </p:sp>
+      <p:sp>
+        <p:nvSpPr>
+          <p:cNvPr id="27" name="TextBox 26"/>
+          <p:cNvSpPr txBox="1"/>
+          <p:nvPr/>
+        </p:nvSpPr>
+        <p:spPr>
+          <a:xfrm>
+            <a:off x="9166631" y="2121408"/>
+            <a:ext cx="2567863" cy="292608"/>
+          </a:xfrm>
+          <a:prstGeom prst="rect">
+            <a:avLst/>
+          </a:prstGeom>
+          <a:noFill/>
+        </p:spPr>
+        <p:txBody>
+          <a:bodyPr wrap="square" lIns="0" tIns="0" rIns="0" bIns="0">
+            <a:spAutoFit/>
+          </a:bodyPr>
+          <a:lstStyle/>
+          <a:p>
+            <a:pPr algn="ctr"/>
+            <a:r>
+              <a:rPr sz="1100" b="1" i="0">
+                <a:solidFill>
+                  <a:srgbClr val="F8FAFC"/>
+                </a:solidFill>
+                <a:latin typeface="Calibri"/>
+              </a:rPr>
+              <a:t>74</a:t>
+            </a:r>
+          </a:p>
+        </p:txBody>
+      </p:sp>
+      <p:sp>
+        <p:nvSpPr>
+          <p:cNvPr id="28" name="TextBox 27"/>
+          <p:cNvSpPr txBox="1"/>
+          <p:nvPr/>
+        </p:nvSpPr>
+        <p:spPr>
+          <a:xfrm>
+            <a:off x="457200" y="2414015"/>
+            <a:ext cx="1005840" cy="292608"/>
+          </a:xfrm>
+          <a:prstGeom prst="rect">
+            <a:avLst/>
+          </a:prstGeom>
+          <a:noFill/>
+        </p:spPr>
+        <p:txBody>
+          <a:bodyPr wrap="square" lIns="0" tIns="0" rIns="0" bIns="0">
+            <a:spAutoFit/>
+          </a:bodyPr>
+          <a:lstStyle/>
+          <a:p>
+            <a:pPr algn="l"/>
+            <a:r>
+              <a:rPr sz="1100" b="0" i="0">
+                <a:solidFill>
+                  <a:srgbClr val="CBD5E1"/>
+                </a:solidFill>
+                <a:latin typeface="Calibri"/>
+              </a:rPr>
+              <a:t>API</a:t>
+            </a:r>
+          </a:p>
+        </p:txBody>
+      </p:sp>
+      <p:sp>
+        <p:nvSpPr>
+          <p:cNvPr id="29" name="Rounded Rectangle 28"/>
+          <p:cNvSpPr/>
+          <p:nvPr/>
+        </p:nvSpPr>
+        <p:spPr>
+          <a:xfrm>
+            <a:off x="1481328" y="2432303"/>
+            <a:ext cx="2531287" cy="256032"/>
+          </a:xfrm>
+          <a:prstGeom prst="roundRect">
+            <a:avLst>
+              <a:gd name="adj" fmla="val 7142"/>
+            </a:avLst>
+          </a:prstGeom>
+          <a:solidFill>
+            <a:srgbClr val="3A7CE7"/>
+          </a:solidFill>
+          <a:ln>
+            <a:noFill/>
+          </a:ln>
+        </p:spPr>
+        <p:style>
+          <a:lnRef idx="1">
+            <a:schemeClr val="accent1"/>
+          </a:lnRef>
+          <a:fillRef idx="3">
+            <a:schemeClr val="accent1"/>
+          </a:fillRef>
+          <a:effectRef idx="2">
+            <a:schemeClr val="accent1"/>
+          </a:effectRef>
+          <a:fontRef idx="minor">
+            <a:schemeClr val="lt1"/>
+          </a:fontRef>
+        </p:style>
+        <p:txBody>
+          <a:bodyPr rtlCol="0" anchor="ctr"/>
+          <a:lstStyle/>
+          <a:p>
+            <a:pPr algn="ctr"/>
+          </a:p>
+        </p:txBody>
+      </p:sp>
+      <p:sp>
+        <p:nvSpPr>
+          <p:cNvPr id="30" name="TextBox 29"/>
+          <p:cNvSpPr txBox="1"/>
+          <p:nvPr/>
+        </p:nvSpPr>
+        <p:spPr>
+          <a:xfrm>
+            <a:off x="1463040" y="2414015"/>
+            <a:ext cx="2567863" cy="292608"/>
+          </a:xfrm>
+          <a:prstGeom prst="rect">
+            <a:avLst/>
+          </a:prstGeom>
+          <a:noFill/>
+        </p:spPr>
+        <p:txBody>
+          <a:bodyPr wrap="square" lIns="0" tIns="0" rIns="0" bIns="0">
+            <a:spAutoFit/>
+          </a:bodyPr>
+          <a:lstStyle/>
+          <a:p>
+            <a:pPr algn="ctr"/>
+            <a:r>
+              <a:rPr sz="1100" b="1" i="0">
+                <a:solidFill>
+                  <a:srgbClr val="0F172A"/>
+                </a:solidFill>
+                <a:latin typeface="Calibri"/>
+              </a:rPr>
+              <a:t>95</a:t>
+            </a:r>
+          </a:p>
+        </p:txBody>
+      </p:sp>
+      <p:sp>
+        <p:nvSpPr>
+          <p:cNvPr id="31" name="Rounded Rectangle 30"/>
+          <p:cNvSpPr/>
+          <p:nvPr/>
+        </p:nvSpPr>
+        <p:spPr>
+          <a:xfrm>
+            <a:off x="4049191" y="2432303"/>
+            <a:ext cx="2531287" cy="256032"/>
+          </a:xfrm>
+          <a:prstGeom prst="roundRect">
+            <a:avLst>
+              <a:gd name="adj" fmla="val 7142"/>
+            </a:avLst>
+          </a:prstGeom>
+          <a:solidFill>
+            <a:srgbClr val="3A7FEE"/>
+          </a:solidFill>
+          <a:ln>
+            <a:noFill/>
+          </a:ln>
+        </p:spPr>
+        <p:style>
+          <a:lnRef idx="1">
+            <a:schemeClr val="accent1"/>
+          </a:lnRef>
+          <a:fillRef idx="3">
+            <a:schemeClr val="accent1"/>
+          </a:fillRef>
+          <a:effectRef idx="2">
+            <a:schemeClr val="accent1"/>
+          </a:effectRef>
+          <a:fontRef idx="minor">
+            <a:schemeClr val="lt1"/>
+          </a:fontRef>
+        </p:style>
+        <p:txBody>
+          <a:bodyPr rtlCol="0" anchor="ctr"/>
+          <a:lstStyle/>
+          <a:p>
+            <a:pPr algn="ctr"/>
+          </a:p>
+        </p:txBody>
+      </p:sp>
+      <p:sp>
+        <p:nvSpPr>
+          <p:cNvPr id="32" name="TextBox 31"/>
+          <p:cNvSpPr txBox="1"/>
+          <p:nvPr/>
+        </p:nvSpPr>
+        <p:spPr>
+          <a:xfrm>
+            <a:off x="4030903" y="2414015"/>
+            <a:ext cx="2567863" cy="292608"/>
+          </a:xfrm>
+          <a:prstGeom prst="rect">
+            <a:avLst/>
+          </a:prstGeom>
+          <a:noFill/>
+        </p:spPr>
+        <p:txBody>
+          <a:bodyPr wrap="square" lIns="0" tIns="0" rIns="0" bIns="0">
+            <a:spAutoFit/>
+          </a:bodyPr>
+          <a:lstStyle/>
+          <a:p>
+            <a:pPr algn="ctr"/>
+            <a:r>
+              <a:rPr sz="1100" b="1" i="0">
+                <a:solidFill>
+                  <a:srgbClr val="0F172A"/>
+                </a:solidFill>
+                <a:latin typeface="Calibri"/>
+              </a:rPr>
+              <a:t>97</a:t>
+            </a:r>
+          </a:p>
+        </p:txBody>
+      </p:sp>
+      <p:sp>
+        <p:nvSpPr>
+          <p:cNvPr id="33" name="Rounded Rectangle 32"/>
+          <p:cNvSpPr/>
+          <p:nvPr/>
+        </p:nvSpPr>
+        <p:spPr>
+          <a:xfrm>
+            <a:off x="6617055" y="2432303"/>
+            <a:ext cx="2531287" cy="256032"/>
+          </a:xfrm>
+          <a:prstGeom prst="roundRect">
+            <a:avLst>
+              <a:gd name="adj" fmla="val 7142"/>
+            </a:avLst>
+          </a:prstGeom>
+          <a:solidFill>
+            <a:srgbClr val="3979E0"/>
+          </a:solidFill>
+          <a:ln>
+            <a:noFill/>
+          </a:ln>
+        </p:spPr>
+        <p:style>
+          <a:lnRef idx="1">
+            <a:schemeClr val="accent1"/>
+          </a:lnRef>
+          <a:fillRef idx="3">
+            <a:schemeClr val="accent1"/>
+          </a:fillRef>
+          <a:effectRef idx="2">
+            <a:schemeClr val="accent1"/>
+          </a:effectRef>
+          <a:fontRef idx="minor">
+            <a:schemeClr val="lt1"/>
+          </a:fontRef>
+        </p:style>
+        <p:txBody>
+          <a:bodyPr rtlCol="0" anchor="ctr"/>
+          <a:lstStyle/>
+          <a:p>
+            <a:pPr algn="ctr"/>
+          </a:p>
+        </p:txBody>
+      </p:sp>
+      <p:sp>
+        <p:nvSpPr>
+          <p:cNvPr id="34" name="TextBox 33"/>
+          <p:cNvSpPr txBox="1"/>
+          <p:nvPr/>
+        </p:nvSpPr>
+        <p:spPr>
+          <a:xfrm>
+            <a:off x="6598767" y="2414015"/>
+            <a:ext cx="2567863" cy="292608"/>
+          </a:xfrm>
+          <a:prstGeom prst="rect">
+            <a:avLst/>
+          </a:prstGeom>
+          <a:noFill/>
+        </p:spPr>
+        <p:txBody>
+          <a:bodyPr wrap="square" lIns="0" tIns="0" rIns="0" bIns="0">
+            <a:spAutoFit/>
+          </a:bodyPr>
+          <a:lstStyle/>
+          <a:p>
+            <a:pPr algn="ctr"/>
+            <a:r>
+              <a:rPr sz="1100" b="1" i="0">
+                <a:solidFill>
+                  <a:srgbClr val="0F172A"/>
+                </a:solidFill>
+                <a:latin typeface="Calibri"/>
+              </a:rPr>
+              <a:t>93</a:t>
+            </a:r>
+          </a:p>
+        </p:txBody>
+      </p:sp>
+      <p:sp>
+        <p:nvSpPr>
+          <p:cNvPr id="35" name="Rounded Rectangle 34"/>
+          <p:cNvSpPr/>
+          <p:nvPr/>
+        </p:nvSpPr>
+        <p:spPr>
+          <a:xfrm>
+            <a:off x="9184919" y="2432303"/>
+            <a:ext cx="2531287" cy="256032"/>
+          </a:xfrm>
+          <a:prstGeom prst="roundRect">
+            <a:avLst>
+              <a:gd name="adj" fmla="val 7142"/>
+            </a:avLst>
+          </a:prstGeom>
+          <a:solidFill>
+            <a:srgbClr val="3B82F6"/>
+          </a:solidFill>
+          <a:ln>
+            <a:noFill/>
+          </a:ln>
+        </p:spPr>
+        <p:style>
+          <a:lnRef idx="1">
+            <a:schemeClr val="accent1"/>
+          </a:lnRef>
+          <a:fillRef idx="3">
+            <a:schemeClr val="accent1"/>
+          </a:fillRef>
+          <a:effectRef idx="2">
+            <a:schemeClr val="accent1"/>
+          </a:effectRef>
+          <a:fontRef idx="minor">
+            <a:schemeClr val="lt1"/>
+          </a:fontRef>
+        </p:style>
+        <p:txBody>
+          <a:bodyPr rtlCol="0" anchor="ctr"/>
+          <a:lstStyle/>
+          <a:p>
+            <a:pPr algn="ctr"/>
+          </a:p>
+        </p:txBody>
+      </p:sp>
+      <p:sp>
+        <p:nvSpPr>
+          <p:cNvPr id="36" name="TextBox 35"/>
+          <p:cNvSpPr txBox="1"/>
+          <p:nvPr/>
+        </p:nvSpPr>
+        <p:spPr>
+          <a:xfrm>
+            <a:off x="9166631" y="2414015"/>
+            <a:ext cx="2567863" cy="292608"/>
+          </a:xfrm>
+          <a:prstGeom prst="rect">
+            <a:avLst/>
+          </a:prstGeom>
+          <a:noFill/>
+        </p:spPr>
+        <p:txBody>
+          <a:bodyPr wrap="square" lIns="0" tIns="0" rIns="0" bIns="0">
+            <a:spAutoFit/>
+          </a:bodyPr>
+          <a:lstStyle/>
+          <a:p>
+            <a:pPr algn="ctr"/>
+            <a:r>
+              <a:rPr sz="1100" b="1" i="0">
+                <a:solidFill>
+                  <a:srgbClr val="0F172A"/>
+                </a:solidFill>
+                <a:latin typeface="Calibri"/>
+              </a:rPr>
+              <a:t>99</a:t>
+            </a:r>
+          </a:p>
+        </p:txBody>
+      </p:sp>
+      <p:sp>
+        <p:nvSpPr>
+          <p:cNvPr id="37" name="TextBox 36"/>
+          <p:cNvSpPr txBox="1"/>
+          <p:nvPr/>
+        </p:nvSpPr>
+        <p:spPr>
+          <a:xfrm>
+            <a:off x="457200" y="2706623"/>
+            <a:ext cx="1005840" cy="292608"/>
+          </a:xfrm>
+          <a:prstGeom prst="rect">
+            <a:avLst/>
+          </a:prstGeom>
+          <a:noFill/>
+        </p:spPr>
+        <p:txBody>
+          <a:bodyPr wrap="square" lIns="0" tIns="0" rIns="0" bIns="0">
+            <a:spAutoFit/>
+          </a:bodyPr>
+          <a:lstStyle/>
+          <a:p>
+            <a:pPr algn="l"/>
+            <a:r>
+              <a:rPr sz="1100" b="0" i="0">
+                <a:solidFill>
+                  <a:srgbClr val="CBD5E1"/>
+                </a:solidFill>
+                <a:latin typeface="Calibri"/>
+              </a:rPr>
+              <a:t>Reports</a:t>
+            </a:r>
+          </a:p>
+        </p:txBody>
+      </p:sp>
+      <p:sp>
+        <p:nvSpPr>
+          <p:cNvPr id="38" name="Rounded Rectangle 37"/>
+          <p:cNvSpPr/>
+          <p:nvPr/>
+        </p:nvSpPr>
+        <p:spPr>
+          <a:xfrm>
+            <a:off x="1481328" y="2724911"/>
+            <a:ext cx="2531287" cy="256032"/>
+          </a:xfrm>
+          <a:prstGeom prst="roundRect">
+            <a:avLst>
+              <a:gd name="adj" fmla="val 7142"/>
+            </a:avLst>
+          </a:prstGeom>
+          <a:solidFill>
+            <a:srgbClr val="34496A"/>
+          </a:solidFill>
+          <a:ln>
+            <a:noFill/>
+          </a:ln>
+        </p:spPr>
+        <p:style>
+          <a:lnRef idx="1">
+            <a:schemeClr val="accent1"/>
+          </a:lnRef>
+          <a:fillRef idx="3">
+            <a:schemeClr val="accent1"/>
+          </a:fillRef>
+          <a:effectRef idx="2">
+            <a:schemeClr val="accent1"/>
+          </a:effectRef>
+          <a:fontRef idx="minor">
+            <a:schemeClr val="lt1"/>
+          </a:fontRef>
+        </p:style>
+        <p:txBody>
+          <a:bodyPr rtlCol="0" anchor="ctr"/>
+          <a:lstStyle/>
+          <a:p>
+            <a:pPr algn="ctr"/>
+          </a:p>
+        </p:txBody>
+      </p:sp>
+      <p:sp>
+        <p:nvSpPr>
+          <p:cNvPr id="39" name="TextBox 38"/>
+          <p:cNvSpPr txBox="1"/>
+          <p:nvPr/>
+        </p:nvSpPr>
+        <p:spPr>
+          <a:xfrm>
+            <a:off x="1463040" y="2706623"/>
+            <a:ext cx="2567863" cy="292608"/>
+          </a:xfrm>
+          <a:prstGeom prst="rect">
+            <a:avLst/>
+          </a:prstGeom>
+          <a:noFill/>
+        </p:spPr>
+        <p:txBody>
+          <a:bodyPr wrap="square" lIns="0" tIns="0" rIns="0" bIns="0">
+            <a:spAutoFit/>
+          </a:bodyPr>
+          <a:lstStyle/>
+          <a:p>
+            <a:pPr algn="ctr"/>
+            <a:r>
+              <a:rPr sz="1100" b="1" i="0">
+                <a:solidFill>
+                  <a:srgbClr val="F8FAFC"/>
+                </a:solidFill>
+                <a:latin typeface="Calibri"/>
+              </a:rPr>
+              <a:t>61</a:t>
+            </a:r>
+          </a:p>
+        </p:txBody>
+      </p:sp>
+      <p:sp>
+        <p:nvSpPr>
+          <p:cNvPr id="40" name="Rounded Rectangle 39"/>
+          <p:cNvSpPr/>
+          <p:nvPr/>
+        </p:nvSpPr>
+        <p:spPr>
+          <a:xfrm>
+            <a:off x="4049191" y="2724911"/>
+            <a:ext cx="2531287" cy="256032"/>
+          </a:xfrm>
+          <a:prstGeom prst="roundRect">
+            <a:avLst>
+              <a:gd name="adj" fmla="val 7142"/>
+            </a:avLst>
+          </a:prstGeom>
+          <a:solidFill>
+            <a:srgbClr val="334155"/>
+          </a:solidFill>
+          <a:ln>
+            <a:noFill/>
+          </a:ln>
+        </p:spPr>
+        <p:style>
+          <a:lnRef idx="1">
+            <a:schemeClr val="accent1"/>
+          </a:lnRef>
+          <a:fillRef idx="3">
+            <a:schemeClr val="accent1"/>
+          </a:fillRef>
+          <a:effectRef idx="2">
+            <a:schemeClr val="accent1"/>
+          </a:effectRef>
+          <a:fontRef idx="minor">
+            <a:schemeClr val="lt1"/>
+          </a:fontRef>
+        </p:style>
+        <p:txBody>
+          <a:bodyPr rtlCol="0" anchor="ctr"/>
+          <a:lstStyle/>
+          <a:p>
+            <a:pPr algn="ctr"/>
+          </a:p>
+        </p:txBody>
+      </p:sp>
+      <p:sp>
+        <p:nvSpPr>
+          <p:cNvPr id="41" name="TextBox 40"/>
+          <p:cNvSpPr txBox="1"/>
+          <p:nvPr/>
+        </p:nvSpPr>
+        <p:spPr>
+          <a:xfrm>
+            <a:off x="4030903" y="2706623"/>
+            <a:ext cx="2567863" cy="292608"/>
+          </a:xfrm>
+          <a:prstGeom prst="rect">
+            <a:avLst/>
+          </a:prstGeom>
+          <a:noFill/>
+        </p:spPr>
+        <p:txBody>
+          <a:bodyPr wrap="square" lIns="0" tIns="0" rIns="0" bIns="0">
+            <a:spAutoFit/>
+          </a:bodyPr>
+          <a:lstStyle/>
+          <a:p>
+            <a:pPr algn="ctr"/>
+            <a:r>
+              <a:rPr sz="1100" b="1" i="0">
+                <a:solidFill>
+                  <a:srgbClr val="F8FAFC"/>
+                </a:solidFill>
+                <a:latin typeface="Calibri"/>
+              </a:rPr>
+              <a:t>55</a:t>
+            </a:r>
+          </a:p>
+        </p:txBody>
+      </p:sp>
+      <p:sp>
+        <p:nvSpPr>
+          <p:cNvPr id="42" name="Rounded Rectangle 41"/>
+          <p:cNvSpPr/>
+          <p:nvPr/>
+        </p:nvSpPr>
+        <p:spPr>
+          <a:xfrm>
+            <a:off x="6617055" y="2724911"/>
+            <a:ext cx="2531287" cy="256032"/>
+          </a:xfrm>
+          <a:prstGeom prst="roundRect">
+            <a:avLst>
+              <a:gd name="adj" fmla="val 7142"/>
+            </a:avLst>
+          </a:prstGeom>
+          <a:solidFill>
+            <a:srgbClr val="35578B"/>
+          </a:solidFill>
+          <a:ln>
+            <a:noFill/>
+          </a:ln>
+        </p:spPr>
+        <p:style>
+          <a:lnRef idx="1">
+            <a:schemeClr val="accent1"/>
+          </a:lnRef>
+          <a:fillRef idx="3">
+            <a:schemeClr val="accent1"/>
+          </a:fillRef>
+          <a:effectRef idx="2">
+            <a:schemeClr val="accent1"/>
+          </a:effectRef>
+          <a:fontRef idx="minor">
+            <a:schemeClr val="lt1"/>
+          </a:fontRef>
+        </p:style>
+        <p:txBody>
+          <a:bodyPr rtlCol="0" anchor="ctr"/>
+          <a:lstStyle/>
+          <a:p>
+            <a:pPr algn="ctr"/>
+          </a:p>
+        </p:txBody>
+      </p:sp>
+      <p:sp>
+        <p:nvSpPr>
+          <p:cNvPr id="43" name="TextBox 42"/>
+          <p:cNvSpPr txBox="1"/>
+          <p:nvPr/>
+        </p:nvSpPr>
+        <p:spPr>
+          <a:xfrm>
+            <a:off x="6598767" y="2706623"/>
+            <a:ext cx="2567863" cy="292608"/>
+          </a:xfrm>
+          <a:prstGeom prst="rect">
+            <a:avLst/>
+          </a:prstGeom>
+          <a:noFill/>
+        </p:spPr>
+        <p:txBody>
+          <a:bodyPr wrap="square" lIns="0" tIns="0" rIns="0" bIns="0">
+            <a:spAutoFit/>
+          </a:bodyPr>
+          <a:lstStyle/>
+          <a:p>
+            <a:pPr algn="ctr"/>
+            <a:r>
+              <a:rPr sz="1100" b="1" i="0">
+                <a:solidFill>
+                  <a:srgbClr val="F8FAFC"/>
+                </a:solidFill>
+                <a:latin typeface="Calibri"/>
+              </a:rPr>
+              <a:t>70</a:t>
+            </a:r>
+          </a:p>
+        </p:txBody>
+      </p:sp>
+      <p:sp>
+        <p:nvSpPr>
+          <p:cNvPr id="44" name="Rounded Rectangle 43"/>
+          <p:cNvSpPr/>
+          <p:nvPr/>
+        </p:nvSpPr>
+        <p:spPr>
+          <a:xfrm>
+            <a:off x="9184919" y="2724911"/>
+            <a:ext cx="2531287" cy="256032"/>
+          </a:xfrm>
+          <a:prstGeom prst="roundRect">
+            <a:avLst>
+              <a:gd name="adj" fmla="val 7142"/>
+            </a:avLst>
+          </a:prstGeom>
+          <a:solidFill>
+            <a:srgbClr val="344C72"/>
+          </a:solidFill>
+          <a:ln>
+            <a:noFill/>
+          </a:ln>
+        </p:spPr>
+        <p:style>
+          <a:lnRef idx="1">
+            <a:schemeClr val="accent1"/>
+          </a:lnRef>
+          <a:fillRef idx="3">
+            <a:schemeClr val="accent1"/>
+          </a:fillRef>
+          <a:effectRef idx="2">
+            <a:schemeClr val="accent1"/>
+          </a:effectRef>
+          <a:fontRef idx="minor">
+            <a:schemeClr val="lt1"/>
+          </a:fontRef>
+        </p:style>
+        <p:txBody>
+          <a:bodyPr rtlCol="0" anchor="ctr"/>
+          <a:lstStyle/>
+          <a:p>
+            <a:pPr algn="ctr"/>
+          </a:p>
+        </p:txBody>
+      </p:sp>
+      <p:sp>
+        <p:nvSpPr>
+          <p:cNvPr id="45" name="TextBox 44"/>
+          <p:cNvSpPr txBox="1"/>
+          <p:nvPr/>
+        </p:nvSpPr>
+        <p:spPr>
+          <a:xfrm>
+            <a:off x="9166631" y="2706623"/>
+            <a:ext cx="2567863" cy="292608"/>
+          </a:xfrm>
+          <a:prstGeom prst="rect">
+            <a:avLst/>
+          </a:prstGeom>
+          <a:noFill/>
+        </p:spPr>
+        <p:txBody>
+          <a:bodyPr wrap="square" lIns="0" tIns="0" rIns="0" bIns="0">
+            <a:spAutoFit/>
+          </a:bodyPr>
+          <a:lstStyle/>
+          <a:p>
+            <a:pPr algn="ctr"/>
+            <a:r>
+              <a:rPr sz="1100" b="1" i="0">
+                <a:solidFill>
+                  <a:srgbClr val="F8FAFC"/>
+                </a:solidFill>
+                <a:latin typeface="Calibri"/>
+              </a:rPr>
+              <a:t>63</a:t>
+            </a:r>
+          </a:p>
+        </p:txBody>
+      </p:sp>
+      <p:sp>
+        <p:nvSpPr>
+          <p:cNvPr id="46" name="TextBox 45"/>
+          <p:cNvSpPr txBox="1"/>
+          <p:nvPr/>
+        </p:nvSpPr>
+        <p:spPr>
+          <a:xfrm>
+            <a:off x="457200" y="2999232"/>
+            <a:ext cx="2364165" cy="201168"/>
+          </a:xfrm>
+          <a:prstGeom prst="rect">
+            <a:avLst/>
+          </a:prstGeom>
+          <a:noFill/>
+        </p:spPr>
+        <p:txBody>
+          <a:bodyPr wrap="square" lIns="0" tIns="0" rIns="0" bIns="0">
+            <a:spAutoFit/>
+          </a:bodyPr>
+          <a:lstStyle/>
+          <a:p>
+            <a:pPr algn="l"/>
+            <a:r>
+              <a:rPr sz="1100" b="0" i="0">
+                <a:solidFill>
+                  <a:srgbClr val="CBD5E1"/>
+                </a:solidFill>
+                <a:latin typeface="Calibri"/>
+              </a:rPr>
+              <a:t>API Latency (ms)</a:t>
+            </a:r>
+          </a:p>
+        </p:txBody>
+      </p:sp>
+      <p:sp>
+        <p:nvSpPr>
+          <p:cNvPr id="47" name="TextBox 46"/>
+          <p:cNvSpPr txBox="1"/>
+          <p:nvPr/>
+        </p:nvSpPr>
+        <p:spPr>
+          <a:xfrm>
+            <a:off x="2821365" y="2999232"/>
+            <a:ext cx="1273012" cy="201168"/>
+          </a:xfrm>
+          <a:prstGeom prst="rect">
+            <a:avLst/>
+          </a:prstGeom>
+          <a:noFill/>
+        </p:spPr>
+        <p:txBody>
+          <a:bodyPr wrap="square" lIns="0" tIns="0" rIns="0" bIns="0">
+            <a:spAutoFit/>
+          </a:bodyPr>
+          <a:lstStyle/>
+          <a:p>
+            <a:pPr algn="r"/>
+            <a:r>
+              <a:rPr sz="1100" b="1" i="0">
+                <a:solidFill>
+                  <a:srgbClr val="F8FAFC"/>
+                </a:solidFill>
+                <a:latin typeface="Calibri"/>
+              </a:rPr>
+              <a:t>210</a:t>
+            </a:r>
+          </a:p>
+        </p:txBody>
+      </p:sp>
+      <p:sp>
+        <p:nvSpPr>
+          <p:cNvPr id="48" name="Rounded Rectangle 47"/>
+          <p:cNvSpPr/>
+          <p:nvPr/>
+        </p:nvSpPr>
+        <p:spPr>
+          <a:xfrm>
+            <a:off x="457200" y="3236976"/>
+            <a:ext cx="909294" cy="201168"/>
+          </a:xfrm>
+          <a:prstGeom prst="roundRect">
+            <a:avLst>
+              <a:gd name="adj" fmla="val 9090"/>
+            </a:avLst>
+          </a:prstGeom>
+          <a:solidFill>
+            <a:srgbClr val="22C55E"/>
+          </a:solidFill>
+          <a:ln>
+            <a:noFill/>
+          </a:ln>
+        </p:spPr>
+        <p:style>
+          <a:lnRef idx="1">
+            <a:schemeClr val="accent1"/>
+          </a:lnRef>
+          <a:fillRef idx="3">
+            <a:schemeClr val="accent1"/>
+          </a:fillRef>
+          <a:effectRef idx="2">
+            <a:schemeClr val="accent1"/>
+          </a:effectRef>
+          <a:fontRef idx="minor">
+            <a:schemeClr val="lt1"/>
+          </a:fontRef>
+        </p:style>
+        <p:txBody>
+          <a:bodyPr rtlCol="0" anchor="ctr"/>
+          <a:lstStyle/>
+          <a:p>
+            <a:pPr algn="ctr"/>
+          </a:p>
+        </p:txBody>
+      </p:sp>
+      <p:sp>
+        <p:nvSpPr>
+          <p:cNvPr id="49" name="TextBox 48"/>
+          <p:cNvSpPr txBox="1"/>
+          <p:nvPr/>
+        </p:nvSpPr>
+        <p:spPr>
+          <a:xfrm>
+            <a:off x="457200" y="3447288"/>
+            <a:ext cx="909294" cy="164592"/>
+          </a:xfrm>
+          <a:prstGeom prst="rect">
+            <a:avLst/>
+          </a:prstGeom>
+          <a:noFill/>
+        </p:spPr>
+        <p:txBody>
+          <a:bodyPr wrap="square" lIns="0" tIns="0" rIns="0" bIns="0">
+            <a:spAutoFit/>
+          </a:bodyPr>
+          <a:lstStyle/>
+          <a:p>
+            <a:pPr algn="ctr"/>
+            <a:r>
+              <a:rPr sz="1100" b="0" i="0">
+                <a:solidFill>
+                  <a:srgbClr val="94A3B8"/>
+                </a:solidFill>
+                <a:latin typeface="Calibri"/>
+              </a:rPr>
+              <a:t>OK</a:t>
+            </a:r>
+          </a:p>
+        </p:txBody>
+      </p:sp>
+      <p:sp>
+        <p:nvSpPr>
+          <p:cNvPr id="50" name="Rounded Rectangle 49"/>
+          <p:cNvSpPr/>
+          <p:nvPr/>
+        </p:nvSpPr>
+        <p:spPr>
+          <a:xfrm>
+            <a:off x="1366494" y="3236976"/>
+            <a:ext cx="909294" cy="201168"/>
+          </a:xfrm>
+          <a:prstGeom prst="roundRect">
+            <a:avLst>
+              <a:gd name="adj" fmla="val 9090"/>
+            </a:avLst>
+          </a:prstGeom>
+          <a:solidFill>
+            <a:srgbClr val="D97706"/>
+          </a:solidFill>
+          <a:ln>
+            <a:noFill/>
+          </a:ln>
+        </p:spPr>
+        <p:style>
+          <a:lnRef idx="1">
+            <a:schemeClr val="accent1"/>
+          </a:lnRef>
+          <a:fillRef idx="3">
+            <a:schemeClr val="accent1"/>
+          </a:fillRef>
+          <a:effectRef idx="2">
+            <a:schemeClr val="accent1"/>
+          </a:effectRef>
+          <a:fontRef idx="minor">
+            <a:schemeClr val="lt1"/>
+          </a:fontRef>
+        </p:style>
+        <p:txBody>
+          <a:bodyPr rtlCol="0" anchor="ctr"/>
+          <a:lstStyle/>
+          <a:p>
+            <a:pPr algn="ctr"/>
+          </a:p>
+        </p:txBody>
+      </p:sp>
+      <p:sp>
+        <p:nvSpPr>
+          <p:cNvPr id="51" name="TextBox 50"/>
+          <p:cNvSpPr txBox="1"/>
+          <p:nvPr/>
+        </p:nvSpPr>
+        <p:spPr>
+          <a:xfrm>
+            <a:off x="1366494" y="3447288"/>
+            <a:ext cx="909294" cy="164592"/>
+          </a:xfrm>
+          <a:prstGeom prst="rect">
+            <a:avLst/>
+          </a:prstGeom>
+          <a:noFill/>
+        </p:spPr>
+        <p:txBody>
+          <a:bodyPr wrap="square" lIns="0" tIns="0" rIns="0" bIns="0">
+            <a:spAutoFit/>
+          </a:bodyPr>
+          <a:lstStyle/>
+          <a:p>
+            <a:pPr algn="ctr"/>
+            <a:r>
+              <a:rPr sz="1100" b="0" i="0">
+                <a:solidFill>
+                  <a:srgbClr val="94A3B8"/>
+                </a:solidFill>
+                <a:latin typeface="Calibri"/>
+              </a:rPr>
+              <a:t>Warn</a:t>
+            </a:r>
+          </a:p>
+        </p:txBody>
+      </p:sp>
+      <p:sp>
+        <p:nvSpPr>
+          <p:cNvPr id="52" name="Rounded Rectangle 51"/>
+          <p:cNvSpPr/>
+          <p:nvPr/>
+        </p:nvSpPr>
+        <p:spPr>
+          <a:xfrm>
+            <a:off x="2275789" y="3236976"/>
+            <a:ext cx="1818589" cy="201168"/>
+          </a:xfrm>
+          <a:prstGeom prst="roundRect">
+            <a:avLst>
+              <a:gd name="adj" fmla="val 9090"/>
+            </a:avLst>
+          </a:prstGeom>
+          <a:solidFill>
+            <a:srgbClr val="EF4444"/>
+          </a:solidFill>
+          <a:ln>
+            <a:noFill/>
+          </a:ln>
+        </p:spPr>
+        <p:style>
+          <a:lnRef idx="1">
+            <a:schemeClr val="accent1"/>
+          </a:lnRef>
+          <a:fillRef idx="3">
+            <a:schemeClr val="accent1"/>
+          </a:fillRef>
+          <a:effectRef idx="2">
+            <a:schemeClr val="accent1"/>
+          </a:effectRef>
+          <a:fontRef idx="minor">
+            <a:schemeClr val="lt1"/>
+          </a:fontRef>
+        </p:style>
+        <p:txBody>
+          <a:bodyPr rtlCol="0" anchor="ctr"/>
+          <a:lstStyle/>
+          <a:p>
+            <a:pPr algn="ctr"/>
+          </a:p>
+        </p:txBody>
+      </p:sp>
+      <p:sp>
+        <p:nvSpPr>
+          <p:cNvPr id="53" name="TextBox 52"/>
+          <p:cNvSpPr txBox="1"/>
+          <p:nvPr/>
+        </p:nvSpPr>
+        <p:spPr>
+          <a:xfrm>
+            <a:off x="2275789" y="3447288"/>
+            <a:ext cx="1818589" cy="164592"/>
+          </a:xfrm>
+          <a:prstGeom prst="rect">
+            <a:avLst/>
+          </a:prstGeom>
+          <a:noFill/>
+        </p:spPr>
+        <p:txBody>
+          <a:bodyPr wrap="square" lIns="0" tIns="0" rIns="0" bIns="0">
+            <a:spAutoFit/>
+          </a:bodyPr>
+          <a:lstStyle/>
+          <a:p>
+            <a:pPr algn="ctr"/>
+            <a:r>
+              <a:rPr sz="1100" b="0" i="0">
+                <a:solidFill>
+                  <a:srgbClr val="94A3B8"/>
+                </a:solidFill>
+                <a:latin typeface="Calibri"/>
+              </a:rPr>
+              <a:t>Critical</a:t>
+            </a:r>
+          </a:p>
+        </p:txBody>
+      </p:sp>
+      <p:sp>
+        <p:nvSpPr>
+          <p:cNvPr id="54" name="Rounded Rectangle 53"/>
+          <p:cNvSpPr/>
+          <p:nvPr/>
+        </p:nvSpPr>
+        <p:spPr>
+          <a:xfrm>
+            <a:off x="1711924" y="3145536"/>
+            <a:ext cx="36576" cy="384048"/>
+          </a:xfrm>
+          <a:prstGeom prst="roundRect">
+            <a:avLst>
+              <a:gd name="adj" fmla="val 25000"/>
+            </a:avLst>
+          </a:prstGeom>
+          <a:solidFill>
+            <a:srgbClr val="F8FAFC"/>
+          </a:solidFill>
+          <a:ln>
+            <a:noFill/>
+          </a:ln>
+        </p:spPr>
+        <p:style>
+          <a:lnRef idx="1">
+            <a:schemeClr val="accent1"/>
+          </a:lnRef>
+          <a:fillRef idx="3">
+            <a:schemeClr val="accent1"/>
+          </a:fillRef>
+          <a:effectRef idx="2">
+            <a:schemeClr val="accent1"/>
+          </a:effectRef>
+          <a:fontRef idx="minor">
+            <a:schemeClr val="lt1"/>
+          </a:fontRef>
+        </p:style>
+        <p:txBody>
+          <a:bodyPr rtlCol="0" anchor="ctr"/>
+          <a:lstStyle/>
+          <a:p>
+            <a:pPr algn="ctr"/>
+          </a:p>
+        </p:txBody>
+      </p:sp>
+      <p:sp>
+        <p:nvSpPr>
+          <p:cNvPr id="55" name="TextBox 54"/>
+          <p:cNvSpPr txBox="1"/>
+          <p:nvPr/>
+        </p:nvSpPr>
+        <p:spPr>
+          <a:xfrm>
+            <a:off x="4277258" y="2999232"/>
+            <a:ext cx="2364165" cy="201168"/>
+          </a:xfrm>
+          <a:prstGeom prst="rect">
+            <a:avLst/>
+          </a:prstGeom>
+          <a:noFill/>
+        </p:spPr>
+        <p:txBody>
+          <a:bodyPr wrap="square" lIns="0" tIns="0" rIns="0" bIns="0">
+            <a:spAutoFit/>
+          </a:bodyPr>
+          <a:lstStyle/>
+          <a:p>
+            <a:pPr algn="l"/>
+            <a:r>
+              <a:rPr sz="1100" b="0" i="0">
+                <a:solidFill>
+                  <a:srgbClr val="CBD5E1"/>
+                </a:solidFill>
+                <a:latin typeface="Calibri"/>
+              </a:rPr>
+              <a:t>Error Rate (%)</a:t>
+            </a:r>
+          </a:p>
+        </p:txBody>
+      </p:sp>
+      <p:sp>
+        <p:nvSpPr>
+          <p:cNvPr id="56" name="TextBox 55"/>
+          <p:cNvSpPr txBox="1"/>
+          <p:nvPr/>
+        </p:nvSpPr>
+        <p:spPr>
+          <a:xfrm>
+            <a:off x="6641424" y="2999232"/>
+            <a:ext cx="1273012" cy="201168"/>
+          </a:xfrm>
+          <a:prstGeom prst="rect">
+            <a:avLst/>
+          </a:prstGeom>
+          <a:noFill/>
+        </p:spPr>
+        <p:txBody>
+          <a:bodyPr wrap="square" lIns="0" tIns="0" rIns="0" bIns="0">
+            <a:spAutoFit/>
+          </a:bodyPr>
+          <a:lstStyle/>
+          <a:p>
+            <a:pPr algn="r"/>
+            <a:r>
+              <a:rPr sz="1100" b="1" i="0">
+                <a:solidFill>
+                  <a:srgbClr val="F8FAFC"/>
+                </a:solidFill>
+                <a:latin typeface="Calibri"/>
+              </a:rPr>
+              <a:t>2.1</a:t>
+            </a:r>
+          </a:p>
+        </p:txBody>
+      </p:sp>
+      <p:sp>
+        <p:nvSpPr>
+          <p:cNvPr id="57" name="Rounded Rectangle 56"/>
+          <p:cNvSpPr/>
+          <p:nvPr/>
+        </p:nvSpPr>
+        <p:spPr>
+          <a:xfrm>
+            <a:off x="4277258" y="3236976"/>
+            <a:ext cx="363717" cy="201168"/>
+          </a:xfrm>
+          <a:prstGeom prst="roundRect">
+            <a:avLst>
+              <a:gd name="adj" fmla="val 9090"/>
+            </a:avLst>
+          </a:prstGeom>
+          <a:solidFill>
+            <a:srgbClr val="22C55E"/>
+          </a:solidFill>
+          <a:ln>
+            <a:noFill/>
+          </a:ln>
+        </p:spPr>
+        <p:style>
+          <a:lnRef idx="1">
+            <a:schemeClr val="accent1"/>
+          </a:lnRef>
+          <a:fillRef idx="3">
+            <a:schemeClr val="accent1"/>
+          </a:fillRef>
+          <a:effectRef idx="2">
+            <a:schemeClr val="accent1"/>
+          </a:effectRef>
+          <a:fontRef idx="minor">
+            <a:schemeClr val="lt1"/>
+          </a:fontRef>
+        </p:style>
+        <p:txBody>
+          <a:bodyPr rtlCol="0" anchor="ctr"/>
+          <a:lstStyle/>
+          <a:p>
+            <a:pPr algn="ctr"/>
+          </a:p>
+        </p:txBody>
+      </p:sp>
+      <p:sp>
+        <p:nvSpPr>
+          <p:cNvPr id="58" name="TextBox 57"/>
+          <p:cNvSpPr txBox="1"/>
+          <p:nvPr/>
+        </p:nvSpPr>
+        <p:spPr>
+          <a:xfrm>
+            <a:off x="4277258" y="3447288"/>
+            <a:ext cx="363717" cy="164592"/>
+          </a:xfrm>
+          <a:prstGeom prst="rect">
+            <a:avLst/>
+          </a:prstGeom>
+          <a:noFill/>
+        </p:spPr>
+        <p:txBody>
+          <a:bodyPr wrap="square" lIns="0" tIns="0" rIns="0" bIns="0">
+            <a:spAutoFit/>
+          </a:bodyPr>
+          <a:lstStyle/>
+          <a:p>
+            <a:pPr algn="ctr"/>
+            <a:r>
+              <a:rPr sz="1100" b="0" i="0">
+                <a:solidFill>
+                  <a:srgbClr val="94A3B8"/>
+                </a:solidFill>
+                <a:latin typeface="Calibri"/>
+              </a:rPr>
+              <a:t>OK</a:t>
+            </a:r>
+          </a:p>
+        </p:txBody>
+      </p:sp>
+      <p:sp>
+        <p:nvSpPr>
+          <p:cNvPr id="59" name="Rounded Rectangle 58"/>
+          <p:cNvSpPr/>
+          <p:nvPr/>
+        </p:nvSpPr>
+        <p:spPr>
+          <a:xfrm>
+            <a:off x="4640976" y="3236976"/>
+            <a:ext cx="727435" cy="201168"/>
+          </a:xfrm>
+          <a:prstGeom prst="roundRect">
+            <a:avLst>
+              <a:gd name="adj" fmla="val 9090"/>
+            </a:avLst>
+          </a:prstGeom>
+          <a:solidFill>
+            <a:srgbClr val="D97706"/>
+          </a:solidFill>
+          <a:ln>
+            <a:noFill/>
+          </a:ln>
+        </p:spPr>
+        <p:style>
+          <a:lnRef idx="1">
+            <a:schemeClr val="accent1"/>
+          </a:lnRef>
+          <a:fillRef idx="3">
+            <a:schemeClr val="accent1"/>
+          </a:fillRef>
+          <a:effectRef idx="2">
+            <a:schemeClr val="accent1"/>
+          </a:effectRef>
+          <a:fontRef idx="minor">
+            <a:schemeClr val="lt1"/>
+          </a:fontRef>
+        </p:style>
+        <p:txBody>
+          <a:bodyPr rtlCol="0" anchor="ctr"/>
+          <a:lstStyle/>
+          <a:p>
+            <a:pPr algn="ctr"/>
+          </a:p>
+        </p:txBody>
+      </p:sp>
+      <p:sp>
+        <p:nvSpPr>
+          <p:cNvPr id="60" name="TextBox 59"/>
+          <p:cNvSpPr txBox="1"/>
+          <p:nvPr/>
+        </p:nvSpPr>
+        <p:spPr>
+          <a:xfrm>
+            <a:off x="4640976" y="3447288"/>
+            <a:ext cx="727435" cy="164592"/>
+          </a:xfrm>
+          <a:prstGeom prst="rect">
+            <a:avLst/>
+          </a:prstGeom>
+          <a:noFill/>
+        </p:spPr>
+        <p:txBody>
+          <a:bodyPr wrap="square" lIns="0" tIns="0" rIns="0" bIns="0">
+            <a:spAutoFit/>
+          </a:bodyPr>
+          <a:lstStyle/>
+          <a:p>
+            <a:pPr algn="ctr"/>
+            <a:r>
+              <a:rPr sz="1100" b="0" i="0">
+                <a:solidFill>
+                  <a:srgbClr val="94A3B8"/>
+                </a:solidFill>
+                <a:latin typeface="Calibri"/>
+              </a:rPr>
+              <a:t>Warn</a:t>
+            </a:r>
+          </a:p>
+        </p:txBody>
+      </p:sp>
+      <p:sp>
+        <p:nvSpPr>
+          <p:cNvPr id="61" name="Rounded Rectangle 60"/>
+          <p:cNvSpPr/>
+          <p:nvPr/>
+        </p:nvSpPr>
+        <p:spPr>
+          <a:xfrm>
+            <a:off x="5368411" y="3236976"/>
+            <a:ext cx="2546024" cy="201168"/>
+          </a:xfrm>
+          <a:prstGeom prst="roundRect">
+            <a:avLst>
+              <a:gd name="adj" fmla="val 9090"/>
+            </a:avLst>
+          </a:prstGeom>
+          <a:solidFill>
+            <a:srgbClr val="EF4444"/>
+          </a:solidFill>
+          <a:ln>
+            <a:noFill/>
+          </a:ln>
+        </p:spPr>
+        <p:style>
+          <a:lnRef idx="1">
+            <a:schemeClr val="accent1"/>
+          </a:lnRef>
+          <a:fillRef idx="3">
+            <a:schemeClr val="accent1"/>
+          </a:fillRef>
+          <a:effectRef idx="2">
+            <a:schemeClr val="accent1"/>
+          </a:effectRef>
+          <a:fontRef idx="minor">
+            <a:schemeClr val="lt1"/>
+          </a:fontRef>
+        </p:style>
+        <p:txBody>
+          <a:bodyPr rtlCol="0" anchor="ctr"/>
+          <a:lstStyle/>
+          <a:p>
+            <a:pPr algn="ctr"/>
+          </a:p>
+        </p:txBody>
+      </p:sp>
+      <p:sp>
+        <p:nvSpPr>
+          <p:cNvPr id="62" name="TextBox 61"/>
+          <p:cNvSpPr txBox="1"/>
+          <p:nvPr/>
+        </p:nvSpPr>
+        <p:spPr>
+          <a:xfrm>
+            <a:off x="5368411" y="3447288"/>
+            <a:ext cx="2546024" cy="164592"/>
+          </a:xfrm>
+          <a:prstGeom prst="rect">
+            <a:avLst/>
+          </a:prstGeom>
+          <a:noFill/>
+        </p:spPr>
+        <p:txBody>
+          <a:bodyPr wrap="square" lIns="0" tIns="0" rIns="0" bIns="0">
+            <a:spAutoFit/>
+          </a:bodyPr>
+          <a:lstStyle/>
+          <a:p>
+            <a:pPr algn="ctr"/>
+            <a:r>
+              <a:rPr sz="1100" b="0" i="0">
+                <a:solidFill>
+                  <a:srgbClr val="94A3B8"/>
+                </a:solidFill>
+                <a:latin typeface="Calibri"/>
+              </a:rPr>
+              <a:t>Critical</a:t>
+            </a:r>
+          </a:p>
+        </p:txBody>
+      </p:sp>
+      <p:sp>
+        <p:nvSpPr>
+          <p:cNvPr id="63" name="Rounded Rectangle 62"/>
+          <p:cNvSpPr/>
+          <p:nvPr/>
+        </p:nvSpPr>
+        <p:spPr>
+          <a:xfrm>
+            <a:off x="5022777" y="3145536"/>
+            <a:ext cx="36576" cy="384048"/>
+          </a:xfrm>
+          <a:prstGeom prst="roundRect">
+            <a:avLst>
+              <a:gd name="adj" fmla="val 25000"/>
+            </a:avLst>
+          </a:prstGeom>
+          <a:solidFill>
+            <a:srgbClr val="F8FAFC"/>
+          </a:solidFill>
+          <a:ln>
+            <a:noFill/>
+          </a:ln>
+        </p:spPr>
+        <p:style>
+          <a:lnRef idx="1">
+            <a:schemeClr val="accent1"/>
+          </a:lnRef>
+          <a:fillRef idx="3">
+            <a:schemeClr val="accent1"/>
+          </a:fillRef>
+          <a:effectRef idx="2">
+            <a:schemeClr val="accent1"/>
+          </a:effectRef>
+          <a:fontRef idx="minor">
+            <a:schemeClr val="lt1"/>
+          </a:fontRef>
+        </p:style>
+        <p:txBody>
+          <a:bodyPr rtlCol="0" anchor="ctr"/>
+          <a:lstStyle/>
+          <a:p>
+            <a:pPr algn="ctr"/>
+          </a:p>
+        </p:txBody>
+      </p:sp>
+      <p:sp>
+        <p:nvSpPr>
+          <p:cNvPr id="64" name="TextBox 63"/>
+          <p:cNvSpPr txBox="1"/>
+          <p:nvPr/>
+        </p:nvSpPr>
+        <p:spPr>
+          <a:xfrm>
+            <a:off x="8097316" y="2999232"/>
+            <a:ext cx="2364165" cy="201168"/>
+          </a:xfrm>
+          <a:prstGeom prst="rect">
+            <a:avLst/>
+          </a:prstGeom>
+          <a:noFill/>
+        </p:spPr>
+        <p:txBody>
+          <a:bodyPr wrap="square" lIns="0" tIns="0" rIns="0" bIns="0">
+            <a:spAutoFit/>
+          </a:bodyPr>
+          <a:lstStyle/>
+          <a:p>
+            <a:pPr algn="l"/>
+            <a:r>
+              <a:rPr sz="1100" b="0" i="0">
+                <a:solidFill>
+                  <a:srgbClr val="CBD5E1"/>
+                </a:solidFill>
+                <a:latin typeface="Calibri"/>
+              </a:rPr>
+              <a:t>Uptime (%)</a:t>
+            </a:r>
+          </a:p>
+        </p:txBody>
+      </p:sp>
+      <p:sp>
+        <p:nvSpPr>
+          <p:cNvPr id="65" name="TextBox 64"/>
+          <p:cNvSpPr txBox="1"/>
+          <p:nvPr/>
+        </p:nvSpPr>
+        <p:spPr>
+          <a:xfrm>
+            <a:off x="10461482" y="2999232"/>
+            <a:ext cx="1273012" cy="201168"/>
+          </a:xfrm>
+          <a:prstGeom prst="rect">
+            <a:avLst/>
+          </a:prstGeom>
+          <a:noFill/>
+        </p:spPr>
+        <p:txBody>
+          <a:bodyPr wrap="square" lIns="0" tIns="0" rIns="0" bIns="0">
+            <a:spAutoFit/>
+          </a:bodyPr>
+          <a:lstStyle/>
+          <a:p>
+            <a:pPr algn="r"/>
+            <a:r>
+              <a:rPr sz="1100" b="1" i="0">
+                <a:solidFill>
+                  <a:srgbClr val="F8FAFC"/>
+                </a:solidFill>
+                <a:latin typeface="Calibri"/>
+              </a:rPr>
+              <a:t>98.5</a:t>
+            </a:r>
+          </a:p>
+        </p:txBody>
+      </p:sp>
+      <p:sp>
+        <p:nvSpPr>
+          <p:cNvPr id="66" name="Rounded Rectangle 65"/>
+          <p:cNvSpPr/>
+          <p:nvPr/>
+        </p:nvSpPr>
+        <p:spPr>
+          <a:xfrm>
+            <a:off x="8097316" y="3236976"/>
+            <a:ext cx="1818589" cy="201168"/>
+          </a:xfrm>
+          <a:prstGeom prst="roundRect">
+            <a:avLst>
+              <a:gd name="adj" fmla="val 9090"/>
+            </a:avLst>
+          </a:prstGeom>
+          <a:solidFill>
+            <a:srgbClr val="EF4444"/>
+          </a:solidFill>
+          <a:ln>
+            <a:noFill/>
+          </a:ln>
+        </p:spPr>
+        <p:style>
+          <a:lnRef idx="1">
+            <a:schemeClr val="accent1"/>
+          </a:lnRef>
+          <a:fillRef idx="3">
+            <a:schemeClr val="accent1"/>
+          </a:fillRef>
+          <a:effectRef idx="2">
+            <a:schemeClr val="accent1"/>
+          </a:effectRef>
+          <a:fontRef idx="minor">
+            <a:schemeClr val="lt1"/>
+          </a:fontRef>
+        </p:style>
+        <p:txBody>
+          <a:bodyPr rtlCol="0" anchor="ctr"/>
+          <a:lstStyle/>
+          <a:p>
+            <a:pPr algn="ctr"/>
+          </a:p>
+        </p:txBody>
+      </p:sp>
+      <p:sp>
+        <p:nvSpPr>
+          <p:cNvPr id="67" name="TextBox 66"/>
+          <p:cNvSpPr txBox="1"/>
+          <p:nvPr/>
+        </p:nvSpPr>
+        <p:spPr>
+          <a:xfrm>
+            <a:off x="8097316" y="3447288"/>
+            <a:ext cx="1818589" cy="164592"/>
+          </a:xfrm>
+          <a:prstGeom prst="rect">
+            <a:avLst/>
+          </a:prstGeom>
+          <a:noFill/>
+        </p:spPr>
+        <p:txBody>
+          <a:bodyPr wrap="square" lIns="0" tIns="0" rIns="0" bIns="0">
+            <a:spAutoFit/>
+          </a:bodyPr>
+          <a:lstStyle/>
+          <a:p>
+            <a:pPr algn="ctr"/>
+            <a:r>
+              <a:rPr sz="1100" b="0" i="0">
+                <a:solidFill>
+                  <a:srgbClr val="94A3B8"/>
+                </a:solidFill>
+                <a:latin typeface="Calibri"/>
+              </a:rPr>
+              <a:t>Below SLA</a:t>
+            </a:r>
+          </a:p>
+        </p:txBody>
+      </p:sp>
+      <p:sp>
+        <p:nvSpPr>
+          <p:cNvPr id="68" name="Rounded Rectangle 67"/>
+          <p:cNvSpPr/>
+          <p:nvPr/>
+        </p:nvSpPr>
+        <p:spPr>
+          <a:xfrm>
+            <a:off x="9915906" y="3236976"/>
+            <a:ext cx="1454871" cy="201168"/>
+          </a:xfrm>
+          <a:prstGeom prst="roundRect">
+            <a:avLst>
+              <a:gd name="adj" fmla="val 9090"/>
+            </a:avLst>
+          </a:prstGeom>
+          <a:solidFill>
+            <a:srgbClr val="D97706"/>
+          </a:solidFill>
+          <a:ln>
+            <a:noFill/>
+          </a:ln>
+        </p:spPr>
+        <p:style>
+          <a:lnRef idx="1">
+            <a:schemeClr val="accent1"/>
+          </a:lnRef>
+          <a:fillRef idx="3">
+            <a:schemeClr val="accent1"/>
+          </a:fillRef>
+          <a:effectRef idx="2">
+            <a:schemeClr val="accent1"/>
+          </a:effectRef>
+          <a:fontRef idx="minor">
+            <a:schemeClr val="lt1"/>
+          </a:fontRef>
+        </p:style>
+        <p:txBody>
+          <a:bodyPr rtlCol="0" anchor="ctr"/>
+          <a:lstStyle/>
+          <a:p>
+            <a:pPr algn="ctr"/>
+          </a:p>
+        </p:txBody>
+      </p:sp>
+      <p:sp>
+        <p:nvSpPr>
+          <p:cNvPr id="69" name="TextBox 68"/>
+          <p:cNvSpPr txBox="1"/>
+          <p:nvPr/>
+        </p:nvSpPr>
+        <p:spPr>
+          <a:xfrm>
+            <a:off x="9915906" y="3447288"/>
+            <a:ext cx="1454871" cy="164592"/>
+          </a:xfrm>
+          <a:prstGeom prst="rect">
+            <a:avLst/>
+          </a:prstGeom>
+          <a:noFill/>
+        </p:spPr>
+        <p:txBody>
+          <a:bodyPr wrap="square" lIns="0" tIns="0" rIns="0" bIns="0">
+            <a:spAutoFit/>
+          </a:bodyPr>
+          <a:lstStyle/>
+          <a:p>
+            <a:pPr algn="ctr"/>
+            <a:r>
+              <a:rPr sz="1100" b="0" i="0">
+                <a:solidFill>
+                  <a:srgbClr val="94A3B8"/>
+                </a:solidFill>
+                <a:latin typeface="Calibri"/>
+              </a:rPr>
+              <a:t>Degraded</a:t>
+            </a:r>
+          </a:p>
+        </p:txBody>
+      </p:sp>
+      <p:sp>
+        <p:nvSpPr>
+          <p:cNvPr id="70" name="Rounded Rectangle 69"/>
+          <p:cNvSpPr/>
+          <p:nvPr/>
+        </p:nvSpPr>
+        <p:spPr>
+          <a:xfrm>
+            <a:off x="11370777" y="3236976"/>
+            <a:ext cx="363717" cy="201168"/>
+          </a:xfrm>
+          <a:prstGeom prst="roundRect">
+            <a:avLst>
+              <a:gd name="adj" fmla="val 9090"/>
+            </a:avLst>
+          </a:prstGeom>
+          <a:solidFill>
+            <a:srgbClr val="22C55E"/>
+          </a:solidFill>
+          <a:ln>
+            <a:noFill/>
+          </a:ln>
+        </p:spPr>
+        <p:style>
+          <a:lnRef idx="1">
+            <a:schemeClr val="accent1"/>
+          </a:lnRef>
+          <a:fillRef idx="3">
+            <a:schemeClr val="accent1"/>
+          </a:fillRef>
+          <a:effectRef idx="2">
+            <a:schemeClr val="accent1"/>
+          </a:effectRef>
+          <a:fontRef idx="minor">
+            <a:schemeClr val="lt1"/>
+          </a:fontRef>
+        </p:style>
+        <p:txBody>
+          <a:bodyPr rtlCol="0" anchor="ctr"/>
+          <a:lstStyle/>
+          <a:p>
+            <a:pPr algn="ctr"/>
+          </a:p>
+        </p:txBody>
+      </p:sp>
+      <p:sp>
+        <p:nvSpPr>
+          <p:cNvPr id="71" name="TextBox 70"/>
+          <p:cNvSpPr txBox="1"/>
+          <p:nvPr/>
+        </p:nvSpPr>
+        <p:spPr>
+          <a:xfrm>
+            <a:off x="11370777" y="3447288"/>
+            <a:ext cx="363717" cy="164592"/>
+          </a:xfrm>
+          <a:prstGeom prst="rect">
+            <a:avLst/>
+          </a:prstGeom>
+          <a:noFill/>
+        </p:spPr>
+        <p:txBody>
+          <a:bodyPr wrap="square" lIns="0" tIns="0" rIns="0" bIns="0">
+            <a:spAutoFit/>
+          </a:bodyPr>
+          <a:lstStyle/>
+          <a:p>
+            <a:pPr algn="ctr"/>
+            <a:r>
+              <a:rPr sz="1100" b="0" i="0">
+                <a:solidFill>
+                  <a:srgbClr val="94A3B8"/>
+                </a:solidFill>
+                <a:latin typeface="Calibri"/>
+              </a:rPr>
+              <a:t>Healthy</a:t>
+            </a:r>
+          </a:p>
+        </p:txBody>
+      </p:sp>
+      <p:sp>
+        <p:nvSpPr>
+          <p:cNvPr id="72" name="Rounded Rectangle 71"/>
+          <p:cNvSpPr/>
+          <p:nvPr/>
+        </p:nvSpPr>
+        <p:spPr>
+          <a:xfrm>
+            <a:off x="11170630" y="3145536"/>
+            <a:ext cx="36576" cy="384048"/>
+          </a:xfrm>
+          <a:prstGeom prst="roundRect">
+            <a:avLst>
+              <a:gd name="adj" fmla="val 25000"/>
+            </a:avLst>
+          </a:prstGeom>
+          <a:solidFill>
+            <a:srgbClr val="F8FAFC"/>
+          </a:solidFill>
+          <a:ln>
+            <a:noFill/>
+          </a:ln>
+        </p:spPr>
+        <p:style>
+          <a:lnRef idx="1">
+            <a:schemeClr val="accent1"/>
+          </a:lnRef>
+          <a:fillRef idx="3">
+            <a:schemeClr val="accent1"/>
+          </a:fillRef>
+          <a:effectRef idx="2">
+            <a:schemeClr val="accent1"/>
+          </a:effectRef>
+          <a:fontRef idx="minor">
+            <a:schemeClr val="lt1"/>
+          </a:fontRef>
+        </p:style>
+        <p:txBody>
+          <a:bodyPr rtlCol="0" anchor="ctr"/>
+          <a:lstStyle/>
+          <a:p>
+            <a:pPr algn="ctr"/>
+          </a:p>
+        </p:txBody>
+      </p:sp>
+    </p:spTree>
+  </p:cSld>
+  <p:clrMapOvr>
+    <a:masterClrMapping/>
+  </p:clrMapOvr>
+</p:sld>
+</file>
+
+<file path=ppt/slides/slide13.xml><?xml version="1.0" encoding="utf-8"?>
+<p:sld xmlns:a="http://schemas.openxmlformats.org/drawingml/2006/main" xmlns:p="http://schemas.openxmlformats.org/presentationml/2006/main" xmlns:r="http://schemas.openxmlformats.org/officeDocument/2006/relationships">
+  <p:cSld>
+    <p:bg>
+      <p:bgPr>
+        <a:solidFill>
+          <a:srgbClr val="0F172A"/>
+        </a:solidFill>
+        <a:effectLst/>
+      </p:bgPr>
+    </p:bg>
+    <p:spTree>
+      <p:nvGrpSpPr>
+        <p:cNvPr id="1" name=""/>
+        <p:cNvGrpSpPr/>
+        <p:nvPr/>
+      </p:nvGrpSpPr>
+      <p:grpSpPr/>
+      <p:sp>
+        <p:nvSpPr>
+          <p:cNvPr id="2" name="Rectangle 1"/>
+          <p:cNvSpPr/>
+          <p:nvPr/>
+        </p:nvSpPr>
+        <p:spPr>
+          <a:xfrm>
+            <a:off x="457200" y="457200"/>
+            <a:ext cx="45720" cy="548640"/>
+          </a:xfrm>
+          <a:prstGeom prst="rect">
+            <a:avLst/>
+          </a:prstGeom>
+          <a:solidFill>
+            <a:srgbClr val="3B82F6"/>
+          </a:solidFill>
+          <a:ln>
+            <a:noFill/>
+          </a:ln>
+        </p:spPr>
+        <p:style>
+          <a:lnRef idx="1">
+            <a:schemeClr val="accent1"/>
+          </a:lnRef>
+          <a:fillRef idx="3">
+            <a:schemeClr val="accent1"/>
+          </a:fillRef>
+          <a:effectRef idx="2">
+            <a:schemeClr val="accent1"/>
+          </a:effectRef>
+          <a:fontRef idx="minor">
+            <a:schemeClr val="lt1"/>
+          </a:fontRef>
+        </p:style>
+        <p:txBody>
+          <a:bodyPr rtlCol="0" anchor="ctr"/>
+          <a:lstStyle/>
+          <a:p>
+            <a:pPr algn="ctr"/>
+          </a:p>
+        </p:txBody>
+      </p:sp>
+      <p:sp>
+        <p:nvSpPr>
+          <p:cNvPr id="3" name="TextBox 2"/>
+          <p:cNvSpPr txBox="1"/>
+          <p:nvPr/>
+        </p:nvSpPr>
+        <p:spPr>
+          <a:xfrm>
+            <a:off x="685800" y="457200"/>
+            <a:ext cx="9119311" cy="548640"/>
+          </a:xfrm>
+          <a:prstGeom prst="rect">
+            <a:avLst/>
+          </a:prstGeom>
+          <a:noFill/>
+        </p:spPr>
+        <p:txBody>
+          <a:bodyPr wrap="square" lIns="0" tIns="0" rIns="0" bIns="0">
+            <a:spAutoFit/>
+          </a:bodyPr>
+          <a:lstStyle/>
+          <a:p>
+            <a:pPr algn="l"/>
+            <a:r>
+              <a:rPr sz="2800" b="1" i="0">
+                <a:solidFill>
+                  <a:srgbClr val="F8FAFC"/>
+                </a:solidFill>
+                <a:latin typeface="Calibri Light"/>
+              </a:rPr>
+              <a:t>Phase 3 Additions</a:t>
+            </a:r>
+          </a:p>
+        </p:txBody>
+      </p:sp>
+      <p:sp>
+        <p:nvSpPr>
+          <p:cNvPr id="4" name="Rounded Rectangle 3"/>
+          <p:cNvSpPr/>
+          <p:nvPr/>
+        </p:nvSpPr>
+        <p:spPr>
+          <a:xfrm>
+            <a:off x="9987991" y="571500"/>
+            <a:ext cx="1746504" cy="320040"/>
+          </a:xfrm>
+          <a:prstGeom prst="roundRect">
+            <a:avLst>
+              <a:gd name="adj" fmla="val 50000"/>
+            </a:avLst>
+          </a:prstGeom>
+          <a:solidFill>
+            <a:srgbClr val="3B82F6"/>
+          </a:solidFill>
+          <a:ln>
+            <a:noFill/>
+          </a:ln>
+        </p:spPr>
+        <p:style>
+          <a:lnRef idx="1">
+            <a:schemeClr val="accent1"/>
+          </a:lnRef>
+          <a:fillRef idx="3">
+            <a:schemeClr val="accent1"/>
+          </a:fillRef>
+          <a:effectRef idx="2">
+            <a:schemeClr val="accent1"/>
+          </a:effectRef>
+          <a:fontRef idx="minor">
+            <a:schemeClr val="lt1"/>
+          </a:fontRef>
+        </p:style>
+        <p:txBody>
+          <a:bodyPr rtlCol="0" anchor="ctr" wrap="none"/>
+          <a:lstStyle/>
+          <a:p>
+            <a:pPr algn="ctr"/>
+            <a:r>
+              <a:rPr sz="1100" b="1">
+                <a:solidFill>
+                  <a:srgbClr val="FFFFFF"/>
+                </a:solidFill>
+                <a:latin typeface="Calibri"/>
+              </a:rPr>
+              <a:t>Code + Annotations</a:t>
+            </a:r>
+          </a:p>
+        </p:txBody>
+      </p:sp>
+      <p:sp>
+        <p:nvSpPr>
+          <p:cNvPr id="5" name="Rounded Rectangle 4"/>
+          <p:cNvSpPr/>
+          <p:nvPr/>
+        </p:nvSpPr>
+        <p:spPr>
+          <a:xfrm>
+            <a:off x="457200" y="1298448"/>
+            <a:ext cx="6471742" cy="4114800"/>
+          </a:xfrm>
+          <a:prstGeom prst="roundRect">
+            <a:avLst>
+              <a:gd name="adj" fmla="val 888"/>
+            </a:avLst>
+          </a:prstGeom>
+          <a:solidFill>
+            <a:srgbClr val="1E293B"/>
+          </a:solidFill>
+          <a:ln>
+            <a:noFill/>
+          </a:ln>
+        </p:spPr>
+        <p:style>
+          <a:lnRef idx="1">
+            <a:schemeClr val="accent1"/>
+          </a:lnRef>
+          <a:fillRef idx="3">
+            <a:schemeClr val="accent1"/>
+          </a:fillRef>
+          <a:effectRef idx="2">
+            <a:schemeClr val="accent1"/>
+          </a:effectRef>
+          <a:fontRef idx="minor">
+            <a:schemeClr val="lt1"/>
+          </a:fontRef>
+        </p:style>
+        <p:txBody>
+          <a:bodyPr rtlCol="0" anchor="ctr"/>
+          <a:lstStyle/>
+          <a:p>
+            <a:pPr algn="ctr"/>
+          </a:p>
+        </p:txBody>
+      </p:sp>
+      <p:sp>
+        <p:nvSpPr>
+          <p:cNvPr id="6" name="Rounded Rectangle 5"/>
+          <p:cNvSpPr/>
+          <p:nvPr/>
+        </p:nvSpPr>
+        <p:spPr>
+          <a:xfrm>
+            <a:off x="457200" y="1298448"/>
+            <a:ext cx="6471742" cy="274320"/>
+          </a:xfrm>
+          <a:prstGeom prst="roundRect">
+            <a:avLst>
+              <a:gd name="adj" fmla="val 13333"/>
+            </a:avLst>
+          </a:prstGeom>
+          <a:solidFill>
+            <a:srgbClr val="334155"/>
+          </a:solidFill>
+          <a:ln>
+            <a:noFill/>
+          </a:ln>
+        </p:spPr>
+        <p:style>
+          <a:lnRef idx="1">
+            <a:schemeClr val="accent1"/>
+          </a:lnRef>
+          <a:fillRef idx="3">
+            <a:schemeClr val="accent1"/>
+          </a:fillRef>
+          <a:effectRef idx="2">
+            <a:schemeClr val="accent1"/>
+          </a:effectRef>
+          <a:fontRef idx="minor">
+            <a:schemeClr val="lt1"/>
+          </a:fontRef>
+        </p:style>
+        <p:txBody>
+          <a:bodyPr rtlCol="0" anchor="ctr"/>
+          <a:lstStyle/>
+          <a:p>
+            <a:pPr algn="ctr"/>
+          </a:p>
+        </p:txBody>
+      </p:sp>
+      <p:sp>
+        <p:nvSpPr>
+          <p:cNvPr id="7" name="Rounded Rectangle 6"/>
+          <p:cNvSpPr/>
+          <p:nvPr/>
+        </p:nvSpPr>
+        <p:spPr>
+          <a:xfrm>
+            <a:off x="585216" y="1353312"/>
+            <a:ext cx="914400" cy="164592"/>
+          </a:xfrm>
+          <a:prstGeom prst="roundRect">
+            <a:avLst>
+              <a:gd name="adj" fmla="val 50000"/>
+            </a:avLst>
+          </a:prstGeom>
+          <a:solidFill>
+            <a:srgbClr val="3B82F6"/>
+          </a:solidFill>
+          <a:ln>
+            <a:noFill/>
+          </a:ln>
+        </p:spPr>
+        <p:style>
+          <a:lnRef idx="1">
+            <a:schemeClr val="accent1"/>
+          </a:lnRef>
+          <a:fillRef idx="3">
+            <a:schemeClr val="accent1"/>
+          </a:fillRef>
+          <a:effectRef idx="2">
+            <a:schemeClr val="accent1"/>
+          </a:effectRef>
+          <a:fontRef idx="minor">
+            <a:schemeClr val="lt1"/>
+          </a:fontRef>
+        </p:style>
+        <p:txBody>
+          <a:bodyPr rtlCol="0" anchor="ctr"/>
+          <a:lstStyle/>
+          <a:p>
+            <a:pPr algn="ctr"/>
+          </a:p>
+        </p:txBody>
+      </p:sp>
+      <p:sp>
+        <p:nvSpPr>
+          <p:cNvPr id="8" name="TextBox 7"/>
+          <p:cNvSpPr txBox="1"/>
+          <p:nvPr/>
+        </p:nvSpPr>
+        <p:spPr>
+          <a:xfrm>
+            <a:off x="585216" y="1353312"/>
+            <a:ext cx="914400" cy="164592"/>
+          </a:xfrm>
+          <a:prstGeom prst="rect">
+            <a:avLst/>
+          </a:prstGeom>
+          <a:noFill/>
+        </p:spPr>
+        <p:txBody>
+          <a:bodyPr wrap="square" lIns="0" tIns="0" rIns="0" bIns="0">
+            <a:spAutoFit/>
+          </a:bodyPr>
+          <a:lstStyle/>
+          <a:p>
+            <a:pPr algn="ctr"/>
+            <a:r>
+              <a:rPr sz="1100" b="1" i="0">
+                <a:solidFill>
+                  <a:srgbClr val="FFFFFF"/>
+                </a:solidFill>
+                <a:latin typeface="Consolas"/>
+              </a:rPr>
+              <a:t>Python</a:t>
+            </a:r>
+          </a:p>
+        </p:txBody>
+      </p:sp>
+      <p:sp>
+        <p:nvSpPr>
+          <p:cNvPr id="9" name="TextBox 8"/>
+          <p:cNvSpPr txBox="1"/>
+          <p:nvPr/>
+        </p:nvSpPr>
+        <p:spPr>
+          <a:xfrm>
+            <a:off x="585216" y="1700784"/>
+            <a:ext cx="274320" cy="201168"/>
+          </a:xfrm>
+          <a:prstGeom prst="rect">
+            <a:avLst/>
+          </a:prstGeom>
+          <a:noFill/>
+        </p:spPr>
+        <p:txBody>
+          <a:bodyPr wrap="none" lIns="0" tIns="0" rIns="0" bIns="0">
+            <a:spAutoFit/>
+          </a:bodyPr>
+          <a:lstStyle/>
+          <a:p>
+            <a:pPr algn="r"/>
+            <a:r>
+              <a:rPr sz="1100" b="0" i="0">
+                <a:solidFill>
+                  <a:srgbClr val="94A3B8"/>
+                </a:solidFill>
+                <a:latin typeface="Consolas"/>
+              </a:rPr>
+              <a:t>1</a:t>
+            </a:r>
+          </a:p>
+        </p:txBody>
+      </p:sp>
+      <p:sp>
+        <p:nvSpPr>
+          <p:cNvPr id="10" name="TextBox 9"/>
+          <p:cNvSpPr txBox="1"/>
+          <p:nvPr/>
+        </p:nvSpPr>
+        <p:spPr>
+          <a:xfrm>
+            <a:off x="932688" y="1700784"/>
+            <a:ext cx="5868238" cy="201168"/>
+          </a:xfrm>
+          <a:prstGeom prst="rect">
+            <a:avLst/>
+          </a:prstGeom>
+          <a:noFill/>
+        </p:spPr>
+        <p:txBody>
+          <a:bodyPr wrap="none" lIns="0" tIns="0" rIns="0" bIns="0">
+            <a:spAutoFit/>
+          </a:bodyPr>
+          <a:lstStyle/>
+          <a:p>
+            <a:pPr algn="l"/>
+            <a:r>
+              <a:rPr sz="1100" b="0" i="0">
+                <a:solidFill>
+                  <a:srgbClr val="CBD5E1"/>
+                </a:solidFill>
+                <a:latin typeface="Consolas"/>
+              </a:rPr>
+              <a:t>import pptx_components as pc</a:t>
+            </a:r>
+          </a:p>
+        </p:txBody>
+      </p:sp>
+      <p:sp>
+        <p:nvSpPr>
+          <p:cNvPr id="11" name="TextBox 10"/>
+          <p:cNvSpPr txBox="1"/>
+          <p:nvPr/>
+        </p:nvSpPr>
+        <p:spPr>
+          <a:xfrm>
+            <a:off x="585216" y="1901952"/>
+            <a:ext cx="274320" cy="201168"/>
+          </a:xfrm>
+          <a:prstGeom prst="rect">
+            <a:avLst/>
+          </a:prstGeom>
+          <a:noFill/>
+        </p:spPr>
+        <p:txBody>
+          <a:bodyPr wrap="none" lIns="0" tIns="0" rIns="0" bIns="0">
+            <a:spAutoFit/>
+          </a:bodyPr>
+          <a:lstStyle/>
+          <a:p>
+            <a:pPr algn="r"/>
+            <a:r>
+              <a:rPr sz="1100" b="0" i="0">
+                <a:solidFill>
+                  <a:srgbClr val="94A3B8"/>
+                </a:solidFill>
+                <a:latin typeface="Consolas"/>
+              </a:rPr>
+              <a:t>2</a:t>
+            </a:r>
+          </a:p>
+        </p:txBody>
+      </p:sp>
+      <p:sp>
+        <p:nvSpPr>
+          <p:cNvPr id="12" name="TextBox 11"/>
+          <p:cNvSpPr txBox="1"/>
+          <p:nvPr/>
+        </p:nvSpPr>
+        <p:spPr>
+          <a:xfrm>
+            <a:off x="932688" y="1901952"/>
+            <a:ext cx="5868238" cy="201168"/>
+          </a:xfrm>
+          <a:prstGeom prst="rect">
+            <a:avLst/>
+          </a:prstGeom>
+          <a:noFill/>
+        </p:spPr>
+        <p:txBody>
+          <a:bodyPr wrap="none" lIns="0" tIns="0" rIns="0" bIns="0">
+            <a:spAutoFit/>
+          </a:bodyPr>
+          <a:lstStyle/>
+          <a:p>
+            <a:pPr algn="l"/>
+            <a:r>
+              <a:rPr sz="1100" b="0" i="0">
+                <a:solidFill>
+                  <a:srgbClr val="CBD5E1"/>
+                </a:solidFill>
+                <a:latin typeface="Consolas"/>
+              </a:rPr>
+              <a:t/>
+            </a:r>
+          </a:p>
+        </p:txBody>
+      </p:sp>
+      <p:sp>
+        <p:nvSpPr>
+          <p:cNvPr id="13" name="TextBox 12"/>
+          <p:cNvSpPr txBox="1"/>
+          <p:nvPr/>
+        </p:nvSpPr>
+        <p:spPr>
+          <a:xfrm>
+            <a:off x="585216" y="2103120"/>
+            <a:ext cx="274320" cy="201168"/>
+          </a:xfrm>
+          <a:prstGeom prst="rect">
+            <a:avLst/>
+          </a:prstGeom>
+          <a:noFill/>
+        </p:spPr>
+        <p:txBody>
+          <a:bodyPr wrap="none" lIns="0" tIns="0" rIns="0" bIns="0">
+            <a:spAutoFit/>
+          </a:bodyPr>
+          <a:lstStyle/>
+          <a:p>
+            <a:pPr algn="r"/>
+            <a:r>
+              <a:rPr sz="1100" b="0" i="0">
+                <a:solidFill>
+                  <a:srgbClr val="94A3B8"/>
+                </a:solidFill>
+                <a:latin typeface="Consolas"/>
+              </a:rPr>
+              <a:t>3</a:t>
+            </a:r>
+          </a:p>
+        </p:txBody>
+      </p:sp>
+      <p:sp>
+        <p:nvSpPr>
+          <p:cNvPr id="14" name="TextBox 13"/>
+          <p:cNvSpPr txBox="1"/>
+          <p:nvPr/>
+        </p:nvSpPr>
+        <p:spPr>
+          <a:xfrm>
+            <a:off x="932688" y="2103120"/>
+            <a:ext cx="5868238" cy="201168"/>
+          </a:xfrm>
+          <a:prstGeom prst="rect">
+            <a:avLst/>
+          </a:prstGeom>
+          <a:noFill/>
+        </p:spPr>
+        <p:txBody>
+          <a:bodyPr wrap="none" lIns="0" tIns="0" rIns="0" bIns="0">
+            <a:spAutoFit/>
+          </a:bodyPr>
+          <a:lstStyle/>
+          <a:p>
+            <a:pPr algn="l"/>
+            <a:r>
+              <a:rPr sz="1100" b="0" i="0">
+                <a:solidFill>
+                  <a:srgbClr val="CBD5E1"/>
+                </a:solidFill>
+                <a:latin typeface="Consolas"/>
+              </a:rPr>
+              <a:t>builder = pc.SlideBuilder(prs)</a:t>
+            </a:r>
+          </a:p>
+        </p:txBody>
+      </p:sp>
+      <p:sp>
+        <p:nvSpPr>
+          <p:cNvPr id="15" name="TextBox 14"/>
+          <p:cNvSpPr txBox="1"/>
+          <p:nvPr/>
+        </p:nvSpPr>
+        <p:spPr>
+          <a:xfrm>
+            <a:off x="585216" y="2304288"/>
+            <a:ext cx="274320" cy="201168"/>
+          </a:xfrm>
+          <a:prstGeom prst="rect">
+            <a:avLst/>
+          </a:prstGeom>
+          <a:noFill/>
+        </p:spPr>
+        <p:txBody>
+          <a:bodyPr wrap="none" lIns="0" tIns="0" rIns="0" bIns="0">
+            <a:spAutoFit/>
+          </a:bodyPr>
+          <a:lstStyle/>
+          <a:p>
+            <a:pPr algn="r"/>
+            <a:r>
+              <a:rPr sz="1100" b="0" i="0">
+                <a:solidFill>
+                  <a:srgbClr val="94A3B8"/>
+                </a:solidFill>
+                <a:latin typeface="Consolas"/>
+              </a:rPr>
+              <a:t>4</a:t>
+            </a:r>
+          </a:p>
+        </p:txBody>
+      </p:sp>
+      <p:sp>
+        <p:nvSpPr>
+          <p:cNvPr id="16" name="TextBox 15"/>
+          <p:cNvSpPr txBox="1"/>
+          <p:nvPr/>
+        </p:nvSpPr>
+        <p:spPr>
+          <a:xfrm>
+            <a:off x="932688" y="2304288"/>
+            <a:ext cx="5868238" cy="201168"/>
+          </a:xfrm>
+          <a:prstGeom prst="rect">
+            <a:avLst/>
+          </a:prstGeom>
+          <a:noFill/>
+        </p:spPr>
+        <p:txBody>
+          <a:bodyPr wrap="none" lIns="0" tIns="0" rIns="0" bIns="0">
+            <a:spAutoFit/>
+          </a:bodyPr>
+          <a:lstStyle/>
+          <a:p>
+            <a:pPr algn="l"/>
+            <a:r>
+              <a:rPr sz="1100" b="0" i="0">
+                <a:solidFill>
+                  <a:srgbClr val="CBD5E1"/>
+                </a:solidFill>
+                <a:latin typeface="Consolas"/>
+              </a:rPr>
+              <a:t>builder.add(pc.SectionHeader("My Slide", badge_text="v1.0"))</a:t>
+            </a:r>
+          </a:p>
+        </p:txBody>
+      </p:sp>
+      <p:sp>
+        <p:nvSpPr>
+          <p:cNvPr id="17" name="TextBox 16"/>
+          <p:cNvSpPr txBox="1"/>
+          <p:nvPr/>
+        </p:nvSpPr>
+        <p:spPr>
+          <a:xfrm>
+            <a:off x="585216" y="2505456"/>
+            <a:ext cx="274320" cy="201168"/>
+          </a:xfrm>
+          <a:prstGeom prst="rect">
+            <a:avLst/>
+          </a:prstGeom>
+          <a:noFill/>
+        </p:spPr>
+        <p:txBody>
+          <a:bodyPr wrap="none" lIns="0" tIns="0" rIns="0" bIns="0">
+            <a:spAutoFit/>
+          </a:bodyPr>
+          <a:lstStyle/>
+          <a:p>
+            <a:pPr algn="r"/>
+            <a:r>
+              <a:rPr sz="1100" b="0" i="0">
+                <a:solidFill>
+                  <a:srgbClr val="94A3B8"/>
+                </a:solidFill>
+                <a:latin typeface="Consolas"/>
+              </a:rPr>
+              <a:t>5</a:t>
+            </a:r>
+          </a:p>
+        </p:txBody>
+      </p:sp>
+      <p:sp>
+        <p:nvSpPr>
+          <p:cNvPr id="18" name="TextBox 17"/>
+          <p:cNvSpPr txBox="1"/>
+          <p:nvPr/>
+        </p:nvSpPr>
+        <p:spPr>
+          <a:xfrm>
+            <a:off x="932688" y="2505456"/>
+            <a:ext cx="5868238" cy="201168"/>
+          </a:xfrm>
+          <a:prstGeom prst="rect">
+            <a:avLst/>
+          </a:prstGeom>
+          <a:noFill/>
+        </p:spPr>
+        <p:txBody>
+          <a:bodyPr wrap="none" lIns="0" tIns="0" rIns="0" bIns="0">
+            <a:spAutoFit/>
+          </a:bodyPr>
+          <a:lstStyle/>
+          <a:p>
+            <a:pPr algn="l"/>
+            <a:r>
+              <a:rPr sz="1100" b="0" i="0">
+                <a:solidFill>
+                  <a:srgbClr val="CBD5E1"/>
+                </a:solidFill>
+                <a:latin typeface="Consolas"/>
+              </a:rPr>
+              <a:t>builder.skip(0.2)</a:t>
+            </a:r>
+          </a:p>
+        </p:txBody>
+      </p:sp>
+      <p:sp>
+        <p:nvSpPr>
+          <p:cNvPr id="19" name="TextBox 18"/>
+          <p:cNvSpPr txBox="1"/>
+          <p:nvPr/>
+        </p:nvSpPr>
+        <p:spPr>
+          <a:xfrm>
+            <a:off x="585216" y="2706624"/>
+            <a:ext cx="274320" cy="201168"/>
+          </a:xfrm>
+          <a:prstGeom prst="rect">
+            <a:avLst/>
+          </a:prstGeom>
+          <a:noFill/>
+        </p:spPr>
+        <p:txBody>
+          <a:bodyPr wrap="none" lIns="0" tIns="0" rIns="0" bIns="0">
+            <a:spAutoFit/>
+          </a:bodyPr>
+          <a:lstStyle/>
+          <a:p>
+            <a:pPr algn="r"/>
+            <a:r>
+              <a:rPr sz="1100" b="0" i="0">
+                <a:solidFill>
+                  <a:srgbClr val="94A3B8"/>
+                </a:solidFill>
+                <a:latin typeface="Consolas"/>
+              </a:rPr>
+              <a:t>6</a:t>
+            </a:r>
+          </a:p>
+        </p:txBody>
+      </p:sp>
+      <p:sp>
+        <p:nvSpPr>
+          <p:cNvPr id="20" name="TextBox 19"/>
+          <p:cNvSpPr txBox="1"/>
+          <p:nvPr/>
+        </p:nvSpPr>
+        <p:spPr>
+          <a:xfrm>
+            <a:off x="932688" y="2706624"/>
+            <a:ext cx="5868238" cy="201168"/>
+          </a:xfrm>
+          <a:prstGeom prst="rect">
+            <a:avLst/>
+          </a:prstGeom>
+          <a:noFill/>
+        </p:spPr>
+        <p:txBody>
+          <a:bodyPr wrap="none" lIns="0" tIns="0" rIns="0" bIns="0">
+            <a:spAutoFit/>
+          </a:bodyPr>
+          <a:lstStyle/>
+          <a:p>
+            <a:pPr algn="l"/>
+            <a:r>
+              <a:rPr sz="1100" b="0" i="0">
+                <a:solidFill>
+                  <a:srgbClr val="CBD5E1"/>
+                </a:solidFill>
+                <a:latin typeface="Consolas"/>
+              </a:rPr>
+              <a:t>builder.add_row(</a:t>
+            </a:r>
+          </a:p>
+        </p:txBody>
+      </p:sp>
+      <p:sp>
+        <p:nvSpPr>
+          <p:cNvPr id="21" name="TextBox 20"/>
+          <p:cNvSpPr txBox="1"/>
+          <p:nvPr/>
+        </p:nvSpPr>
+        <p:spPr>
+          <a:xfrm>
+            <a:off x="585216" y="2907792"/>
+            <a:ext cx="274320" cy="201168"/>
+          </a:xfrm>
+          <a:prstGeom prst="rect">
+            <a:avLst/>
+          </a:prstGeom>
+          <a:noFill/>
+        </p:spPr>
+        <p:txBody>
+          <a:bodyPr wrap="none" lIns="0" tIns="0" rIns="0" bIns="0">
+            <a:spAutoFit/>
+          </a:bodyPr>
+          <a:lstStyle/>
+          <a:p>
+            <a:pPr algn="r"/>
+            <a:r>
+              <a:rPr sz="1100" b="0" i="0">
+                <a:solidFill>
+                  <a:srgbClr val="94A3B8"/>
+                </a:solidFill>
+                <a:latin typeface="Consolas"/>
+              </a:rPr>
+              <a:t>7</a:t>
+            </a:r>
+          </a:p>
+        </p:txBody>
+      </p:sp>
+      <p:sp>
+        <p:nvSpPr>
+          <p:cNvPr id="22" name="TextBox 21"/>
+          <p:cNvSpPr txBox="1"/>
+          <p:nvPr/>
+        </p:nvSpPr>
+        <p:spPr>
+          <a:xfrm>
+            <a:off x="932688" y="2907792"/>
+            <a:ext cx="5868238" cy="201168"/>
+          </a:xfrm>
+          <a:prstGeom prst="rect">
+            <a:avLst/>
+          </a:prstGeom>
+          <a:noFill/>
+        </p:spPr>
+        <p:txBody>
+          <a:bodyPr wrap="none" lIns="0" tIns="0" rIns="0" bIns="0">
+            <a:spAutoFit/>
+          </a:bodyPr>
+          <a:lstStyle/>
+          <a:p>
+            <a:pPr algn="l"/>
+            <a:r>
+              <a:rPr sz="1100" b="0" i="0">
+                <a:solidFill>
+                  <a:srgbClr val="CBD5E1"/>
+                </a:solidFill>
+                <a:latin typeface="Consolas"/>
+              </a:rPr>
+              <a:t>    pc.MetricCard("Revenue", "$1.2M", "+12%", True),</a:t>
+            </a:r>
+          </a:p>
+        </p:txBody>
+      </p:sp>
+      <p:sp>
+        <p:nvSpPr>
+          <p:cNvPr id="23" name="TextBox 22"/>
+          <p:cNvSpPr txBox="1"/>
+          <p:nvPr/>
+        </p:nvSpPr>
+        <p:spPr>
+          <a:xfrm>
+            <a:off x="585216" y="3108960"/>
+            <a:ext cx="274320" cy="201168"/>
+          </a:xfrm>
+          <a:prstGeom prst="rect">
+            <a:avLst/>
+          </a:prstGeom>
+          <a:noFill/>
+        </p:spPr>
+        <p:txBody>
+          <a:bodyPr wrap="none" lIns="0" tIns="0" rIns="0" bIns="0">
+            <a:spAutoFit/>
+          </a:bodyPr>
+          <a:lstStyle/>
+          <a:p>
+            <a:pPr algn="r"/>
+            <a:r>
+              <a:rPr sz="1100" b="0" i="0">
+                <a:solidFill>
+                  <a:srgbClr val="94A3B8"/>
+                </a:solidFill>
+                <a:latin typeface="Consolas"/>
+              </a:rPr>
+              <a:t>8</a:t>
+            </a:r>
+          </a:p>
+        </p:txBody>
+      </p:sp>
+      <p:sp>
+        <p:nvSpPr>
+          <p:cNvPr id="24" name="TextBox 23"/>
+          <p:cNvSpPr txBox="1"/>
+          <p:nvPr/>
+        </p:nvSpPr>
+        <p:spPr>
+          <a:xfrm>
+            <a:off x="932688" y="3108960"/>
+            <a:ext cx="5868238" cy="201168"/>
+          </a:xfrm>
+          <a:prstGeom prst="rect">
+            <a:avLst/>
+          </a:prstGeom>
+          <a:noFill/>
+        </p:spPr>
+        <p:txBody>
+          <a:bodyPr wrap="none" lIns="0" tIns="0" rIns="0" bIns="0">
+            <a:spAutoFit/>
+          </a:bodyPr>
+          <a:lstStyle/>
+          <a:p>
+            <a:pPr algn="l"/>
+            <a:r>
+              <a:rPr sz="1100" b="0" i="0">
+                <a:solidFill>
+                  <a:srgbClr val="CBD5E1"/>
+                </a:solidFill>
+                <a:latin typeface="Consolas"/>
+              </a:rPr>
+              <a:t>    pc.MetricCard("Churn",   "3.1%",  "+0.2pp", False),</a:t>
+            </a:r>
+          </a:p>
+        </p:txBody>
+      </p:sp>
+      <p:sp>
+        <p:nvSpPr>
+          <p:cNvPr id="25" name="TextBox 24"/>
+          <p:cNvSpPr txBox="1"/>
+          <p:nvPr/>
+        </p:nvSpPr>
+        <p:spPr>
+          <a:xfrm>
+            <a:off x="585216" y="3310128"/>
+            <a:ext cx="274320" cy="201168"/>
+          </a:xfrm>
+          <a:prstGeom prst="rect">
+            <a:avLst/>
+          </a:prstGeom>
+          <a:noFill/>
+        </p:spPr>
+        <p:txBody>
+          <a:bodyPr wrap="none" lIns="0" tIns="0" rIns="0" bIns="0">
+            <a:spAutoFit/>
+          </a:bodyPr>
+          <a:lstStyle/>
+          <a:p>
+            <a:pPr algn="r"/>
+            <a:r>
+              <a:rPr sz="1100" b="0" i="0">
+                <a:solidFill>
+                  <a:srgbClr val="94A3B8"/>
+                </a:solidFill>
+                <a:latin typeface="Consolas"/>
+              </a:rPr>
+              <a:t>9</a:t>
+            </a:r>
+          </a:p>
+        </p:txBody>
+      </p:sp>
+      <p:sp>
+        <p:nvSpPr>
+          <p:cNvPr id="26" name="TextBox 25"/>
+          <p:cNvSpPr txBox="1"/>
+          <p:nvPr/>
+        </p:nvSpPr>
+        <p:spPr>
+          <a:xfrm>
+            <a:off x="932688" y="3310128"/>
+            <a:ext cx="5868238" cy="201168"/>
+          </a:xfrm>
+          <a:prstGeom prst="rect">
+            <a:avLst/>
+          </a:prstGeom>
+          <a:noFill/>
+        </p:spPr>
+        <p:txBody>
+          <a:bodyPr wrap="none" lIns="0" tIns="0" rIns="0" bIns="0">
+            <a:spAutoFit/>
+          </a:bodyPr>
+          <a:lstStyle/>
+          <a:p>
+            <a:pPr algn="l"/>
+            <a:r>
+              <a:rPr sz="1100" b="0" i="0">
+                <a:solidFill>
+                  <a:srgbClr val="CBD5E1"/>
+                </a:solidFill>
+                <a:latin typeface="Consolas"/>
+              </a:rPr>
+              <a:t>    h=1.5,</a:t>
+            </a:r>
+          </a:p>
+        </p:txBody>
+      </p:sp>
+      <p:sp>
+        <p:nvSpPr>
+          <p:cNvPr id="27" name="TextBox 26"/>
+          <p:cNvSpPr txBox="1"/>
+          <p:nvPr/>
+        </p:nvSpPr>
+        <p:spPr>
+          <a:xfrm>
+            <a:off x="585216" y="3511296"/>
+            <a:ext cx="274320" cy="201168"/>
+          </a:xfrm>
+          <a:prstGeom prst="rect">
+            <a:avLst/>
+          </a:prstGeom>
+          <a:noFill/>
+        </p:spPr>
+        <p:txBody>
+          <a:bodyPr wrap="none" lIns="0" tIns="0" rIns="0" bIns="0">
+            <a:spAutoFit/>
+          </a:bodyPr>
+          <a:lstStyle/>
+          <a:p>
+            <a:pPr algn="r"/>
+            <a:r>
+              <a:rPr sz="1100" b="0" i="0">
+                <a:solidFill>
+                  <a:srgbClr val="94A3B8"/>
+                </a:solidFill>
+                <a:latin typeface="Consolas"/>
+              </a:rPr>
+              <a:t>10</a:t>
+            </a:r>
+          </a:p>
+        </p:txBody>
+      </p:sp>
+      <p:sp>
+        <p:nvSpPr>
+          <p:cNvPr id="28" name="TextBox 27"/>
+          <p:cNvSpPr txBox="1"/>
+          <p:nvPr/>
+        </p:nvSpPr>
+        <p:spPr>
+          <a:xfrm>
+            <a:off x="932688" y="3511296"/>
+            <a:ext cx="5868238" cy="201168"/>
+          </a:xfrm>
+          <a:prstGeom prst="rect">
+            <a:avLst/>
+          </a:prstGeom>
+          <a:noFill/>
+        </p:spPr>
+        <p:txBody>
+          <a:bodyPr wrap="none" lIns="0" tIns="0" rIns="0" bIns="0">
+            <a:spAutoFit/>
+          </a:bodyPr>
+          <a:lstStyle/>
+          <a:p>
+            <a:pPr algn="l"/>
+            <a:r>
+              <a:rPr sz="1100" b="0" i="0">
+                <a:solidFill>
+                  <a:srgbClr val="CBD5E1"/>
+                </a:solidFill>
+                <a:latin typeface="Consolas"/>
+              </a:rPr>
+              <a:t>)</a:t>
+            </a:r>
+          </a:p>
+        </p:txBody>
+      </p:sp>
+      <p:sp>
+        <p:nvSpPr>
+          <p:cNvPr id="29" name="TextBox 28"/>
+          <p:cNvSpPr txBox="1"/>
+          <p:nvPr/>
+        </p:nvSpPr>
+        <p:spPr>
+          <a:xfrm>
+            <a:off x="585216" y="3712464"/>
+            <a:ext cx="274320" cy="201168"/>
+          </a:xfrm>
+          <a:prstGeom prst="rect">
+            <a:avLst/>
+          </a:prstGeom>
+          <a:noFill/>
+        </p:spPr>
+        <p:txBody>
+          <a:bodyPr wrap="none" lIns="0" tIns="0" rIns="0" bIns="0">
+            <a:spAutoFit/>
+          </a:bodyPr>
+          <a:lstStyle/>
+          <a:p>
+            <a:pPr algn="r"/>
+            <a:r>
+              <a:rPr sz="1100" b="0" i="0">
+                <a:solidFill>
+                  <a:srgbClr val="94A3B8"/>
+                </a:solidFill>
+                <a:latin typeface="Consolas"/>
+              </a:rPr>
+              <a:t>11</a:t>
+            </a:r>
+          </a:p>
+        </p:txBody>
+      </p:sp>
+      <p:sp>
+        <p:nvSpPr>
+          <p:cNvPr id="30" name="TextBox 29"/>
+          <p:cNvSpPr txBox="1"/>
+          <p:nvPr/>
+        </p:nvSpPr>
+        <p:spPr>
+          <a:xfrm>
+            <a:off x="932688" y="3712464"/>
+            <a:ext cx="5868238" cy="201168"/>
+          </a:xfrm>
+          <a:prstGeom prst="rect">
+            <a:avLst/>
+          </a:prstGeom>
+          <a:noFill/>
+        </p:spPr>
+        <p:txBody>
+          <a:bodyPr wrap="none" lIns="0" tIns="0" rIns="0" bIns="0">
+            <a:spAutoFit/>
+          </a:bodyPr>
+          <a:lstStyle/>
+          <a:p>
+            <a:pPr algn="l"/>
+            <a:r>
+              <a:rPr sz="1100" b="0" i="0">
+                <a:solidFill>
+                  <a:srgbClr val="CBD5E1"/>
+                </a:solidFill>
+                <a:latin typeface="Consolas"/>
+              </a:rPr>
+              <a:t>builder.add(</a:t>
+            </a:r>
+          </a:p>
+        </p:txBody>
+      </p:sp>
+      <p:sp>
+        <p:nvSpPr>
+          <p:cNvPr id="31" name="TextBox 30"/>
+          <p:cNvSpPr txBox="1"/>
+          <p:nvPr/>
+        </p:nvSpPr>
+        <p:spPr>
+          <a:xfrm>
+            <a:off x="585216" y="3913632"/>
+            <a:ext cx="274320" cy="201168"/>
+          </a:xfrm>
+          <a:prstGeom prst="rect">
+            <a:avLst/>
+          </a:prstGeom>
+          <a:noFill/>
+        </p:spPr>
+        <p:txBody>
+          <a:bodyPr wrap="none" lIns="0" tIns="0" rIns="0" bIns="0">
+            <a:spAutoFit/>
+          </a:bodyPr>
+          <a:lstStyle/>
+          <a:p>
+            <a:pPr algn="r"/>
+            <a:r>
+              <a:rPr sz="1100" b="0" i="0">
+                <a:solidFill>
+                  <a:srgbClr val="94A3B8"/>
+                </a:solidFill>
+                <a:latin typeface="Consolas"/>
+              </a:rPr>
+              <a:t>12</a:t>
+            </a:r>
+          </a:p>
+        </p:txBody>
+      </p:sp>
+      <p:sp>
+        <p:nvSpPr>
+          <p:cNvPr id="32" name="TextBox 31"/>
+          <p:cNvSpPr txBox="1"/>
+          <p:nvPr/>
+        </p:nvSpPr>
+        <p:spPr>
+          <a:xfrm>
+            <a:off x="932688" y="3913632"/>
+            <a:ext cx="5868238" cy="201168"/>
+          </a:xfrm>
+          <a:prstGeom prst="rect">
+            <a:avLst/>
+          </a:prstGeom>
+          <a:noFill/>
+        </p:spPr>
+        <p:txBody>
+          <a:bodyPr wrap="none" lIns="0" tIns="0" rIns="0" bIns="0">
+            <a:spAutoFit/>
+          </a:bodyPr>
+          <a:lstStyle/>
+          <a:p>
+            <a:pPr algn="l"/>
+            <a:r>
+              <a:rPr sz="1100" b="0" i="0">
+                <a:solidFill>
+                  <a:srgbClr val="CBD5E1"/>
+                </a:solidFill>
+                <a:latin typeface="Consolas"/>
+              </a:rPr>
+              <a:t>    pc.BarChart(months, data, title="Monthly Trend"),</a:t>
+            </a:r>
+          </a:p>
+        </p:txBody>
+      </p:sp>
+      <p:sp>
+        <p:nvSpPr>
+          <p:cNvPr id="33" name="TextBox 32"/>
+          <p:cNvSpPr txBox="1"/>
+          <p:nvPr/>
+        </p:nvSpPr>
+        <p:spPr>
+          <a:xfrm>
+            <a:off x="585216" y="4114800"/>
+            <a:ext cx="274320" cy="201168"/>
+          </a:xfrm>
+          <a:prstGeom prst="rect">
+            <a:avLst/>
+          </a:prstGeom>
+          <a:noFill/>
+        </p:spPr>
+        <p:txBody>
+          <a:bodyPr wrap="none" lIns="0" tIns="0" rIns="0" bIns="0">
+            <a:spAutoFit/>
+          </a:bodyPr>
+          <a:lstStyle/>
+          <a:p>
+            <a:pPr algn="r"/>
+            <a:r>
+              <a:rPr sz="1100" b="0" i="0">
+                <a:solidFill>
+                  <a:srgbClr val="94A3B8"/>
+                </a:solidFill>
+                <a:latin typeface="Consolas"/>
+              </a:rPr>
+              <a:t>13</a:t>
+            </a:r>
+          </a:p>
+        </p:txBody>
+      </p:sp>
+      <p:sp>
+        <p:nvSpPr>
+          <p:cNvPr id="34" name="TextBox 33"/>
+          <p:cNvSpPr txBox="1"/>
+          <p:nvPr/>
+        </p:nvSpPr>
+        <p:spPr>
+          <a:xfrm>
+            <a:off x="932688" y="4114800"/>
+            <a:ext cx="5868238" cy="201168"/>
+          </a:xfrm>
+          <a:prstGeom prst="rect">
+            <a:avLst/>
+          </a:prstGeom>
+          <a:noFill/>
+        </p:spPr>
+        <p:txBody>
+          <a:bodyPr wrap="none" lIns="0" tIns="0" rIns="0" bIns="0">
+            <a:spAutoFit/>
+          </a:bodyPr>
+          <a:lstStyle/>
+          <a:p>
+            <a:pPr algn="l"/>
+            <a:r>
+              <a:rPr sz="1100" b="0" i="0">
+                <a:solidFill>
+                  <a:srgbClr val="CBD5E1"/>
+                </a:solidFill>
+                <a:latin typeface="Consolas"/>
+              </a:rPr>
+              <a:t>    h=2.8,</a:t>
+            </a:r>
+          </a:p>
+        </p:txBody>
+      </p:sp>
+      <p:sp>
+        <p:nvSpPr>
+          <p:cNvPr id="35" name="TextBox 34"/>
+          <p:cNvSpPr txBox="1"/>
+          <p:nvPr/>
+        </p:nvSpPr>
+        <p:spPr>
+          <a:xfrm>
+            <a:off x="585216" y="4315968"/>
+            <a:ext cx="274320" cy="201168"/>
+          </a:xfrm>
+          <a:prstGeom prst="rect">
+            <a:avLst/>
+          </a:prstGeom>
+          <a:noFill/>
+        </p:spPr>
+        <p:txBody>
+          <a:bodyPr wrap="none" lIns="0" tIns="0" rIns="0" bIns="0">
+            <a:spAutoFit/>
+          </a:bodyPr>
+          <a:lstStyle/>
+          <a:p>
+            <a:pPr algn="r"/>
+            <a:r>
+              <a:rPr sz="1100" b="0" i="0">
+                <a:solidFill>
+                  <a:srgbClr val="94A3B8"/>
+                </a:solidFill>
+                <a:latin typeface="Consolas"/>
+              </a:rPr>
+              <a:t>14</a:t>
+            </a:r>
+          </a:p>
+        </p:txBody>
+      </p:sp>
+      <p:sp>
+        <p:nvSpPr>
+          <p:cNvPr id="36" name="TextBox 35"/>
+          <p:cNvSpPr txBox="1"/>
+          <p:nvPr/>
+        </p:nvSpPr>
+        <p:spPr>
+          <a:xfrm>
+            <a:off x="932688" y="4315968"/>
+            <a:ext cx="5868238" cy="201168"/>
+          </a:xfrm>
+          <a:prstGeom prst="rect">
+            <a:avLst/>
+          </a:prstGeom>
+          <a:noFill/>
+        </p:spPr>
+        <p:txBody>
+          <a:bodyPr wrap="none" lIns="0" tIns="0" rIns="0" bIns="0">
+            <a:spAutoFit/>
+          </a:bodyPr>
+          <a:lstStyle/>
+          <a:p>
+            <a:pPr algn="l"/>
+            <a:r>
+              <a:rPr sz="1100" b="0" i="0">
+                <a:solidFill>
+                  <a:srgbClr val="CBD5E1"/>
+                </a:solidFill>
+                <a:latin typeface="Consolas"/>
+              </a:rPr>
+              <a:t>)</a:t>
+            </a:r>
+          </a:p>
+        </p:txBody>
+      </p:sp>
+      <p:sp>
+        <p:nvSpPr>
+          <p:cNvPr id="37" name="Rounded Rectangle 36"/>
+          <p:cNvSpPr/>
+          <p:nvPr/>
+        </p:nvSpPr>
+        <p:spPr>
+          <a:xfrm>
+            <a:off x="7111822" y="1298448"/>
+            <a:ext cx="4622673" cy="658368"/>
+          </a:xfrm>
+          <a:prstGeom prst="roundRect">
+            <a:avLst>
+              <a:gd name="adj" fmla="val 6944"/>
+            </a:avLst>
+          </a:prstGeom>
+          <a:solidFill>
+            <a:srgbClr val="1E293B"/>
+          </a:solidFill>
+          <a:ln>
+            <a:noFill/>
+          </a:ln>
+        </p:spPr>
+        <p:style>
+          <a:lnRef idx="1">
+            <a:schemeClr val="accent1"/>
+          </a:lnRef>
+          <a:fillRef idx="3">
+            <a:schemeClr val="accent1"/>
+          </a:fillRef>
+          <a:effectRef idx="2">
+            <a:schemeClr val="accent1"/>
+          </a:effectRef>
+          <a:fontRef idx="minor">
+            <a:schemeClr val="lt1"/>
+          </a:fontRef>
+        </p:style>
+        <p:txBody>
+          <a:bodyPr rtlCol="0" anchor="ctr"/>
+          <a:lstStyle/>
+          <a:p>
+            <a:pPr algn="ctr"/>
+          </a:p>
+        </p:txBody>
+      </p:sp>
+      <p:sp>
+        <p:nvSpPr>
+          <p:cNvPr id="38" name="Isosceles Triangle 37"/>
+          <p:cNvSpPr/>
+          <p:nvPr/>
+        </p:nvSpPr>
+        <p:spPr>
+          <a:xfrm rot="16200000">
+            <a:off x="7111822" y="1563623"/>
+            <a:ext cx="128016" cy="128016"/>
+          </a:xfrm>
+          <a:prstGeom prst="triangle">
+            <a:avLst/>
+          </a:prstGeom>
+          <a:solidFill>
+            <a:srgbClr val="1E293B"/>
+          </a:solidFill>
+          <a:ln>
+            <a:noFill/>
+          </a:ln>
+        </p:spPr>
+        <p:style>
+          <a:lnRef idx="1">
+            <a:schemeClr val="accent1"/>
+          </a:lnRef>
+          <a:fillRef idx="3">
+            <a:schemeClr val="accent1"/>
+          </a:fillRef>
+          <a:effectRef idx="2">
+            <a:schemeClr val="accent1"/>
+          </a:effectRef>
+          <a:fontRef idx="minor">
+            <a:schemeClr val="lt1"/>
+          </a:fontRef>
+        </p:style>
+        <p:txBody>
+          <a:bodyPr rtlCol="0" anchor="ctr"/>
+          <a:lstStyle/>
+          <a:p>
+            <a:pPr algn="ctr"/>
+          </a:p>
+        </p:txBody>
+      </p:sp>
+      <p:sp>
+        <p:nvSpPr>
+          <p:cNvPr id="39" name="TextBox 38"/>
+          <p:cNvSpPr txBox="1"/>
+          <p:nvPr/>
+        </p:nvSpPr>
+        <p:spPr>
+          <a:xfrm>
+            <a:off x="7294702" y="1481328"/>
+            <a:ext cx="4256913" cy="292607"/>
+          </a:xfrm>
+          <a:prstGeom prst="rect">
+            <a:avLst/>
+          </a:prstGeom>
+          <a:noFill/>
+        </p:spPr>
+        <p:txBody>
+          <a:bodyPr wrap="square" lIns="0" tIns="0" rIns="0" bIns="0">
+            <a:spAutoFit/>
+          </a:bodyPr>
+          <a:lstStyle/>
+          <a:p>
+            <a:pPr algn="l"/>
+            <a:r>
+              <a:rPr sz="1100" b="0" i="0">
+                <a:solidFill>
+                  <a:srgbClr val="F8FAFC"/>
+                </a:solidFill>
+                <a:latin typeface="Calibri"/>
+              </a:rPr>
+              <a:t>Use SlideBuilder to compose slides with rows, columns, and grids.</a:t>
+            </a:r>
+          </a:p>
+        </p:txBody>
+      </p:sp>
+      <p:sp>
+        <p:nvSpPr>
+          <p:cNvPr id="40" name="Rounded Rectangle 39"/>
+          <p:cNvSpPr/>
+          <p:nvPr/>
+        </p:nvSpPr>
+        <p:spPr>
+          <a:xfrm>
+            <a:off x="7111822" y="2139696"/>
+            <a:ext cx="4622673" cy="658368"/>
+          </a:xfrm>
+          <a:prstGeom prst="roundRect">
+            <a:avLst>
+              <a:gd name="adj" fmla="val 6944"/>
+            </a:avLst>
+          </a:prstGeom>
+          <a:solidFill>
+            <a:srgbClr val="3B82F6"/>
+          </a:solidFill>
+          <a:ln>
+            <a:noFill/>
+          </a:ln>
+        </p:spPr>
+        <p:style>
+          <a:lnRef idx="1">
+            <a:schemeClr val="accent1"/>
+          </a:lnRef>
+          <a:fillRef idx="3">
+            <a:schemeClr val="accent1"/>
+          </a:fillRef>
+          <a:effectRef idx="2">
+            <a:schemeClr val="accent1"/>
+          </a:effectRef>
+          <a:fontRef idx="minor">
+            <a:schemeClr val="lt1"/>
+          </a:fontRef>
+        </p:style>
+        <p:txBody>
+          <a:bodyPr rtlCol="0" anchor="ctr"/>
+          <a:lstStyle/>
+          <a:p>
+            <a:pPr algn="ctr"/>
+          </a:p>
+        </p:txBody>
+      </p:sp>
+      <p:sp>
+        <p:nvSpPr>
+          <p:cNvPr id="41" name="Isosceles Triangle 40"/>
+          <p:cNvSpPr/>
+          <p:nvPr/>
+        </p:nvSpPr>
+        <p:spPr>
+          <a:xfrm rot="16200000">
+            <a:off x="7111822" y="2404872"/>
+            <a:ext cx="128016" cy="128016"/>
+          </a:xfrm>
+          <a:prstGeom prst="triangle">
+            <a:avLst/>
+          </a:prstGeom>
+          <a:solidFill>
+            <a:srgbClr val="3B82F6"/>
+          </a:solidFill>
+          <a:ln>
+            <a:noFill/>
+          </a:ln>
+        </p:spPr>
+        <p:style>
+          <a:lnRef idx="1">
+            <a:schemeClr val="accent1"/>
+          </a:lnRef>
+          <a:fillRef idx="3">
+            <a:schemeClr val="accent1"/>
+          </a:fillRef>
+          <a:effectRef idx="2">
+            <a:schemeClr val="accent1"/>
+          </a:effectRef>
+          <a:fontRef idx="minor">
+            <a:schemeClr val="lt1"/>
+          </a:fontRef>
+        </p:style>
+        <p:txBody>
+          <a:bodyPr rtlCol="0" anchor="ctr"/>
+          <a:lstStyle/>
+          <a:p>
+            <a:pPr algn="ctr"/>
+          </a:p>
+        </p:txBody>
+      </p:sp>
+      <p:sp>
+        <p:nvSpPr>
+          <p:cNvPr id="42" name="TextBox 41"/>
+          <p:cNvSpPr txBox="1"/>
+          <p:nvPr/>
+        </p:nvSpPr>
+        <p:spPr>
+          <a:xfrm>
+            <a:off x="7294702" y="2322576"/>
+            <a:ext cx="4256913" cy="292607"/>
+          </a:xfrm>
+          <a:prstGeom prst="rect">
+            <a:avLst/>
+          </a:prstGeom>
+          <a:noFill/>
+        </p:spPr>
+        <p:txBody>
+          <a:bodyPr wrap="square" lIns="0" tIns="0" rIns="0" bIns="0">
+            <a:spAutoFit/>
+          </a:bodyPr>
+          <a:lstStyle/>
+          <a:p>
+            <a:pPr algn="l"/>
+            <a:r>
+              <a:rPr sz="1100" b="0" i="0">
+                <a:solidFill>
+                  <a:srgbClr val="FFFFFF"/>
+                </a:solidFill>
+                <a:latin typeface="Calibri"/>
+              </a:rPr>
+              <a:t>add_row() automatically distributes width equally.</a:t>
+            </a:r>
+          </a:p>
+        </p:txBody>
+      </p:sp>
+      <p:sp>
+        <p:nvSpPr>
+          <p:cNvPr id="43" name="Rounded Rectangle 42"/>
+          <p:cNvSpPr/>
+          <p:nvPr/>
+        </p:nvSpPr>
+        <p:spPr>
+          <a:xfrm>
+            <a:off x="7111822" y="2980944"/>
+            <a:ext cx="4622673" cy="658368"/>
+          </a:xfrm>
+          <a:prstGeom prst="roundRect">
+            <a:avLst>
+              <a:gd name="adj" fmla="val 6944"/>
+            </a:avLst>
+          </a:prstGeom>
+          <a:solidFill>
+            <a:srgbClr val="2563EB"/>
+          </a:solidFill>
+          <a:ln>
+            <a:noFill/>
+          </a:ln>
+        </p:spPr>
+        <p:style>
+          <a:lnRef idx="1">
+            <a:schemeClr val="accent1"/>
+          </a:lnRef>
+          <a:fillRef idx="3">
+            <a:schemeClr val="accent1"/>
+          </a:fillRef>
+          <a:effectRef idx="2">
+            <a:schemeClr val="accent1"/>
+          </a:effectRef>
+          <a:fontRef idx="minor">
+            <a:schemeClr val="lt1"/>
+          </a:fontRef>
+        </p:style>
+        <p:txBody>
+          <a:bodyPr rtlCol="0" anchor="ctr"/>
+          <a:lstStyle/>
+          <a:p>
+            <a:pPr algn="ctr"/>
+          </a:p>
+        </p:txBody>
+      </p:sp>
+      <p:sp>
+        <p:nvSpPr>
+          <p:cNvPr id="44" name="Isosceles Triangle 43"/>
+          <p:cNvSpPr/>
+          <p:nvPr/>
+        </p:nvSpPr>
+        <p:spPr>
+          <a:xfrm rot="16200000">
+            <a:off x="7111822" y="3246120"/>
+            <a:ext cx="128016" cy="128016"/>
+          </a:xfrm>
+          <a:prstGeom prst="triangle">
+            <a:avLst/>
+          </a:prstGeom>
+          <a:solidFill>
+            <a:srgbClr val="2563EB"/>
+          </a:solidFill>
+          <a:ln>
+            <a:noFill/>
+          </a:ln>
+        </p:spPr>
+        <p:style>
+          <a:lnRef idx="1">
+            <a:schemeClr val="accent1"/>
+          </a:lnRef>
+          <a:fillRef idx="3">
+            <a:schemeClr val="accent1"/>
+          </a:fillRef>
+          <a:effectRef idx="2">
+            <a:schemeClr val="accent1"/>
+          </a:effectRef>
+          <a:fontRef idx="minor">
+            <a:schemeClr val="lt1"/>
+          </a:fontRef>
+        </p:style>
+        <p:txBody>
+          <a:bodyPr rtlCol="0" anchor="ctr"/>
+          <a:lstStyle/>
+          <a:p>
+            <a:pPr algn="ctr"/>
+          </a:p>
+        </p:txBody>
+      </p:sp>
+      <p:sp>
+        <p:nvSpPr>
+          <p:cNvPr id="45" name="TextBox 44"/>
+          <p:cNvSpPr txBox="1"/>
+          <p:nvPr/>
+        </p:nvSpPr>
+        <p:spPr>
+          <a:xfrm>
+            <a:off x="7294702" y="3163824"/>
+            <a:ext cx="4256913" cy="292607"/>
+          </a:xfrm>
+          <a:prstGeom prst="rect">
+            <a:avLst/>
+          </a:prstGeom>
+          <a:noFill/>
+        </p:spPr>
+        <p:txBody>
+          <a:bodyPr wrap="square" lIns="0" tIns="0" rIns="0" bIns="0">
+            <a:spAutoFit/>
+          </a:bodyPr>
+          <a:lstStyle/>
+          <a:p>
+            <a:pPr algn="l"/>
+            <a:r>
+              <a:rPr sz="1100" b="0" i="0">
+                <a:solidFill>
+                  <a:srgbClr val="F8FAFC"/>
+                </a:solidFill>
+                <a:latin typeface="Calibri"/>
+              </a:rPr>
+              <a:t>set h= to control the rendered height of each component.</a:t>
+            </a:r>
+          </a:p>
+        </p:txBody>
+      </p:sp>
+      <p:sp>
+        <p:nvSpPr>
+          <p:cNvPr id="46" name="Rounded Rectangle 45"/>
+          <p:cNvSpPr/>
+          <p:nvPr/>
+        </p:nvSpPr>
+        <p:spPr>
+          <a:xfrm>
+            <a:off x="7111822" y="3822191"/>
+            <a:ext cx="4622673" cy="658368"/>
+          </a:xfrm>
+          <a:prstGeom prst="roundRect">
+            <a:avLst>
+              <a:gd name="adj" fmla="val 6944"/>
+            </a:avLst>
+          </a:prstGeom>
+          <a:solidFill>
+            <a:srgbClr val="B45309"/>
+          </a:solidFill>
+          <a:ln>
+            <a:noFill/>
+          </a:ln>
+        </p:spPr>
+        <p:style>
+          <a:lnRef idx="1">
+            <a:schemeClr val="accent1"/>
+          </a:lnRef>
+          <a:fillRef idx="3">
+            <a:schemeClr val="accent1"/>
+          </a:fillRef>
+          <a:effectRef idx="2">
+            <a:schemeClr val="accent1"/>
+          </a:effectRef>
+          <a:fontRef idx="minor">
+            <a:schemeClr val="lt1"/>
+          </a:fontRef>
+        </p:style>
+        <p:txBody>
+          <a:bodyPr rtlCol="0" anchor="ctr"/>
+          <a:lstStyle/>
+          <a:p>
+            <a:pPr algn="ctr"/>
+          </a:p>
+        </p:txBody>
+      </p:sp>
+      <p:sp>
+        <p:nvSpPr>
+          <p:cNvPr id="47" name="Isosceles Triangle 46"/>
+          <p:cNvSpPr/>
+          <p:nvPr/>
+        </p:nvSpPr>
+        <p:spPr>
+          <a:xfrm rot="16200000">
+            <a:off x="7111822" y="4087368"/>
+            <a:ext cx="128016" cy="128016"/>
+          </a:xfrm>
+          <a:prstGeom prst="triangle">
+            <a:avLst/>
+          </a:prstGeom>
+          <a:solidFill>
+            <a:srgbClr val="B45309"/>
+          </a:solidFill>
+          <a:ln>
+            <a:noFill/>
+          </a:ln>
+        </p:spPr>
+        <p:style>
+          <a:lnRef idx="1">
+            <a:schemeClr val="accent1"/>
+          </a:lnRef>
+          <a:fillRef idx="3">
+            <a:schemeClr val="accent1"/>
+          </a:fillRef>
+          <a:effectRef idx="2">
+            <a:schemeClr val="accent1"/>
+          </a:effectRef>
+          <a:fontRef idx="minor">
+            <a:schemeClr val="lt1"/>
+          </a:fontRef>
+        </p:style>
+        <p:txBody>
+          <a:bodyPr rtlCol="0" anchor="ctr"/>
+          <a:lstStyle/>
+          <a:p>
+            <a:pPr algn="ctr"/>
+          </a:p>
+        </p:txBody>
+      </p:sp>
+      <p:sp>
+        <p:nvSpPr>
+          <p:cNvPr id="48" name="TextBox 47"/>
+          <p:cNvSpPr txBox="1"/>
+          <p:nvPr/>
+        </p:nvSpPr>
+        <p:spPr>
+          <a:xfrm>
+            <a:off x="7294702" y="4005072"/>
+            <a:ext cx="4256913" cy="292607"/>
+          </a:xfrm>
+          <a:prstGeom prst="rect">
+            <a:avLst/>
+          </a:prstGeom>
+          <a:noFill/>
+        </p:spPr>
+        <p:txBody>
+          <a:bodyPr wrap="square" lIns="0" tIns="0" rIns="0" bIns="0">
+            <a:spAutoFit/>
+          </a:bodyPr>
+          <a:lstStyle/>
+          <a:p>
+            <a:pPr algn="l"/>
+            <a:r>
+              <a:rPr sz="1100" b="0" i="0">
+                <a:solidFill>
+                  <a:srgbClr val="FFFBEB"/>
+                </a:solidFill>
+                <a:latin typeface="Calibri"/>
+              </a:rPr>
+              <a:t>Mismatched weights cause rendering issues — validate inputs.</a:t>
+            </a:r>
+          </a:p>
+        </p:txBody>
+      </p:sp>
+    </p:spTree>
+  </p:cSld>
+  <p:clrMapOvr>
+    <a:masterClrMapping/>
+  </p:clrMapOvr>
+</p:sld>
+</file>
+
+<file path=ppt/slides/slide14.xml><?xml version="1.0" encoding="utf-8"?>
+<p:sld xmlns:a="http://schemas.openxmlformats.org/drawingml/2006/main" xmlns:p="http://schemas.openxmlformats.org/presentationml/2006/main" xmlns:r="http://schemas.openxmlformats.org/officeDocument/2006/relationships">
+  <p:cSld>
+    <p:bg>
+      <p:bgPr>
+        <a:solidFill>
+          <a:srgbClr val="0F172A"/>
+        </a:solidFill>
+        <a:effectLst/>
+      </p:bgPr>
+    </p:bg>
+    <p:spTree>
+      <p:nvGrpSpPr>
+        <p:cNvPr id="1" name=""/>
+        <p:cNvGrpSpPr/>
+        <p:nvPr/>
+      </p:nvGrpSpPr>
+      <p:grpSpPr/>
+      <p:sp>
+        <p:nvSpPr>
+          <p:cNvPr id="2" name="Rectangle 1"/>
+          <p:cNvSpPr/>
+          <p:nvPr/>
+        </p:nvSpPr>
+        <p:spPr>
+          <a:xfrm>
+            <a:off x="457200" y="457200"/>
+            <a:ext cx="45720" cy="548640"/>
+          </a:xfrm>
+          <a:prstGeom prst="rect">
+            <a:avLst/>
+          </a:prstGeom>
+          <a:solidFill>
+            <a:srgbClr val="3B82F6"/>
+          </a:solidFill>
+          <a:ln>
+            <a:noFill/>
+          </a:ln>
+        </p:spPr>
+        <p:style>
+          <a:lnRef idx="1">
+            <a:schemeClr val="accent1"/>
+          </a:lnRef>
+          <a:fillRef idx="3">
+            <a:schemeClr val="accent1"/>
+          </a:fillRef>
+          <a:effectRef idx="2">
+            <a:schemeClr val="accent1"/>
+          </a:effectRef>
+          <a:fontRef idx="minor">
+            <a:schemeClr val="lt1"/>
+          </a:fontRef>
+        </p:style>
+        <p:txBody>
+          <a:bodyPr rtlCol="0" anchor="ctr"/>
+          <a:lstStyle/>
+          <a:p>
+            <a:pPr algn="ctr"/>
+          </a:p>
+        </p:txBody>
+      </p:sp>
+      <p:sp>
+        <p:nvSpPr>
+          <p:cNvPr id="3" name="TextBox 2"/>
+          <p:cNvSpPr txBox="1"/>
+          <p:nvPr/>
+        </p:nvSpPr>
+        <p:spPr>
+          <a:xfrm>
+            <a:off x="685800" y="457200"/>
+            <a:ext cx="9375343" cy="548640"/>
+          </a:xfrm>
+          <a:prstGeom prst="rect">
+            <a:avLst/>
+          </a:prstGeom>
+          <a:noFill/>
+        </p:spPr>
+        <p:txBody>
+          <a:bodyPr wrap="square" lIns="0" tIns="0" rIns="0" bIns="0">
+            <a:spAutoFit/>
+          </a:bodyPr>
+          <a:lstStyle/>
+          <a:p>
+            <a:pPr algn="l"/>
+            <a:r>
+              <a:rPr sz="2800" b="1" i="0">
+                <a:solidFill>
+                  <a:srgbClr val="F8FAFC"/>
+                </a:solidFill>
+                <a:latin typeface="Calibri Light"/>
+              </a:rPr>
+              <a:t>Revenue Bridge — H1 2026</a:t>
+            </a:r>
+          </a:p>
+        </p:txBody>
+      </p:sp>
+      <p:sp>
+        <p:nvSpPr>
+          <p:cNvPr id="4" name="Rounded Rectangle 3"/>
+          <p:cNvSpPr/>
+          <p:nvPr/>
+        </p:nvSpPr>
+        <p:spPr>
+          <a:xfrm>
+            <a:off x="10244023" y="571500"/>
+            <a:ext cx="1490472" cy="320040"/>
+          </a:xfrm>
+          <a:prstGeom prst="roundRect">
+            <a:avLst>
+              <a:gd name="adj" fmla="val 50000"/>
+            </a:avLst>
+          </a:prstGeom>
+          <a:solidFill>
+            <a:srgbClr val="3B82F6"/>
+          </a:solidFill>
+          <a:ln>
+            <a:noFill/>
+          </a:ln>
+        </p:spPr>
+        <p:style>
+          <a:lnRef idx="1">
+            <a:schemeClr val="accent1"/>
+          </a:lnRef>
+          <a:fillRef idx="3">
+            <a:schemeClr val="accent1"/>
+          </a:fillRef>
+          <a:effectRef idx="2">
+            <a:schemeClr val="accent1"/>
+          </a:effectRef>
+          <a:fontRef idx="minor">
+            <a:schemeClr val="lt1"/>
+          </a:fontRef>
+        </p:style>
+        <p:txBody>
+          <a:bodyPr rtlCol="0" anchor="ctr" wrap="none"/>
+          <a:lstStyle/>
+          <a:p>
+            <a:pPr algn="ctr"/>
+            <a:r>
+              <a:rPr sz="1100" b="1">
+                <a:solidFill>
+                  <a:srgbClr val="FFFFFF"/>
+                </a:solidFill>
+                <a:latin typeface="Calibri"/>
+              </a:rPr>
+              <a:t>WaterfallChart</a:t>
+            </a:r>
+          </a:p>
+        </p:txBody>
+      </p:sp>
+      <p:sp>
+        <p:nvSpPr>
+          <p:cNvPr id="5" name="TextBox 4"/>
+          <p:cNvSpPr txBox="1"/>
+          <p:nvPr/>
+        </p:nvSpPr>
+        <p:spPr>
+          <a:xfrm>
+            <a:off x="457200" y="1280160"/>
+            <a:ext cx="11277295" cy="320040"/>
+          </a:xfrm>
+          <a:prstGeom prst="rect">
+            <a:avLst/>
+          </a:prstGeom>
+          <a:noFill/>
+        </p:spPr>
+        <p:txBody>
+          <a:bodyPr wrap="square" lIns="0" tIns="0" rIns="0" bIns="0">
+            <a:spAutoFit/>
+          </a:bodyPr>
+          <a:lstStyle/>
+          <a:p>
+            <a:pPr algn="l"/>
+            <a:r>
+              <a:rPr sz="2000" b="1" i="0">
+                <a:solidFill>
+                  <a:srgbClr val="F8FAFC"/>
+                </a:solidFill>
+                <a:latin typeface="Calibri Light"/>
+              </a:rPr>
+              <a:t>Revenue Contribution by Category ($K)</a:t>
+            </a:r>
+          </a:p>
+        </p:txBody>
+      </p:sp>
+      <p:sp>
+        <p:nvSpPr>
+          <p:cNvPr id="6" name="Rectangle 5"/>
+          <p:cNvSpPr/>
+          <p:nvPr/>
+        </p:nvSpPr>
+        <p:spPr>
+          <a:xfrm>
+            <a:off x="457200" y="4677155"/>
+            <a:ext cx="11277295" cy="9144"/>
+          </a:xfrm>
+          <a:prstGeom prst="rect">
+            <a:avLst/>
+          </a:prstGeom>
+          <a:solidFill>
+            <a:srgbClr val="334155"/>
+          </a:solidFill>
+          <a:ln>
+            <a:noFill/>
+          </a:ln>
+        </p:spPr>
+        <p:style>
+          <a:lnRef idx="1">
+            <a:schemeClr val="accent1"/>
+          </a:lnRef>
+          <a:fillRef idx="3">
+            <a:schemeClr val="accent1"/>
+          </a:fillRef>
+          <a:effectRef idx="2">
+            <a:schemeClr val="accent1"/>
+          </a:effectRef>
+          <a:fontRef idx="minor">
+            <a:schemeClr val="lt1"/>
+          </a:fontRef>
+        </p:style>
+        <p:txBody>
+          <a:bodyPr rtlCol="0" anchor="ctr"/>
+          <a:lstStyle/>
+          <a:p>
+            <a:pPr algn="ctr"/>
+          </a:p>
+        </p:txBody>
+      </p:sp>
+      <p:sp>
+        <p:nvSpPr>
+          <p:cNvPr id="7" name="Rounded Rectangle 6"/>
+          <p:cNvSpPr/>
+          <p:nvPr/>
+        </p:nvSpPr>
+        <p:spPr>
+          <a:xfrm>
+            <a:off x="457200" y="2674957"/>
+            <a:ext cx="1564015" cy="2006770"/>
+          </a:xfrm>
+          <a:prstGeom prst="roundRect">
+            <a:avLst>
+              <a:gd name="adj" fmla="val 1169"/>
+            </a:avLst>
+          </a:prstGeom>
+          <a:solidFill>
+            <a:srgbClr val="22C55E"/>
+          </a:solidFill>
+          <a:ln>
+            <a:noFill/>
+          </a:ln>
+        </p:spPr>
+        <p:style>
+          <a:lnRef idx="1">
+            <a:schemeClr val="accent1"/>
+          </a:lnRef>
+          <a:fillRef idx="3">
+            <a:schemeClr val="accent1"/>
+          </a:fillRef>
+          <a:effectRef idx="2">
+            <a:schemeClr val="accent1"/>
+          </a:effectRef>
+          <a:fontRef idx="minor">
+            <a:schemeClr val="lt1"/>
+          </a:fontRef>
+        </p:style>
+        <p:txBody>
+          <a:bodyPr rtlCol="0" anchor="ctr"/>
+          <a:lstStyle/>
+          <a:p>
+            <a:pPr algn="ctr"/>
+          </a:p>
+        </p:txBody>
+      </p:sp>
+      <p:sp>
+        <p:nvSpPr>
+          <p:cNvPr id="8" name="TextBox 7"/>
+          <p:cNvSpPr txBox="1"/>
+          <p:nvPr/>
+        </p:nvSpPr>
+        <p:spPr>
+          <a:xfrm>
+            <a:off x="457200" y="2455501"/>
+            <a:ext cx="1564015" cy="201168"/>
+          </a:xfrm>
+          <a:prstGeom prst="rect">
+            <a:avLst/>
+          </a:prstGeom>
+          <a:noFill/>
+        </p:spPr>
+        <p:txBody>
+          <a:bodyPr wrap="square" lIns="0" tIns="0" rIns="0" bIns="0">
+            <a:spAutoFit/>
+          </a:bodyPr>
+          <a:lstStyle/>
+          <a:p>
+            <a:pPr algn="ctr"/>
+            <a:r>
+              <a:rPr sz="1100" b="1" i="0">
+                <a:solidFill>
+                  <a:srgbClr val="22C55E"/>
+                </a:solidFill>
+                <a:latin typeface="Calibri"/>
+              </a:rPr>
+              <a:t>+500</a:t>
+            </a:r>
+          </a:p>
+        </p:txBody>
+      </p:sp>
+      <p:sp>
+        <p:nvSpPr>
+          <p:cNvPr id="9" name="TextBox 8"/>
+          <p:cNvSpPr txBox="1"/>
+          <p:nvPr/>
+        </p:nvSpPr>
+        <p:spPr>
+          <a:xfrm>
+            <a:off x="457200" y="4736591"/>
+            <a:ext cx="1564015" cy="256032"/>
+          </a:xfrm>
+          <a:prstGeom prst="rect">
+            <a:avLst/>
+          </a:prstGeom>
+          <a:noFill/>
+        </p:spPr>
+        <p:txBody>
+          <a:bodyPr wrap="square" lIns="0" tIns="0" rIns="0" bIns="0">
+            <a:spAutoFit/>
+          </a:bodyPr>
+          <a:lstStyle/>
+          <a:p>
+            <a:pPr algn="ctr"/>
+            <a:r>
+              <a:rPr sz="1100" b="0" i="0">
+                <a:solidFill>
+                  <a:srgbClr val="CBD5E1"/>
+                </a:solidFill>
+                <a:latin typeface="Calibri"/>
+              </a:rPr>
+              <a:t>Base</a:t>
+            </a:r>
+          </a:p>
+        </p:txBody>
+      </p:sp>
+      <p:sp>
+        <p:nvSpPr>
+          <p:cNvPr id="10" name="Rounded Rectangle 9"/>
+          <p:cNvSpPr/>
+          <p:nvPr/>
+        </p:nvSpPr>
+        <p:spPr>
+          <a:xfrm>
+            <a:off x="2076079" y="2193332"/>
+            <a:ext cx="1564015" cy="481624"/>
+          </a:xfrm>
+          <a:prstGeom prst="roundRect">
+            <a:avLst>
+              <a:gd name="adj" fmla="val 3796"/>
+            </a:avLst>
+          </a:prstGeom>
+          <a:solidFill>
+            <a:srgbClr val="22C55E"/>
+          </a:solidFill>
+          <a:ln>
+            <a:noFill/>
+          </a:ln>
+        </p:spPr>
+        <p:style>
+          <a:lnRef idx="1">
+            <a:schemeClr val="accent1"/>
+          </a:lnRef>
+          <a:fillRef idx="3">
+            <a:schemeClr val="accent1"/>
+          </a:fillRef>
+          <a:effectRef idx="2">
+            <a:schemeClr val="accent1"/>
+          </a:effectRef>
+          <a:fontRef idx="minor">
+            <a:schemeClr val="lt1"/>
+          </a:fontRef>
+        </p:style>
+        <p:txBody>
+          <a:bodyPr rtlCol="0" anchor="ctr"/>
+          <a:lstStyle/>
+          <a:p>
+            <a:pPr algn="ctr"/>
+          </a:p>
+        </p:txBody>
+      </p:sp>
+      <p:sp>
+        <p:nvSpPr>
+          <p:cNvPr id="11" name="Rectangle 10"/>
+          <p:cNvSpPr/>
+          <p:nvPr/>
+        </p:nvSpPr>
+        <p:spPr>
+          <a:xfrm>
+            <a:off x="2021215" y="2670385"/>
+            <a:ext cx="54864" cy="9144"/>
+          </a:xfrm>
+          <a:prstGeom prst="rect">
+            <a:avLst/>
+          </a:prstGeom>
+          <a:solidFill>
+            <a:srgbClr val="94A3B8"/>
+          </a:solidFill>
+          <a:ln>
+            <a:noFill/>
+          </a:ln>
+        </p:spPr>
+        <p:style>
+          <a:lnRef idx="1">
+            <a:schemeClr val="accent1"/>
+          </a:lnRef>
+          <a:fillRef idx="3">
+            <a:schemeClr val="accent1"/>
+          </a:fillRef>
+          <a:effectRef idx="2">
+            <a:schemeClr val="accent1"/>
+          </a:effectRef>
+          <a:fontRef idx="minor">
+            <a:schemeClr val="lt1"/>
+          </a:fontRef>
+        </p:style>
+        <p:txBody>
+          <a:bodyPr rtlCol="0" anchor="ctr"/>
+          <a:lstStyle/>
+          <a:p>
+            <a:pPr algn="ctr"/>
+          </a:p>
+        </p:txBody>
+      </p:sp>
+      <p:sp>
+        <p:nvSpPr>
+          <p:cNvPr id="12" name="TextBox 11"/>
+          <p:cNvSpPr txBox="1"/>
+          <p:nvPr/>
+        </p:nvSpPr>
+        <p:spPr>
+          <a:xfrm>
+            <a:off x="2076079" y="1973876"/>
+            <a:ext cx="1564015" cy="201168"/>
+          </a:xfrm>
+          <a:prstGeom prst="rect">
+            <a:avLst/>
+          </a:prstGeom>
+          <a:noFill/>
+        </p:spPr>
+        <p:txBody>
+          <a:bodyPr wrap="square" lIns="0" tIns="0" rIns="0" bIns="0">
+            <a:spAutoFit/>
+          </a:bodyPr>
+          <a:lstStyle/>
+          <a:p>
+            <a:pPr algn="ctr"/>
+            <a:r>
+              <a:rPr sz="1100" b="1" i="0">
+                <a:solidFill>
+                  <a:srgbClr val="22C55E"/>
+                </a:solidFill>
+                <a:latin typeface="Calibri"/>
+              </a:rPr>
+              <a:t>+120</a:t>
+            </a:r>
+          </a:p>
+        </p:txBody>
+      </p:sp>
+      <p:sp>
+        <p:nvSpPr>
+          <p:cNvPr id="13" name="TextBox 12"/>
+          <p:cNvSpPr txBox="1"/>
+          <p:nvPr/>
+        </p:nvSpPr>
+        <p:spPr>
+          <a:xfrm>
+            <a:off x="2076079" y="4736591"/>
+            <a:ext cx="1564015" cy="256032"/>
+          </a:xfrm>
+          <a:prstGeom prst="rect">
+            <a:avLst/>
+          </a:prstGeom>
+          <a:noFill/>
+        </p:spPr>
+        <p:txBody>
+          <a:bodyPr wrap="square" lIns="0" tIns="0" rIns="0" bIns="0">
+            <a:spAutoFit/>
+          </a:bodyPr>
+          <a:lstStyle/>
+          <a:p>
+            <a:pPr algn="ctr"/>
+            <a:r>
+              <a:rPr sz="1100" b="0" i="0">
+                <a:solidFill>
+                  <a:srgbClr val="CBD5E1"/>
+                </a:solidFill>
+                <a:latin typeface="Calibri"/>
+              </a:rPr>
+              <a:t>New Logos</a:t>
+            </a:r>
+          </a:p>
+        </p:txBody>
+      </p:sp>
+      <p:sp>
+        <p:nvSpPr>
+          <p:cNvPr id="14" name="Rounded Rectangle 13"/>
+          <p:cNvSpPr/>
+          <p:nvPr/>
+        </p:nvSpPr>
+        <p:spPr>
+          <a:xfrm>
+            <a:off x="3694959" y="1852181"/>
+            <a:ext cx="1564015" cy="341150"/>
+          </a:xfrm>
+          <a:prstGeom prst="roundRect">
+            <a:avLst>
+              <a:gd name="adj" fmla="val 5360"/>
+            </a:avLst>
+          </a:prstGeom>
+          <a:solidFill>
+            <a:srgbClr val="22C55E"/>
+          </a:solidFill>
+          <a:ln>
+            <a:noFill/>
+          </a:ln>
+        </p:spPr>
+        <p:style>
+          <a:lnRef idx="1">
+            <a:schemeClr val="accent1"/>
+          </a:lnRef>
+          <a:fillRef idx="3">
+            <a:schemeClr val="accent1"/>
+          </a:fillRef>
+          <a:effectRef idx="2">
+            <a:schemeClr val="accent1"/>
+          </a:effectRef>
+          <a:fontRef idx="minor">
+            <a:schemeClr val="lt1"/>
+          </a:fontRef>
+        </p:style>
+        <p:txBody>
+          <a:bodyPr rtlCol="0" anchor="ctr"/>
+          <a:lstStyle/>
+          <a:p>
+            <a:pPr algn="ctr"/>
+          </a:p>
+        </p:txBody>
+      </p:sp>
+      <p:sp>
+        <p:nvSpPr>
+          <p:cNvPr id="15" name="Rectangle 14"/>
+          <p:cNvSpPr/>
+          <p:nvPr/>
+        </p:nvSpPr>
+        <p:spPr>
+          <a:xfrm>
+            <a:off x="3640095" y="2188760"/>
+            <a:ext cx="54864" cy="9144"/>
+          </a:xfrm>
+          <a:prstGeom prst="rect">
+            <a:avLst/>
+          </a:prstGeom>
+          <a:solidFill>
+            <a:srgbClr val="94A3B8"/>
+          </a:solidFill>
+          <a:ln>
+            <a:noFill/>
+          </a:ln>
+        </p:spPr>
+        <p:style>
+          <a:lnRef idx="1">
+            <a:schemeClr val="accent1"/>
+          </a:lnRef>
+          <a:fillRef idx="3">
+            <a:schemeClr val="accent1"/>
+          </a:fillRef>
+          <a:effectRef idx="2">
+            <a:schemeClr val="accent1"/>
+          </a:effectRef>
+          <a:fontRef idx="minor">
+            <a:schemeClr val="lt1"/>
+          </a:fontRef>
+        </p:style>
+        <p:txBody>
+          <a:bodyPr rtlCol="0" anchor="ctr"/>
+          <a:lstStyle/>
+          <a:p>
+            <a:pPr algn="ctr"/>
+          </a:p>
+        </p:txBody>
+      </p:sp>
+      <p:sp>
+        <p:nvSpPr>
+          <p:cNvPr id="16" name="TextBox 15"/>
+          <p:cNvSpPr txBox="1"/>
+          <p:nvPr/>
+        </p:nvSpPr>
+        <p:spPr>
+          <a:xfrm>
+            <a:off x="3694959" y="2220764"/>
+            <a:ext cx="1564015" cy="201168"/>
+          </a:xfrm>
+          <a:prstGeom prst="rect">
+            <a:avLst/>
+          </a:prstGeom>
+          <a:noFill/>
+        </p:spPr>
+        <p:txBody>
+          <a:bodyPr wrap="square" lIns="0" tIns="0" rIns="0" bIns="0">
+            <a:spAutoFit/>
+          </a:bodyPr>
+          <a:lstStyle/>
+          <a:p>
+            <a:pPr algn="ctr"/>
+            <a:r>
+              <a:rPr sz="1100" b="1" i="0">
+                <a:solidFill>
+                  <a:srgbClr val="22C55E"/>
+                </a:solidFill>
+                <a:latin typeface="Calibri"/>
+              </a:rPr>
+              <a:t>+85</a:t>
+            </a:r>
+          </a:p>
+        </p:txBody>
+      </p:sp>
+      <p:sp>
+        <p:nvSpPr>
+          <p:cNvPr id="17" name="TextBox 16"/>
+          <p:cNvSpPr txBox="1"/>
+          <p:nvPr/>
+        </p:nvSpPr>
+        <p:spPr>
+          <a:xfrm>
+            <a:off x="3694959" y="4736591"/>
+            <a:ext cx="1564015" cy="256032"/>
+          </a:xfrm>
+          <a:prstGeom prst="rect">
+            <a:avLst/>
+          </a:prstGeom>
+          <a:noFill/>
+        </p:spPr>
+        <p:txBody>
+          <a:bodyPr wrap="square" lIns="0" tIns="0" rIns="0" bIns="0">
+            <a:spAutoFit/>
+          </a:bodyPr>
+          <a:lstStyle/>
+          <a:p>
+            <a:pPr algn="ctr"/>
+            <a:r>
+              <a:rPr sz="1100" b="0" i="0">
+                <a:solidFill>
+                  <a:srgbClr val="CBD5E1"/>
+                </a:solidFill>
+                <a:latin typeface="Calibri"/>
+              </a:rPr>
+              <a:t>Upsell</a:t>
+            </a:r>
+          </a:p>
+        </p:txBody>
+      </p:sp>
+      <p:sp>
+        <p:nvSpPr>
+          <p:cNvPr id="18" name="Rounded Rectangle 17"/>
+          <p:cNvSpPr/>
+          <p:nvPr/>
+        </p:nvSpPr>
+        <p:spPr>
+          <a:xfrm>
+            <a:off x="5313839" y="1691640"/>
+            <a:ext cx="1564015" cy="160541"/>
+          </a:xfrm>
+          <a:prstGeom prst="roundRect">
+            <a:avLst>
+              <a:gd name="adj" fmla="val 11391"/>
+            </a:avLst>
+          </a:prstGeom>
+          <a:solidFill>
+            <a:srgbClr val="22C55E"/>
+          </a:solidFill>
+          <a:ln>
+            <a:noFill/>
+          </a:ln>
+        </p:spPr>
+        <p:style>
+          <a:lnRef idx="1">
+            <a:schemeClr val="accent1"/>
+          </a:lnRef>
+          <a:fillRef idx="3">
+            <a:schemeClr val="accent1"/>
+          </a:fillRef>
+          <a:effectRef idx="2">
+            <a:schemeClr val="accent1"/>
+          </a:effectRef>
+          <a:fontRef idx="minor">
+            <a:schemeClr val="lt1"/>
+          </a:fontRef>
+        </p:style>
+        <p:txBody>
+          <a:bodyPr rtlCol="0" anchor="ctr"/>
+          <a:lstStyle/>
+          <a:p>
+            <a:pPr algn="ctr"/>
+          </a:p>
+        </p:txBody>
+      </p:sp>
+      <p:sp>
+        <p:nvSpPr>
+          <p:cNvPr id="19" name="Rectangle 18"/>
+          <p:cNvSpPr/>
+          <p:nvPr/>
+        </p:nvSpPr>
+        <p:spPr>
+          <a:xfrm>
+            <a:off x="5258975" y="1847609"/>
+            <a:ext cx="54864" cy="9144"/>
+          </a:xfrm>
+          <a:prstGeom prst="rect">
+            <a:avLst/>
+          </a:prstGeom>
+          <a:solidFill>
+            <a:srgbClr val="94A3B8"/>
+          </a:solidFill>
+          <a:ln>
+            <a:noFill/>
+          </a:ln>
+        </p:spPr>
+        <p:style>
+          <a:lnRef idx="1">
+            <a:schemeClr val="accent1"/>
+          </a:lnRef>
+          <a:fillRef idx="3">
+            <a:schemeClr val="accent1"/>
+          </a:fillRef>
+          <a:effectRef idx="2">
+            <a:schemeClr val="accent1"/>
+          </a:effectRef>
+          <a:fontRef idx="minor">
+            <a:schemeClr val="lt1"/>
+          </a:fontRef>
+        </p:style>
+        <p:txBody>
+          <a:bodyPr rtlCol="0" anchor="ctr"/>
+          <a:lstStyle/>
+          <a:p>
+            <a:pPr algn="ctr"/>
+          </a:p>
+        </p:txBody>
+      </p:sp>
+      <p:sp>
+        <p:nvSpPr>
+          <p:cNvPr id="20" name="TextBox 19"/>
+          <p:cNvSpPr txBox="1"/>
+          <p:nvPr/>
+        </p:nvSpPr>
+        <p:spPr>
+          <a:xfrm>
+            <a:off x="5313839" y="1879613"/>
+            <a:ext cx="1564015" cy="201168"/>
+          </a:xfrm>
+          <a:prstGeom prst="rect">
+            <a:avLst/>
+          </a:prstGeom>
+          <a:noFill/>
+        </p:spPr>
+        <p:txBody>
+          <a:bodyPr wrap="square" lIns="0" tIns="0" rIns="0" bIns="0">
+            <a:spAutoFit/>
+          </a:bodyPr>
+          <a:lstStyle/>
+          <a:p>
+            <a:pPr algn="ctr"/>
+            <a:r>
+              <a:rPr sz="1100" b="1" i="0">
+                <a:solidFill>
+                  <a:srgbClr val="22C55E"/>
+                </a:solidFill>
+                <a:latin typeface="Calibri"/>
+              </a:rPr>
+              <a:t>+40</a:t>
+            </a:r>
+          </a:p>
+        </p:txBody>
+      </p:sp>
+      <p:sp>
+        <p:nvSpPr>
+          <p:cNvPr id="21" name="TextBox 20"/>
+          <p:cNvSpPr txBox="1"/>
+          <p:nvPr/>
+        </p:nvSpPr>
+        <p:spPr>
+          <a:xfrm>
+            <a:off x="5313839" y="4736591"/>
+            <a:ext cx="1564015" cy="256032"/>
+          </a:xfrm>
+          <a:prstGeom prst="rect">
+            <a:avLst/>
+          </a:prstGeom>
+          <a:noFill/>
+        </p:spPr>
+        <p:txBody>
+          <a:bodyPr wrap="square" lIns="0" tIns="0" rIns="0" bIns="0">
+            <a:spAutoFit/>
+          </a:bodyPr>
+          <a:lstStyle/>
+          <a:p>
+            <a:pPr algn="ctr"/>
+            <a:r>
+              <a:rPr sz="1100" b="0" i="0">
+                <a:solidFill>
+                  <a:srgbClr val="CBD5E1"/>
+                </a:solidFill>
+                <a:latin typeface="Calibri"/>
+              </a:rPr>
+              <a:t>Expansion</a:t>
+            </a:r>
+          </a:p>
+        </p:txBody>
+      </p:sp>
+      <p:sp>
+        <p:nvSpPr>
+          <p:cNvPr id="22" name="Rounded Rectangle 21"/>
+          <p:cNvSpPr/>
+          <p:nvPr/>
+        </p:nvSpPr>
+        <p:spPr>
+          <a:xfrm>
+            <a:off x="6932719" y="1691640"/>
+            <a:ext cx="1564015" cy="240812"/>
+          </a:xfrm>
+          <a:prstGeom prst="roundRect">
+            <a:avLst>
+              <a:gd name="adj" fmla="val 7593"/>
+            </a:avLst>
+          </a:prstGeom>
+          <a:solidFill>
+            <a:srgbClr val="EF4444"/>
+          </a:solidFill>
+          <a:ln>
+            <a:noFill/>
+          </a:ln>
+        </p:spPr>
+        <p:style>
+          <a:lnRef idx="1">
+            <a:schemeClr val="accent1"/>
+          </a:lnRef>
+          <a:fillRef idx="3">
+            <a:schemeClr val="accent1"/>
+          </a:fillRef>
+          <a:effectRef idx="2">
+            <a:schemeClr val="accent1"/>
+          </a:effectRef>
+          <a:fontRef idx="minor">
+            <a:schemeClr val="lt1"/>
+          </a:fontRef>
+        </p:style>
+        <p:txBody>
+          <a:bodyPr rtlCol="0" anchor="ctr"/>
+          <a:lstStyle/>
+          <a:p>
+            <a:pPr algn="ctr"/>
+          </a:p>
+        </p:txBody>
+      </p:sp>
+      <p:sp>
+        <p:nvSpPr>
+          <p:cNvPr id="23" name="Rectangle 22"/>
+          <p:cNvSpPr/>
+          <p:nvPr/>
+        </p:nvSpPr>
+        <p:spPr>
+          <a:xfrm>
+            <a:off x="6877855" y="1687068"/>
+            <a:ext cx="54864" cy="9144"/>
+          </a:xfrm>
+          <a:prstGeom prst="rect">
+            <a:avLst/>
+          </a:prstGeom>
+          <a:solidFill>
+            <a:srgbClr val="94A3B8"/>
+          </a:solidFill>
+          <a:ln>
+            <a:noFill/>
+          </a:ln>
+        </p:spPr>
+        <p:style>
+          <a:lnRef idx="1">
+            <a:schemeClr val="accent1"/>
+          </a:lnRef>
+          <a:fillRef idx="3">
+            <a:schemeClr val="accent1"/>
+          </a:fillRef>
+          <a:effectRef idx="2">
+            <a:schemeClr val="accent1"/>
+          </a:effectRef>
+          <a:fontRef idx="minor">
+            <a:schemeClr val="lt1"/>
+          </a:fontRef>
+        </p:style>
+        <p:txBody>
+          <a:bodyPr rtlCol="0" anchor="ctr"/>
+          <a:lstStyle/>
+          <a:p>
+            <a:pPr algn="ctr"/>
+          </a:p>
+        </p:txBody>
+      </p:sp>
+      <p:sp>
+        <p:nvSpPr>
+          <p:cNvPr id="24" name="TextBox 23"/>
+          <p:cNvSpPr txBox="1"/>
+          <p:nvPr/>
+        </p:nvSpPr>
+        <p:spPr>
+          <a:xfrm>
+            <a:off x="6932719" y="1959884"/>
+            <a:ext cx="1564015" cy="201168"/>
+          </a:xfrm>
+          <a:prstGeom prst="rect">
+            <a:avLst/>
+          </a:prstGeom>
+          <a:noFill/>
+        </p:spPr>
+        <p:txBody>
+          <a:bodyPr wrap="square" lIns="0" tIns="0" rIns="0" bIns="0">
+            <a:spAutoFit/>
+          </a:bodyPr>
+          <a:lstStyle/>
+          <a:p>
+            <a:pPr algn="ctr"/>
+            <a:r>
+              <a:rPr sz="1100" b="1" i="0">
+                <a:solidFill>
+                  <a:srgbClr val="EF4444"/>
+                </a:solidFill>
+                <a:latin typeface="Calibri"/>
+              </a:rPr>
+              <a:t>-60</a:t>
+            </a:r>
+          </a:p>
+        </p:txBody>
+      </p:sp>
+      <p:sp>
+        <p:nvSpPr>
+          <p:cNvPr id="25" name="TextBox 24"/>
+          <p:cNvSpPr txBox="1"/>
+          <p:nvPr/>
+        </p:nvSpPr>
+        <p:spPr>
+          <a:xfrm>
+            <a:off x="6932719" y="4736591"/>
+            <a:ext cx="1564015" cy="256032"/>
+          </a:xfrm>
+          <a:prstGeom prst="rect">
+            <a:avLst/>
+          </a:prstGeom>
+          <a:noFill/>
+        </p:spPr>
+        <p:txBody>
+          <a:bodyPr wrap="square" lIns="0" tIns="0" rIns="0" bIns="0">
+            <a:spAutoFit/>
+          </a:bodyPr>
+          <a:lstStyle/>
+          <a:p>
+            <a:pPr algn="ctr"/>
+            <a:r>
+              <a:rPr sz="1100" b="0" i="0">
+                <a:solidFill>
+                  <a:srgbClr val="CBD5E1"/>
+                </a:solidFill>
+                <a:latin typeface="Calibri"/>
+              </a:rPr>
+              <a:t>Churn</a:t>
+            </a:r>
+          </a:p>
+        </p:txBody>
+      </p:sp>
+      <p:sp>
+        <p:nvSpPr>
+          <p:cNvPr id="26" name="Rounded Rectangle 25"/>
+          <p:cNvSpPr/>
+          <p:nvPr/>
+        </p:nvSpPr>
+        <p:spPr>
+          <a:xfrm>
+            <a:off x="8551599" y="1932452"/>
+            <a:ext cx="1564015" cy="140473"/>
+          </a:xfrm>
+          <a:prstGeom prst="roundRect">
+            <a:avLst>
+              <a:gd name="adj" fmla="val 13017"/>
+            </a:avLst>
+          </a:prstGeom>
+          <a:solidFill>
+            <a:srgbClr val="EF4444"/>
+          </a:solidFill>
+          <a:ln>
+            <a:noFill/>
+          </a:ln>
+        </p:spPr>
+        <p:style>
+          <a:lnRef idx="1">
+            <a:schemeClr val="accent1"/>
+          </a:lnRef>
+          <a:fillRef idx="3">
+            <a:schemeClr val="accent1"/>
+          </a:fillRef>
+          <a:effectRef idx="2">
+            <a:schemeClr val="accent1"/>
+          </a:effectRef>
+          <a:fontRef idx="minor">
+            <a:schemeClr val="lt1"/>
+          </a:fontRef>
+        </p:style>
+        <p:txBody>
+          <a:bodyPr rtlCol="0" anchor="ctr"/>
+          <a:lstStyle/>
+          <a:p>
+            <a:pPr algn="ctr"/>
+          </a:p>
+        </p:txBody>
+      </p:sp>
+      <p:sp>
+        <p:nvSpPr>
+          <p:cNvPr id="27" name="Rectangle 26"/>
+          <p:cNvSpPr/>
+          <p:nvPr/>
+        </p:nvSpPr>
+        <p:spPr>
+          <a:xfrm>
+            <a:off x="8496735" y="1927880"/>
+            <a:ext cx="54864" cy="9144"/>
+          </a:xfrm>
+          <a:prstGeom prst="rect">
+            <a:avLst/>
+          </a:prstGeom>
+          <a:solidFill>
+            <a:srgbClr val="94A3B8"/>
+          </a:solidFill>
+          <a:ln>
+            <a:noFill/>
+          </a:ln>
+        </p:spPr>
+        <p:style>
+          <a:lnRef idx="1">
+            <a:schemeClr val="accent1"/>
+          </a:lnRef>
+          <a:fillRef idx="3">
+            <a:schemeClr val="accent1"/>
+          </a:fillRef>
+          <a:effectRef idx="2">
+            <a:schemeClr val="accent1"/>
+          </a:effectRef>
+          <a:fontRef idx="minor">
+            <a:schemeClr val="lt1"/>
+          </a:fontRef>
+        </p:style>
+        <p:txBody>
+          <a:bodyPr rtlCol="0" anchor="ctr"/>
+          <a:lstStyle/>
+          <a:p>
+            <a:pPr algn="ctr"/>
+          </a:p>
+        </p:txBody>
+      </p:sp>
+      <p:sp>
+        <p:nvSpPr>
+          <p:cNvPr id="28" name="TextBox 27"/>
+          <p:cNvSpPr txBox="1"/>
+          <p:nvPr/>
+        </p:nvSpPr>
+        <p:spPr>
+          <a:xfrm>
+            <a:off x="8551599" y="1712996"/>
+            <a:ext cx="1564015" cy="201168"/>
+          </a:xfrm>
+          <a:prstGeom prst="rect">
+            <a:avLst/>
+          </a:prstGeom>
+          <a:noFill/>
+        </p:spPr>
+        <p:txBody>
+          <a:bodyPr wrap="square" lIns="0" tIns="0" rIns="0" bIns="0">
+            <a:spAutoFit/>
+          </a:bodyPr>
+          <a:lstStyle/>
+          <a:p>
+            <a:pPr algn="ctr"/>
+            <a:r>
+              <a:rPr sz="1100" b="1" i="0">
+                <a:solidFill>
+                  <a:srgbClr val="EF4444"/>
+                </a:solidFill>
+                <a:latin typeface="Calibri"/>
+              </a:rPr>
+              <a:t>-35</a:t>
+            </a:r>
+          </a:p>
+        </p:txBody>
+      </p:sp>
+      <p:sp>
+        <p:nvSpPr>
+          <p:cNvPr id="29" name="TextBox 28"/>
+          <p:cNvSpPr txBox="1"/>
+          <p:nvPr/>
+        </p:nvSpPr>
+        <p:spPr>
+          <a:xfrm>
+            <a:off x="8551599" y="4736591"/>
+            <a:ext cx="1564015" cy="256032"/>
+          </a:xfrm>
+          <a:prstGeom prst="rect">
+            <a:avLst/>
+          </a:prstGeom>
+          <a:noFill/>
+        </p:spPr>
+        <p:txBody>
+          <a:bodyPr wrap="square" lIns="0" tIns="0" rIns="0" bIns="0">
+            <a:spAutoFit/>
+          </a:bodyPr>
+          <a:lstStyle/>
+          <a:p>
+            <a:pPr algn="ctr"/>
+            <a:r>
+              <a:rPr sz="1100" b="0" i="0">
+                <a:solidFill>
+                  <a:srgbClr val="CBD5E1"/>
+                </a:solidFill>
+                <a:latin typeface="Calibri"/>
+              </a:rPr>
+              <a:t>Discounts</a:t>
+            </a:r>
+          </a:p>
+        </p:txBody>
+      </p:sp>
+      <p:sp>
+        <p:nvSpPr>
+          <p:cNvPr id="30" name="Rounded Rectangle 29"/>
+          <p:cNvSpPr/>
+          <p:nvPr/>
+        </p:nvSpPr>
+        <p:spPr>
+          <a:xfrm>
+            <a:off x="10170479" y="2072926"/>
+            <a:ext cx="1564015" cy="2608801"/>
+          </a:xfrm>
+          <a:prstGeom prst="roundRect">
+            <a:avLst>
+              <a:gd name="adj" fmla="val 1169"/>
+            </a:avLst>
+          </a:prstGeom>
+          <a:solidFill>
+            <a:srgbClr val="3B82F6"/>
+          </a:solidFill>
+          <a:ln>
+            <a:noFill/>
+          </a:ln>
+        </p:spPr>
+        <p:style>
+          <a:lnRef idx="1">
+            <a:schemeClr val="accent1"/>
+          </a:lnRef>
+          <a:fillRef idx="3">
+            <a:schemeClr val="accent1"/>
+          </a:fillRef>
+          <a:effectRef idx="2">
+            <a:schemeClr val="accent1"/>
+          </a:effectRef>
+          <a:fontRef idx="minor">
+            <a:schemeClr val="lt1"/>
+          </a:fontRef>
+        </p:style>
+        <p:txBody>
+          <a:bodyPr rtlCol="0" anchor="ctr"/>
+          <a:lstStyle/>
+          <a:p>
+            <a:pPr algn="ctr"/>
+          </a:p>
+        </p:txBody>
+      </p:sp>
+      <p:sp>
+        <p:nvSpPr>
+          <p:cNvPr id="31" name="TextBox 30"/>
+          <p:cNvSpPr txBox="1"/>
+          <p:nvPr/>
+        </p:nvSpPr>
+        <p:spPr>
+          <a:xfrm>
+            <a:off x="10170479" y="1853470"/>
+            <a:ext cx="1564015" cy="201168"/>
+          </a:xfrm>
+          <a:prstGeom prst="rect">
+            <a:avLst/>
+          </a:prstGeom>
+          <a:noFill/>
+        </p:spPr>
+        <p:txBody>
+          <a:bodyPr wrap="square" lIns="0" tIns="0" rIns="0" bIns="0">
+            <a:spAutoFit/>
+          </a:bodyPr>
+          <a:lstStyle/>
+          <a:p>
+            <a:pPr algn="ctr"/>
+            <a:r>
+              <a:rPr sz="1100" b="1" i="0">
+                <a:solidFill>
+                  <a:srgbClr val="3B82F6"/>
+                </a:solidFill>
+                <a:latin typeface="Calibri"/>
+              </a:rPr>
+              <a:t>650</a:t>
+            </a:r>
+          </a:p>
+        </p:txBody>
+      </p:sp>
+      <p:sp>
+        <p:nvSpPr>
+          <p:cNvPr id="32" name="TextBox 31"/>
+          <p:cNvSpPr txBox="1"/>
+          <p:nvPr/>
+        </p:nvSpPr>
+        <p:spPr>
+          <a:xfrm>
+            <a:off x="10170479" y="4736591"/>
+            <a:ext cx="1564015" cy="256032"/>
+          </a:xfrm>
+          <a:prstGeom prst="rect">
+            <a:avLst/>
+          </a:prstGeom>
+          <a:noFill/>
+        </p:spPr>
+        <p:txBody>
+          <a:bodyPr wrap="square" lIns="0" tIns="0" rIns="0" bIns="0">
+            <a:spAutoFit/>
+          </a:bodyPr>
+          <a:lstStyle/>
+          <a:p>
+            <a:pPr algn="ctr"/>
+            <a:r>
+              <a:rPr sz="1100" b="0" i="0">
+                <a:solidFill>
+                  <a:srgbClr val="CBD5E1"/>
+                </a:solidFill>
+                <a:latin typeface="Calibri"/>
+              </a:rPr>
+              <a:t>Net Revenue</a:t>
+            </a:r>
+          </a:p>
+        </p:txBody>
+      </p:sp>
     </p:spTree>
   </p:cSld>
   <p:clrMapOvr>

--- a/examples/demo_dark.pptx
+++ b/examples/demo_dark.pptx
@@ -19,6 +19,10 @@
     <p:sldId id="267" r:id="rId18"/>
     <p:sldId id="268" r:id="rId19"/>
     <p:sldId id="269" r:id="rId20"/>
+    <p:sldId id="270" r:id="rId21"/>
+    <p:sldId id="271" r:id="rId22"/>
+    <p:sldId id="272" r:id="rId23"/>
+    <p:sldId id="273" r:id="rId24"/>
   </p:sldIdLst>
   <p:sldSz cx="12191695" cy="6858000" type="screen4x3"/>
   <p:notesSz cx="6858000" cy="9144000"/>
@@ -11007,11 +11011,11 @@
         <p:spPr>
           <a:xfrm>
             <a:off x="457200" y="1298448"/>
-            <a:ext cx="6471742" cy="4114800"/>
+            <a:ext cx="6471742" cy="4297680"/>
           </a:xfrm>
           <a:prstGeom prst="roundRect">
             <a:avLst>
-              <a:gd name="adj" fmla="val 888"/>
+              <a:gd name="adj" fmla="val 851"/>
             </a:avLst>
           </a:prstGeom>
           <a:solidFill>
@@ -12279,7 +12283,7 @@
         </p:nvSpPr>
         <p:spPr>
           <a:xfrm>
-            <a:off x="7111822" y="2139696"/>
+            <a:off x="7111822" y="2487168"/>
             <a:ext cx="4622673" cy="658368"/>
           </a:xfrm>
           <a:prstGeom prst="roundRect">
@@ -12324,7 +12328,7 @@
         </p:nvSpPr>
         <p:spPr>
           <a:xfrm rot="16200000">
-            <a:off x="7111822" y="2404872"/>
+            <a:off x="7111822" y="2752344"/>
             <a:ext cx="128016" cy="128016"/>
           </a:xfrm>
           <a:prstGeom prst="triangle">
@@ -12367,7 +12371,7 @@
         </p:nvSpPr>
         <p:spPr>
           <a:xfrm>
-            <a:off x="7294702" y="2322576"/>
+            <a:off x="7294702" y="2670048"/>
             <a:ext cx="4256913" cy="292607"/>
           </a:xfrm>
           <a:prstGeom prst="rect">
@@ -12402,7 +12406,7 @@
         </p:nvSpPr>
         <p:spPr>
           <a:xfrm>
-            <a:off x="7111822" y="2980944"/>
+            <a:off x="7111822" y="3675887"/>
             <a:ext cx="4622673" cy="658368"/>
           </a:xfrm>
           <a:prstGeom prst="roundRect">
@@ -12447,7 +12451,7 @@
         </p:nvSpPr>
         <p:spPr>
           <a:xfrm rot="16200000">
-            <a:off x="7111822" y="3246120"/>
+            <a:off x="7111822" y="3941063"/>
             <a:ext cx="128016" cy="128016"/>
           </a:xfrm>
           <a:prstGeom prst="triangle">
@@ -12490,7 +12494,7 @@
         </p:nvSpPr>
         <p:spPr>
           <a:xfrm>
-            <a:off x="7294702" y="3163824"/>
+            <a:off x="7294702" y="3858768"/>
             <a:ext cx="4256913" cy="292607"/>
           </a:xfrm>
           <a:prstGeom prst="rect">
@@ -12525,7 +12529,7 @@
         </p:nvSpPr>
         <p:spPr>
           <a:xfrm>
-            <a:off x="7111822" y="3822191"/>
+            <a:off x="7111822" y="4864607"/>
             <a:ext cx="4622673" cy="658368"/>
           </a:xfrm>
           <a:prstGeom prst="roundRect">
@@ -12570,7 +12574,7 @@
         </p:nvSpPr>
         <p:spPr>
           <a:xfrm rot="16200000">
-            <a:off x="7111822" y="4087368"/>
+            <a:off x="7111822" y="5129783"/>
             <a:ext cx="128016" cy="128016"/>
           </a:xfrm>
           <a:prstGeom prst="triangle">
@@ -12613,7 +12617,7 @@
         </p:nvSpPr>
         <p:spPr>
           <a:xfrm>
-            <a:off x="7294702" y="4005072"/>
+            <a:off x="7294702" y="5047488"/>
             <a:ext cx="4256913" cy="292607"/>
           </a:xfrm>
           <a:prstGeom prst="rect">
@@ -13892,6 +13896,8371 @@
                 <a:latin typeface="Calibri"/>
               </a:rPr>
               <a:t>Net Revenue</a:t>
+            </a:r>
+          </a:p>
+        </p:txBody>
+      </p:sp>
+    </p:spTree>
+  </p:cSld>
+  <p:clrMapOvr>
+    <a:masterClrMapping/>
+  </p:clrMapOvr>
+</p:sld>
+</file>
+
+<file path=ppt/slides/slide15.xml><?xml version="1.0" encoding="utf-8"?>
+<p:sld xmlns:a="http://schemas.openxmlformats.org/drawingml/2006/main" xmlns:p="http://schemas.openxmlformats.org/presentationml/2006/main" xmlns:r="http://schemas.openxmlformats.org/officeDocument/2006/relationships">
+  <p:cSld>
+    <p:bg>
+      <p:bgPr>
+        <a:solidFill>
+          <a:srgbClr val="0F172A"/>
+        </a:solidFill>
+        <a:effectLst/>
+      </p:bgPr>
+    </p:bg>
+    <p:spTree>
+      <p:nvGrpSpPr>
+        <p:cNvPr id="1" name=""/>
+        <p:cNvGrpSpPr/>
+        <p:nvPr/>
+      </p:nvGrpSpPr>
+      <p:grpSpPr/>
+      <p:sp>
+        <p:nvSpPr>
+          <p:cNvPr id="2" name="Rectangle 1"/>
+          <p:cNvSpPr/>
+          <p:nvPr/>
+        </p:nvSpPr>
+        <p:spPr>
+          <a:xfrm>
+            <a:off x="457200" y="457200"/>
+            <a:ext cx="45720" cy="548640"/>
+          </a:xfrm>
+          <a:prstGeom prst="rect">
+            <a:avLst/>
+          </a:prstGeom>
+          <a:solidFill>
+            <a:srgbClr val="3B82F6"/>
+          </a:solidFill>
+          <a:ln>
+            <a:noFill/>
+          </a:ln>
+        </p:spPr>
+        <p:style>
+          <a:lnRef idx="1">
+            <a:schemeClr val="accent1"/>
+          </a:lnRef>
+          <a:fillRef idx="3">
+            <a:schemeClr val="accent1"/>
+          </a:fillRef>
+          <a:effectRef idx="2">
+            <a:schemeClr val="accent1"/>
+          </a:effectRef>
+          <a:fontRef idx="minor">
+            <a:schemeClr val="lt1"/>
+          </a:fontRef>
+        </p:style>
+        <p:txBody>
+          <a:bodyPr rtlCol="0" anchor="ctr"/>
+          <a:lstStyle/>
+          <a:p>
+            <a:pPr algn="ctr"/>
+          </a:p>
+        </p:txBody>
+      </p:sp>
+      <p:sp>
+        <p:nvSpPr>
+          <p:cNvPr id="3" name="TextBox 2"/>
+          <p:cNvSpPr txBox="1"/>
+          <p:nvPr/>
+        </p:nvSpPr>
+        <p:spPr>
+          <a:xfrm>
+            <a:off x="685800" y="457200"/>
+            <a:ext cx="8991295" cy="548640"/>
+          </a:xfrm>
+          <a:prstGeom prst="rect">
+            <a:avLst/>
+          </a:prstGeom>
+          <a:noFill/>
+        </p:spPr>
+        <p:txBody>
+          <a:bodyPr wrap="square" lIns="0" tIns="0" rIns="0" bIns="0">
+            <a:spAutoFit/>
+          </a:bodyPr>
+          <a:lstStyle/>
+          <a:p>
+            <a:pPr algn="l"/>
+            <a:r>
+              <a:rPr sz="2800" b="1" i="0">
+                <a:solidFill>
+                  <a:srgbClr val="F8FAFC"/>
+                </a:solidFill>
+                <a:latin typeface="Calibri Light"/>
+              </a:rPr>
+              <a:t>Additional React Patterns</a:t>
+            </a:r>
+          </a:p>
+        </p:txBody>
+      </p:sp>
+      <p:sp>
+        <p:nvSpPr>
+          <p:cNvPr id="4" name="Rounded Rectangle 3"/>
+          <p:cNvSpPr/>
+          <p:nvPr/>
+        </p:nvSpPr>
+        <p:spPr>
+          <a:xfrm>
+            <a:off x="9859975" y="571500"/>
+            <a:ext cx="1874520" cy="320040"/>
+          </a:xfrm>
+          <a:prstGeom prst="roundRect">
+            <a:avLst>
+              <a:gd name="adj" fmla="val 50000"/>
+            </a:avLst>
+          </a:prstGeom>
+          <a:solidFill>
+            <a:srgbClr val="3B82F6"/>
+          </a:solidFill>
+          <a:ln>
+            <a:noFill/>
+          </a:ln>
+        </p:spPr>
+        <p:style>
+          <a:lnRef idx="1">
+            <a:schemeClr val="accent1"/>
+          </a:lnRef>
+          <a:fillRef idx="3">
+            <a:schemeClr val="accent1"/>
+          </a:fillRef>
+          <a:effectRef idx="2">
+            <a:schemeClr val="accent1"/>
+          </a:effectRef>
+          <a:fontRef idx="minor">
+            <a:schemeClr val="lt1"/>
+          </a:fontRef>
+        </p:style>
+        <p:txBody>
+          <a:bodyPr rtlCol="0" anchor="ctr" wrap="none"/>
+          <a:lstStyle/>
+          <a:p>
+            <a:pPr algn="ctr"/>
+            <a:r>
+              <a:rPr sz="1100" b="1">
+                <a:solidFill>
+                  <a:srgbClr val="FFFFFF"/>
+                </a:solidFill>
+                <a:latin typeface="Calibri"/>
+              </a:rPr>
+              <a:t>Accordion + Features</a:t>
+            </a:r>
+          </a:p>
+        </p:txBody>
+      </p:sp>
+      <p:sp>
+        <p:nvSpPr>
+          <p:cNvPr id="5" name="TextBox 4"/>
+          <p:cNvSpPr txBox="1"/>
+          <p:nvPr/>
+        </p:nvSpPr>
+        <p:spPr>
+          <a:xfrm>
+            <a:off x="457200" y="1325880"/>
+            <a:ext cx="11277295" cy="320040"/>
+          </a:xfrm>
+          <a:prstGeom prst="rect">
+            <a:avLst/>
+          </a:prstGeom>
+          <a:noFill/>
+        </p:spPr>
+        <p:txBody>
+          <a:bodyPr wrap="square" lIns="0" tIns="0" rIns="0" bIns="0">
+            <a:spAutoFit/>
+          </a:bodyPr>
+          <a:lstStyle/>
+          <a:p>
+            <a:pPr algn="l"/>
+            <a:r>
+              <a:rPr sz="2000" b="1" i="0">
+                <a:solidFill>
+                  <a:srgbClr val="F8FAFC"/>
+                </a:solidFill>
+                <a:latin typeface="Calibri Light"/>
+              </a:rPr>
+              <a:t>Accordion (FAQ Pattern / MUI inspired)</a:t>
+            </a:r>
+          </a:p>
+        </p:txBody>
+      </p:sp>
+      <p:sp>
+        <p:nvSpPr>
+          <p:cNvPr id="6" name="Rounded Rectangle 5"/>
+          <p:cNvSpPr/>
+          <p:nvPr/>
+        </p:nvSpPr>
+        <p:spPr>
+          <a:xfrm>
+            <a:off x="457200" y="1645919"/>
+            <a:ext cx="11277295" cy="347472"/>
+          </a:xfrm>
+          <a:prstGeom prst="roundRect">
+            <a:avLst>
+              <a:gd name="adj" fmla="val 10526"/>
+            </a:avLst>
+          </a:prstGeom>
+          <a:solidFill>
+            <a:srgbClr val="1E293B"/>
+          </a:solidFill>
+          <a:ln>
+            <a:noFill/>
+          </a:ln>
+        </p:spPr>
+        <p:style>
+          <a:lnRef idx="1">
+            <a:schemeClr val="accent1"/>
+          </a:lnRef>
+          <a:fillRef idx="3">
+            <a:schemeClr val="accent1"/>
+          </a:fillRef>
+          <a:effectRef idx="2">
+            <a:schemeClr val="accent1"/>
+          </a:effectRef>
+          <a:fontRef idx="minor">
+            <a:schemeClr val="lt1"/>
+          </a:fontRef>
+        </p:style>
+        <p:txBody>
+          <a:bodyPr rtlCol="0" anchor="ctr"/>
+          <a:lstStyle/>
+          <a:p>
+            <a:pPr algn="ctr"/>
+          </a:p>
+        </p:txBody>
+      </p:sp>
+      <p:sp>
+        <p:nvSpPr>
+          <p:cNvPr id="7" name="TextBox 6"/>
+          <p:cNvSpPr txBox="1"/>
+          <p:nvPr/>
+        </p:nvSpPr>
+        <p:spPr>
+          <a:xfrm>
+            <a:off x="640080" y="1645919"/>
+            <a:ext cx="10774375" cy="347472"/>
+          </a:xfrm>
+          <a:prstGeom prst="rect">
+            <a:avLst/>
+          </a:prstGeom>
+          <a:noFill/>
+        </p:spPr>
+        <p:txBody>
+          <a:bodyPr wrap="square" lIns="0" tIns="0" rIns="0" bIns="0">
+            <a:spAutoFit/>
+          </a:bodyPr>
+          <a:lstStyle/>
+          <a:p>
+            <a:pPr algn="l"/>
+            <a:r>
+              <a:rPr sz="1400" b="1" i="0">
+                <a:solidFill>
+                  <a:srgbClr val="F8FAFC"/>
+                </a:solidFill>
+                <a:latin typeface="Calibri"/>
+              </a:rPr>
+              <a:t>How do we scale headcount?</a:t>
+            </a:r>
+          </a:p>
+        </p:txBody>
+      </p:sp>
+      <p:sp>
+        <p:nvSpPr>
+          <p:cNvPr id="8" name="TextBox 7"/>
+          <p:cNvSpPr txBox="1"/>
+          <p:nvPr/>
+        </p:nvSpPr>
+        <p:spPr>
+          <a:xfrm>
+            <a:off x="11414455" y="1645919"/>
+            <a:ext cx="137160" cy="347472"/>
+          </a:xfrm>
+          <a:prstGeom prst="rect">
+            <a:avLst/>
+          </a:prstGeom>
+          <a:noFill/>
+        </p:spPr>
+        <p:txBody>
+          <a:bodyPr wrap="square" lIns="0" tIns="0" rIns="0" bIns="0">
+            <a:spAutoFit/>
+          </a:bodyPr>
+          <a:lstStyle/>
+          <a:p>
+            <a:pPr algn="ctr"/>
+            <a:r>
+              <a:rPr sz="1400" b="1" i="0">
+                <a:solidFill>
+                  <a:srgbClr val="3B82F6"/>
+                </a:solidFill>
+                <a:latin typeface="Calibri"/>
+              </a:rPr>
+              <a:t>−</a:t>
+            </a:r>
+          </a:p>
+        </p:txBody>
+      </p:sp>
+      <p:sp>
+        <p:nvSpPr>
+          <p:cNvPr id="9" name="Rounded Rectangle 8"/>
+          <p:cNvSpPr/>
+          <p:nvPr/>
+        </p:nvSpPr>
+        <p:spPr>
+          <a:xfrm>
+            <a:off x="502920" y="2020823"/>
+            <a:ext cx="11185855" cy="731520"/>
+          </a:xfrm>
+          <a:prstGeom prst="roundRect">
+            <a:avLst>
+              <a:gd name="adj" fmla="val 5000"/>
+            </a:avLst>
+          </a:prstGeom>
+          <a:solidFill>
+            <a:srgbClr val="0F172A"/>
+          </a:solidFill>
+          <a:ln>
+            <a:noFill/>
+          </a:ln>
+        </p:spPr>
+        <p:style>
+          <a:lnRef idx="1">
+            <a:schemeClr val="accent1"/>
+          </a:lnRef>
+          <a:fillRef idx="3">
+            <a:schemeClr val="accent1"/>
+          </a:fillRef>
+          <a:effectRef idx="2">
+            <a:schemeClr val="accent1"/>
+          </a:effectRef>
+          <a:fontRef idx="minor">
+            <a:schemeClr val="lt1"/>
+          </a:fontRef>
+        </p:style>
+        <p:txBody>
+          <a:bodyPr rtlCol="0" anchor="ctr"/>
+          <a:lstStyle/>
+          <a:p>
+            <a:pPr algn="ctr"/>
+          </a:p>
+        </p:txBody>
+      </p:sp>
+      <p:sp>
+        <p:nvSpPr>
+          <p:cNvPr id="10" name="TextBox 9"/>
+          <p:cNvSpPr txBox="1"/>
+          <p:nvPr/>
+        </p:nvSpPr>
+        <p:spPr>
+          <a:xfrm>
+            <a:off x="685800" y="2112263"/>
+            <a:ext cx="10820095" cy="548640"/>
+          </a:xfrm>
+          <a:prstGeom prst="rect">
+            <a:avLst/>
+          </a:prstGeom>
+          <a:noFill/>
+        </p:spPr>
+        <p:txBody>
+          <a:bodyPr wrap="square" lIns="0" tIns="0" rIns="0" bIns="0">
+            <a:spAutoFit/>
+          </a:bodyPr>
+          <a:lstStyle/>
+          <a:p>
+            <a:pPr algn="l"/>
+            <a:r>
+              <a:rPr sz="1100" b="0" i="0">
+                <a:solidFill>
+                  <a:srgbClr val="CBD5E1"/>
+                </a:solidFill>
+                <a:latin typeface="Calibri"/>
+              </a:rPr>
+              <a:t>Hiring plan targets 40% growth in engineering and product through Q4 2026. Focus on mid/senior IC roles and two new manager positions.</a:t>
+            </a:r>
+          </a:p>
+        </p:txBody>
+      </p:sp>
+      <p:sp>
+        <p:nvSpPr>
+          <p:cNvPr id="11" name="Rounded Rectangle 10"/>
+          <p:cNvSpPr/>
+          <p:nvPr/>
+        </p:nvSpPr>
+        <p:spPr>
+          <a:xfrm>
+            <a:off x="457200" y="2816351"/>
+            <a:ext cx="11277295" cy="347472"/>
+          </a:xfrm>
+          <a:prstGeom prst="roundRect">
+            <a:avLst>
+              <a:gd name="adj" fmla="val 10526"/>
+            </a:avLst>
+          </a:prstGeom>
+          <a:solidFill>
+            <a:srgbClr val="334155"/>
+          </a:solidFill>
+          <a:ln>
+            <a:noFill/>
+          </a:ln>
+        </p:spPr>
+        <p:style>
+          <a:lnRef idx="1">
+            <a:schemeClr val="accent1"/>
+          </a:lnRef>
+          <a:fillRef idx="3">
+            <a:schemeClr val="accent1"/>
+          </a:fillRef>
+          <a:effectRef idx="2">
+            <a:schemeClr val="accent1"/>
+          </a:effectRef>
+          <a:fontRef idx="minor">
+            <a:schemeClr val="lt1"/>
+          </a:fontRef>
+        </p:style>
+        <p:txBody>
+          <a:bodyPr rtlCol="0" anchor="ctr"/>
+          <a:lstStyle/>
+          <a:p>
+            <a:pPr algn="ctr"/>
+          </a:p>
+        </p:txBody>
+      </p:sp>
+      <p:sp>
+        <p:nvSpPr>
+          <p:cNvPr id="12" name="TextBox 11"/>
+          <p:cNvSpPr txBox="1"/>
+          <p:nvPr/>
+        </p:nvSpPr>
+        <p:spPr>
+          <a:xfrm>
+            <a:off x="640080" y="2816351"/>
+            <a:ext cx="10774375" cy="347472"/>
+          </a:xfrm>
+          <a:prstGeom prst="rect">
+            <a:avLst/>
+          </a:prstGeom>
+          <a:noFill/>
+        </p:spPr>
+        <p:txBody>
+          <a:bodyPr wrap="square" lIns="0" tIns="0" rIns="0" bIns="0">
+            <a:spAutoFit/>
+          </a:bodyPr>
+          <a:lstStyle/>
+          <a:p>
+            <a:pPr algn="l"/>
+            <a:r>
+              <a:rPr sz="1400" b="0" i="0">
+                <a:solidFill>
+                  <a:srgbClr val="CBD5E1"/>
+                </a:solidFill>
+                <a:latin typeface="Calibri"/>
+              </a:rPr>
+              <a:t>What's our go-to-market strategy?</a:t>
+            </a:r>
+          </a:p>
+        </p:txBody>
+      </p:sp>
+      <p:sp>
+        <p:nvSpPr>
+          <p:cNvPr id="13" name="TextBox 12"/>
+          <p:cNvSpPr txBox="1"/>
+          <p:nvPr/>
+        </p:nvSpPr>
+        <p:spPr>
+          <a:xfrm>
+            <a:off x="11414455" y="2816351"/>
+            <a:ext cx="137160" cy="347472"/>
+          </a:xfrm>
+          <a:prstGeom prst="rect">
+            <a:avLst/>
+          </a:prstGeom>
+          <a:noFill/>
+        </p:spPr>
+        <p:txBody>
+          <a:bodyPr wrap="square" lIns="0" tIns="0" rIns="0" bIns="0">
+            <a:spAutoFit/>
+          </a:bodyPr>
+          <a:lstStyle/>
+          <a:p>
+            <a:pPr algn="ctr"/>
+            <a:r>
+              <a:rPr sz="1400" b="1" i="0">
+                <a:solidFill>
+                  <a:srgbClr val="3B82F6"/>
+                </a:solidFill>
+                <a:latin typeface="Calibri"/>
+              </a:rPr>
+              <a:t>+</a:t>
+            </a:r>
+          </a:p>
+        </p:txBody>
+      </p:sp>
+      <p:sp>
+        <p:nvSpPr>
+          <p:cNvPr id="14" name="Rounded Rectangle 13"/>
+          <p:cNvSpPr/>
+          <p:nvPr/>
+        </p:nvSpPr>
+        <p:spPr>
+          <a:xfrm>
+            <a:off x="457200" y="3255263"/>
+            <a:ext cx="11277295" cy="347472"/>
+          </a:xfrm>
+          <a:prstGeom prst="roundRect">
+            <a:avLst>
+              <a:gd name="adj" fmla="val 10526"/>
+            </a:avLst>
+          </a:prstGeom>
+          <a:solidFill>
+            <a:srgbClr val="334155"/>
+          </a:solidFill>
+          <a:ln>
+            <a:noFill/>
+          </a:ln>
+        </p:spPr>
+        <p:style>
+          <a:lnRef idx="1">
+            <a:schemeClr val="accent1"/>
+          </a:lnRef>
+          <a:fillRef idx="3">
+            <a:schemeClr val="accent1"/>
+          </a:fillRef>
+          <a:effectRef idx="2">
+            <a:schemeClr val="accent1"/>
+          </a:effectRef>
+          <a:fontRef idx="minor">
+            <a:schemeClr val="lt1"/>
+          </a:fontRef>
+        </p:style>
+        <p:txBody>
+          <a:bodyPr rtlCol="0" anchor="ctr"/>
+          <a:lstStyle/>
+          <a:p>
+            <a:pPr algn="ctr"/>
+          </a:p>
+        </p:txBody>
+      </p:sp>
+      <p:sp>
+        <p:nvSpPr>
+          <p:cNvPr id="15" name="TextBox 14"/>
+          <p:cNvSpPr txBox="1"/>
+          <p:nvPr/>
+        </p:nvSpPr>
+        <p:spPr>
+          <a:xfrm>
+            <a:off x="640080" y="3255263"/>
+            <a:ext cx="10774375" cy="347472"/>
+          </a:xfrm>
+          <a:prstGeom prst="rect">
+            <a:avLst/>
+          </a:prstGeom>
+          <a:noFill/>
+        </p:spPr>
+        <p:txBody>
+          <a:bodyPr wrap="square" lIns="0" tIns="0" rIns="0" bIns="0">
+            <a:spAutoFit/>
+          </a:bodyPr>
+          <a:lstStyle/>
+          <a:p>
+            <a:pPr algn="l"/>
+            <a:r>
+              <a:rPr sz="1400" b="0" i="0">
+                <a:solidFill>
+                  <a:srgbClr val="CBD5E1"/>
+                </a:solidFill>
+                <a:latin typeface="Calibri"/>
+              </a:rPr>
+              <a:t>How do we reduce churn?</a:t>
+            </a:r>
+          </a:p>
+        </p:txBody>
+      </p:sp>
+      <p:sp>
+        <p:nvSpPr>
+          <p:cNvPr id="16" name="TextBox 15"/>
+          <p:cNvSpPr txBox="1"/>
+          <p:nvPr/>
+        </p:nvSpPr>
+        <p:spPr>
+          <a:xfrm>
+            <a:off x="11414455" y="3255263"/>
+            <a:ext cx="137160" cy="347472"/>
+          </a:xfrm>
+          <a:prstGeom prst="rect">
+            <a:avLst/>
+          </a:prstGeom>
+          <a:noFill/>
+        </p:spPr>
+        <p:txBody>
+          <a:bodyPr wrap="square" lIns="0" tIns="0" rIns="0" bIns="0">
+            <a:spAutoFit/>
+          </a:bodyPr>
+          <a:lstStyle/>
+          <a:p>
+            <a:pPr algn="ctr"/>
+            <a:r>
+              <a:rPr sz="1400" b="1" i="0">
+                <a:solidFill>
+                  <a:srgbClr val="3B82F6"/>
+                </a:solidFill>
+                <a:latin typeface="Calibri"/>
+              </a:rPr>
+              <a:t>+</a:t>
+            </a:r>
+          </a:p>
+        </p:txBody>
+      </p:sp>
+      <p:sp>
+        <p:nvSpPr>
+          <p:cNvPr id="17" name="TextBox 16"/>
+          <p:cNvSpPr txBox="1"/>
+          <p:nvPr/>
+        </p:nvSpPr>
+        <p:spPr>
+          <a:xfrm>
+            <a:off x="457200" y="3657600"/>
+            <a:ext cx="11277295" cy="320040"/>
+          </a:xfrm>
+          <a:prstGeom prst="rect">
+            <a:avLst/>
+          </a:prstGeom>
+          <a:noFill/>
+        </p:spPr>
+        <p:txBody>
+          <a:bodyPr wrap="square" lIns="0" tIns="0" rIns="0" bIns="0">
+            <a:spAutoFit/>
+          </a:bodyPr>
+          <a:lstStyle/>
+          <a:p>
+            <a:pPr algn="l"/>
+            <a:r>
+              <a:rPr sz="2000" b="1" i="0">
+                <a:solidFill>
+                  <a:srgbClr val="F8FAFC"/>
+                </a:solidFill>
+                <a:latin typeface="Calibri Light"/>
+              </a:rPr>
+              <a:t>FeatureGrid (Product Showcase Pattern)</a:t>
+            </a:r>
+          </a:p>
+        </p:txBody>
+      </p:sp>
+      <p:sp>
+        <p:nvSpPr>
+          <p:cNvPr id="18" name="Rounded Rectangle 17"/>
+          <p:cNvSpPr/>
+          <p:nvPr/>
+        </p:nvSpPr>
+        <p:spPr>
+          <a:xfrm>
+            <a:off x="457200" y="3977639"/>
+            <a:ext cx="3667658" cy="868680"/>
+          </a:xfrm>
+          <a:prstGeom prst="roundRect">
+            <a:avLst>
+              <a:gd name="adj" fmla="val 5263"/>
+            </a:avLst>
+          </a:prstGeom>
+          <a:solidFill>
+            <a:srgbClr val="1E293B"/>
+          </a:solidFill>
+          <a:ln>
+            <a:noFill/>
+          </a:ln>
+        </p:spPr>
+        <p:style>
+          <a:lnRef idx="1">
+            <a:schemeClr val="accent1"/>
+          </a:lnRef>
+          <a:fillRef idx="3">
+            <a:schemeClr val="accent1"/>
+          </a:fillRef>
+          <a:effectRef idx="2">
+            <a:schemeClr val="accent1"/>
+          </a:effectRef>
+          <a:fontRef idx="minor">
+            <a:schemeClr val="lt1"/>
+          </a:fontRef>
+        </p:style>
+        <p:txBody>
+          <a:bodyPr rtlCol="0" anchor="ctr"/>
+          <a:lstStyle/>
+          <a:p>
+            <a:pPr algn="ctr"/>
+          </a:p>
+        </p:txBody>
+      </p:sp>
+      <p:sp>
+        <p:nvSpPr>
+          <p:cNvPr id="19" name="Rounded Rectangle 18"/>
+          <p:cNvSpPr/>
+          <p:nvPr/>
+        </p:nvSpPr>
+        <p:spPr>
+          <a:xfrm>
+            <a:off x="2199589" y="4160520"/>
+            <a:ext cx="182880" cy="182880"/>
+          </a:xfrm>
+          <a:prstGeom prst="roundRect">
+            <a:avLst>
+              <a:gd name="adj" fmla="val 15000"/>
+            </a:avLst>
+          </a:prstGeom>
+          <a:solidFill>
+            <a:srgbClr val="3B82F6"/>
+          </a:solidFill>
+          <a:ln>
+            <a:noFill/>
+          </a:ln>
+        </p:spPr>
+        <p:style>
+          <a:lnRef idx="1">
+            <a:schemeClr val="accent1"/>
+          </a:lnRef>
+          <a:fillRef idx="3">
+            <a:schemeClr val="accent1"/>
+          </a:fillRef>
+          <a:effectRef idx="2">
+            <a:schemeClr val="accent1"/>
+          </a:effectRef>
+          <a:fontRef idx="minor">
+            <a:schemeClr val="lt1"/>
+          </a:fontRef>
+        </p:style>
+        <p:txBody>
+          <a:bodyPr rtlCol="0" anchor="ctr"/>
+          <a:lstStyle/>
+          <a:p>
+            <a:pPr algn="ctr"/>
+          </a:p>
+        </p:txBody>
+      </p:sp>
+      <p:sp>
+        <p:nvSpPr>
+          <p:cNvPr id="20" name="TextBox 19"/>
+          <p:cNvSpPr txBox="1"/>
+          <p:nvPr/>
+        </p:nvSpPr>
+        <p:spPr>
+          <a:xfrm>
+            <a:off x="2199589" y="4178807"/>
+            <a:ext cx="182880" cy="146304"/>
+          </a:xfrm>
+          <a:prstGeom prst="rect">
+            <a:avLst/>
+          </a:prstGeom>
+          <a:noFill/>
+        </p:spPr>
+        <p:txBody>
+          <a:bodyPr wrap="square" lIns="0" tIns="0" rIns="0" bIns="0">
+            <a:spAutoFit/>
+          </a:bodyPr>
+          <a:lstStyle/>
+          <a:p>
+            <a:pPr algn="ctr"/>
+            <a:r>
+              <a:rPr sz="2800" b="1" i="0">
+                <a:solidFill>
+                  <a:srgbClr val="0F172A"/>
+                </a:solidFill>
+                <a:latin typeface="Calibri"/>
+              </a:rPr>
+              <a:t>⚡</a:t>
+            </a:r>
+          </a:p>
+        </p:txBody>
+      </p:sp>
+      <p:sp>
+        <p:nvSpPr>
+          <p:cNvPr id="21" name="TextBox 20"/>
+          <p:cNvSpPr txBox="1"/>
+          <p:nvPr/>
+        </p:nvSpPr>
+        <p:spPr>
+          <a:xfrm>
+            <a:off x="640080" y="4526280"/>
+            <a:ext cx="3301898" cy="228600"/>
+          </a:xfrm>
+          <a:prstGeom prst="rect">
+            <a:avLst/>
+          </a:prstGeom>
+          <a:noFill/>
+        </p:spPr>
+        <p:txBody>
+          <a:bodyPr wrap="square" lIns="0" tIns="0" rIns="0" bIns="0">
+            <a:spAutoFit/>
+          </a:bodyPr>
+          <a:lstStyle/>
+          <a:p>
+            <a:pPr algn="ctr"/>
+            <a:r>
+              <a:rPr sz="1400" b="1" i="0">
+                <a:solidFill>
+                  <a:srgbClr val="F8FAFC"/>
+                </a:solidFill>
+                <a:latin typeface="Calibri"/>
+              </a:rPr>
+              <a:t>Real-time Sync</a:t>
+            </a:r>
+          </a:p>
+        </p:txBody>
+      </p:sp>
+      <p:sp>
+        <p:nvSpPr>
+          <p:cNvPr id="22" name="TextBox 21"/>
+          <p:cNvSpPr txBox="1"/>
+          <p:nvPr/>
+        </p:nvSpPr>
+        <p:spPr>
+          <a:xfrm>
+            <a:off x="640080" y="4846320"/>
+            <a:ext cx="3301898" cy="-182880"/>
+          </a:xfrm>
+          <a:prstGeom prst="rect">
+            <a:avLst/>
+          </a:prstGeom>
+          <a:noFill/>
+        </p:spPr>
+        <p:txBody>
+          <a:bodyPr wrap="square" lIns="0" tIns="0" rIns="0" bIns="0">
+            <a:spAutoFit/>
+          </a:bodyPr>
+          <a:lstStyle/>
+          <a:p>
+            <a:pPr algn="ctr"/>
+            <a:r>
+              <a:rPr sz="1100" b="0" i="0">
+                <a:solidFill>
+                  <a:srgbClr val="CBD5E1"/>
+                </a:solidFill>
+                <a:latin typeface="Calibri"/>
+              </a:rPr>
+              <a:t>Data synchronizes across all endpoints instantly.</a:t>
+            </a:r>
+          </a:p>
+        </p:txBody>
+      </p:sp>
+      <p:sp>
+        <p:nvSpPr>
+          <p:cNvPr id="23" name="Rounded Rectangle 22"/>
+          <p:cNvSpPr/>
+          <p:nvPr/>
+        </p:nvSpPr>
+        <p:spPr>
+          <a:xfrm>
+            <a:off x="4262018" y="3977639"/>
+            <a:ext cx="3667658" cy="868680"/>
+          </a:xfrm>
+          <a:prstGeom prst="roundRect">
+            <a:avLst>
+              <a:gd name="adj" fmla="val 5263"/>
+            </a:avLst>
+          </a:prstGeom>
+          <a:solidFill>
+            <a:srgbClr val="1E293B"/>
+          </a:solidFill>
+          <a:ln>
+            <a:noFill/>
+          </a:ln>
+        </p:spPr>
+        <p:style>
+          <a:lnRef idx="1">
+            <a:schemeClr val="accent1"/>
+          </a:lnRef>
+          <a:fillRef idx="3">
+            <a:schemeClr val="accent1"/>
+          </a:fillRef>
+          <a:effectRef idx="2">
+            <a:schemeClr val="accent1"/>
+          </a:effectRef>
+          <a:fontRef idx="minor">
+            <a:schemeClr val="lt1"/>
+          </a:fontRef>
+        </p:style>
+        <p:txBody>
+          <a:bodyPr rtlCol="0" anchor="ctr"/>
+          <a:lstStyle/>
+          <a:p>
+            <a:pPr algn="ctr"/>
+          </a:p>
+        </p:txBody>
+      </p:sp>
+      <p:sp>
+        <p:nvSpPr>
+          <p:cNvPr id="24" name="Rounded Rectangle 23"/>
+          <p:cNvSpPr/>
+          <p:nvPr/>
+        </p:nvSpPr>
+        <p:spPr>
+          <a:xfrm>
+            <a:off x="6004407" y="4160520"/>
+            <a:ext cx="182880" cy="182880"/>
+          </a:xfrm>
+          <a:prstGeom prst="roundRect">
+            <a:avLst>
+              <a:gd name="adj" fmla="val 15000"/>
+            </a:avLst>
+          </a:prstGeom>
+          <a:solidFill>
+            <a:srgbClr val="3B82F6"/>
+          </a:solidFill>
+          <a:ln>
+            <a:noFill/>
+          </a:ln>
+        </p:spPr>
+        <p:style>
+          <a:lnRef idx="1">
+            <a:schemeClr val="accent1"/>
+          </a:lnRef>
+          <a:fillRef idx="3">
+            <a:schemeClr val="accent1"/>
+          </a:fillRef>
+          <a:effectRef idx="2">
+            <a:schemeClr val="accent1"/>
+          </a:effectRef>
+          <a:fontRef idx="minor">
+            <a:schemeClr val="lt1"/>
+          </a:fontRef>
+        </p:style>
+        <p:txBody>
+          <a:bodyPr rtlCol="0" anchor="ctr"/>
+          <a:lstStyle/>
+          <a:p>
+            <a:pPr algn="ctr"/>
+          </a:p>
+        </p:txBody>
+      </p:sp>
+      <p:sp>
+        <p:nvSpPr>
+          <p:cNvPr id="25" name="TextBox 24"/>
+          <p:cNvSpPr txBox="1"/>
+          <p:nvPr/>
+        </p:nvSpPr>
+        <p:spPr>
+          <a:xfrm>
+            <a:off x="6004407" y="4178807"/>
+            <a:ext cx="182880" cy="146304"/>
+          </a:xfrm>
+          <a:prstGeom prst="rect">
+            <a:avLst/>
+          </a:prstGeom>
+          <a:noFill/>
+        </p:spPr>
+        <p:txBody>
+          <a:bodyPr wrap="square" lIns="0" tIns="0" rIns="0" bIns="0">
+            <a:spAutoFit/>
+          </a:bodyPr>
+          <a:lstStyle/>
+          <a:p>
+            <a:pPr algn="ctr"/>
+            <a:r>
+              <a:rPr sz="2800" b="1" i="0">
+                <a:solidFill>
+                  <a:srgbClr val="0F172A"/>
+                </a:solidFill>
+                <a:latin typeface="Calibri"/>
+              </a:rPr>
+              <a:t>🔒</a:t>
+            </a:r>
+          </a:p>
+        </p:txBody>
+      </p:sp>
+      <p:sp>
+        <p:nvSpPr>
+          <p:cNvPr id="26" name="TextBox 25"/>
+          <p:cNvSpPr txBox="1"/>
+          <p:nvPr/>
+        </p:nvSpPr>
+        <p:spPr>
+          <a:xfrm>
+            <a:off x="4444898" y="4526280"/>
+            <a:ext cx="3301898" cy="228600"/>
+          </a:xfrm>
+          <a:prstGeom prst="rect">
+            <a:avLst/>
+          </a:prstGeom>
+          <a:noFill/>
+        </p:spPr>
+        <p:txBody>
+          <a:bodyPr wrap="square" lIns="0" tIns="0" rIns="0" bIns="0">
+            <a:spAutoFit/>
+          </a:bodyPr>
+          <a:lstStyle/>
+          <a:p>
+            <a:pPr algn="ctr"/>
+            <a:r>
+              <a:rPr sz="1400" b="1" i="0">
+                <a:solidFill>
+                  <a:srgbClr val="F8FAFC"/>
+                </a:solidFill>
+                <a:latin typeface="Calibri"/>
+              </a:rPr>
+              <a:t>Enterprise Security</a:t>
+            </a:r>
+          </a:p>
+        </p:txBody>
+      </p:sp>
+      <p:sp>
+        <p:nvSpPr>
+          <p:cNvPr id="27" name="TextBox 26"/>
+          <p:cNvSpPr txBox="1"/>
+          <p:nvPr/>
+        </p:nvSpPr>
+        <p:spPr>
+          <a:xfrm>
+            <a:off x="4444898" y="4846320"/>
+            <a:ext cx="3301898" cy="-182880"/>
+          </a:xfrm>
+          <a:prstGeom prst="rect">
+            <a:avLst/>
+          </a:prstGeom>
+          <a:noFill/>
+        </p:spPr>
+        <p:txBody>
+          <a:bodyPr wrap="square" lIns="0" tIns="0" rIns="0" bIns="0">
+            <a:spAutoFit/>
+          </a:bodyPr>
+          <a:lstStyle/>
+          <a:p>
+            <a:pPr algn="ctr"/>
+            <a:r>
+              <a:rPr sz="1100" b="0" i="0">
+                <a:solidFill>
+                  <a:srgbClr val="CBD5E1"/>
+                </a:solidFill>
+                <a:latin typeface="Calibri"/>
+              </a:rPr>
+              <a:t>SOC 2 Type II certified infrastructure.</a:t>
+            </a:r>
+          </a:p>
+        </p:txBody>
+      </p:sp>
+      <p:sp>
+        <p:nvSpPr>
+          <p:cNvPr id="28" name="Rounded Rectangle 27"/>
+          <p:cNvSpPr/>
+          <p:nvPr/>
+        </p:nvSpPr>
+        <p:spPr>
+          <a:xfrm>
+            <a:off x="8066836" y="3977639"/>
+            <a:ext cx="3667658" cy="868680"/>
+          </a:xfrm>
+          <a:prstGeom prst="roundRect">
+            <a:avLst>
+              <a:gd name="adj" fmla="val 5263"/>
+            </a:avLst>
+          </a:prstGeom>
+          <a:solidFill>
+            <a:srgbClr val="1E293B"/>
+          </a:solidFill>
+          <a:ln>
+            <a:noFill/>
+          </a:ln>
+        </p:spPr>
+        <p:style>
+          <a:lnRef idx="1">
+            <a:schemeClr val="accent1"/>
+          </a:lnRef>
+          <a:fillRef idx="3">
+            <a:schemeClr val="accent1"/>
+          </a:fillRef>
+          <a:effectRef idx="2">
+            <a:schemeClr val="accent1"/>
+          </a:effectRef>
+          <a:fontRef idx="minor">
+            <a:schemeClr val="lt1"/>
+          </a:fontRef>
+        </p:style>
+        <p:txBody>
+          <a:bodyPr rtlCol="0" anchor="ctr"/>
+          <a:lstStyle/>
+          <a:p>
+            <a:pPr algn="ctr"/>
+          </a:p>
+        </p:txBody>
+      </p:sp>
+      <p:sp>
+        <p:nvSpPr>
+          <p:cNvPr id="29" name="Rounded Rectangle 28"/>
+          <p:cNvSpPr/>
+          <p:nvPr/>
+        </p:nvSpPr>
+        <p:spPr>
+          <a:xfrm>
+            <a:off x="9809226" y="4160520"/>
+            <a:ext cx="182880" cy="182880"/>
+          </a:xfrm>
+          <a:prstGeom prst="roundRect">
+            <a:avLst>
+              <a:gd name="adj" fmla="val 15000"/>
+            </a:avLst>
+          </a:prstGeom>
+          <a:solidFill>
+            <a:srgbClr val="3B82F6"/>
+          </a:solidFill>
+          <a:ln>
+            <a:noFill/>
+          </a:ln>
+        </p:spPr>
+        <p:style>
+          <a:lnRef idx="1">
+            <a:schemeClr val="accent1"/>
+          </a:lnRef>
+          <a:fillRef idx="3">
+            <a:schemeClr val="accent1"/>
+          </a:fillRef>
+          <a:effectRef idx="2">
+            <a:schemeClr val="accent1"/>
+          </a:effectRef>
+          <a:fontRef idx="minor">
+            <a:schemeClr val="lt1"/>
+          </a:fontRef>
+        </p:style>
+        <p:txBody>
+          <a:bodyPr rtlCol="0" anchor="ctr"/>
+          <a:lstStyle/>
+          <a:p>
+            <a:pPr algn="ctr"/>
+          </a:p>
+        </p:txBody>
+      </p:sp>
+      <p:sp>
+        <p:nvSpPr>
+          <p:cNvPr id="30" name="TextBox 29"/>
+          <p:cNvSpPr txBox="1"/>
+          <p:nvPr/>
+        </p:nvSpPr>
+        <p:spPr>
+          <a:xfrm>
+            <a:off x="9809226" y="4178807"/>
+            <a:ext cx="182880" cy="146304"/>
+          </a:xfrm>
+          <a:prstGeom prst="rect">
+            <a:avLst/>
+          </a:prstGeom>
+          <a:noFill/>
+        </p:spPr>
+        <p:txBody>
+          <a:bodyPr wrap="square" lIns="0" tIns="0" rIns="0" bIns="0">
+            <a:spAutoFit/>
+          </a:bodyPr>
+          <a:lstStyle/>
+          <a:p>
+            <a:pPr algn="ctr"/>
+            <a:r>
+              <a:rPr sz="2800" b="1" i="0">
+                <a:solidFill>
+                  <a:srgbClr val="0F172A"/>
+                </a:solidFill>
+                <a:latin typeface="Calibri"/>
+              </a:rPr>
+              <a:t>📊</a:t>
+            </a:r>
+          </a:p>
+        </p:txBody>
+      </p:sp>
+      <p:sp>
+        <p:nvSpPr>
+          <p:cNvPr id="31" name="TextBox 30"/>
+          <p:cNvSpPr txBox="1"/>
+          <p:nvPr/>
+        </p:nvSpPr>
+        <p:spPr>
+          <a:xfrm>
+            <a:off x="8249716" y="4526280"/>
+            <a:ext cx="3301898" cy="228600"/>
+          </a:xfrm>
+          <a:prstGeom prst="rect">
+            <a:avLst/>
+          </a:prstGeom>
+          <a:noFill/>
+        </p:spPr>
+        <p:txBody>
+          <a:bodyPr wrap="square" lIns="0" tIns="0" rIns="0" bIns="0">
+            <a:spAutoFit/>
+          </a:bodyPr>
+          <a:lstStyle/>
+          <a:p>
+            <a:pPr algn="ctr"/>
+            <a:r>
+              <a:rPr sz="1400" b="1" i="0">
+                <a:solidFill>
+                  <a:srgbClr val="F8FAFC"/>
+                </a:solidFill>
+                <a:latin typeface="Calibri"/>
+              </a:rPr>
+              <a:t>Rich Analytics</a:t>
+            </a:r>
+          </a:p>
+        </p:txBody>
+      </p:sp>
+      <p:sp>
+        <p:nvSpPr>
+          <p:cNvPr id="32" name="TextBox 31"/>
+          <p:cNvSpPr txBox="1"/>
+          <p:nvPr/>
+        </p:nvSpPr>
+        <p:spPr>
+          <a:xfrm>
+            <a:off x="8249716" y="4846320"/>
+            <a:ext cx="3301898" cy="-182880"/>
+          </a:xfrm>
+          <a:prstGeom prst="rect">
+            <a:avLst/>
+          </a:prstGeom>
+          <a:noFill/>
+        </p:spPr>
+        <p:txBody>
+          <a:bodyPr wrap="square" lIns="0" tIns="0" rIns="0" bIns="0">
+            <a:spAutoFit/>
+          </a:bodyPr>
+          <a:lstStyle/>
+          <a:p>
+            <a:pPr algn="ctr"/>
+            <a:r>
+              <a:rPr sz="1100" b="0" i="0">
+                <a:solidFill>
+                  <a:srgbClr val="CBD5E1"/>
+                </a:solidFill>
+                <a:latin typeface="Calibri"/>
+              </a:rPr>
+              <a:t>Comprehensive dashboards and custom reporting.</a:t>
+            </a:r>
+          </a:p>
+        </p:txBody>
+      </p:sp>
+      <p:sp>
+        <p:nvSpPr>
+          <p:cNvPr id="33" name="Rounded Rectangle 32"/>
+          <p:cNvSpPr/>
+          <p:nvPr/>
+        </p:nvSpPr>
+        <p:spPr>
+          <a:xfrm>
+            <a:off x="457200" y="4983479"/>
+            <a:ext cx="3667658" cy="868680"/>
+          </a:xfrm>
+          <a:prstGeom prst="roundRect">
+            <a:avLst>
+              <a:gd name="adj" fmla="val 5263"/>
+            </a:avLst>
+          </a:prstGeom>
+          <a:solidFill>
+            <a:srgbClr val="1E293B"/>
+          </a:solidFill>
+          <a:ln>
+            <a:noFill/>
+          </a:ln>
+        </p:spPr>
+        <p:style>
+          <a:lnRef idx="1">
+            <a:schemeClr val="accent1"/>
+          </a:lnRef>
+          <a:fillRef idx="3">
+            <a:schemeClr val="accent1"/>
+          </a:fillRef>
+          <a:effectRef idx="2">
+            <a:schemeClr val="accent1"/>
+          </a:effectRef>
+          <a:fontRef idx="minor">
+            <a:schemeClr val="lt1"/>
+          </a:fontRef>
+        </p:style>
+        <p:txBody>
+          <a:bodyPr rtlCol="0" anchor="ctr"/>
+          <a:lstStyle/>
+          <a:p>
+            <a:pPr algn="ctr"/>
+          </a:p>
+        </p:txBody>
+      </p:sp>
+      <p:sp>
+        <p:nvSpPr>
+          <p:cNvPr id="34" name="Rounded Rectangle 33"/>
+          <p:cNvSpPr/>
+          <p:nvPr/>
+        </p:nvSpPr>
+        <p:spPr>
+          <a:xfrm>
+            <a:off x="2199589" y="5166359"/>
+            <a:ext cx="182880" cy="182880"/>
+          </a:xfrm>
+          <a:prstGeom prst="roundRect">
+            <a:avLst>
+              <a:gd name="adj" fmla="val 15000"/>
+            </a:avLst>
+          </a:prstGeom>
+          <a:solidFill>
+            <a:srgbClr val="3B82F6"/>
+          </a:solidFill>
+          <a:ln>
+            <a:noFill/>
+          </a:ln>
+        </p:spPr>
+        <p:style>
+          <a:lnRef idx="1">
+            <a:schemeClr val="accent1"/>
+          </a:lnRef>
+          <a:fillRef idx="3">
+            <a:schemeClr val="accent1"/>
+          </a:fillRef>
+          <a:effectRef idx="2">
+            <a:schemeClr val="accent1"/>
+          </a:effectRef>
+          <a:fontRef idx="minor">
+            <a:schemeClr val="lt1"/>
+          </a:fontRef>
+        </p:style>
+        <p:txBody>
+          <a:bodyPr rtlCol="0" anchor="ctr"/>
+          <a:lstStyle/>
+          <a:p>
+            <a:pPr algn="ctr"/>
+          </a:p>
+        </p:txBody>
+      </p:sp>
+      <p:sp>
+        <p:nvSpPr>
+          <p:cNvPr id="35" name="TextBox 34"/>
+          <p:cNvSpPr txBox="1"/>
+          <p:nvPr/>
+        </p:nvSpPr>
+        <p:spPr>
+          <a:xfrm>
+            <a:off x="2199589" y="5184647"/>
+            <a:ext cx="182880" cy="146304"/>
+          </a:xfrm>
+          <a:prstGeom prst="rect">
+            <a:avLst/>
+          </a:prstGeom>
+          <a:noFill/>
+        </p:spPr>
+        <p:txBody>
+          <a:bodyPr wrap="square" lIns="0" tIns="0" rIns="0" bIns="0">
+            <a:spAutoFit/>
+          </a:bodyPr>
+          <a:lstStyle/>
+          <a:p>
+            <a:pPr algn="ctr"/>
+            <a:r>
+              <a:rPr sz="2800" b="1" i="0">
+                <a:solidFill>
+                  <a:srgbClr val="0F172A"/>
+                </a:solidFill>
+                <a:latin typeface="Calibri"/>
+              </a:rPr>
+              <a:t>🌍</a:t>
+            </a:r>
+          </a:p>
+        </p:txBody>
+      </p:sp>
+      <p:sp>
+        <p:nvSpPr>
+          <p:cNvPr id="36" name="TextBox 35"/>
+          <p:cNvSpPr txBox="1"/>
+          <p:nvPr/>
+        </p:nvSpPr>
+        <p:spPr>
+          <a:xfrm>
+            <a:off x="640080" y="5532120"/>
+            <a:ext cx="3301898" cy="228600"/>
+          </a:xfrm>
+          <a:prstGeom prst="rect">
+            <a:avLst/>
+          </a:prstGeom>
+          <a:noFill/>
+        </p:spPr>
+        <p:txBody>
+          <a:bodyPr wrap="square" lIns="0" tIns="0" rIns="0" bIns="0">
+            <a:spAutoFit/>
+          </a:bodyPr>
+          <a:lstStyle/>
+          <a:p>
+            <a:pPr algn="ctr"/>
+            <a:r>
+              <a:rPr sz="1400" b="1" i="0">
+                <a:solidFill>
+                  <a:srgbClr val="F8FAFC"/>
+                </a:solidFill>
+                <a:latin typeface="Calibri"/>
+              </a:rPr>
+              <a:t>Global Scale</a:t>
+            </a:r>
+          </a:p>
+        </p:txBody>
+      </p:sp>
+      <p:sp>
+        <p:nvSpPr>
+          <p:cNvPr id="37" name="TextBox 36"/>
+          <p:cNvSpPr txBox="1"/>
+          <p:nvPr/>
+        </p:nvSpPr>
+        <p:spPr>
+          <a:xfrm>
+            <a:off x="640080" y="5852159"/>
+            <a:ext cx="3301898" cy="-182880"/>
+          </a:xfrm>
+          <a:prstGeom prst="rect">
+            <a:avLst/>
+          </a:prstGeom>
+          <a:noFill/>
+        </p:spPr>
+        <p:txBody>
+          <a:bodyPr wrap="square" lIns="0" tIns="0" rIns="0" bIns="0">
+            <a:spAutoFit/>
+          </a:bodyPr>
+          <a:lstStyle/>
+          <a:p>
+            <a:pPr algn="ctr"/>
+            <a:r>
+              <a:rPr sz="1100" b="0" i="0">
+                <a:solidFill>
+                  <a:srgbClr val="CBD5E1"/>
+                </a:solidFill>
+                <a:latin typeface="Calibri"/>
+              </a:rPr>
+              <a:t>Multi-region deployment with 99.99% SLA.</a:t>
+            </a:r>
+          </a:p>
+        </p:txBody>
+      </p:sp>
+      <p:sp>
+        <p:nvSpPr>
+          <p:cNvPr id="38" name="Rounded Rectangle 37"/>
+          <p:cNvSpPr/>
+          <p:nvPr/>
+        </p:nvSpPr>
+        <p:spPr>
+          <a:xfrm>
+            <a:off x="4262018" y="4983479"/>
+            <a:ext cx="3667658" cy="868680"/>
+          </a:xfrm>
+          <a:prstGeom prst="roundRect">
+            <a:avLst>
+              <a:gd name="adj" fmla="val 5263"/>
+            </a:avLst>
+          </a:prstGeom>
+          <a:solidFill>
+            <a:srgbClr val="1E293B"/>
+          </a:solidFill>
+          <a:ln>
+            <a:noFill/>
+          </a:ln>
+        </p:spPr>
+        <p:style>
+          <a:lnRef idx="1">
+            <a:schemeClr val="accent1"/>
+          </a:lnRef>
+          <a:fillRef idx="3">
+            <a:schemeClr val="accent1"/>
+          </a:fillRef>
+          <a:effectRef idx="2">
+            <a:schemeClr val="accent1"/>
+          </a:effectRef>
+          <a:fontRef idx="minor">
+            <a:schemeClr val="lt1"/>
+          </a:fontRef>
+        </p:style>
+        <p:txBody>
+          <a:bodyPr rtlCol="0" anchor="ctr"/>
+          <a:lstStyle/>
+          <a:p>
+            <a:pPr algn="ctr"/>
+          </a:p>
+        </p:txBody>
+      </p:sp>
+      <p:sp>
+        <p:nvSpPr>
+          <p:cNvPr id="39" name="Rounded Rectangle 38"/>
+          <p:cNvSpPr/>
+          <p:nvPr/>
+        </p:nvSpPr>
+        <p:spPr>
+          <a:xfrm>
+            <a:off x="6004407" y="5166359"/>
+            <a:ext cx="182880" cy="182880"/>
+          </a:xfrm>
+          <a:prstGeom prst="roundRect">
+            <a:avLst>
+              <a:gd name="adj" fmla="val 15000"/>
+            </a:avLst>
+          </a:prstGeom>
+          <a:solidFill>
+            <a:srgbClr val="3B82F6"/>
+          </a:solidFill>
+          <a:ln>
+            <a:noFill/>
+          </a:ln>
+        </p:spPr>
+        <p:style>
+          <a:lnRef idx="1">
+            <a:schemeClr val="accent1"/>
+          </a:lnRef>
+          <a:fillRef idx="3">
+            <a:schemeClr val="accent1"/>
+          </a:fillRef>
+          <a:effectRef idx="2">
+            <a:schemeClr val="accent1"/>
+          </a:effectRef>
+          <a:fontRef idx="minor">
+            <a:schemeClr val="lt1"/>
+          </a:fontRef>
+        </p:style>
+        <p:txBody>
+          <a:bodyPr rtlCol="0" anchor="ctr"/>
+          <a:lstStyle/>
+          <a:p>
+            <a:pPr algn="ctr"/>
+          </a:p>
+        </p:txBody>
+      </p:sp>
+      <p:sp>
+        <p:nvSpPr>
+          <p:cNvPr id="40" name="TextBox 39"/>
+          <p:cNvSpPr txBox="1"/>
+          <p:nvPr/>
+        </p:nvSpPr>
+        <p:spPr>
+          <a:xfrm>
+            <a:off x="6004407" y="5184647"/>
+            <a:ext cx="182880" cy="146304"/>
+          </a:xfrm>
+          <a:prstGeom prst="rect">
+            <a:avLst/>
+          </a:prstGeom>
+          <a:noFill/>
+        </p:spPr>
+        <p:txBody>
+          <a:bodyPr wrap="square" lIns="0" tIns="0" rIns="0" bIns="0">
+            <a:spAutoFit/>
+          </a:bodyPr>
+          <a:lstStyle/>
+          <a:p>
+            <a:pPr algn="ctr"/>
+            <a:r>
+              <a:rPr sz="2800" b="1" i="0">
+                <a:solidFill>
+                  <a:srgbClr val="0F172A"/>
+                </a:solidFill>
+                <a:latin typeface="Calibri"/>
+              </a:rPr>
+              <a:t>🤝</a:t>
+            </a:r>
+          </a:p>
+        </p:txBody>
+      </p:sp>
+      <p:sp>
+        <p:nvSpPr>
+          <p:cNvPr id="41" name="TextBox 40"/>
+          <p:cNvSpPr txBox="1"/>
+          <p:nvPr/>
+        </p:nvSpPr>
+        <p:spPr>
+          <a:xfrm>
+            <a:off x="4444898" y="5532120"/>
+            <a:ext cx="3301898" cy="228600"/>
+          </a:xfrm>
+          <a:prstGeom prst="rect">
+            <a:avLst/>
+          </a:prstGeom>
+          <a:noFill/>
+        </p:spPr>
+        <p:txBody>
+          <a:bodyPr wrap="square" lIns="0" tIns="0" rIns="0" bIns="0">
+            <a:spAutoFit/>
+          </a:bodyPr>
+          <a:lstStyle/>
+          <a:p>
+            <a:pPr algn="ctr"/>
+            <a:r>
+              <a:rPr sz="1400" b="1" i="0">
+                <a:solidFill>
+                  <a:srgbClr val="F8FAFC"/>
+                </a:solidFill>
+                <a:latin typeface="Calibri"/>
+              </a:rPr>
+              <a:t>API-First</a:t>
+            </a:r>
+          </a:p>
+        </p:txBody>
+      </p:sp>
+      <p:sp>
+        <p:nvSpPr>
+          <p:cNvPr id="42" name="TextBox 41"/>
+          <p:cNvSpPr txBox="1"/>
+          <p:nvPr/>
+        </p:nvSpPr>
+        <p:spPr>
+          <a:xfrm>
+            <a:off x="4444898" y="5852159"/>
+            <a:ext cx="3301898" cy="-182880"/>
+          </a:xfrm>
+          <a:prstGeom prst="rect">
+            <a:avLst/>
+          </a:prstGeom>
+          <a:noFill/>
+        </p:spPr>
+        <p:txBody>
+          <a:bodyPr wrap="square" lIns="0" tIns="0" rIns="0" bIns="0">
+            <a:spAutoFit/>
+          </a:bodyPr>
+          <a:lstStyle/>
+          <a:p>
+            <a:pPr algn="ctr"/>
+            <a:r>
+              <a:rPr sz="1100" b="0" i="0">
+                <a:solidFill>
+                  <a:srgbClr val="CBD5E1"/>
+                </a:solidFill>
+                <a:latin typeface="Calibri"/>
+              </a:rPr>
+              <a:t>Full REST + GraphQL coverage for integrations.</a:t>
+            </a:r>
+          </a:p>
+        </p:txBody>
+      </p:sp>
+      <p:sp>
+        <p:nvSpPr>
+          <p:cNvPr id="43" name="Rounded Rectangle 42"/>
+          <p:cNvSpPr/>
+          <p:nvPr/>
+        </p:nvSpPr>
+        <p:spPr>
+          <a:xfrm>
+            <a:off x="8066836" y="4983479"/>
+            <a:ext cx="3667658" cy="868680"/>
+          </a:xfrm>
+          <a:prstGeom prst="roundRect">
+            <a:avLst>
+              <a:gd name="adj" fmla="val 5263"/>
+            </a:avLst>
+          </a:prstGeom>
+          <a:solidFill>
+            <a:srgbClr val="1E293B"/>
+          </a:solidFill>
+          <a:ln>
+            <a:noFill/>
+          </a:ln>
+        </p:spPr>
+        <p:style>
+          <a:lnRef idx="1">
+            <a:schemeClr val="accent1"/>
+          </a:lnRef>
+          <a:fillRef idx="3">
+            <a:schemeClr val="accent1"/>
+          </a:fillRef>
+          <a:effectRef idx="2">
+            <a:schemeClr val="accent1"/>
+          </a:effectRef>
+          <a:fontRef idx="minor">
+            <a:schemeClr val="lt1"/>
+          </a:fontRef>
+        </p:style>
+        <p:txBody>
+          <a:bodyPr rtlCol="0" anchor="ctr"/>
+          <a:lstStyle/>
+          <a:p>
+            <a:pPr algn="ctr"/>
+          </a:p>
+        </p:txBody>
+      </p:sp>
+      <p:sp>
+        <p:nvSpPr>
+          <p:cNvPr id="44" name="Rounded Rectangle 43"/>
+          <p:cNvSpPr/>
+          <p:nvPr/>
+        </p:nvSpPr>
+        <p:spPr>
+          <a:xfrm>
+            <a:off x="9809226" y="5166359"/>
+            <a:ext cx="182880" cy="182880"/>
+          </a:xfrm>
+          <a:prstGeom prst="roundRect">
+            <a:avLst>
+              <a:gd name="adj" fmla="val 15000"/>
+            </a:avLst>
+          </a:prstGeom>
+          <a:solidFill>
+            <a:srgbClr val="3B82F6"/>
+          </a:solidFill>
+          <a:ln>
+            <a:noFill/>
+          </a:ln>
+        </p:spPr>
+        <p:style>
+          <a:lnRef idx="1">
+            <a:schemeClr val="accent1"/>
+          </a:lnRef>
+          <a:fillRef idx="3">
+            <a:schemeClr val="accent1"/>
+          </a:fillRef>
+          <a:effectRef idx="2">
+            <a:schemeClr val="accent1"/>
+          </a:effectRef>
+          <a:fontRef idx="minor">
+            <a:schemeClr val="lt1"/>
+          </a:fontRef>
+        </p:style>
+        <p:txBody>
+          <a:bodyPr rtlCol="0" anchor="ctr"/>
+          <a:lstStyle/>
+          <a:p>
+            <a:pPr algn="ctr"/>
+          </a:p>
+        </p:txBody>
+      </p:sp>
+      <p:sp>
+        <p:nvSpPr>
+          <p:cNvPr id="45" name="TextBox 44"/>
+          <p:cNvSpPr txBox="1"/>
+          <p:nvPr/>
+        </p:nvSpPr>
+        <p:spPr>
+          <a:xfrm>
+            <a:off x="9809226" y="5184647"/>
+            <a:ext cx="182880" cy="146304"/>
+          </a:xfrm>
+          <a:prstGeom prst="rect">
+            <a:avLst/>
+          </a:prstGeom>
+          <a:noFill/>
+        </p:spPr>
+        <p:txBody>
+          <a:bodyPr wrap="square" lIns="0" tIns="0" rIns="0" bIns="0">
+            <a:spAutoFit/>
+          </a:bodyPr>
+          <a:lstStyle/>
+          <a:p>
+            <a:pPr algn="ctr"/>
+            <a:r>
+              <a:rPr sz="2800" b="1" i="0">
+                <a:solidFill>
+                  <a:srgbClr val="0F172A"/>
+                </a:solidFill>
+                <a:latin typeface="Calibri"/>
+              </a:rPr>
+              <a:t>💬</a:t>
+            </a:r>
+          </a:p>
+        </p:txBody>
+      </p:sp>
+      <p:sp>
+        <p:nvSpPr>
+          <p:cNvPr id="46" name="TextBox 45"/>
+          <p:cNvSpPr txBox="1"/>
+          <p:nvPr/>
+        </p:nvSpPr>
+        <p:spPr>
+          <a:xfrm>
+            <a:off x="8249716" y="5532120"/>
+            <a:ext cx="3301898" cy="228600"/>
+          </a:xfrm>
+          <a:prstGeom prst="rect">
+            <a:avLst/>
+          </a:prstGeom>
+          <a:noFill/>
+        </p:spPr>
+        <p:txBody>
+          <a:bodyPr wrap="square" lIns="0" tIns="0" rIns="0" bIns="0">
+            <a:spAutoFit/>
+          </a:bodyPr>
+          <a:lstStyle/>
+          <a:p>
+            <a:pPr algn="ctr"/>
+            <a:r>
+              <a:rPr sz="1400" b="1" i="0">
+                <a:solidFill>
+                  <a:srgbClr val="F8FAFC"/>
+                </a:solidFill>
+                <a:latin typeface="Calibri"/>
+              </a:rPr>
+              <a:t>24/7 Support</a:t>
+            </a:r>
+          </a:p>
+        </p:txBody>
+      </p:sp>
+      <p:sp>
+        <p:nvSpPr>
+          <p:cNvPr id="47" name="TextBox 46"/>
+          <p:cNvSpPr txBox="1"/>
+          <p:nvPr/>
+        </p:nvSpPr>
+        <p:spPr>
+          <a:xfrm>
+            <a:off x="8249716" y="5852159"/>
+            <a:ext cx="3301898" cy="-182880"/>
+          </a:xfrm>
+          <a:prstGeom prst="rect">
+            <a:avLst/>
+          </a:prstGeom>
+          <a:noFill/>
+        </p:spPr>
+        <p:txBody>
+          <a:bodyPr wrap="square" lIns="0" tIns="0" rIns="0" bIns="0">
+            <a:spAutoFit/>
+          </a:bodyPr>
+          <a:lstStyle/>
+          <a:p>
+            <a:pPr algn="ctr"/>
+            <a:r>
+              <a:rPr sz="1100" b="0" i="0">
+                <a:solidFill>
+                  <a:srgbClr val="CBD5E1"/>
+                </a:solidFill>
+                <a:latin typeface="Calibri"/>
+              </a:rPr>
+              <a:t>Dedicated account team for enterprise clients.</a:t>
+            </a:r>
+          </a:p>
+        </p:txBody>
+      </p:sp>
+    </p:spTree>
+  </p:cSld>
+  <p:clrMapOvr>
+    <a:masterClrMapping/>
+  </p:clrMapOvr>
+</p:sld>
+</file>
+
+<file path=ppt/slides/slide16.xml><?xml version="1.0" encoding="utf-8"?>
+<p:sld xmlns:a="http://schemas.openxmlformats.org/drawingml/2006/main" xmlns:p="http://schemas.openxmlformats.org/presentationml/2006/main" xmlns:r="http://schemas.openxmlformats.org/officeDocument/2006/relationships">
+  <p:cSld>
+    <p:bg>
+      <p:bgPr>
+        <a:solidFill>
+          <a:srgbClr val="0F172A"/>
+        </a:solidFill>
+        <a:effectLst/>
+      </p:bgPr>
+    </p:bg>
+    <p:spTree>
+      <p:nvGrpSpPr>
+        <p:cNvPr id="1" name=""/>
+        <p:cNvGrpSpPr/>
+        <p:nvPr/>
+      </p:nvGrpSpPr>
+      <p:grpSpPr/>
+      <p:sp>
+        <p:nvSpPr>
+          <p:cNvPr id="2" name="Rectangle 1"/>
+          <p:cNvSpPr/>
+          <p:nvPr/>
+        </p:nvSpPr>
+        <p:spPr>
+          <a:xfrm>
+            <a:off x="457200" y="457200"/>
+            <a:ext cx="45720" cy="548640"/>
+          </a:xfrm>
+          <a:prstGeom prst="rect">
+            <a:avLst/>
+          </a:prstGeom>
+          <a:solidFill>
+            <a:srgbClr val="3B82F6"/>
+          </a:solidFill>
+          <a:ln>
+            <a:noFill/>
+          </a:ln>
+        </p:spPr>
+        <p:style>
+          <a:lnRef idx="1">
+            <a:schemeClr val="accent1"/>
+          </a:lnRef>
+          <a:fillRef idx="3">
+            <a:schemeClr val="accent1"/>
+          </a:fillRef>
+          <a:effectRef idx="2">
+            <a:schemeClr val="accent1"/>
+          </a:effectRef>
+          <a:fontRef idx="minor">
+            <a:schemeClr val="lt1"/>
+          </a:fontRef>
+        </p:style>
+        <p:txBody>
+          <a:bodyPr rtlCol="0" anchor="ctr"/>
+          <a:lstStyle/>
+          <a:p>
+            <a:pPr algn="ctr"/>
+          </a:p>
+        </p:txBody>
+      </p:sp>
+      <p:sp>
+        <p:nvSpPr>
+          <p:cNvPr id="3" name="TextBox 2"/>
+          <p:cNvSpPr txBox="1"/>
+          <p:nvPr/>
+        </p:nvSpPr>
+        <p:spPr>
+          <a:xfrm>
+            <a:off x="685800" y="457200"/>
+            <a:ext cx="9567367" cy="548640"/>
+          </a:xfrm>
+          <a:prstGeom prst="rect">
+            <a:avLst/>
+          </a:prstGeom>
+          <a:noFill/>
+        </p:spPr>
+        <p:txBody>
+          <a:bodyPr wrap="square" lIns="0" tIns="0" rIns="0" bIns="0">
+            <a:spAutoFit/>
+          </a:bodyPr>
+          <a:lstStyle/>
+          <a:p>
+            <a:pPr algn="l"/>
+            <a:r>
+              <a:rPr sz="2800" b="1" i="0">
+                <a:solidFill>
+                  <a:srgbClr val="F8FAFC"/>
+                </a:solidFill>
+                <a:latin typeface="Calibri Light"/>
+              </a:rPr>
+              <a:t>Phase 4: Advanced Charts</a:t>
+            </a:r>
+          </a:p>
+        </p:txBody>
+      </p:sp>
+      <p:sp>
+        <p:nvSpPr>
+          <p:cNvPr id="4" name="Rounded Rectangle 3"/>
+          <p:cNvSpPr/>
+          <p:nvPr/>
+        </p:nvSpPr>
+        <p:spPr>
+          <a:xfrm>
+            <a:off x="10436047" y="571500"/>
+            <a:ext cx="1298448" cy="320040"/>
+          </a:xfrm>
+          <a:prstGeom prst="roundRect">
+            <a:avLst>
+              <a:gd name="adj" fmla="val 50000"/>
+            </a:avLst>
+          </a:prstGeom>
+          <a:solidFill>
+            <a:srgbClr val="3B82F6"/>
+          </a:solidFill>
+          <a:ln>
+            <a:noFill/>
+          </a:ln>
+        </p:spPr>
+        <p:style>
+          <a:lnRef idx="1">
+            <a:schemeClr val="accent1"/>
+          </a:lnRef>
+          <a:fillRef idx="3">
+            <a:schemeClr val="accent1"/>
+          </a:fillRef>
+          <a:effectRef idx="2">
+            <a:schemeClr val="accent1"/>
+          </a:effectRef>
+          <a:fontRef idx="minor">
+            <a:schemeClr val="lt1"/>
+          </a:fontRef>
+        </p:style>
+        <p:txBody>
+          <a:bodyPr rtlCol="0" anchor="ctr" wrap="none"/>
+          <a:lstStyle/>
+          <a:p>
+            <a:pPr algn="ctr"/>
+            <a:r>
+              <a:rPr sz="1100" b="1">
+                <a:solidFill>
+                  <a:srgbClr val="FFFFFF"/>
+                </a:solidFill>
+                <a:latin typeface="Calibri"/>
+              </a:rPr>
+              <a:t>ScatterPlot</a:t>
+            </a:r>
+          </a:p>
+        </p:txBody>
+      </p:sp>
+      <p:sp>
+        <p:nvSpPr>
+          <p:cNvPr id="5" name="TextBox 4"/>
+          <p:cNvSpPr txBox="1"/>
+          <p:nvPr/>
+        </p:nvSpPr>
+        <p:spPr>
+          <a:xfrm>
+            <a:off x="457200" y="1280160"/>
+            <a:ext cx="11277295" cy="365760"/>
+          </a:xfrm>
+          <a:prstGeom prst="rect">
+            <a:avLst/>
+          </a:prstGeom>
+          <a:noFill/>
+        </p:spPr>
+        <p:txBody>
+          <a:bodyPr wrap="square" lIns="0" tIns="0" rIns="0" bIns="0">
+            <a:spAutoFit/>
+          </a:bodyPr>
+          <a:lstStyle/>
+          <a:p>
+            <a:pPr algn="ctr"/>
+            <a:r>
+              <a:rPr sz="2800" b="1" i="0">
+                <a:solidFill>
+                  <a:srgbClr val="F8FAFC"/>
+                </a:solidFill>
+                <a:latin typeface="Calibri"/>
+              </a:rPr>
+              <a:t>Algorithm Performance Landscape</a:t>
+            </a:r>
+          </a:p>
+        </p:txBody>
+      </p:sp>
+      <p:sp>
+        <p:nvSpPr>
+          <p:cNvPr id="6" name="Rectangle 5"/>
+          <p:cNvSpPr/>
+          <p:nvPr/>
+        </p:nvSpPr>
+        <p:spPr>
+          <a:xfrm>
+            <a:off x="1097280" y="4160520"/>
+            <a:ext cx="10362895" cy="27432"/>
+          </a:xfrm>
+          <a:prstGeom prst="rect">
+            <a:avLst/>
+          </a:prstGeom>
+          <a:solidFill>
+            <a:srgbClr val="334155"/>
+          </a:solidFill>
+          <a:ln>
+            <a:noFill/>
+          </a:ln>
+        </p:spPr>
+        <p:style>
+          <a:lnRef idx="1">
+            <a:schemeClr val="accent1"/>
+          </a:lnRef>
+          <a:fillRef idx="3">
+            <a:schemeClr val="accent1"/>
+          </a:fillRef>
+          <a:effectRef idx="2">
+            <a:schemeClr val="accent1"/>
+          </a:effectRef>
+          <a:fontRef idx="minor">
+            <a:schemeClr val="lt1"/>
+          </a:fontRef>
+        </p:style>
+        <p:txBody>
+          <a:bodyPr rtlCol="0" anchor="ctr"/>
+          <a:lstStyle/>
+          <a:p>
+            <a:pPr algn="ctr"/>
+          </a:p>
+        </p:txBody>
+      </p:sp>
+      <p:sp>
+        <p:nvSpPr>
+          <p:cNvPr id="7" name="Rectangle 6"/>
+          <p:cNvSpPr/>
+          <p:nvPr/>
+        </p:nvSpPr>
+        <p:spPr>
+          <a:xfrm>
+            <a:off x="1097280" y="1645920"/>
+            <a:ext cx="27432" cy="2560320"/>
+          </a:xfrm>
+          <a:prstGeom prst="rect">
+            <a:avLst/>
+          </a:prstGeom>
+          <a:solidFill>
+            <a:srgbClr val="334155"/>
+          </a:solidFill>
+          <a:ln>
+            <a:noFill/>
+          </a:ln>
+        </p:spPr>
+        <p:style>
+          <a:lnRef idx="1">
+            <a:schemeClr val="accent1"/>
+          </a:lnRef>
+          <a:fillRef idx="3">
+            <a:schemeClr val="accent1"/>
+          </a:fillRef>
+          <a:effectRef idx="2">
+            <a:schemeClr val="accent1"/>
+          </a:effectRef>
+          <a:fontRef idx="minor">
+            <a:schemeClr val="lt1"/>
+          </a:fontRef>
+        </p:style>
+        <p:txBody>
+          <a:bodyPr rtlCol="0" anchor="ctr"/>
+          <a:lstStyle/>
+          <a:p>
+            <a:pPr algn="ctr"/>
+          </a:p>
+        </p:txBody>
+      </p:sp>
+      <p:sp>
+        <p:nvSpPr>
+          <p:cNvPr id="8" name="Rectangle 7"/>
+          <p:cNvSpPr/>
+          <p:nvPr/>
+        </p:nvSpPr>
+        <p:spPr>
+          <a:xfrm>
+            <a:off x="1097280" y="1645920"/>
+            <a:ext cx="18288" cy="2560320"/>
+          </a:xfrm>
+          <a:prstGeom prst="rect">
+            <a:avLst/>
+          </a:prstGeom>
+          <a:solidFill>
+            <a:srgbClr val="1E293B"/>
+          </a:solidFill>
+          <a:ln>
+            <a:noFill/>
+          </a:ln>
+        </p:spPr>
+        <p:style>
+          <a:lnRef idx="1">
+            <a:schemeClr val="accent1"/>
+          </a:lnRef>
+          <a:fillRef idx="3">
+            <a:schemeClr val="accent1"/>
+          </a:fillRef>
+          <a:effectRef idx="2">
+            <a:schemeClr val="accent1"/>
+          </a:effectRef>
+          <a:fontRef idx="minor">
+            <a:schemeClr val="lt1"/>
+          </a:fontRef>
+        </p:style>
+        <p:txBody>
+          <a:bodyPr rtlCol="0" anchor="ctr"/>
+          <a:lstStyle/>
+          <a:p>
+            <a:pPr algn="ctr"/>
+          </a:p>
+        </p:txBody>
+      </p:sp>
+      <p:sp>
+        <p:nvSpPr>
+          <p:cNvPr id="9" name="Rectangle 8"/>
+          <p:cNvSpPr/>
+          <p:nvPr/>
+        </p:nvSpPr>
+        <p:spPr>
+          <a:xfrm>
+            <a:off x="1097280" y="1645920"/>
+            <a:ext cx="10362895" cy="18288"/>
+          </a:xfrm>
+          <a:prstGeom prst="rect">
+            <a:avLst/>
+          </a:prstGeom>
+          <a:solidFill>
+            <a:srgbClr val="1E293B"/>
+          </a:solidFill>
+          <a:ln>
+            <a:noFill/>
+          </a:ln>
+        </p:spPr>
+        <p:style>
+          <a:lnRef idx="1">
+            <a:schemeClr val="accent1"/>
+          </a:lnRef>
+          <a:fillRef idx="3">
+            <a:schemeClr val="accent1"/>
+          </a:fillRef>
+          <a:effectRef idx="2">
+            <a:schemeClr val="accent1"/>
+          </a:effectRef>
+          <a:fontRef idx="minor">
+            <a:schemeClr val="lt1"/>
+          </a:fontRef>
+        </p:style>
+        <p:txBody>
+          <a:bodyPr rtlCol="0" anchor="ctr"/>
+          <a:lstStyle/>
+          <a:p>
+            <a:pPr algn="ctr"/>
+          </a:p>
+        </p:txBody>
+      </p:sp>
+      <p:sp>
+        <p:nvSpPr>
+          <p:cNvPr id="10" name="Rectangle 9"/>
+          <p:cNvSpPr/>
+          <p:nvPr/>
+        </p:nvSpPr>
+        <p:spPr>
+          <a:xfrm>
+            <a:off x="3688003" y="1645920"/>
+            <a:ext cx="18288" cy="2560320"/>
+          </a:xfrm>
+          <a:prstGeom prst="rect">
+            <a:avLst/>
+          </a:prstGeom>
+          <a:solidFill>
+            <a:srgbClr val="1E293B"/>
+          </a:solidFill>
+          <a:ln>
+            <a:noFill/>
+          </a:ln>
+        </p:spPr>
+        <p:style>
+          <a:lnRef idx="1">
+            <a:schemeClr val="accent1"/>
+          </a:lnRef>
+          <a:fillRef idx="3">
+            <a:schemeClr val="accent1"/>
+          </a:fillRef>
+          <a:effectRef idx="2">
+            <a:schemeClr val="accent1"/>
+          </a:effectRef>
+          <a:fontRef idx="minor">
+            <a:schemeClr val="lt1"/>
+          </a:fontRef>
+        </p:style>
+        <p:txBody>
+          <a:bodyPr rtlCol="0" anchor="ctr"/>
+          <a:lstStyle/>
+          <a:p>
+            <a:pPr algn="ctr"/>
+          </a:p>
+        </p:txBody>
+      </p:sp>
+      <p:sp>
+        <p:nvSpPr>
+          <p:cNvPr id="11" name="Rectangle 10"/>
+          <p:cNvSpPr/>
+          <p:nvPr/>
+        </p:nvSpPr>
+        <p:spPr>
+          <a:xfrm>
+            <a:off x="1097280" y="2286000"/>
+            <a:ext cx="10362895" cy="18288"/>
+          </a:xfrm>
+          <a:prstGeom prst="rect">
+            <a:avLst/>
+          </a:prstGeom>
+          <a:solidFill>
+            <a:srgbClr val="1E293B"/>
+          </a:solidFill>
+          <a:ln>
+            <a:noFill/>
+          </a:ln>
+        </p:spPr>
+        <p:style>
+          <a:lnRef idx="1">
+            <a:schemeClr val="accent1"/>
+          </a:lnRef>
+          <a:fillRef idx="3">
+            <a:schemeClr val="accent1"/>
+          </a:fillRef>
+          <a:effectRef idx="2">
+            <a:schemeClr val="accent1"/>
+          </a:effectRef>
+          <a:fontRef idx="minor">
+            <a:schemeClr val="lt1"/>
+          </a:fontRef>
+        </p:style>
+        <p:txBody>
+          <a:bodyPr rtlCol="0" anchor="ctr"/>
+          <a:lstStyle/>
+          <a:p>
+            <a:pPr algn="ctr"/>
+          </a:p>
+        </p:txBody>
+      </p:sp>
+      <p:sp>
+        <p:nvSpPr>
+          <p:cNvPr id="12" name="Rectangle 11"/>
+          <p:cNvSpPr/>
+          <p:nvPr/>
+        </p:nvSpPr>
+        <p:spPr>
+          <a:xfrm>
+            <a:off x="6278727" y="1645920"/>
+            <a:ext cx="18288" cy="2560320"/>
+          </a:xfrm>
+          <a:prstGeom prst="rect">
+            <a:avLst/>
+          </a:prstGeom>
+          <a:solidFill>
+            <a:srgbClr val="1E293B"/>
+          </a:solidFill>
+          <a:ln>
+            <a:noFill/>
+          </a:ln>
+        </p:spPr>
+        <p:style>
+          <a:lnRef idx="1">
+            <a:schemeClr val="accent1"/>
+          </a:lnRef>
+          <a:fillRef idx="3">
+            <a:schemeClr val="accent1"/>
+          </a:fillRef>
+          <a:effectRef idx="2">
+            <a:schemeClr val="accent1"/>
+          </a:effectRef>
+          <a:fontRef idx="minor">
+            <a:schemeClr val="lt1"/>
+          </a:fontRef>
+        </p:style>
+        <p:txBody>
+          <a:bodyPr rtlCol="0" anchor="ctr"/>
+          <a:lstStyle/>
+          <a:p>
+            <a:pPr algn="ctr"/>
+          </a:p>
+        </p:txBody>
+      </p:sp>
+      <p:sp>
+        <p:nvSpPr>
+          <p:cNvPr id="13" name="Rectangle 12"/>
+          <p:cNvSpPr/>
+          <p:nvPr/>
+        </p:nvSpPr>
+        <p:spPr>
+          <a:xfrm>
+            <a:off x="1097280" y="2926080"/>
+            <a:ext cx="10362895" cy="18288"/>
+          </a:xfrm>
+          <a:prstGeom prst="rect">
+            <a:avLst/>
+          </a:prstGeom>
+          <a:solidFill>
+            <a:srgbClr val="1E293B"/>
+          </a:solidFill>
+          <a:ln>
+            <a:noFill/>
+          </a:ln>
+        </p:spPr>
+        <p:style>
+          <a:lnRef idx="1">
+            <a:schemeClr val="accent1"/>
+          </a:lnRef>
+          <a:fillRef idx="3">
+            <a:schemeClr val="accent1"/>
+          </a:fillRef>
+          <a:effectRef idx="2">
+            <a:schemeClr val="accent1"/>
+          </a:effectRef>
+          <a:fontRef idx="minor">
+            <a:schemeClr val="lt1"/>
+          </a:fontRef>
+        </p:style>
+        <p:txBody>
+          <a:bodyPr rtlCol="0" anchor="ctr"/>
+          <a:lstStyle/>
+          <a:p>
+            <a:pPr algn="ctr"/>
+          </a:p>
+        </p:txBody>
+      </p:sp>
+      <p:sp>
+        <p:nvSpPr>
+          <p:cNvPr id="14" name="Rectangle 13"/>
+          <p:cNvSpPr/>
+          <p:nvPr/>
+        </p:nvSpPr>
+        <p:spPr>
+          <a:xfrm>
+            <a:off x="8869451" y="1645920"/>
+            <a:ext cx="18288" cy="2560320"/>
+          </a:xfrm>
+          <a:prstGeom prst="rect">
+            <a:avLst/>
+          </a:prstGeom>
+          <a:solidFill>
+            <a:srgbClr val="1E293B"/>
+          </a:solidFill>
+          <a:ln>
+            <a:noFill/>
+          </a:ln>
+        </p:spPr>
+        <p:style>
+          <a:lnRef idx="1">
+            <a:schemeClr val="accent1"/>
+          </a:lnRef>
+          <a:fillRef idx="3">
+            <a:schemeClr val="accent1"/>
+          </a:fillRef>
+          <a:effectRef idx="2">
+            <a:schemeClr val="accent1"/>
+          </a:effectRef>
+          <a:fontRef idx="minor">
+            <a:schemeClr val="lt1"/>
+          </a:fontRef>
+        </p:style>
+        <p:txBody>
+          <a:bodyPr rtlCol="0" anchor="ctr"/>
+          <a:lstStyle/>
+          <a:p>
+            <a:pPr algn="ctr"/>
+          </a:p>
+        </p:txBody>
+      </p:sp>
+      <p:sp>
+        <p:nvSpPr>
+          <p:cNvPr id="15" name="Rectangle 14"/>
+          <p:cNvSpPr/>
+          <p:nvPr/>
+        </p:nvSpPr>
+        <p:spPr>
+          <a:xfrm>
+            <a:off x="1097280" y="3566160"/>
+            <a:ext cx="10362895" cy="18288"/>
+          </a:xfrm>
+          <a:prstGeom prst="rect">
+            <a:avLst/>
+          </a:prstGeom>
+          <a:solidFill>
+            <a:srgbClr val="1E293B"/>
+          </a:solidFill>
+          <a:ln>
+            <a:noFill/>
+          </a:ln>
+        </p:spPr>
+        <p:style>
+          <a:lnRef idx="1">
+            <a:schemeClr val="accent1"/>
+          </a:lnRef>
+          <a:fillRef idx="3">
+            <a:schemeClr val="accent1"/>
+          </a:fillRef>
+          <a:effectRef idx="2">
+            <a:schemeClr val="accent1"/>
+          </a:effectRef>
+          <a:fontRef idx="minor">
+            <a:schemeClr val="lt1"/>
+          </a:fontRef>
+        </p:style>
+        <p:txBody>
+          <a:bodyPr rtlCol="0" anchor="ctr"/>
+          <a:lstStyle/>
+          <a:p>
+            <a:pPr algn="ctr"/>
+          </a:p>
+        </p:txBody>
+      </p:sp>
+      <p:sp>
+        <p:nvSpPr>
+          <p:cNvPr id="16" name="Rectangle 15"/>
+          <p:cNvSpPr/>
+          <p:nvPr/>
+        </p:nvSpPr>
+        <p:spPr>
+          <a:xfrm>
+            <a:off x="11460175" y="1645920"/>
+            <a:ext cx="18288" cy="2560320"/>
+          </a:xfrm>
+          <a:prstGeom prst="rect">
+            <a:avLst/>
+          </a:prstGeom>
+          <a:solidFill>
+            <a:srgbClr val="1E293B"/>
+          </a:solidFill>
+          <a:ln>
+            <a:noFill/>
+          </a:ln>
+        </p:spPr>
+        <p:style>
+          <a:lnRef idx="1">
+            <a:schemeClr val="accent1"/>
+          </a:lnRef>
+          <a:fillRef idx="3">
+            <a:schemeClr val="accent1"/>
+          </a:fillRef>
+          <a:effectRef idx="2">
+            <a:schemeClr val="accent1"/>
+          </a:effectRef>
+          <a:fontRef idx="minor">
+            <a:schemeClr val="lt1"/>
+          </a:fontRef>
+        </p:style>
+        <p:txBody>
+          <a:bodyPr rtlCol="0" anchor="ctr"/>
+          <a:lstStyle/>
+          <a:p>
+            <a:pPr algn="ctr"/>
+          </a:p>
+        </p:txBody>
+      </p:sp>
+      <p:sp>
+        <p:nvSpPr>
+          <p:cNvPr id="17" name="Rectangle 16"/>
+          <p:cNvSpPr/>
+          <p:nvPr/>
+        </p:nvSpPr>
+        <p:spPr>
+          <a:xfrm>
+            <a:off x="1097280" y="4206240"/>
+            <a:ext cx="10362895" cy="18288"/>
+          </a:xfrm>
+          <a:prstGeom prst="rect">
+            <a:avLst/>
+          </a:prstGeom>
+          <a:solidFill>
+            <a:srgbClr val="1E293B"/>
+          </a:solidFill>
+          <a:ln>
+            <a:noFill/>
+          </a:ln>
+        </p:spPr>
+        <p:style>
+          <a:lnRef idx="1">
+            <a:schemeClr val="accent1"/>
+          </a:lnRef>
+          <a:fillRef idx="3">
+            <a:schemeClr val="accent1"/>
+          </a:fillRef>
+          <a:effectRef idx="2">
+            <a:schemeClr val="accent1"/>
+          </a:effectRef>
+          <a:fontRef idx="minor">
+            <a:schemeClr val="lt1"/>
+          </a:fontRef>
+        </p:style>
+        <p:txBody>
+          <a:bodyPr rtlCol="0" anchor="ctr"/>
+          <a:lstStyle/>
+          <a:p>
+            <a:pPr algn="ctr"/>
+          </a:p>
+        </p:txBody>
+      </p:sp>
+      <p:sp>
+        <p:nvSpPr>
+          <p:cNvPr id="18" name="TextBox 17"/>
+          <p:cNvSpPr txBox="1"/>
+          <p:nvPr/>
+        </p:nvSpPr>
+        <p:spPr>
+          <a:xfrm>
+            <a:off x="1097280" y="1645920"/>
+            <a:ext cx="5181447" cy="1280160"/>
+          </a:xfrm>
+          <a:prstGeom prst="rect">
+            <a:avLst/>
+          </a:prstGeom>
+          <a:noFill/>
+        </p:spPr>
+        <p:txBody>
+          <a:bodyPr wrap="square" lIns="0" tIns="0" rIns="0" bIns="0">
+            <a:spAutoFit/>
+          </a:bodyPr>
+          <a:lstStyle/>
+          <a:p>
+            <a:pPr algn="ctr"/>
+            <a:r>
+              <a:rPr sz="1000" b="0" i="0">
+                <a:solidFill>
+                  <a:srgbClr val="94A3B8"/>
+                </a:solidFill>
+                <a:latin typeface="Calibri"/>
+              </a:rPr>
+              <a:t>Best
+(Simple &amp; Accurate)</a:t>
+            </a:r>
+          </a:p>
+        </p:txBody>
+      </p:sp>
+      <p:sp>
+        <p:nvSpPr>
+          <p:cNvPr id="19" name="TextBox 18"/>
+          <p:cNvSpPr txBox="1"/>
+          <p:nvPr/>
+        </p:nvSpPr>
+        <p:spPr>
+          <a:xfrm>
+            <a:off x="6278727" y="1645920"/>
+            <a:ext cx="5181447" cy="1280160"/>
+          </a:xfrm>
+          <a:prstGeom prst="rect">
+            <a:avLst/>
+          </a:prstGeom>
+          <a:noFill/>
+        </p:spPr>
+        <p:txBody>
+          <a:bodyPr wrap="square" lIns="0" tIns="0" rIns="0" bIns="0">
+            <a:spAutoFit/>
+          </a:bodyPr>
+          <a:lstStyle/>
+          <a:p>
+            <a:pPr algn="ctr"/>
+            <a:r>
+              <a:rPr sz="1000" b="0" i="0">
+                <a:solidFill>
+                  <a:srgbClr val="94A3B8"/>
+                </a:solidFill>
+                <a:latin typeface="Calibri"/>
+              </a:rPr>
+              <a:t>High Effort</a:t>
+            </a:r>
+          </a:p>
+        </p:txBody>
+      </p:sp>
+      <p:sp>
+        <p:nvSpPr>
+          <p:cNvPr id="20" name="TextBox 19"/>
+          <p:cNvSpPr txBox="1"/>
+          <p:nvPr/>
+        </p:nvSpPr>
+        <p:spPr>
+          <a:xfrm>
+            <a:off x="1097280" y="2926080"/>
+            <a:ext cx="5181447" cy="1280160"/>
+          </a:xfrm>
+          <a:prstGeom prst="rect">
+            <a:avLst/>
+          </a:prstGeom>
+          <a:noFill/>
+        </p:spPr>
+        <p:txBody>
+          <a:bodyPr wrap="square" lIns="0" tIns="0" rIns="0" bIns="0">
+            <a:spAutoFit/>
+          </a:bodyPr>
+          <a:lstStyle/>
+          <a:p>
+            <a:pPr algn="ctr"/>
+            <a:r>
+              <a:rPr sz="1000" b="0" i="0">
+                <a:solidFill>
+                  <a:srgbClr val="94A3B8"/>
+                </a:solidFill>
+                <a:latin typeface="Calibri"/>
+              </a:rPr>
+              <a:t>Avoid</a:t>
+            </a:r>
+          </a:p>
+        </p:txBody>
+      </p:sp>
+      <p:sp>
+        <p:nvSpPr>
+          <p:cNvPr id="21" name="TextBox 20"/>
+          <p:cNvSpPr txBox="1"/>
+          <p:nvPr/>
+        </p:nvSpPr>
+        <p:spPr>
+          <a:xfrm>
+            <a:off x="6278727" y="2926080"/>
+            <a:ext cx="5181447" cy="1280160"/>
+          </a:xfrm>
+          <a:prstGeom prst="rect">
+            <a:avLst/>
+          </a:prstGeom>
+          <a:noFill/>
+        </p:spPr>
+        <p:txBody>
+          <a:bodyPr wrap="square" lIns="0" tIns="0" rIns="0" bIns="0">
+            <a:spAutoFit/>
+          </a:bodyPr>
+          <a:lstStyle/>
+          <a:p>
+            <a:pPr algn="ctr"/>
+            <a:r>
+              <a:rPr sz="1000" b="0" i="0">
+                <a:solidFill>
+                  <a:srgbClr val="94A3B8"/>
+                </a:solidFill>
+                <a:latin typeface="Calibri"/>
+              </a:rPr>
+              <a:t>Feasible</a:t>
+            </a:r>
+          </a:p>
+        </p:txBody>
+      </p:sp>
+      <p:sp>
+        <p:nvSpPr>
+          <p:cNvPr id="22" name="Rounded Rectangle 21"/>
+          <p:cNvSpPr/>
+          <p:nvPr/>
+        </p:nvSpPr>
+        <p:spPr>
+          <a:xfrm>
+            <a:off x="3841228" y="3026664"/>
+            <a:ext cx="164592" cy="164592"/>
+          </a:xfrm>
+          <a:prstGeom prst="roundRect">
+            <a:avLst>
+              <a:gd name="adj" fmla="val 41666"/>
+            </a:avLst>
+          </a:prstGeom>
+          <a:solidFill>
+            <a:srgbClr val="64C8FF"/>
+          </a:solidFill>
+          <a:ln>
+            <a:noFill/>
+          </a:ln>
+        </p:spPr>
+        <p:style>
+          <a:lnRef idx="1">
+            <a:schemeClr val="accent1"/>
+          </a:lnRef>
+          <a:fillRef idx="3">
+            <a:schemeClr val="accent1"/>
+          </a:fillRef>
+          <a:effectRef idx="2">
+            <a:schemeClr val="accent1"/>
+          </a:effectRef>
+          <a:fontRef idx="minor">
+            <a:schemeClr val="lt1"/>
+          </a:fontRef>
+        </p:style>
+        <p:txBody>
+          <a:bodyPr rtlCol="0" anchor="ctr"/>
+          <a:lstStyle/>
+          <a:p>
+            <a:pPr algn="ctr"/>
+          </a:p>
+        </p:txBody>
+      </p:sp>
+      <p:sp>
+        <p:nvSpPr>
+          <p:cNvPr id="23" name="TextBox 22"/>
+          <p:cNvSpPr txBox="1"/>
+          <p:nvPr/>
+        </p:nvSpPr>
+        <p:spPr>
+          <a:xfrm>
+            <a:off x="4051540" y="3017520"/>
+            <a:ext cx="548640" cy="182880"/>
+          </a:xfrm>
+          <a:prstGeom prst="rect">
+            <a:avLst/>
+          </a:prstGeom>
+          <a:noFill/>
+        </p:spPr>
+        <p:txBody>
+          <a:bodyPr wrap="square" lIns="0" tIns="0" rIns="0" bIns="0">
+            <a:spAutoFit/>
+          </a:bodyPr>
+          <a:lstStyle/>
+          <a:p>
+            <a:pPr algn="l"/>
+            <a:r>
+              <a:rPr sz="900" b="0" i="0">
+                <a:solidFill>
+                  <a:srgbClr val="F8FAFC"/>
+                </a:solidFill>
+                <a:latin typeface="Calibri"/>
+              </a:rPr>
+              <a:t>Low cost</a:t>
+            </a:r>
+          </a:p>
+        </p:txBody>
+      </p:sp>
+      <p:sp>
+        <p:nvSpPr>
+          <p:cNvPr id="24" name="Rounded Rectangle 23"/>
+          <p:cNvSpPr/>
+          <p:nvPr/>
+        </p:nvSpPr>
+        <p:spPr>
+          <a:xfrm>
+            <a:off x="7035160" y="2066544"/>
+            <a:ext cx="182880" cy="182880"/>
+          </a:xfrm>
+          <a:prstGeom prst="roundRect">
+            <a:avLst>
+              <a:gd name="adj" fmla="val 37500"/>
+            </a:avLst>
+          </a:prstGeom>
+          <a:solidFill>
+            <a:srgbClr val="64C8FF"/>
+          </a:solidFill>
+          <a:ln>
+            <a:noFill/>
+          </a:ln>
+        </p:spPr>
+        <p:style>
+          <a:lnRef idx="1">
+            <a:schemeClr val="accent1"/>
+          </a:lnRef>
+          <a:fillRef idx="3">
+            <a:schemeClr val="accent1"/>
+          </a:fillRef>
+          <a:effectRef idx="2">
+            <a:schemeClr val="accent1"/>
+          </a:effectRef>
+          <a:fontRef idx="minor">
+            <a:schemeClr val="lt1"/>
+          </a:fontRef>
+        </p:style>
+        <p:txBody>
+          <a:bodyPr rtlCol="0" anchor="ctr"/>
+          <a:lstStyle/>
+          <a:p>
+            <a:pPr algn="ctr"/>
+          </a:p>
+        </p:txBody>
+      </p:sp>
+      <p:sp>
+        <p:nvSpPr>
+          <p:cNvPr id="25" name="TextBox 24"/>
+          <p:cNvSpPr txBox="1"/>
+          <p:nvPr/>
+        </p:nvSpPr>
+        <p:spPr>
+          <a:xfrm>
+            <a:off x="7263760" y="2066544"/>
+            <a:ext cx="548640" cy="182880"/>
+          </a:xfrm>
+          <a:prstGeom prst="rect">
+            <a:avLst/>
+          </a:prstGeom>
+          <a:noFill/>
+        </p:spPr>
+        <p:txBody>
+          <a:bodyPr wrap="square" lIns="0" tIns="0" rIns="0" bIns="0">
+            <a:spAutoFit/>
+          </a:bodyPr>
+          <a:lstStyle/>
+          <a:p>
+            <a:pPr algn="l"/>
+            <a:r>
+              <a:rPr sz="900" b="0" i="0">
+                <a:solidFill>
+                  <a:srgbClr val="F8FAFC"/>
+                </a:solidFill>
+                <a:latin typeface="Calibri"/>
+              </a:rPr>
+              <a:t>Best performer</a:t>
+            </a:r>
+          </a:p>
+        </p:txBody>
+      </p:sp>
+      <p:sp>
+        <p:nvSpPr>
+          <p:cNvPr id="26" name="Rounded Rectangle 25"/>
+          <p:cNvSpPr/>
+          <p:nvPr/>
+        </p:nvSpPr>
+        <p:spPr>
+          <a:xfrm>
+            <a:off x="4976297" y="3250692"/>
+            <a:ext cx="155448" cy="155448"/>
+          </a:xfrm>
+          <a:prstGeom prst="roundRect">
+            <a:avLst>
+              <a:gd name="adj" fmla="val 44117"/>
+            </a:avLst>
+          </a:prstGeom>
+          <a:solidFill>
+            <a:srgbClr val="64C8FF"/>
+          </a:solidFill>
+          <a:ln>
+            <a:noFill/>
+          </a:ln>
+        </p:spPr>
+        <p:style>
+          <a:lnRef idx="1">
+            <a:schemeClr val="accent1"/>
+          </a:lnRef>
+          <a:fillRef idx="3">
+            <a:schemeClr val="accent1"/>
+          </a:fillRef>
+          <a:effectRef idx="2">
+            <a:schemeClr val="accent1"/>
+          </a:effectRef>
+          <a:fontRef idx="minor">
+            <a:schemeClr val="lt1"/>
+          </a:fontRef>
+        </p:style>
+        <p:txBody>
+          <a:bodyPr rtlCol="0" anchor="ctr"/>
+          <a:lstStyle/>
+          <a:p>
+            <a:pPr algn="ctr"/>
+          </a:p>
+        </p:txBody>
+      </p:sp>
+      <p:sp>
+        <p:nvSpPr>
+          <p:cNvPr id="27" name="TextBox 26"/>
+          <p:cNvSpPr txBox="1"/>
+          <p:nvPr/>
+        </p:nvSpPr>
+        <p:spPr>
+          <a:xfrm>
+            <a:off x="5177465" y="3236976"/>
+            <a:ext cx="548640" cy="182880"/>
+          </a:xfrm>
+          <a:prstGeom prst="rect">
+            <a:avLst/>
+          </a:prstGeom>
+          <a:noFill/>
+        </p:spPr>
+        <p:txBody>
+          <a:bodyPr wrap="square" lIns="0" tIns="0" rIns="0" bIns="0">
+            <a:spAutoFit/>
+          </a:bodyPr>
+          <a:lstStyle/>
+          <a:p>
+            <a:pPr algn="l"/>
+            <a:r>
+              <a:rPr sz="900" b="0" i="0">
+                <a:solidFill>
+                  <a:srgbClr val="F8FAFC"/>
+                </a:solidFill>
+                <a:latin typeface="Calibri"/>
+              </a:rPr>
+              <a:t>Mid-range</a:t>
+            </a:r>
+          </a:p>
+        </p:txBody>
+      </p:sp>
+      <p:sp>
+        <p:nvSpPr>
+          <p:cNvPr id="28" name="Rounded Rectangle 27"/>
+          <p:cNvSpPr/>
+          <p:nvPr/>
+        </p:nvSpPr>
+        <p:spPr>
+          <a:xfrm>
+            <a:off x="10058965" y="2514600"/>
+            <a:ext cx="164592" cy="164592"/>
+          </a:xfrm>
+          <a:prstGeom prst="roundRect">
+            <a:avLst>
+              <a:gd name="adj" fmla="val 41666"/>
+            </a:avLst>
+          </a:prstGeom>
+          <a:solidFill>
+            <a:srgbClr val="FF9664"/>
+          </a:solidFill>
+          <a:ln>
+            <a:noFill/>
+          </a:ln>
+        </p:spPr>
+        <p:style>
+          <a:lnRef idx="1">
+            <a:schemeClr val="accent1"/>
+          </a:lnRef>
+          <a:fillRef idx="3">
+            <a:schemeClr val="accent1"/>
+          </a:fillRef>
+          <a:effectRef idx="2">
+            <a:schemeClr val="accent1"/>
+          </a:effectRef>
+          <a:fontRef idx="minor">
+            <a:schemeClr val="lt1"/>
+          </a:fontRef>
+        </p:style>
+        <p:txBody>
+          <a:bodyPr rtlCol="0" anchor="ctr"/>
+          <a:lstStyle/>
+          <a:p>
+            <a:pPr algn="ctr"/>
+          </a:p>
+        </p:txBody>
+      </p:sp>
+      <p:sp>
+        <p:nvSpPr>
+          <p:cNvPr id="29" name="TextBox 28"/>
+          <p:cNvSpPr txBox="1"/>
+          <p:nvPr/>
+        </p:nvSpPr>
+        <p:spPr>
+          <a:xfrm>
+            <a:off x="10269277" y="2505456"/>
+            <a:ext cx="548640" cy="182880"/>
+          </a:xfrm>
+          <a:prstGeom prst="rect">
+            <a:avLst/>
+          </a:prstGeom>
+          <a:noFill/>
+        </p:spPr>
+        <p:txBody>
+          <a:bodyPr wrap="square" lIns="0" tIns="0" rIns="0" bIns="0">
+            <a:spAutoFit/>
+          </a:bodyPr>
+          <a:lstStyle/>
+          <a:p>
+            <a:pPr algn="l"/>
+            <a:r>
+              <a:rPr sz="900" b="0" i="0">
+                <a:solidFill>
+                  <a:srgbClr val="F8FAFC"/>
+                </a:solidFill>
+                <a:latin typeface="Calibri"/>
+              </a:rPr>
+              <a:t>High complexity</a:t>
+            </a:r>
+          </a:p>
+        </p:txBody>
+      </p:sp>
+      <p:sp>
+        <p:nvSpPr>
+          <p:cNvPr id="30" name="Rounded Rectangle 29"/>
+          <p:cNvSpPr/>
+          <p:nvPr/>
+        </p:nvSpPr>
+        <p:spPr>
+          <a:xfrm>
+            <a:off x="1966209" y="3767328"/>
+            <a:ext cx="146304" cy="146304"/>
+          </a:xfrm>
+          <a:prstGeom prst="roundRect">
+            <a:avLst>
+              <a:gd name="adj" fmla="val 46875"/>
+            </a:avLst>
+          </a:prstGeom>
+          <a:solidFill>
+            <a:srgbClr val="96FF64"/>
+          </a:solidFill>
+          <a:ln>
+            <a:noFill/>
+          </a:ln>
+        </p:spPr>
+        <p:style>
+          <a:lnRef idx="1">
+            <a:schemeClr val="accent1"/>
+          </a:lnRef>
+          <a:fillRef idx="3">
+            <a:schemeClr val="accent1"/>
+          </a:fillRef>
+          <a:effectRef idx="2">
+            <a:schemeClr val="accent1"/>
+          </a:effectRef>
+          <a:fontRef idx="minor">
+            <a:schemeClr val="lt1"/>
+          </a:fontRef>
+        </p:style>
+        <p:txBody>
+          <a:bodyPr rtlCol="0" anchor="ctr"/>
+          <a:lstStyle/>
+          <a:p>
+            <a:pPr algn="ctr"/>
+          </a:p>
+        </p:txBody>
+      </p:sp>
+      <p:sp>
+        <p:nvSpPr>
+          <p:cNvPr id="31" name="TextBox 30"/>
+          <p:cNvSpPr txBox="1"/>
+          <p:nvPr/>
+        </p:nvSpPr>
+        <p:spPr>
+          <a:xfrm>
+            <a:off x="2158233" y="3749040"/>
+            <a:ext cx="548640" cy="182880"/>
+          </a:xfrm>
+          <a:prstGeom prst="rect">
+            <a:avLst/>
+          </a:prstGeom>
+          <a:noFill/>
+        </p:spPr>
+        <p:txBody>
+          <a:bodyPr wrap="square" lIns="0" tIns="0" rIns="0" bIns="0">
+            <a:spAutoFit/>
+          </a:bodyPr>
+          <a:lstStyle/>
+          <a:p>
+            <a:pPr algn="l"/>
+            <a:r>
+              <a:rPr sz="900" b="0" i="0">
+                <a:solidFill>
+                  <a:srgbClr val="F8FAFC"/>
+                </a:solidFill>
+                <a:latin typeface="Calibri"/>
+              </a:rPr>
+              <a:t>Simple</a:t>
+            </a:r>
+          </a:p>
+        </p:txBody>
+      </p:sp>
+      <p:sp>
+        <p:nvSpPr>
+          <p:cNvPr id="32" name="TextBox 31"/>
+          <p:cNvSpPr txBox="1"/>
+          <p:nvPr/>
+        </p:nvSpPr>
+        <p:spPr>
+          <a:xfrm>
+            <a:off x="1097280" y="4251959"/>
+            <a:ext cx="10362895" cy="274320"/>
+          </a:xfrm>
+          <a:prstGeom prst="rect">
+            <a:avLst/>
+          </a:prstGeom>
+          <a:noFill/>
+        </p:spPr>
+        <p:txBody>
+          <a:bodyPr wrap="square" lIns="0" tIns="0" rIns="0" bIns="0">
+            <a:spAutoFit/>
+          </a:bodyPr>
+          <a:lstStyle/>
+          <a:p>
+            <a:pPr algn="ctr"/>
+            <a:r>
+              <a:rPr sz="1100" b="0" i="0">
+                <a:solidFill>
+                  <a:srgbClr val="94A3B8"/>
+                </a:solidFill>
+                <a:latin typeface="Calibri"/>
+              </a:rPr>
+              <a:t>Implementation Complexity</a:t>
+            </a:r>
+          </a:p>
+        </p:txBody>
+      </p:sp>
+      <p:sp>
+        <p:nvSpPr>
+          <p:cNvPr id="33" name="TextBox 32"/>
+          <p:cNvSpPr txBox="1"/>
+          <p:nvPr/>
+        </p:nvSpPr>
+        <p:spPr>
+          <a:xfrm>
+            <a:off x="457200" y="1645920"/>
+            <a:ext cx="320040" cy="2560320"/>
+          </a:xfrm>
+          <a:prstGeom prst="rect">
+            <a:avLst/>
+          </a:prstGeom>
+          <a:noFill/>
+        </p:spPr>
+        <p:txBody>
+          <a:bodyPr wrap="square" lIns="0" tIns="0" rIns="0" bIns="0">
+            <a:spAutoFit/>
+          </a:bodyPr>
+          <a:lstStyle/>
+          <a:p>
+            <a:pPr algn="ctr"/>
+            <a:r>
+              <a:rPr sz="1100" b="0" i="0">
+                <a:solidFill>
+                  <a:srgbClr val="94A3B8"/>
+                </a:solidFill>
+                <a:latin typeface="Calibri"/>
+              </a:rPr>
+              <a:t>Accuracy (%)</a:t>
+            </a:r>
+          </a:p>
+        </p:txBody>
+      </p:sp>
+    </p:spTree>
+  </p:cSld>
+  <p:clrMapOvr>
+    <a:masterClrMapping/>
+  </p:clrMapOvr>
+</p:sld>
+</file>
+
+<file path=ppt/slides/slide17.xml><?xml version="1.0" encoding="utf-8"?>
+<p:sld xmlns:a="http://schemas.openxmlformats.org/drawingml/2006/main" xmlns:p="http://schemas.openxmlformats.org/presentationml/2006/main" xmlns:r="http://schemas.openxmlformats.org/officeDocument/2006/relationships">
+  <p:cSld>
+    <p:bg>
+      <p:bgPr>
+        <a:solidFill>
+          <a:srgbClr val="0F172A"/>
+        </a:solidFill>
+        <a:effectLst/>
+      </p:bgPr>
+    </p:bg>
+    <p:spTree>
+      <p:nvGrpSpPr>
+        <p:cNvPr id="1" name=""/>
+        <p:cNvGrpSpPr/>
+        <p:nvPr/>
+      </p:nvGrpSpPr>
+      <p:grpSpPr/>
+      <p:sp>
+        <p:nvSpPr>
+          <p:cNvPr id="2" name="Rectangle 1"/>
+          <p:cNvSpPr/>
+          <p:nvPr/>
+        </p:nvSpPr>
+        <p:spPr>
+          <a:xfrm>
+            <a:off x="457200" y="457200"/>
+            <a:ext cx="45720" cy="548640"/>
+          </a:xfrm>
+          <a:prstGeom prst="rect">
+            <a:avLst/>
+          </a:prstGeom>
+          <a:solidFill>
+            <a:srgbClr val="3B82F6"/>
+          </a:solidFill>
+          <a:ln>
+            <a:noFill/>
+          </a:ln>
+        </p:spPr>
+        <p:style>
+          <a:lnRef idx="1">
+            <a:schemeClr val="accent1"/>
+          </a:lnRef>
+          <a:fillRef idx="3">
+            <a:schemeClr val="accent1"/>
+          </a:fillRef>
+          <a:effectRef idx="2">
+            <a:schemeClr val="accent1"/>
+          </a:effectRef>
+          <a:fontRef idx="minor">
+            <a:schemeClr val="lt1"/>
+          </a:fontRef>
+        </p:style>
+        <p:txBody>
+          <a:bodyPr rtlCol="0" anchor="ctr"/>
+          <a:lstStyle/>
+          <a:p>
+            <a:pPr algn="ctr"/>
+          </a:p>
+        </p:txBody>
+      </p:sp>
+      <p:sp>
+        <p:nvSpPr>
+          <p:cNvPr id="3" name="TextBox 2"/>
+          <p:cNvSpPr txBox="1"/>
+          <p:nvPr/>
+        </p:nvSpPr>
+        <p:spPr>
+          <a:xfrm>
+            <a:off x="685800" y="457200"/>
+            <a:ext cx="9503359" cy="548640"/>
+          </a:xfrm>
+          <a:prstGeom prst="rect">
+            <a:avLst/>
+          </a:prstGeom>
+          <a:noFill/>
+        </p:spPr>
+        <p:txBody>
+          <a:bodyPr wrap="square" lIns="0" tIns="0" rIns="0" bIns="0">
+            <a:spAutoFit/>
+          </a:bodyPr>
+          <a:lstStyle/>
+          <a:p>
+            <a:pPr algn="l"/>
+            <a:r>
+              <a:rPr sz="2800" b="1" i="0">
+                <a:solidFill>
+                  <a:srgbClr val="F8FAFC"/>
+                </a:solidFill>
+                <a:latin typeface="Calibri Light"/>
+              </a:rPr>
+              <a:t>Phase 4: Hierarchical Data</a:t>
+            </a:r>
+          </a:p>
+        </p:txBody>
+      </p:sp>
+      <p:sp>
+        <p:nvSpPr>
+          <p:cNvPr id="4" name="Rounded Rectangle 3"/>
+          <p:cNvSpPr/>
+          <p:nvPr/>
+        </p:nvSpPr>
+        <p:spPr>
+          <a:xfrm>
+            <a:off x="10372039" y="571500"/>
+            <a:ext cx="1362456" cy="320040"/>
+          </a:xfrm>
+          <a:prstGeom prst="roundRect">
+            <a:avLst>
+              <a:gd name="adj" fmla="val 50000"/>
+            </a:avLst>
+          </a:prstGeom>
+          <a:solidFill>
+            <a:srgbClr val="3B82F6"/>
+          </a:solidFill>
+          <a:ln>
+            <a:noFill/>
+          </a:ln>
+        </p:spPr>
+        <p:style>
+          <a:lnRef idx="1">
+            <a:schemeClr val="accent1"/>
+          </a:lnRef>
+          <a:fillRef idx="3">
+            <a:schemeClr val="accent1"/>
+          </a:fillRef>
+          <a:effectRef idx="2">
+            <a:schemeClr val="accent1"/>
+          </a:effectRef>
+          <a:fontRef idx="minor">
+            <a:schemeClr val="lt1"/>
+          </a:fontRef>
+        </p:style>
+        <p:txBody>
+          <a:bodyPr rtlCol="0" anchor="ctr" wrap="none"/>
+          <a:lstStyle/>
+          <a:p>
+            <a:pPr algn="ctr"/>
+            <a:r>
+              <a:rPr sz="1100" b="1">
+                <a:solidFill>
+                  <a:srgbClr val="FFFFFF"/>
+                </a:solidFill>
+                <a:latin typeface="Calibri"/>
+              </a:rPr>
+              <a:t>GroupedTable</a:t>
+            </a:r>
+          </a:p>
+        </p:txBody>
+      </p:sp>
+      <p:sp>
+        <p:nvSpPr>
+          <p:cNvPr id="5" name="TextBox 4"/>
+          <p:cNvSpPr txBox="1"/>
+          <p:nvPr/>
+        </p:nvSpPr>
+        <p:spPr>
+          <a:xfrm>
+            <a:off x="457200" y="1280160"/>
+            <a:ext cx="11277295" cy="320040"/>
+          </a:xfrm>
+          <a:prstGeom prst="rect">
+            <a:avLst/>
+          </a:prstGeom>
+          <a:noFill/>
+        </p:spPr>
+        <p:txBody>
+          <a:bodyPr wrap="square" lIns="0" tIns="0" rIns="0" bIns="0">
+            <a:spAutoFit/>
+          </a:bodyPr>
+          <a:lstStyle/>
+          <a:p>
+            <a:pPr algn="ctr"/>
+            <a:r>
+              <a:rPr sz="2400" b="1" i="0">
+                <a:solidFill>
+                  <a:srgbClr val="F8FAFC"/>
+                </a:solidFill>
+                <a:latin typeface="Calibri"/>
+              </a:rPr>
+              <a:t>Revenue by Region &amp; Country</a:t>
+            </a:r>
+          </a:p>
+        </p:txBody>
+      </p:sp>
+      <p:sp>
+        <p:nvSpPr>
+          <p:cNvPr id="6" name="Rectangle 5"/>
+          <p:cNvSpPr/>
+          <p:nvPr/>
+        </p:nvSpPr>
+        <p:spPr>
+          <a:xfrm>
+            <a:off x="457200" y="1600200"/>
+            <a:ext cx="3759098" cy="292608"/>
+          </a:xfrm>
+          <a:prstGeom prst="rect">
+            <a:avLst/>
+          </a:prstGeom>
+          <a:solidFill>
+            <a:srgbClr val="3B82F6"/>
+          </a:solidFill>
+          <a:ln>
+            <a:noFill/>
+          </a:ln>
+        </p:spPr>
+        <p:style>
+          <a:lnRef idx="1">
+            <a:schemeClr val="accent1"/>
+          </a:lnRef>
+          <a:fillRef idx="3">
+            <a:schemeClr val="accent1"/>
+          </a:fillRef>
+          <a:effectRef idx="2">
+            <a:schemeClr val="accent1"/>
+          </a:effectRef>
+          <a:fontRef idx="minor">
+            <a:schemeClr val="lt1"/>
+          </a:fontRef>
+        </p:style>
+        <p:txBody>
+          <a:bodyPr rtlCol="0" anchor="ctr"/>
+          <a:lstStyle/>
+          <a:p>
+            <a:pPr algn="ctr"/>
+          </a:p>
+        </p:txBody>
+      </p:sp>
+      <p:sp>
+        <p:nvSpPr>
+          <p:cNvPr id="7" name="TextBox 6"/>
+          <p:cNvSpPr txBox="1"/>
+          <p:nvPr/>
+        </p:nvSpPr>
+        <p:spPr>
+          <a:xfrm>
+            <a:off x="502920" y="1618488"/>
+            <a:ext cx="3667658" cy="256032"/>
+          </a:xfrm>
+          <a:prstGeom prst="rect">
+            <a:avLst/>
+          </a:prstGeom>
+          <a:noFill/>
+        </p:spPr>
+        <p:txBody>
+          <a:bodyPr wrap="square" lIns="0" tIns="0" rIns="0" bIns="0">
+            <a:spAutoFit/>
+          </a:bodyPr>
+          <a:lstStyle/>
+          <a:p>
+            <a:pPr algn="ctr"/>
+            <a:r>
+              <a:rPr sz="1100" b="1" i="0">
+                <a:solidFill>
+                  <a:srgbClr val="FFFFFF"/>
+                </a:solidFill>
+                <a:latin typeface="Calibri"/>
+              </a:rPr>
+              <a:t>Region</a:t>
+            </a:r>
+          </a:p>
+        </p:txBody>
+      </p:sp>
+      <p:sp>
+        <p:nvSpPr>
+          <p:cNvPr id="8" name="Rectangle 7"/>
+          <p:cNvSpPr/>
+          <p:nvPr/>
+        </p:nvSpPr>
+        <p:spPr>
+          <a:xfrm>
+            <a:off x="4216298" y="1600200"/>
+            <a:ext cx="2819323" cy="292608"/>
+          </a:xfrm>
+          <a:prstGeom prst="rect">
+            <a:avLst/>
+          </a:prstGeom>
+          <a:solidFill>
+            <a:srgbClr val="3B82F6"/>
+          </a:solidFill>
+          <a:ln>
+            <a:noFill/>
+          </a:ln>
+        </p:spPr>
+        <p:style>
+          <a:lnRef idx="1">
+            <a:schemeClr val="accent1"/>
+          </a:lnRef>
+          <a:fillRef idx="3">
+            <a:schemeClr val="accent1"/>
+          </a:fillRef>
+          <a:effectRef idx="2">
+            <a:schemeClr val="accent1"/>
+          </a:effectRef>
+          <a:fontRef idx="minor">
+            <a:schemeClr val="lt1"/>
+          </a:fontRef>
+        </p:style>
+        <p:txBody>
+          <a:bodyPr rtlCol="0" anchor="ctr"/>
+          <a:lstStyle/>
+          <a:p>
+            <a:pPr algn="ctr"/>
+          </a:p>
+        </p:txBody>
+      </p:sp>
+      <p:sp>
+        <p:nvSpPr>
+          <p:cNvPr id="9" name="TextBox 8"/>
+          <p:cNvSpPr txBox="1"/>
+          <p:nvPr/>
+        </p:nvSpPr>
+        <p:spPr>
+          <a:xfrm>
+            <a:off x="4262018" y="1618488"/>
+            <a:ext cx="2727883" cy="256032"/>
+          </a:xfrm>
+          <a:prstGeom prst="rect">
+            <a:avLst/>
+          </a:prstGeom>
+          <a:noFill/>
+        </p:spPr>
+        <p:txBody>
+          <a:bodyPr wrap="square" lIns="0" tIns="0" rIns="0" bIns="0">
+            <a:spAutoFit/>
+          </a:bodyPr>
+          <a:lstStyle/>
+          <a:p>
+            <a:pPr algn="ctr"/>
+            <a:r>
+              <a:rPr sz="1100" b="1" i="0">
+                <a:solidFill>
+                  <a:srgbClr val="FFFFFF"/>
+                </a:solidFill>
+                <a:latin typeface="Calibri"/>
+              </a:rPr>
+              <a:t>2025 Revenue</a:t>
+            </a:r>
+          </a:p>
+        </p:txBody>
+      </p:sp>
+      <p:sp>
+        <p:nvSpPr>
+          <p:cNvPr id="10" name="Rectangle 9"/>
+          <p:cNvSpPr/>
+          <p:nvPr/>
+        </p:nvSpPr>
+        <p:spPr>
+          <a:xfrm>
+            <a:off x="7035622" y="1600200"/>
+            <a:ext cx="2819323" cy="292608"/>
+          </a:xfrm>
+          <a:prstGeom prst="rect">
+            <a:avLst/>
+          </a:prstGeom>
+          <a:solidFill>
+            <a:srgbClr val="3B82F6"/>
+          </a:solidFill>
+          <a:ln>
+            <a:noFill/>
+          </a:ln>
+        </p:spPr>
+        <p:style>
+          <a:lnRef idx="1">
+            <a:schemeClr val="accent1"/>
+          </a:lnRef>
+          <a:fillRef idx="3">
+            <a:schemeClr val="accent1"/>
+          </a:fillRef>
+          <a:effectRef idx="2">
+            <a:schemeClr val="accent1"/>
+          </a:effectRef>
+          <a:fontRef idx="minor">
+            <a:schemeClr val="lt1"/>
+          </a:fontRef>
+        </p:style>
+        <p:txBody>
+          <a:bodyPr rtlCol="0" anchor="ctr"/>
+          <a:lstStyle/>
+          <a:p>
+            <a:pPr algn="ctr"/>
+          </a:p>
+        </p:txBody>
+      </p:sp>
+      <p:sp>
+        <p:nvSpPr>
+          <p:cNvPr id="11" name="TextBox 10"/>
+          <p:cNvSpPr txBox="1"/>
+          <p:nvPr/>
+        </p:nvSpPr>
+        <p:spPr>
+          <a:xfrm>
+            <a:off x="7081342" y="1618488"/>
+            <a:ext cx="2727883" cy="256032"/>
+          </a:xfrm>
+          <a:prstGeom prst="rect">
+            <a:avLst/>
+          </a:prstGeom>
+          <a:noFill/>
+        </p:spPr>
+        <p:txBody>
+          <a:bodyPr wrap="square" lIns="0" tIns="0" rIns="0" bIns="0">
+            <a:spAutoFit/>
+          </a:bodyPr>
+          <a:lstStyle/>
+          <a:p>
+            <a:pPr algn="ctr"/>
+            <a:r>
+              <a:rPr sz="1100" b="1" i="0">
+                <a:solidFill>
+                  <a:srgbClr val="FFFFFF"/>
+                </a:solidFill>
+                <a:latin typeface="Calibri"/>
+              </a:rPr>
+              <a:t>2026 Revenue</a:t>
+            </a:r>
+          </a:p>
+        </p:txBody>
+      </p:sp>
+      <p:sp>
+        <p:nvSpPr>
+          <p:cNvPr id="12" name="Rectangle 11"/>
+          <p:cNvSpPr/>
+          <p:nvPr/>
+        </p:nvSpPr>
+        <p:spPr>
+          <a:xfrm>
+            <a:off x="9854946" y="1600200"/>
+            <a:ext cx="1879549" cy="292608"/>
+          </a:xfrm>
+          <a:prstGeom prst="rect">
+            <a:avLst/>
+          </a:prstGeom>
+          <a:solidFill>
+            <a:srgbClr val="3B82F6"/>
+          </a:solidFill>
+          <a:ln>
+            <a:noFill/>
+          </a:ln>
+        </p:spPr>
+        <p:style>
+          <a:lnRef idx="1">
+            <a:schemeClr val="accent1"/>
+          </a:lnRef>
+          <a:fillRef idx="3">
+            <a:schemeClr val="accent1"/>
+          </a:fillRef>
+          <a:effectRef idx="2">
+            <a:schemeClr val="accent1"/>
+          </a:effectRef>
+          <a:fontRef idx="minor">
+            <a:schemeClr val="lt1"/>
+          </a:fontRef>
+        </p:style>
+        <p:txBody>
+          <a:bodyPr rtlCol="0" anchor="ctr"/>
+          <a:lstStyle/>
+          <a:p>
+            <a:pPr algn="ctr"/>
+          </a:p>
+        </p:txBody>
+      </p:sp>
+      <p:sp>
+        <p:nvSpPr>
+          <p:cNvPr id="13" name="TextBox 12"/>
+          <p:cNvSpPr txBox="1"/>
+          <p:nvPr/>
+        </p:nvSpPr>
+        <p:spPr>
+          <a:xfrm>
+            <a:off x="9900666" y="1618488"/>
+            <a:ext cx="1788109" cy="256032"/>
+          </a:xfrm>
+          <a:prstGeom prst="rect">
+            <a:avLst/>
+          </a:prstGeom>
+          <a:noFill/>
+        </p:spPr>
+        <p:txBody>
+          <a:bodyPr wrap="square" lIns="0" tIns="0" rIns="0" bIns="0">
+            <a:spAutoFit/>
+          </a:bodyPr>
+          <a:lstStyle/>
+          <a:p>
+            <a:pPr algn="ctr"/>
+            <a:r>
+              <a:rPr sz="1100" b="1" i="0">
+                <a:solidFill>
+                  <a:srgbClr val="FFFFFF"/>
+                </a:solidFill>
+                <a:latin typeface="Calibri"/>
+              </a:rPr>
+              <a:t>YoY Growth</a:t>
+            </a:r>
+          </a:p>
+        </p:txBody>
+      </p:sp>
+      <p:sp>
+        <p:nvSpPr>
+          <p:cNvPr id="14" name="Rectangle 13"/>
+          <p:cNvSpPr/>
+          <p:nvPr/>
+        </p:nvSpPr>
+        <p:spPr>
+          <a:xfrm>
+            <a:off x="457200" y="1892807"/>
+            <a:ext cx="3759098" cy="256032"/>
+          </a:xfrm>
+          <a:prstGeom prst="rect">
+            <a:avLst/>
+          </a:prstGeom>
+          <a:solidFill>
+            <a:srgbClr val="334155"/>
+          </a:solidFill>
+          <a:ln>
+            <a:noFill/>
+          </a:ln>
+        </p:spPr>
+        <p:style>
+          <a:lnRef idx="1">
+            <a:schemeClr val="accent1"/>
+          </a:lnRef>
+          <a:fillRef idx="3">
+            <a:schemeClr val="accent1"/>
+          </a:fillRef>
+          <a:effectRef idx="2">
+            <a:schemeClr val="accent1"/>
+          </a:effectRef>
+          <a:fontRef idx="minor">
+            <a:schemeClr val="lt1"/>
+          </a:fontRef>
+        </p:style>
+        <p:txBody>
+          <a:bodyPr rtlCol="0" anchor="ctr"/>
+          <a:lstStyle/>
+          <a:p>
+            <a:pPr algn="ctr"/>
+          </a:p>
+        </p:txBody>
+      </p:sp>
+      <p:sp>
+        <p:nvSpPr>
+          <p:cNvPr id="15" name="TextBox 14"/>
+          <p:cNvSpPr txBox="1"/>
+          <p:nvPr/>
+        </p:nvSpPr>
+        <p:spPr>
+          <a:xfrm>
+            <a:off x="502920" y="1911095"/>
+            <a:ext cx="3667658" cy="219456"/>
+          </a:xfrm>
+          <a:prstGeom prst="rect">
+            <a:avLst/>
+          </a:prstGeom>
+          <a:noFill/>
+        </p:spPr>
+        <p:txBody>
+          <a:bodyPr wrap="square" lIns="0" tIns="0" rIns="0" bIns="0">
+            <a:spAutoFit/>
+          </a:bodyPr>
+          <a:lstStyle/>
+          <a:p>
+            <a:pPr algn="l"/>
+            <a:r>
+              <a:rPr sz="1100" b="1" i="0">
+                <a:solidFill>
+                  <a:srgbClr val="F8FAFC"/>
+                </a:solidFill>
+                <a:latin typeface="Calibri"/>
+              </a:rPr>
+              <a:t>NORTH AMERICA</a:t>
+            </a:r>
+          </a:p>
+        </p:txBody>
+      </p:sp>
+      <p:sp>
+        <p:nvSpPr>
+          <p:cNvPr id="16" name="Rectangle 15"/>
+          <p:cNvSpPr/>
+          <p:nvPr/>
+        </p:nvSpPr>
+        <p:spPr>
+          <a:xfrm>
+            <a:off x="4216298" y="1892807"/>
+            <a:ext cx="2819323" cy="256032"/>
+          </a:xfrm>
+          <a:prstGeom prst="rect">
+            <a:avLst/>
+          </a:prstGeom>
+          <a:solidFill>
+            <a:srgbClr val="334155"/>
+          </a:solidFill>
+          <a:ln>
+            <a:noFill/>
+          </a:ln>
+        </p:spPr>
+        <p:style>
+          <a:lnRef idx="1">
+            <a:schemeClr val="accent1"/>
+          </a:lnRef>
+          <a:fillRef idx="3">
+            <a:schemeClr val="accent1"/>
+          </a:fillRef>
+          <a:effectRef idx="2">
+            <a:schemeClr val="accent1"/>
+          </a:effectRef>
+          <a:fontRef idx="minor">
+            <a:schemeClr val="lt1"/>
+          </a:fontRef>
+        </p:style>
+        <p:txBody>
+          <a:bodyPr rtlCol="0" anchor="ctr"/>
+          <a:lstStyle/>
+          <a:p>
+            <a:pPr algn="ctr"/>
+          </a:p>
+        </p:txBody>
+      </p:sp>
+      <p:sp>
+        <p:nvSpPr>
+          <p:cNvPr id="17" name="TextBox 16"/>
+          <p:cNvSpPr txBox="1"/>
+          <p:nvPr/>
+        </p:nvSpPr>
+        <p:spPr>
+          <a:xfrm>
+            <a:off x="4262018" y="1911095"/>
+            <a:ext cx="2727883" cy="219456"/>
+          </a:xfrm>
+          <a:prstGeom prst="rect">
+            <a:avLst/>
+          </a:prstGeom>
+          <a:noFill/>
+        </p:spPr>
+        <p:txBody>
+          <a:bodyPr wrap="square" lIns="0" tIns="0" rIns="0" bIns="0">
+            <a:spAutoFit/>
+          </a:bodyPr>
+          <a:lstStyle/>
+          <a:p>
+            <a:pPr algn="l"/>
+            <a:r>
+              <a:rPr sz="1100" b="1" i="0">
+                <a:solidFill>
+                  <a:srgbClr val="F8FAFC"/>
+                </a:solidFill>
+                <a:latin typeface="Calibri"/>
+              </a:rPr>
+              <a:t>$580M</a:t>
+            </a:r>
+          </a:p>
+        </p:txBody>
+      </p:sp>
+      <p:sp>
+        <p:nvSpPr>
+          <p:cNvPr id="18" name="Rectangle 17"/>
+          <p:cNvSpPr/>
+          <p:nvPr/>
+        </p:nvSpPr>
+        <p:spPr>
+          <a:xfrm>
+            <a:off x="7035622" y="1892807"/>
+            <a:ext cx="2819323" cy="256032"/>
+          </a:xfrm>
+          <a:prstGeom prst="rect">
+            <a:avLst/>
+          </a:prstGeom>
+          <a:solidFill>
+            <a:srgbClr val="334155"/>
+          </a:solidFill>
+          <a:ln>
+            <a:noFill/>
+          </a:ln>
+        </p:spPr>
+        <p:style>
+          <a:lnRef idx="1">
+            <a:schemeClr val="accent1"/>
+          </a:lnRef>
+          <a:fillRef idx="3">
+            <a:schemeClr val="accent1"/>
+          </a:fillRef>
+          <a:effectRef idx="2">
+            <a:schemeClr val="accent1"/>
+          </a:effectRef>
+          <a:fontRef idx="minor">
+            <a:schemeClr val="lt1"/>
+          </a:fontRef>
+        </p:style>
+        <p:txBody>
+          <a:bodyPr rtlCol="0" anchor="ctr"/>
+          <a:lstStyle/>
+          <a:p>
+            <a:pPr algn="ctr"/>
+          </a:p>
+        </p:txBody>
+      </p:sp>
+      <p:sp>
+        <p:nvSpPr>
+          <p:cNvPr id="19" name="TextBox 18"/>
+          <p:cNvSpPr txBox="1"/>
+          <p:nvPr/>
+        </p:nvSpPr>
+        <p:spPr>
+          <a:xfrm>
+            <a:off x="7081342" y="1911095"/>
+            <a:ext cx="2727883" cy="219456"/>
+          </a:xfrm>
+          <a:prstGeom prst="rect">
+            <a:avLst/>
+          </a:prstGeom>
+          <a:noFill/>
+        </p:spPr>
+        <p:txBody>
+          <a:bodyPr wrap="square" lIns="0" tIns="0" rIns="0" bIns="0">
+            <a:spAutoFit/>
+          </a:bodyPr>
+          <a:lstStyle/>
+          <a:p>
+            <a:pPr algn="l"/>
+            <a:r>
+              <a:rPr sz="1100" b="1" i="0">
+                <a:solidFill>
+                  <a:srgbClr val="F8FAFC"/>
+                </a:solidFill>
+                <a:latin typeface="Calibri"/>
+              </a:rPr>
+              <a:t>$715M</a:t>
+            </a:r>
+          </a:p>
+        </p:txBody>
+      </p:sp>
+      <p:sp>
+        <p:nvSpPr>
+          <p:cNvPr id="20" name="Rectangle 19"/>
+          <p:cNvSpPr/>
+          <p:nvPr/>
+        </p:nvSpPr>
+        <p:spPr>
+          <a:xfrm>
+            <a:off x="9854946" y="1892807"/>
+            <a:ext cx="1879549" cy="256032"/>
+          </a:xfrm>
+          <a:prstGeom prst="rect">
+            <a:avLst/>
+          </a:prstGeom>
+          <a:solidFill>
+            <a:srgbClr val="334155"/>
+          </a:solidFill>
+          <a:ln>
+            <a:noFill/>
+          </a:ln>
+        </p:spPr>
+        <p:style>
+          <a:lnRef idx="1">
+            <a:schemeClr val="accent1"/>
+          </a:lnRef>
+          <a:fillRef idx="3">
+            <a:schemeClr val="accent1"/>
+          </a:fillRef>
+          <a:effectRef idx="2">
+            <a:schemeClr val="accent1"/>
+          </a:effectRef>
+          <a:fontRef idx="minor">
+            <a:schemeClr val="lt1"/>
+          </a:fontRef>
+        </p:style>
+        <p:txBody>
+          <a:bodyPr rtlCol="0" anchor="ctr"/>
+          <a:lstStyle/>
+          <a:p>
+            <a:pPr algn="ctr"/>
+          </a:p>
+        </p:txBody>
+      </p:sp>
+      <p:sp>
+        <p:nvSpPr>
+          <p:cNvPr id="21" name="TextBox 20"/>
+          <p:cNvSpPr txBox="1"/>
+          <p:nvPr/>
+        </p:nvSpPr>
+        <p:spPr>
+          <a:xfrm>
+            <a:off x="9900666" y="1911095"/>
+            <a:ext cx="1788109" cy="219456"/>
+          </a:xfrm>
+          <a:prstGeom prst="rect">
+            <a:avLst/>
+          </a:prstGeom>
+          <a:noFill/>
+        </p:spPr>
+        <p:txBody>
+          <a:bodyPr wrap="square" lIns="0" tIns="0" rIns="0" bIns="0">
+            <a:spAutoFit/>
+          </a:bodyPr>
+          <a:lstStyle/>
+          <a:p>
+            <a:pPr algn="l"/>
+            <a:r>
+              <a:rPr sz="1100" b="1" i="0">
+                <a:solidFill>
+                  <a:srgbClr val="F8FAFC"/>
+                </a:solidFill>
+                <a:latin typeface="Calibri"/>
+              </a:rPr>
+              <a:t>+23%</a:t>
+            </a:r>
+          </a:p>
+        </p:txBody>
+      </p:sp>
+      <p:sp>
+        <p:nvSpPr>
+          <p:cNvPr id="22" name="Rectangle 21"/>
+          <p:cNvSpPr/>
+          <p:nvPr/>
+        </p:nvSpPr>
+        <p:spPr>
+          <a:xfrm>
+            <a:off x="457200" y="2148839"/>
+            <a:ext cx="3759098" cy="256032"/>
+          </a:xfrm>
+          <a:prstGeom prst="rect">
+            <a:avLst/>
+          </a:prstGeom>
+          <a:solidFill>
+            <a:srgbClr val="1E293B"/>
+          </a:solidFill>
+          <a:ln>
+            <a:noFill/>
+          </a:ln>
+        </p:spPr>
+        <p:style>
+          <a:lnRef idx="1">
+            <a:schemeClr val="accent1"/>
+          </a:lnRef>
+          <a:fillRef idx="3">
+            <a:schemeClr val="accent1"/>
+          </a:fillRef>
+          <a:effectRef idx="2">
+            <a:schemeClr val="accent1"/>
+          </a:effectRef>
+          <a:fontRef idx="minor">
+            <a:schemeClr val="lt1"/>
+          </a:fontRef>
+        </p:style>
+        <p:txBody>
+          <a:bodyPr rtlCol="0" anchor="ctr"/>
+          <a:lstStyle/>
+          <a:p>
+            <a:pPr algn="ctr"/>
+          </a:p>
+        </p:txBody>
+      </p:sp>
+      <p:sp>
+        <p:nvSpPr>
+          <p:cNvPr id="23" name="TextBox 22"/>
+          <p:cNvSpPr txBox="1"/>
+          <p:nvPr/>
+        </p:nvSpPr>
+        <p:spPr>
+          <a:xfrm>
+            <a:off x="502920" y="2167127"/>
+            <a:ext cx="3667658" cy="219456"/>
+          </a:xfrm>
+          <a:prstGeom prst="rect">
+            <a:avLst/>
+          </a:prstGeom>
+          <a:noFill/>
+        </p:spPr>
+        <p:txBody>
+          <a:bodyPr wrap="square" lIns="0" tIns="0" rIns="0" bIns="0">
+            <a:spAutoFit/>
+          </a:bodyPr>
+          <a:lstStyle/>
+          <a:p>
+            <a:pPr algn="l"/>
+            <a:r>
+              <a:rPr sz="1000" b="0" i="0">
+                <a:solidFill>
+                  <a:srgbClr val="F8FAFC"/>
+                </a:solidFill>
+                <a:latin typeface="Calibri"/>
+              </a:rPr>
+              <a:t>    USA</a:t>
+            </a:r>
+          </a:p>
+        </p:txBody>
+      </p:sp>
+      <p:sp>
+        <p:nvSpPr>
+          <p:cNvPr id="24" name="Rectangle 23"/>
+          <p:cNvSpPr/>
+          <p:nvPr/>
+        </p:nvSpPr>
+        <p:spPr>
+          <a:xfrm>
+            <a:off x="4216298" y="2148839"/>
+            <a:ext cx="2819323" cy="256032"/>
+          </a:xfrm>
+          <a:prstGeom prst="rect">
+            <a:avLst/>
+          </a:prstGeom>
+          <a:solidFill>
+            <a:srgbClr val="1E293B"/>
+          </a:solidFill>
+          <a:ln>
+            <a:noFill/>
+          </a:ln>
+        </p:spPr>
+        <p:style>
+          <a:lnRef idx="1">
+            <a:schemeClr val="accent1"/>
+          </a:lnRef>
+          <a:fillRef idx="3">
+            <a:schemeClr val="accent1"/>
+          </a:fillRef>
+          <a:effectRef idx="2">
+            <a:schemeClr val="accent1"/>
+          </a:effectRef>
+          <a:fontRef idx="minor">
+            <a:schemeClr val="lt1"/>
+          </a:fontRef>
+        </p:style>
+        <p:txBody>
+          <a:bodyPr rtlCol="0" anchor="ctr"/>
+          <a:lstStyle/>
+          <a:p>
+            <a:pPr algn="ctr"/>
+          </a:p>
+        </p:txBody>
+      </p:sp>
+      <p:sp>
+        <p:nvSpPr>
+          <p:cNvPr id="25" name="TextBox 24"/>
+          <p:cNvSpPr txBox="1"/>
+          <p:nvPr/>
+        </p:nvSpPr>
+        <p:spPr>
+          <a:xfrm>
+            <a:off x="4262018" y="2167127"/>
+            <a:ext cx="2727883" cy="219456"/>
+          </a:xfrm>
+          <a:prstGeom prst="rect">
+            <a:avLst/>
+          </a:prstGeom>
+          <a:noFill/>
+        </p:spPr>
+        <p:txBody>
+          <a:bodyPr wrap="square" lIns="0" tIns="0" rIns="0" bIns="0">
+            <a:spAutoFit/>
+          </a:bodyPr>
+          <a:lstStyle/>
+          <a:p>
+            <a:pPr algn="l"/>
+            <a:r>
+              <a:rPr sz="1000" b="0" i="0">
+                <a:solidFill>
+                  <a:srgbClr val="F8FAFC"/>
+                </a:solidFill>
+                <a:latin typeface="Calibri"/>
+              </a:rPr>
+              <a:t>$500M</a:t>
+            </a:r>
+          </a:p>
+        </p:txBody>
+      </p:sp>
+      <p:sp>
+        <p:nvSpPr>
+          <p:cNvPr id="26" name="Rectangle 25"/>
+          <p:cNvSpPr/>
+          <p:nvPr/>
+        </p:nvSpPr>
+        <p:spPr>
+          <a:xfrm>
+            <a:off x="7035622" y="2148839"/>
+            <a:ext cx="2819323" cy="256032"/>
+          </a:xfrm>
+          <a:prstGeom prst="rect">
+            <a:avLst/>
+          </a:prstGeom>
+          <a:solidFill>
+            <a:srgbClr val="1E293B"/>
+          </a:solidFill>
+          <a:ln>
+            <a:noFill/>
+          </a:ln>
+        </p:spPr>
+        <p:style>
+          <a:lnRef idx="1">
+            <a:schemeClr val="accent1"/>
+          </a:lnRef>
+          <a:fillRef idx="3">
+            <a:schemeClr val="accent1"/>
+          </a:fillRef>
+          <a:effectRef idx="2">
+            <a:schemeClr val="accent1"/>
+          </a:effectRef>
+          <a:fontRef idx="minor">
+            <a:schemeClr val="lt1"/>
+          </a:fontRef>
+        </p:style>
+        <p:txBody>
+          <a:bodyPr rtlCol="0" anchor="ctr"/>
+          <a:lstStyle/>
+          <a:p>
+            <a:pPr algn="ctr"/>
+          </a:p>
+        </p:txBody>
+      </p:sp>
+      <p:sp>
+        <p:nvSpPr>
+          <p:cNvPr id="27" name="TextBox 26"/>
+          <p:cNvSpPr txBox="1"/>
+          <p:nvPr/>
+        </p:nvSpPr>
+        <p:spPr>
+          <a:xfrm>
+            <a:off x="7081342" y="2167127"/>
+            <a:ext cx="2727883" cy="219456"/>
+          </a:xfrm>
+          <a:prstGeom prst="rect">
+            <a:avLst/>
+          </a:prstGeom>
+          <a:noFill/>
+        </p:spPr>
+        <p:txBody>
+          <a:bodyPr wrap="square" lIns="0" tIns="0" rIns="0" bIns="0">
+            <a:spAutoFit/>
+          </a:bodyPr>
+          <a:lstStyle/>
+          <a:p>
+            <a:pPr algn="l"/>
+            <a:r>
+              <a:rPr sz="1000" b="0" i="0">
+                <a:solidFill>
+                  <a:srgbClr val="F8FAFC"/>
+                </a:solidFill>
+                <a:latin typeface="Calibri"/>
+              </a:rPr>
+              <a:t>$620M</a:t>
+            </a:r>
+          </a:p>
+        </p:txBody>
+      </p:sp>
+      <p:sp>
+        <p:nvSpPr>
+          <p:cNvPr id="28" name="Rectangle 27"/>
+          <p:cNvSpPr/>
+          <p:nvPr/>
+        </p:nvSpPr>
+        <p:spPr>
+          <a:xfrm>
+            <a:off x="9854946" y="2148839"/>
+            <a:ext cx="1879549" cy="256032"/>
+          </a:xfrm>
+          <a:prstGeom prst="rect">
+            <a:avLst/>
+          </a:prstGeom>
+          <a:solidFill>
+            <a:srgbClr val="1E293B"/>
+          </a:solidFill>
+          <a:ln>
+            <a:noFill/>
+          </a:ln>
+        </p:spPr>
+        <p:style>
+          <a:lnRef idx="1">
+            <a:schemeClr val="accent1"/>
+          </a:lnRef>
+          <a:fillRef idx="3">
+            <a:schemeClr val="accent1"/>
+          </a:fillRef>
+          <a:effectRef idx="2">
+            <a:schemeClr val="accent1"/>
+          </a:effectRef>
+          <a:fontRef idx="minor">
+            <a:schemeClr val="lt1"/>
+          </a:fontRef>
+        </p:style>
+        <p:txBody>
+          <a:bodyPr rtlCol="0" anchor="ctr"/>
+          <a:lstStyle/>
+          <a:p>
+            <a:pPr algn="ctr"/>
+          </a:p>
+        </p:txBody>
+      </p:sp>
+      <p:sp>
+        <p:nvSpPr>
+          <p:cNvPr id="29" name="TextBox 28"/>
+          <p:cNvSpPr txBox="1"/>
+          <p:nvPr/>
+        </p:nvSpPr>
+        <p:spPr>
+          <a:xfrm>
+            <a:off x="9900666" y="2167127"/>
+            <a:ext cx="1788109" cy="219456"/>
+          </a:xfrm>
+          <a:prstGeom prst="rect">
+            <a:avLst/>
+          </a:prstGeom>
+          <a:noFill/>
+        </p:spPr>
+        <p:txBody>
+          <a:bodyPr wrap="square" lIns="0" tIns="0" rIns="0" bIns="0">
+            <a:spAutoFit/>
+          </a:bodyPr>
+          <a:lstStyle/>
+          <a:p>
+            <a:pPr algn="l"/>
+            <a:r>
+              <a:rPr sz="1000" b="0" i="0">
+                <a:solidFill>
+                  <a:srgbClr val="F8FAFC"/>
+                </a:solidFill>
+                <a:latin typeface="Calibri"/>
+              </a:rPr>
+              <a:t>+24%</a:t>
+            </a:r>
+          </a:p>
+        </p:txBody>
+      </p:sp>
+      <p:sp>
+        <p:nvSpPr>
+          <p:cNvPr id="30" name="Rectangle 29"/>
+          <p:cNvSpPr/>
+          <p:nvPr/>
+        </p:nvSpPr>
+        <p:spPr>
+          <a:xfrm>
+            <a:off x="457200" y="2404872"/>
+            <a:ext cx="3759098" cy="256032"/>
+          </a:xfrm>
+          <a:prstGeom prst="rect">
+            <a:avLst/>
+          </a:prstGeom>
+          <a:solidFill>
+            <a:srgbClr val="1E293B"/>
+          </a:solidFill>
+          <a:ln>
+            <a:noFill/>
+          </a:ln>
+        </p:spPr>
+        <p:style>
+          <a:lnRef idx="1">
+            <a:schemeClr val="accent1"/>
+          </a:lnRef>
+          <a:fillRef idx="3">
+            <a:schemeClr val="accent1"/>
+          </a:fillRef>
+          <a:effectRef idx="2">
+            <a:schemeClr val="accent1"/>
+          </a:effectRef>
+          <a:fontRef idx="minor">
+            <a:schemeClr val="lt1"/>
+          </a:fontRef>
+        </p:style>
+        <p:txBody>
+          <a:bodyPr rtlCol="0" anchor="ctr"/>
+          <a:lstStyle/>
+          <a:p>
+            <a:pPr algn="ctr"/>
+          </a:p>
+        </p:txBody>
+      </p:sp>
+      <p:sp>
+        <p:nvSpPr>
+          <p:cNvPr id="31" name="TextBox 30"/>
+          <p:cNvSpPr txBox="1"/>
+          <p:nvPr/>
+        </p:nvSpPr>
+        <p:spPr>
+          <a:xfrm>
+            <a:off x="502920" y="2423160"/>
+            <a:ext cx="3667658" cy="219456"/>
+          </a:xfrm>
+          <a:prstGeom prst="rect">
+            <a:avLst/>
+          </a:prstGeom>
+          <a:noFill/>
+        </p:spPr>
+        <p:txBody>
+          <a:bodyPr wrap="square" lIns="0" tIns="0" rIns="0" bIns="0">
+            <a:spAutoFit/>
+          </a:bodyPr>
+          <a:lstStyle/>
+          <a:p>
+            <a:pPr algn="l"/>
+            <a:r>
+              <a:rPr sz="1000" b="0" i="0">
+                <a:solidFill>
+                  <a:srgbClr val="F8FAFC"/>
+                </a:solidFill>
+                <a:latin typeface="Calibri"/>
+              </a:rPr>
+              <a:t>    Canada</a:t>
+            </a:r>
+          </a:p>
+        </p:txBody>
+      </p:sp>
+      <p:sp>
+        <p:nvSpPr>
+          <p:cNvPr id="32" name="Rectangle 31"/>
+          <p:cNvSpPr/>
+          <p:nvPr/>
+        </p:nvSpPr>
+        <p:spPr>
+          <a:xfrm>
+            <a:off x="4216298" y="2404872"/>
+            <a:ext cx="2819323" cy="256032"/>
+          </a:xfrm>
+          <a:prstGeom prst="rect">
+            <a:avLst/>
+          </a:prstGeom>
+          <a:solidFill>
+            <a:srgbClr val="1E293B"/>
+          </a:solidFill>
+          <a:ln>
+            <a:noFill/>
+          </a:ln>
+        </p:spPr>
+        <p:style>
+          <a:lnRef idx="1">
+            <a:schemeClr val="accent1"/>
+          </a:lnRef>
+          <a:fillRef idx="3">
+            <a:schemeClr val="accent1"/>
+          </a:fillRef>
+          <a:effectRef idx="2">
+            <a:schemeClr val="accent1"/>
+          </a:effectRef>
+          <a:fontRef idx="minor">
+            <a:schemeClr val="lt1"/>
+          </a:fontRef>
+        </p:style>
+        <p:txBody>
+          <a:bodyPr rtlCol="0" anchor="ctr"/>
+          <a:lstStyle/>
+          <a:p>
+            <a:pPr algn="ctr"/>
+          </a:p>
+        </p:txBody>
+      </p:sp>
+      <p:sp>
+        <p:nvSpPr>
+          <p:cNvPr id="33" name="TextBox 32"/>
+          <p:cNvSpPr txBox="1"/>
+          <p:nvPr/>
+        </p:nvSpPr>
+        <p:spPr>
+          <a:xfrm>
+            <a:off x="4262018" y="2423160"/>
+            <a:ext cx="2727883" cy="219456"/>
+          </a:xfrm>
+          <a:prstGeom prst="rect">
+            <a:avLst/>
+          </a:prstGeom>
+          <a:noFill/>
+        </p:spPr>
+        <p:txBody>
+          <a:bodyPr wrap="square" lIns="0" tIns="0" rIns="0" bIns="0">
+            <a:spAutoFit/>
+          </a:bodyPr>
+          <a:lstStyle/>
+          <a:p>
+            <a:pPr algn="l"/>
+            <a:r>
+              <a:rPr sz="1000" b="0" i="0">
+                <a:solidFill>
+                  <a:srgbClr val="F8FAFC"/>
+                </a:solidFill>
+                <a:latin typeface="Calibri"/>
+              </a:rPr>
+              <a:t>$80M</a:t>
+            </a:r>
+          </a:p>
+        </p:txBody>
+      </p:sp>
+      <p:sp>
+        <p:nvSpPr>
+          <p:cNvPr id="34" name="Rectangle 33"/>
+          <p:cNvSpPr/>
+          <p:nvPr/>
+        </p:nvSpPr>
+        <p:spPr>
+          <a:xfrm>
+            <a:off x="7035622" y="2404872"/>
+            <a:ext cx="2819323" cy="256032"/>
+          </a:xfrm>
+          <a:prstGeom prst="rect">
+            <a:avLst/>
+          </a:prstGeom>
+          <a:solidFill>
+            <a:srgbClr val="1E293B"/>
+          </a:solidFill>
+          <a:ln>
+            <a:noFill/>
+          </a:ln>
+        </p:spPr>
+        <p:style>
+          <a:lnRef idx="1">
+            <a:schemeClr val="accent1"/>
+          </a:lnRef>
+          <a:fillRef idx="3">
+            <a:schemeClr val="accent1"/>
+          </a:fillRef>
+          <a:effectRef idx="2">
+            <a:schemeClr val="accent1"/>
+          </a:effectRef>
+          <a:fontRef idx="minor">
+            <a:schemeClr val="lt1"/>
+          </a:fontRef>
+        </p:style>
+        <p:txBody>
+          <a:bodyPr rtlCol="0" anchor="ctr"/>
+          <a:lstStyle/>
+          <a:p>
+            <a:pPr algn="ctr"/>
+          </a:p>
+        </p:txBody>
+      </p:sp>
+      <p:sp>
+        <p:nvSpPr>
+          <p:cNvPr id="35" name="TextBox 34"/>
+          <p:cNvSpPr txBox="1"/>
+          <p:nvPr/>
+        </p:nvSpPr>
+        <p:spPr>
+          <a:xfrm>
+            <a:off x="7081342" y="2423160"/>
+            <a:ext cx="2727883" cy="219456"/>
+          </a:xfrm>
+          <a:prstGeom prst="rect">
+            <a:avLst/>
+          </a:prstGeom>
+          <a:noFill/>
+        </p:spPr>
+        <p:txBody>
+          <a:bodyPr wrap="square" lIns="0" tIns="0" rIns="0" bIns="0">
+            <a:spAutoFit/>
+          </a:bodyPr>
+          <a:lstStyle/>
+          <a:p>
+            <a:pPr algn="l"/>
+            <a:r>
+              <a:rPr sz="1000" b="0" i="0">
+                <a:solidFill>
+                  <a:srgbClr val="F8FAFC"/>
+                </a:solidFill>
+                <a:latin typeface="Calibri"/>
+              </a:rPr>
+              <a:t>$95M</a:t>
+            </a:r>
+          </a:p>
+        </p:txBody>
+      </p:sp>
+      <p:sp>
+        <p:nvSpPr>
+          <p:cNvPr id="36" name="Rectangle 35"/>
+          <p:cNvSpPr/>
+          <p:nvPr/>
+        </p:nvSpPr>
+        <p:spPr>
+          <a:xfrm>
+            <a:off x="9854946" y="2404872"/>
+            <a:ext cx="1879549" cy="256032"/>
+          </a:xfrm>
+          <a:prstGeom prst="rect">
+            <a:avLst/>
+          </a:prstGeom>
+          <a:solidFill>
+            <a:srgbClr val="1E293B"/>
+          </a:solidFill>
+          <a:ln>
+            <a:noFill/>
+          </a:ln>
+        </p:spPr>
+        <p:style>
+          <a:lnRef idx="1">
+            <a:schemeClr val="accent1"/>
+          </a:lnRef>
+          <a:fillRef idx="3">
+            <a:schemeClr val="accent1"/>
+          </a:fillRef>
+          <a:effectRef idx="2">
+            <a:schemeClr val="accent1"/>
+          </a:effectRef>
+          <a:fontRef idx="minor">
+            <a:schemeClr val="lt1"/>
+          </a:fontRef>
+        </p:style>
+        <p:txBody>
+          <a:bodyPr rtlCol="0" anchor="ctr"/>
+          <a:lstStyle/>
+          <a:p>
+            <a:pPr algn="ctr"/>
+          </a:p>
+        </p:txBody>
+      </p:sp>
+      <p:sp>
+        <p:nvSpPr>
+          <p:cNvPr id="37" name="TextBox 36"/>
+          <p:cNvSpPr txBox="1"/>
+          <p:nvPr/>
+        </p:nvSpPr>
+        <p:spPr>
+          <a:xfrm>
+            <a:off x="9900666" y="2423160"/>
+            <a:ext cx="1788109" cy="219456"/>
+          </a:xfrm>
+          <a:prstGeom prst="rect">
+            <a:avLst/>
+          </a:prstGeom>
+          <a:noFill/>
+        </p:spPr>
+        <p:txBody>
+          <a:bodyPr wrap="square" lIns="0" tIns="0" rIns="0" bIns="0">
+            <a:spAutoFit/>
+          </a:bodyPr>
+          <a:lstStyle/>
+          <a:p>
+            <a:pPr algn="l"/>
+            <a:r>
+              <a:rPr sz="1000" b="0" i="0">
+                <a:solidFill>
+                  <a:srgbClr val="F8FAFC"/>
+                </a:solidFill>
+                <a:latin typeface="Calibri"/>
+              </a:rPr>
+              <a:t>+19%</a:t>
+            </a:r>
+          </a:p>
+        </p:txBody>
+      </p:sp>
+      <p:sp>
+        <p:nvSpPr>
+          <p:cNvPr id="38" name="Rectangle 37"/>
+          <p:cNvSpPr/>
+          <p:nvPr/>
+        </p:nvSpPr>
+        <p:spPr>
+          <a:xfrm>
+            <a:off x="457200" y="2660904"/>
+            <a:ext cx="3759098" cy="256032"/>
+          </a:xfrm>
+          <a:prstGeom prst="rect">
+            <a:avLst/>
+          </a:prstGeom>
+          <a:solidFill>
+            <a:srgbClr val="334155"/>
+          </a:solidFill>
+          <a:ln>
+            <a:noFill/>
+          </a:ln>
+        </p:spPr>
+        <p:style>
+          <a:lnRef idx="1">
+            <a:schemeClr val="accent1"/>
+          </a:lnRef>
+          <a:fillRef idx="3">
+            <a:schemeClr val="accent1"/>
+          </a:fillRef>
+          <a:effectRef idx="2">
+            <a:schemeClr val="accent1"/>
+          </a:effectRef>
+          <a:fontRef idx="minor">
+            <a:schemeClr val="lt1"/>
+          </a:fontRef>
+        </p:style>
+        <p:txBody>
+          <a:bodyPr rtlCol="0" anchor="ctr"/>
+          <a:lstStyle/>
+          <a:p>
+            <a:pPr algn="ctr"/>
+          </a:p>
+        </p:txBody>
+      </p:sp>
+      <p:sp>
+        <p:nvSpPr>
+          <p:cNvPr id="39" name="TextBox 38"/>
+          <p:cNvSpPr txBox="1"/>
+          <p:nvPr/>
+        </p:nvSpPr>
+        <p:spPr>
+          <a:xfrm>
+            <a:off x="502920" y="2679192"/>
+            <a:ext cx="3667658" cy="219456"/>
+          </a:xfrm>
+          <a:prstGeom prst="rect">
+            <a:avLst/>
+          </a:prstGeom>
+          <a:noFill/>
+        </p:spPr>
+        <p:txBody>
+          <a:bodyPr wrap="square" lIns="0" tIns="0" rIns="0" bIns="0">
+            <a:spAutoFit/>
+          </a:bodyPr>
+          <a:lstStyle/>
+          <a:p>
+            <a:pPr algn="l"/>
+            <a:r>
+              <a:rPr sz="1000" b="1" i="0">
+                <a:solidFill>
+                  <a:srgbClr val="94A3B8"/>
+                </a:solidFill>
+                <a:latin typeface="Calibri"/>
+              </a:rPr>
+              <a:t>SubtotalNA</a:t>
+            </a:r>
+          </a:p>
+        </p:txBody>
+      </p:sp>
+      <p:sp>
+        <p:nvSpPr>
+          <p:cNvPr id="40" name="Rectangle 39"/>
+          <p:cNvSpPr/>
+          <p:nvPr/>
+        </p:nvSpPr>
+        <p:spPr>
+          <a:xfrm>
+            <a:off x="4216298" y="2660904"/>
+            <a:ext cx="2819323" cy="256032"/>
+          </a:xfrm>
+          <a:prstGeom prst="rect">
+            <a:avLst/>
+          </a:prstGeom>
+          <a:solidFill>
+            <a:srgbClr val="334155"/>
+          </a:solidFill>
+          <a:ln>
+            <a:noFill/>
+          </a:ln>
+        </p:spPr>
+        <p:style>
+          <a:lnRef idx="1">
+            <a:schemeClr val="accent1"/>
+          </a:lnRef>
+          <a:fillRef idx="3">
+            <a:schemeClr val="accent1"/>
+          </a:fillRef>
+          <a:effectRef idx="2">
+            <a:schemeClr val="accent1"/>
+          </a:effectRef>
+          <a:fontRef idx="minor">
+            <a:schemeClr val="lt1"/>
+          </a:fontRef>
+        </p:style>
+        <p:txBody>
+          <a:bodyPr rtlCol="0" anchor="ctr"/>
+          <a:lstStyle/>
+          <a:p>
+            <a:pPr algn="ctr"/>
+          </a:p>
+        </p:txBody>
+      </p:sp>
+      <p:sp>
+        <p:nvSpPr>
+          <p:cNvPr id="41" name="TextBox 40"/>
+          <p:cNvSpPr txBox="1"/>
+          <p:nvPr/>
+        </p:nvSpPr>
+        <p:spPr>
+          <a:xfrm>
+            <a:off x="4262018" y="2679192"/>
+            <a:ext cx="2727883" cy="219456"/>
+          </a:xfrm>
+          <a:prstGeom prst="rect">
+            <a:avLst/>
+          </a:prstGeom>
+          <a:noFill/>
+        </p:spPr>
+        <p:txBody>
+          <a:bodyPr wrap="square" lIns="0" tIns="0" rIns="0" bIns="0">
+            <a:spAutoFit/>
+          </a:bodyPr>
+          <a:lstStyle/>
+          <a:p>
+            <a:pPr algn="l"/>
+            <a:r>
+              <a:rPr sz="1000" b="1" i="0">
+                <a:solidFill>
+                  <a:srgbClr val="94A3B8"/>
+                </a:solidFill>
+                <a:latin typeface="Calibri"/>
+              </a:rPr>
+              <a:t>$580M</a:t>
+            </a:r>
+          </a:p>
+        </p:txBody>
+      </p:sp>
+      <p:sp>
+        <p:nvSpPr>
+          <p:cNvPr id="42" name="Rectangle 41"/>
+          <p:cNvSpPr/>
+          <p:nvPr/>
+        </p:nvSpPr>
+        <p:spPr>
+          <a:xfrm>
+            <a:off x="7035622" y="2660904"/>
+            <a:ext cx="2819323" cy="256032"/>
+          </a:xfrm>
+          <a:prstGeom prst="rect">
+            <a:avLst/>
+          </a:prstGeom>
+          <a:solidFill>
+            <a:srgbClr val="334155"/>
+          </a:solidFill>
+          <a:ln>
+            <a:noFill/>
+          </a:ln>
+        </p:spPr>
+        <p:style>
+          <a:lnRef idx="1">
+            <a:schemeClr val="accent1"/>
+          </a:lnRef>
+          <a:fillRef idx="3">
+            <a:schemeClr val="accent1"/>
+          </a:fillRef>
+          <a:effectRef idx="2">
+            <a:schemeClr val="accent1"/>
+          </a:effectRef>
+          <a:fontRef idx="minor">
+            <a:schemeClr val="lt1"/>
+          </a:fontRef>
+        </p:style>
+        <p:txBody>
+          <a:bodyPr rtlCol="0" anchor="ctr"/>
+          <a:lstStyle/>
+          <a:p>
+            <a:pPr algn="ctr"/>
+          </a:p>
+        </p:txBody>
+      </p:sp>
+      <p:sp>
+        <p:nvSpPr>
+          <p:cNvPr id="43" name="TextBox 42"/>
+          <p:cNvSpPr txBox="1"/>
+          <p:nvPr/>
+        </p:nvSpPr>
+        <p:spPr>
+          <a:xfrm>
+            <a:off x="7081342" y="2679192"/>
+            <a:ext cx="2727883" cy="219456"/>
+          </a:xfrm>
+          <a:prstGeom prst="rect">
+            <a:avLst/>
+          </a:prstGeom>
+          <a:noFill/>
+        </p:spPr>
+        <p:txBody>
+          <a:bodyPr wrap="square" lIns="0" tIns="0" rIns="0" bIns="0">
+            <a:spAutoFit/>
+          </a:bodyPr>
+          <a:lstStyle/>
+          <a:p>
+            <a:pPr algn="l"/>
+            <a:r>
+              <a:rPr sz="1000" b="1" i="0">
+                <a:solidFill>
+                  <a:srgbClr val="94A3B8"/>
+                </a:solidFill>
+                <a:latin typeface="Calibri"/>
+              </a:rPr>
+              <a:t>$715M</a:t>
+            </a:r>
+          </a:p>
+        </p:txBody>
+      </p:sp>
+      <p:sp>
+        <p:nvSpPr>
+          <p:cNvPr id="44" name="Rectangle 43"/>
+          <p:cNvSpPr/>
+          <p:nvPr/>
+        </p:nvSpPr>
+        <p:spPr>
+          <a:xfrm>
+            <a:off x="9854946" y="2660904"/>
+            <a:ext cx="1879549" cy="256032"/>
+          </a:xfrm>
+          <a:prstGeom prst="rect">
+            <a:avLst/>
+          </a:prstGeom>
+          <a:solidFill>
+            <a:srgbClr val="334155"/>
+          </a:solidFill>
+          <a:ln>
+            <a:noFill/>
+          </a:ln>
+        </p:spPr>
+        <p:style>
+          <a:lnRef idx="1">
+            <a:schemeClr val="accent1"/>
+          </a:lnRef>
+          <a:fillRef idx="3">
+            <a:schemeClr val="accent1"/>
+          </a:fillRef>
+          <a:effectRef idx="2">
+            <a:schemeClr val="accent1"/>
+          </a:effectRef>
+          <a:fontRef idx="minor">
+            <a:schemeClr val="lt1"/>
+          </a:fontRef>
+        </p:style>
+        <p:txBody>
+          <a:bodyPr rtlCol="0" anchor="ctr"/>
+          <a:lstStyle/>
+          <a:p>
+            <a:pPr algn="ctr"/>
+          </a:p>
+        </p:txBody>
+      </p:sp>
+      <p:sp>
+        <p:nvSpPr>
+          <p:cNvPr id="45" name="TextBox 44"/>
+          <p:cNvSpPr txBox="1"/>
+          <p:nvPr/>
+        </p:nvSpPr>
+        <p:spPr>
+          <a:xfrm>
+            <a:off x="9900666" y="2679192"/>
+            <a:ext cx="1788109" cy="219456"/>
+          </a:xfrm>
+          <a:prstGeom prst="rect">
+            <a:avLst/>
+          </a:prstGeom>
+          <a:noFill/>
+        </p:spPr>
+        <p:txBody>
+          <a:bodyPr wrap="square" lIns="0" tIns="0" rIns="0" bIns="0">
+            <a:spAutoFit/>
+          </a:bodyPr>
+          <a:lstStyle/>
+          <a:p>
+            <a:pPr algn="l"/>
+            <a:r>
+              <a:rPr sz="1000" b="1" i="0">
+                <a:solidFill>
+                  <a:srgbClr val="94A3B8"/>
+                </a:solidFill>
+                <a:latin typeface="Calibri"/>
+              </a:rPr>
+              <a:t>+23%</a:t>
+            </a:r>
+          </a:p>
+        </p:txBody>
+      </p:sp>
+      <p:sp>
+        <p:nvSpPr>
+          <p:cNvPr id="46" name="Rectangle 45"/>
+          <p:cNvSpPr/>
+          <p:nvPr/>
+        </p:nvSpPr>
+        <p:spPr>
+          <a:xfrm>
+            <a:off x="457200" y="3008376"/>
+            <a:ext cx="3759098" cy="256032"/>
+          </a:xfrm>
+          <a:prstGeom prst="rect">
+            <a:avLst/>
+          </a:prstGeom>
+          <a:solidFill>
+            <a:srgbClr val="334155"/>
+          </a:solidFill>
+          <a:ln>
+            <a:noFill/>
+          </a:ln>
+        </p:spPr>
+        <p:style>
+          <a:lnRef idx="1">
+            <a:schemeClr val="accent1"/>
+          </a:lnRef>
+          <a:fillRef idx="3">
+            <a:schemeClr val="accent1"/>
+          </a:fillRef>
+          <a:effectRef idx="2">
+            <a:schemeClr val="accent1"/>
+          </a:effectRef>
+          <a:fontRef idx="minor">
+            <a:schemeClr val="lt1"/>
+          </a:fontRef>
+        </p:style>
+        <p:txBody>
+          <a:bodyPr rtlCol="0" anchor="ctr"/>
+          <a:lstStyle/>
+          <a:p>
+            <a:pPr algn="ctr"/>
+          </a:p>
+        </p:txBody>
+      </p:sp>
+      <p:sp>
+        <p:nvSpPr>
+          <p:cNvPr id="47" name="TextBox 46"/>
+          <p:cNvSpPr txBox="1"/>
+          <p:nvPr/>
+        </p:nvSpPr>
+        <p:spPr>
+          <a:xfrm>
+            <a:off x="502920" y="3026664"/>
+            <a:ext cx="3667658" cy="219456"/>
+          </a:xfrm>
+          <a:prstGeom prst="rect">
+            <a:avLst/>
+          </a:prstGeom>
+          <a:noFill/>
+        </p:spPr>
+        <p:txBody>
+          <a:bodyPr wrap="square" lIns="0" tIns="0" rIns="0" bIns="0">
+            <a:spAutoFit/>
+          </a:bodyPr>
+          <a:lstStyle/>
+          <a:p>
+            <a:pPr algn="l"/>
+            <a:r>
+              <a:rPr sz="1100" b="1" i="0">
+                <a:solidFill>
+                  <a:srgbClr val="F8FAFC"/>
+                </a:solidFill>
+                <a:latin typeface="Calibri"/>
+              </a:rPr>
+              <a:t>EMEA</a:t>
+            </a:r>
+          </a:p>
+        </p:txBody>
+      </p:sp>
+      <p:sp>
+        <p:nvSpPr>
+          <p:cNvPr id="48" name="Rectangle 47"/>
+          <p:cNvSpPr/>
+          <p:nvPr/>
+        </p:nvSpPr>
+        <p:spPr>
+          <a:xfrm>
+            <a:off x="4216298" y="3008376"/>
+            <a:ext cx="2819323" cy="256032"/>
+          </a:xfrm>
+          <a:prstGeom prst="rect">
+            <a:avLst/>
+          </a:prstGeom>
+          <a:solidFill>
+            <a:srgbClr val="334155"/>
+          </a:solidFill>
+          <a:ln>
+            <a:noFill/>
+          </a:ln>
+        </p:spPr>
+        <p:style>
+          <a:lnRef idx="1">
+            <a:schemeClr val="accent1"/>
+          </a:lnRef>
+          <a:fillRef idx="3">
+            <a:schemeClr val="accent1"/>
+          </a:fillRef>
+          <a:effectRef idx="2">
+            <a:schemeClr val="accent1"/>
+          </a:effectRef>
+          <a:fontRef idx="minor">
+            <a:schemeClr val="lt1"/>
+          </a:fontRef>
+        </p:style>
+        <p:txBody>
+          <a:bodyPr rtlCol="0" anchor="ctr"/>
+          <a:lstStyle/>
+          <a:p>
+            <a:pPr algn="ctr"/>
+          </a:p>
+        </p:txBody>
+      </p:sp>
+      <p:sp>
+        <p:nvSpPr>
+          <p:cNvPr id="49" name="TextBox 48"/>
+          <p:cNvSpPr txBox="1"/>
+          <p:nvPr/>
+        </p:nvSpPr>
+        <p:spPr>
+          <a:xfrm>
+            <a:off x="4262018" y="3026664"/>
+            <a:ext cx="2727883" cy="219456"/>
+          </a:xfrm>
+          <a:prstGeom prst="rect">
+            <a:avLst/>
+          </a:prstGeom>
+          <a:noFill/>
+        </p:spPr>
+        <p:txBody>
+          <a:bodyPr wrap="square" lIns="0" tIns="0" rIns="0" bIns="0">
+            <a:spAutoFit/>
+          </a:bodyPr>
+          <a:lstStyle/>
+          <a:p>
+            <a:pPr algn="l"/>
+            <a:r>
+              <a:rPr sz="1100" b="1" i="0">
+                <a:solidFill>
+                  <a:srgbClr val="F8FAFC"/>
+                </a:solidFill>
+                <a:latin typeface="Calibri"/>
+              </a:rPr>
+              <a:t>$350M</a:t>
+            </a:r>
+          </a:p>
+        </p:txBody>
+      </p:sp>
+      <p:sp>
+        <p:nvSpPr>
+          <p:cNvPr id="50" name="Rectangle 49"/>
+          <p:cNvSpPr/>
+          <p:nvPr/>
+        </p:nvSpPr>
+        <p:spPr>
+          <a:xfrm>
+            <a:off x="7035622" y="3008376"/>
+            <a:ext cx="2819323" cy="256032"/>
+          </a:xfrm>
+          <a:prstGeom prst="rect">
+            <a:avLst/>
+          </a:prstGeom>
+          <a:solidFill>
+            <a:srgbClr val="334155"/>
+          </a:solidFill>
+          <a:ln>
+            <a:noFill/>
+          </a:ln>
+        </p:spPr>
+        <p:style>
+          <a:lnRef idx="1">
+            <a:schemeClr val="accent1"/>
+          </a:lnRef>
+          <a:fillRef idx="3">
+            <a:schemeClr val="accent1"/>
+          </a:fillRef>
+          <a:effectRef idx="2">
+            <a:schemeClr val="accent1"/>
+          </a:effectRef>
+          <a:fontRef idx="minor">
+            <a:schemeClr val="lt1"/>
+          </a:fontRef>
+        </p:style>
+        <p:txBody>
+          <a:bodyPr rtlCol="0" anchor="ctr"/>
+          <a:lstStyle/>
+          <a:p>
+            <a:pPr algn="ctr"/>
+          </a:p>
+        </p:txBody>
+      </p:sp>
+      <p:sp>
+        <p:nvSpPr>
+          <p:cNvPr id="51" name="TextBox 50"/>
+          <p:cNvSpPr txBox="1"/>
+          <p:nvPr/>
+        </p:nvSpPr>
+        <p:spPr>
+          <a:xfrm>
+            <a:off x="7081342" y="3026664"/>
+            <a:ext cx="2727883" cy="219456"/>
+          </a:xfrm>
+          <a:prstGeom prst="rect">
+            <a:avLst/>
+          </a:prstGeom>
+          <a:noFill/>
+        </p:spPr>
+        <p:txBody>
+          <a:bodyPr wrap="square" lIns="0" tIns="0" rIns="0" bIns="0">
+            <a:spAutoFit/>
+          </a:bodyPr>
+          <a:lstStyle/>
+          <a:p>
+            <a:pPr algn="l"/>
+            <a:r>
+              <a:rPr sz="1100" b="1" i="0">
+                <a:solidFill>
+                  <a:srgbClr val="F8FAFC"/>
+                </a:solidFill>
+                <a:latin typeface="Calibri"/>
+              </a:rPr>
+              <a:t>$425M</a:t>
+            </a:r>
+          </a:p>
+        </p:txBody>
+      </p:sp>
+      <p:sp>
+        <p:nvSpPr>
+          <p:cNvPr id="52" name="Rectangle 51"/>
+          <p:cNvSpPr/>
+          <p:nvPr/>
+        </p:nvSpPr>
+        <p:spPr>
+          <a:xfrm>
+            <a:off x="9854946" y="3008376"/>
+            <a:ext cx="1879549" cy="256032"/>
+          </a:xfrm>
+          <a:prstGeom prst="rect">
+            <a:avLst/>
+          </a:prstGeom>
+          <a:solidFill>
+            <a:srgbClr val="334155"/>
+          </a:solidFill>
+          <a:ln>
+            <a:noFill/>
+          </a:ln>
+        </p:spPr>
+        <p:style>
+          <a:lnRef idx="1">
+            <a:schemeClr val="accent1"/>
+          </a:lnRef>
+          <a:fillRef idx="3">
+            <a:schemeClr val="accent1"/>
+          </a:fillRef>
+          <a:effectRef idx="2">
+            <a:schemeClr val="accent1"/>
+          </a:effectRef>
+          <a:fontRef idx="minor">
+            <a:schemeClr val="lt1"/>
+          </a:fontRef>
+        </p:style>
+        <p:txBody>
+          <a:bodyPr rtlCol="0" anchor="ctr"/>
+          <a:lstStyle/>
+          <a:p>
+            <a:pPr algn="ctr"/>
+          </a:p>
+        </p:txBody>
+      </p:sp>
+      <p:sp>
+        <p:nvSpPr>
+          <p:cNvPr id="53" name="TextBox 52"/>
+          <p:cNvSpPr txBox="1"/>
+          <p:nvPr/>
+        </p:nvSpPr>
+        <p:spPr>
+          <a:xfrm>
+            <a:off x="9900666" y="3026664"/>
+            <a:ext cx="1788109" cy="219456"/>
+          </a:xfrm>
+          <a:prstGeom prst="rect">
+            <a:avLst/>
+          </a:prstGeom>
+          <a:noFill/>
+        </p:spPr>
+        <p:txBody>
+          <a:bodyPr wrap="square" lIns="0" tIns="0" rIns="0" bIns="0">
+            <a:spAutoFit/>
+          </a:bodyPr>
+          <a:lstStyle/>
+          <a:p>
+            <a:pPr algn="l"/>
+            <a:r>
+              <a:rPr sz="1100" b="1" i="0">
+                <a:solidFill>
+                  <a:srgbClr val="F8FAFC"/>
+                </a:solidFill>
+                <a:latin typeface="Calibri"/>
+              </a:rPr>
+              <a:t>+21%</a:t>
+            </a:r>
+          </a:p>
+        </p:txBody>
+      </p:sp>
+      <p:sp>
+        <p:nvSpPr>
+          <p:cNvPr id="54" name="Rectangle 53"/>
+          <p:cNvSpPr/>
+          <p:nvPr/>
+        </p:nvSpPr>
+        <p:spPr>
+          <a:xfrm>
+            <a:off x="457200" y="3264408"/>
+            <a:ext cx="3759098" cy="256032"/>
+          </a:xfrm>
+          <a:prstGeom prst="rect">
+            <a:avLst/>
+          </a:prstGeom>
+          <a:solidFill>
+            <a:srgbClr val="1E293B"/>
+          </a:solidFill>
+          <a:ln>
+            <a:noFill/>
+          </a:ln>
+        </p:spPr>
+        <p:style>
+          <a:lnRef idx="1">
+            <a:schemeClr val="accent1"/>
+          </a:lnRef>
+          <a:fillRef idx="3">
+            <a:schemeClr val="accent1"/>
+          </a:fillRef>
+          <a:effectRef idx="2">
+            <a:schemeClr val="accent1"/>
+          </a:effectRef>
+          <a:fontRef idx="minor">
+            <a:schemeClr val="lt1"/>
+          </a:fontRef>
+        </p:style>
+        <p:txBody>
+          <a:bodyPr rtlCol="0" anchor="ctr"/>
+          <a:lstStyle/>
+          <a:p>
+            <a:pPr algn="ctr"/>
+          </a:p>
+        </p:txBody>
+      </p:sp>
+      <p:sp>
+        <p:nvSpPr>
+          <p:cNvPr id="55" name="TextBox 54"/>
+          <p:cNvSpPr txBox="1"/>
+          <p:nvPr/>
+        </p:nvSpPr>
+        <p:spPr>
+          <a:xfrm>
+            <a:off x="502920" y="3282696"/>
+            <a:ext cx="3667658" cy="219456"/>
+          </a:xfrm>
+          <a:prstGeom prst="rect">
+            <a:avLst/>
+          </a:prstGeom>
+          <a:noFill/>
+        </p:spPr>
+        <p:txBody>
+          <a:bodyPr wrap="square" lIns="0" tIns="0" rIns="0" bIns="0">
+            <a:spAutoFit/>
+          </a:bodyPr>
+          <a:lstStyle/>
+          <a:p>
+            <a:pPr algn="l"/>
+            <a:r>
+              <a:rPr sz="1000" b="0" i="0">
+                <a:solidFill>
+                  <a:srgbClr val="F8FAFC"/>
+                </a:solidFill>
+                <a:latin typeface="Calibri"/>
+              </a:rPr>
+              <a:t>    UK</a:t>
+            </a:r>
+          </a:p>
+        </p:txBody>
+      </p:sp>
+      <p:sp>
+        <p:nvSpPr>
+          <p:cNvPr id="56" name="Rectangle 55"/>
+          <p:cNvSpPr/>
+          <p:nvPr/>
+        </p:nvSpPr>
+        <p:spPr>
+          <a:xfrm>
+            <a:off x="4216298" y="3264408"/>
+            <a:ext cx="2819323" cy="256032"/>
+          </a:xfrm>
+          <a:prstGeom prst="rect">
+            <a:avLst/>
+          </a:prstGeom>
+          <a:solidFill>
+            <a:srgbClr val="1E293B"/>
+          </a:solidFill>
+          <a:ln>
+            <a:noFill/>
+          </a:ln>
+        </p:spPr>
+        <p:style>
+          <a:lnRef idx="1">
+            <a:schemeClr val="accent1"/>
+          </a:lnRef>
+          <a:fillRef idx="3">
+            <a:schemeClr val="accent1"/>
+          </a:fillRef>
+          <a:effectRef idx="2">
+            <a:schemeClr val="accent1"/>
+          </a:effectRef>
+          <a:fontRef idx="minor">
+            <a:schemeClr val="lt1"/>
+          </a:fontRef>
+        </p:style>
+        <p:txBody>
+          <a:bodyPr rtlCol="0" anchor="ctr"/>
+          <a:lstStyle/>
+          <a:p>
+            <a:pPr algn="ctr"/>
+          </a:p>
+        </p:txBody>
+      </p:sp>
+      <p:sp>
+        <p:nvSpPr>
+          <p:cNvPr id="57" name="TextBox 56"/>
+          <p:cNvSpPr txBox="1"/>
+          <p:nvPr/>
+        </p:nvSpPr>
+        <p:spPr>
+          <a:xfrm>
+            <a:off x="4262018" y="3282696"/>
+            <a:ext cx="2727883" cy="219456"/>
+          </a:xfrm>
+          <a:prstGeom prst="rect">
+            <a:avLst/>
+          </a:prstGeom>
+          <a:noFill/>
+        </p:spPr>
+        <p:txBody>
+          <a:bodyPr wrap="square" lIns="0" tIns="0" rIns="0" bIns="0">
+            <a:spAutoFit/>
+          </a:bodyPr>
+          <a:lstStyle/>
+          <a:p>
+            <a:pPr algn="l"/>
+            <a:r>
+              <a:rPr sz="1000" b="0" i="0">
+                <a:solidFill>
+                  <a:srgbClr val="F8FAFC"/>
+                </a:solidFill>
+                <a:latin typeface="Calibri"/>
+              </a:rPr>
+              <a:t>$200M</a:t>
+            </a:r>
+          </a:p>
+        </p:txBody>
+      </p:sp>
+      <p:sp>
+        <p:nvSpPr>
+          <p:cNvPr id="58" name="Rectangle 57"/>
+          <p:cNvSpPr/>
+          <p:nvPr/>
+        </p:nvSpPr>
+        <p:spPr>
+          <a:xfrm>
+            <a:off x="7035622" y="3264408"/>
+            <a:ext cx="2819323" cy="256032"/>
+          </a:xfrm>
+          <a:prstGeom prst="rect">
+            <a:avLst/>
+          </a:prstGeom>
+          <a:solidFill>
+            <a:srgbClr val="1E293B"/>
+          </a:solidFill>
+          <a:ln>
+            <a:noFill/>
+          </a:ln>
+        </p:spPr>
+        <p:style>
+          <a:lnRef idx="1">
+            <a:schemeClr val="accent1"/>
+          </a:lnRef>
+          <a:fillRef idx="3">
+            <a:schemeClr val="accent1"/>
+          </a:fillRef>
+          <a:effectRef idx="2">
+            <a:schemeClr val="accent1"/>
+          </a:effectRef>
+          <a:fontRef idx="minor">
+            <a:schemeClr val="lt1"/>
+          </a:fontRef>
+        </p:style>
+        <p:txBody>
+          <a:bodyPr rtlCol="0" anchor="ctr"/>
+          <a:lstStyle/>
+          <a:p>
+            <a:pPr algn="ctr"/>
+          </a:p>
+        </p:txBody>
+      </p:sp>
+      <p:sp>
+        <p:nvSpPr>
+          <p:cNvPr id="59" name="TextBox 58"/>
+          <p:cNvSpPr txBox="1"/>
+          <p:nvPr/>
+        </p:nvSpPr>
+        <p:spPr>
+          <a:xfrm>
+            <a:off x="7081342" y="3282696"/>
+            <a:ext cx="2727883" cy="219456"/>
+          </a:xfrm>
+          <a:prstGeom prst="rect">
+            <a:avLst/>
+          </a:prstGeom>
+          <a:noFill/>
+        </p:spPr>
+        <p:txBody>
+          <a:bodyPr wrap="square" lIns="0" tIns="0" rIns="0" bIns="0">
+            <a:spAutoFit/>
+          </a:bodyPr>
+          <a:lstStyle/>
+          <a:p>
+            <a:pPr algn="l"/>
+            <a:r>
+              <a:rPr sz="1000" b="0" i="0">
+                <a:solidFill>
+                  <a:srgbClr val="F8FAFC"/>
+                </a:solidFill>
+                <a:latin typeface="Calibri"/>
+              </a:rPr>
+              <a:t>$245M</a:t>
+            </a:r>
+          </a:p>
+        </p:txBody>
+      </p:sp>
+      <p:sp>
+        <p:nvSpPr>
+          <p:cNvPr id="60" name="Rectangle 59"/>
+          <p:cNvSpPr/>
+          <p:nvPr/>
+        </p:nvSpPr>
+        <p:spPr>
+          <a:xfrm>
+            <a:off x="9854946" y="3264408"/>
+            <a:ext cx="1879549" cy="256032"/>
+          </a:xfrm>
+          <a:prstGeom prst="rect">
+            <a:avLst/>
+          </a:prstGeom>
+          <a:solidFill>
+            <a:srgbClr val="1E293B"/>
+          </a:solidFill>
+          <a:ln>
+            <a:noFill/>
+          </a:ln>
+        </p:spPr>
+        <p:style>
+          <a:lnRef idx="1">
+            <a:schemeClr val="accent1"/>
+          </a:lnRef>
+          <a:fillRef idx="3">
+            <a:schemeClr val="accent1"/>
+          </a:fillRef>
+          <a:effectRef idx="2">
+            <a:schemeClr val="accent1"/>
+          </a:effectRef>
+          <a:fontRef idx="minor">
+            <a:schemeClr val="lt1"/>
+          </a:fontRef>
+        </p:style>
+        <p:txBody>
+          <a:bodyPr rtlCol="0" anchor="ctr"/>
+          <a:lstStyle/>
+          <a:p>
+            <a:pPr algn="ctr"/>
+          </a:p>
+        </p:txBody>
+      </p:sp>
+      <p:sp>
+        <p:nvSpPr>
+          <p:cNvPr id="61" name="TextBox 60"/>
+          <p:cNvSpPr txBox="1"/>
+          <p:nvPr/>
+        </p:nvSpPr>
+        <p:spPr>
+          <a:xfrm>
+            <a:off x="9900666" y="3282696"/>
+            <a:ext cx="1788109" cy="219456"/>
+          </a:xfrm>
+          <a:prstGeom prst="rect">
+            <a:avLst/>
+          </a:prstGeom>
+          <a:noFill/>
+        </p:spPr>
+        <p:txBody>
+          <a:bodyPr wrap="square" lIns="0" tIns="0" rIns="0" bIns="0">
+            <a:spAutoFit/>
+          </a:bodyPr>
+          <a:lstStyle/>
+          <a:p>
+            <a:pPr algn="l"/>
+            <a:r>
+              <a:rPr sz="1000" b="0" i="0">
+                <a:solidFill>
+                  <a:srgbClr val="F8FAFC"/>
+                </a:solidFill>
+                <a:latin typeface="Calibri"/>
+              </a:rPr>
+              <a:t>+22%</a:t>
+            </a:r>
+          </a:p>
+        </p:txBody>
+      </p:sp>
+      <p:sp>
+        <p:nvSpPr>
+          <p:cNvPr id="62" name="Rectangle 61"/>
+          <p:cNvSpPr/>
+          <p:nvPr/>
+        </p:nvSpPr>
+        <p:spPr>
+          <a:xfrm>
+            <a:off x="457200" y="3520440"/>
+            <a:ext cx="3759098" cy="256032"/>
+          </a:xfrm>
+          <a:prstGeom prst="rect">
+            <a:avLst/>
+          </a:prstGeom>
+          <a:solidFill>
+            <a:srgbClr val="1E293B"/>
+          </a:solidFill>
+          <a:ln>
+            <a:noFill/>
+          </a:ln>
+        </p:spPr>
+        <p:style>
+          <a:lnRef idx="1">
+            <a:schemeClr val="accent1"/>
+          </a:lnRef>
+          <a:fillRef idx="3">
+            <a:schemeClr val="accent1"/>
+          </a:fillRef>
+          <a:effectRef idx="2">
+            <a:schemeClr val="accent1"/>
+          </a:effectRef>
+          <a:fontRef idx="minor">
+            <a:schemeClr val="lt1"/>
+          </a:fontRef>
+        </p:style>
+        <p:txBody>
+          <a:bodyPr rtlCol="0" anchor="ctr"/>
+          <a:lstStyle/>
+          <a:p>
+            <a:pPr algn="ctr"/>
+          </a:p>
+        </p:txBody>
+      </p:sp>
+      <p:sp>
+        <p:nvSpPr>
+          <p:cNvPr id="63" name="TextBox 62"/>
+          <p:cNvSpPr txBox="1"/>
+          <p:nvPr/>
+        </p:nvSpPr>
+        <p:spPr>
+          <a:xfrm>
+            <a:off x="502920" y="3538728"/>
+            <a:ext cx="3667658" cy="219456"/>
+          </a:xfrm>
+          <a:prstGeom prst="rect">
+            <a:avLst/>
+          </a:prstGeom>
+          <a:noFill/>
+        </p:spPr>
+        <p:txBody>
+          <a:bodyPr wrap="square" lIns="0" tIns="0" rIns="0" bIns="0">
+            <a:spAutoFit/>
+          </a:bodyPr>
+          <a:lstStyle/>
+          <a:p>
+            <a:pPr algn="l"/>
+            <a:r>
+              <a:rPr sz="1000" b="0" i="0">
+                <a:solidFill>
+                  <a:srgbClr val="F8FAFC"/>
+                </a:solidFill>
+                <a:latin typeface="Calibri"/>
+              </a:rPr>
+              <a:t>    France</a:t>
+            </a:r>
+          </a:p>
+        </p:txBody>
+      </p:sp>
+      <p:sp>
+        <p:nvSpPr>
+          <p:cNvPr id="64" name="Rectangle 63"/>
+          <p:cNvSpPr/>
+          <p:nvPr/>
+        </p:nvSpPr>
+        <p:spPr>
+          <a:xfrm>
+            <a:off x="4216298" y="3520440"/>
+            <a:ext cx="2819323" cy="256032"/>
+          </a:xfrm>
+          <a:prstGeom prst="rect">
+            <a:avLst/>
+          </a:prstGeom>
+          <a:solidFill>
+            <a:srgbClr val="1E293B"/>
+          </a:solidFill>
+          <a:ln>
+            <a:noFill/>
+          </a:ln>
+        </p:spPr>
+        <p:style>
+          <a:lnRef idx="1">
+            <a:schemeClr val="accent1"/>
+          </a:lnRef>
+          <a:fillRef idx="3">
+            <a:schemeClr val="accent1"/>
+          </a:fillRef>
+          <a:effectRef idx="2">
+            <a:schemeClr val="accent1"/>
+          </a:effectRef>
+          <a:fontRef idx="minor">
+            <a:schemeClr val="lt1"/>
+          </a:fontRef>
+        </p:style>
+        <p:txBody>
+          <a:bodyPr rtlCol="0" anchor="ctr"/>
+          <a:lstStyle/>
+          <a:p>
+            <a:pPr algn="ctr"/>
+          </a:p>
+        </p:txBody>
+      </p:sp>
+      <p:sp>
+        <p:nvSpPr>
+          <p:cNvPr id="65" name="TextBox 64"/>
+          <p:cNvSpPr txBox="1"/>
+          <p:nvPr/>
+        </p:nvSpPr>
+        <p:spPr>
+          <a:xfrm>
+            <a:off x="4262018" y="3538728"/>
+            <a:ext cx="2727883" cy="219456"/>
+          </a:xfrm>
+          <a:prstGeom prst="rect">
+            <a:avLst/>
+          </a:prstGeom>
+          <a:noFill/>
+        </p:spPr>
+        <p:txBody>
+          <a:bodyPr wrap="square" lIns="0" tIns="0" rIns="0" bIns="0">
+            <a:spAutoFit/>
+          </a:bodyPr>
+          <a:lstStyle/>
+          <a:p>
+            <a:pPr algn="l"/>
+            <a:r>
+              <a:rPr sz="1000" b="0" i="0">
+                <a:solidFill>
+                  <a:srgbClr val="F8FAFC"/>
+                </a:solidFill>
+                <a:latin typeface="Calibri"/>
+              </a:rPr>
+              <a:t>$150M</a:t>
+            </a:r>
+          </a:p>
+        </p:txBody>
+      </p:sp>
+      <p:sp>
+        <p:nvSpPr>
+          <p:cNvPr id="66" name="Rectangle 65"/>
+          <p:cNvSpPr/>
+          <p:nvPr/>
+        </p:nvSpPr>
+        <p:spPr>
+          <a:xfrm>
+            <a:off x="7035622" y="3520440"/>
+            <a:ext cx="2819323" cy="256032"/>
+          </a:xfrm>
+          <a:prstGeom prst="rect">
+            <a:avLst/>
+          </a:prstGeom>
+          <a:solidFill>
+            <a:srgbClr val="1E293B"/>
+          </a:solidFill>
+          <a:ln>
+            <a:noFill/>
+          </a:ln>
+        </p:spPr>
+        <p:style>
+          <a:lnRef idx="1">
+            <a:schemeClr val="accent1"/>
+          </a:lnRef>
+          <a:fillRef idx="3">
+            <a:schemeClr val="accent1"/>
+          </a:fillRef>
+          <a:effectRef idx="2">
+            <a:schemeClr val="accent1"/>
+          </a:effectRef>
+          <a:fontRef idx="minor">
+            <a:schemeClr val="lt1"/>
+          </a:fontRef>
+        </p:style>
+        <p:txBody>
+          <a:bodyPr rtlCol="0" anchor="ctr"/>
+          <a:lstStyle/>
+          <a:p>
+            <a:pPr algn="ctr"/>
+          </a:p>
+        </p:txBody>
+      </p:sp>
+      <p:sp>
+        <p:nvSpPr>
+          <p:cNvPr id="67" name="TextBox 66"/>
+          <p:cNvSpPr txBox="1"/>
+          <p:nvPr/>
+        </p:nvSpPr>
+        <p:spPr>
+          <a:xfrm>
+            <a:off x="7081342" y="3538728"/>
+            <a:ext cx="2727883" cy="219456"/>
+          </a:xfrm>
+          <a:prstGeom prst="rect">
+            <a:avLst/>
+          </a:prstGeom>
+          <a:noFill/>
+        </p:spPr>
+        <p:txBody>
+          <a:bodyPr wrap="square" lIns="0" tIns="0" rIns="0" bIns="0">
+            <a:spAutoFit/>
+          </a:bodyPr>
+          <a:lstStyle/>
+          <a:p>
+            <a:pPr algn="l"/>
+            <a:r>
+              <a:rPr sz="1000" b="0" i="0">
+                <a:solidFill>
+                  <a:srgbClr val="F8FAFC"/>
+                </a:solidFill>
+                <a:latin typeface="Calibri"/>
+              </a:rPr>
+              <a:t>$180M</a:t>
+            </a:r>
+          </a:p>
+        </p:txBody>
+      </p:sp>
+      <p:sp>
+        <p:nvSpPr>
+          <p:cNvPr id="68" name="Rectangle 67"/>
+          <p:cNvSpPr/>
+          <p:nvPr/>
+        </p:nvSpPr>
+        <p:spPr>
+          <a:xfrm>
+            <a:off x="9854946" y="3520440"/>
+            <a:ext cx="1879549" cy="256032"/>
+          </a:xfrm>
+          <a:prstGeom prst="rect">
+            <a:avLst/>
+          </a:prstGeom>
+          <a:solidFill>
+            <a:srgbClr val="1E293B"/>
+          </a:solidFill>
+          <a:ln>
+            <a:noFill/>
+          </a:ln>
+        </p:spPr>
+        <p:style>
+          <a:lnRef idx="1">
+            <a:schemeClr val="accent1"/>
+          </a:lnRef>
+          <a:fillRef idx="3">
+            <a:schemeClr val="accent1"/>
+          </a:fillRef>
+          <a:effectRef idx="2">
+            <a:schemeClr val="accent1"/>
+          </a:effectRef>
+          <a:fontRef idx="minor">
+            <a:schemeClr val="lt1"/>
+          </a:fontRef>
+        </p:style>
+        <p:txBody>
+          <a:bodyPr rtlCol="0" anchor="ctr"/>
+          <a:lstStyle/>
+          <a:p>
+            <a:pPr algn="ctr"/>
+          </a:p>
+        </p:txBody>
+      </p:sp>
+      <p:sp>
+        <p:nvSpPr>
+          <p:cNvPr id="69" name="TextBox 68"/>
+          <p:cNvSpPr txBox="1"/>
+          <p:nvPr/>
+        </p:nvSpPr>
+        <p:spPr>
+          <a:xfrm>
+            <a:off x="9900666" y="3538728"/>
+            <a:ext cx="1788109" cy="219456"/>
+          </a:xfrm>
+          <a:prstGeom prst="rect">
+            <a:avLst/>
+          </a:prstGeom>
+          <a:noFill/>
+        </p:spPr>
+        <p:txBody>
+          <a:bodyPr wrap="square" lIns="0" tIns="0" rIns="0" bIns="0">
+            <a:spAutoFit/>
+          </a:bodyPr>
+          <a:lstStyle/>
+          <a:p>
+            <a:pPr algn="l"/>
+            <a:r>
+              <a:rPr sz="1000" b="0" i="0">
+                <a:solidFill>
+                  <a:srgbClr val="F8FAFC"/>
+                </a:solidFill>
+                <a:latin typeface="Calibri"/>
+              </a:rPr>
+              <a:t>+20%</a:t>
+            </a:r>
+          </a:p>
+        </p:txBody>
+      </p:sp>
+      <p:sp>
+        <p:nvSpPr>
+          <p:cNvPr id="70" name="Rectangle 69"/>
+          <p:cNvSpPr/>
+          <p:nvPr/>
+        </p:nvSpPr>
+        <p:spPr>
+          <a:xfrm>
+            <a:off x="457200" y="3776472"/>
+            <a:ext cx="3759098" cy="256032"/>
+          </a:xfrm>
+          <a:prstGeom prst="rect">
+            <a:avLst/>
+          </a:prstGeom>
+          <a:solidFill>
+            <a:srgbClr val="334155"/>
+          </a:solidFill>
+          <a:ln>
+            <a:noFill/>
+          </a:ln>
+        </p:spPr>
+        <p:style>
+          <a:lnRef idx="1">
+            <a:schemeClr val="accent1"/>
+          </a:lnRef>
+          <a:fillRef idx="3">
+            <a:schemeClr val="accent1"/>
+          </a:fillRef>
+          <a:effectRef idx="2">
+            <a:schemeClr val="accent1"/>
+          </a:effectRef>
+          <a:fontRef idx="minor">
+            <a:schemeClr val="lt1"/>
+          </a:fontRef>
+        </p:style>
+        <p:txBody>
+          <a:bodyPr rtlCol="0" anchor="ctr"/>
+          <a:lstStyle/>
+          <a:p>
+            <a:pPr algn="ctr"/>
+          </a:p>
+        </p:txBody>
+      </p:sp>
+      <p:sp>
+        <p:nvSpPr>
+          <p:cNvPr id="71" name="TextBox 70"/>
+          <p:cNvSpPr txBox="1"/>
+          <p:nvPr/>
+        </p:nvSpPr>
+        <p:spPr>
+          <a:xfrm>
+            <a:off x="502920" y="3794760"/>
+            <a:ext cx="3667658" cy="219456"/>
+          </a:xfrm>
+          <a:prstGeom prst="rect">
+            <a:avLst/>
+          </a:prstGeom>
+          <a:noFill/>
+        </p:spPr>
+        <p:txBody>
+          <a:bodyPr wrap="square" lIns="0" tIns="0" rIns="0" bIns="0">
+            <a:spAutoFit/>
+          </a:bodyPr>
+          <a:lstStyle/>
+          <a:p>
+            <a:pPr algn="l"/>
+            <a:r>
+              <a:rPr sz="1000" b="1" i="0">
+                <a:solidFill>
+                  <a:srgbClr val="94A3B8"/>
+                </a:solidFill>
+                <a:latin typeface="Calibri"/>
+              </a:rPr>
+              <a:t>SubtotalEMEA</a:t>
+            </a:r>
+          </a:p>
+        </p:txBody>
+      </p:sp>
+      <p:sp>
+        <p:nvSpPr>
+          <p:cNvPr id="72" name="Rectangle 71"/>
+          <p:cNvSpPr/>
+          <p:nvPr/>
+        </p:nvSpPr>
+        <p:spPr>
+          <a:xfrm>
+            <a:off x="4216298" y="3776472"/>
+            <a:ext cx="2819323" cy="256032"/>
+          </a:xfrm>
+          <a:prstGeom prst="rect">
+            <a:avLst/>
+          </a:prstGeom>
+          <a:solidFill>
+            <a:srgbClr val="334155"/>
+          </a:solidFill>
+          <a:ln>
+            <a:noFill/>
+          </a:ln>
+        </p:spPr>
+        <p:style>
+          <a:lnRef idx="1">
+            <a:schemeClr val="accent1"/>
+          </a:lnRef>
+          <a:fillRef idx="3">
+            <a:schemeClr val="accent1"/>
+          </a:fillRef>
+          <a:effectRef idx="2">
+            <a:schemeClr val="accent1"/>
+          </a:effectRef>
+          <a:fontRef idx="minor">
+            <a:schemeClr val="lt1"/>
+          </a:fontRef>
+        </p:style>
+        <p:txBody>
+          <a:bodyPr rtlCol="0" anchor="ctr"/>
+          <a:lstStyle/>
+          <a:p>
+            <a:pPr algn="ctr"/>
+          </a:p>
+        </p:txBody>
+      </p:sp>
+      <p:sp>
+        <p:nvSpPr>
+          <p:cNvPr id="73" name="TextBox 72"/>
+          <p:cNvSpPr txBox="1"/>
+          <p:nvPr/>
+        </p:nvSpPr>
+        <p:spPr>
+          <a:xfrm>
+            <a:off x="4262018" y="3794760"/>
+            <a:ext cx="2727883" cy="219456"/>
+          </a:xfrm>
+          <a:prstGeom prst="rect">
+            <a:avLst/>
+          </a:prstGeom>
+          <a:noFill/>
+        </p:spPr>
+        <p:txBody>
+          <a:bodyPr wrap="square" lIns="0" tIns="0" rIns="0" bIns="0">
+            <a:spAutoFit/>
+          </a:bodyPr>
+          <a:lstStyle/>
+          <a:p>
+            <a:pPr algn="l"/>
+            <a:r>
+              <a:rPr sz="1000" b="1" i="0">
+                <a:solidFill>
+                  <a:srgbClr val="94A3B8"/>
+                </a:solidFill>
+                <a:latin typeface="Calibri"/>
+              </a:rPr>
+              <a:t>$350M</a:t>
+            </a:r>
+          </a:p>
+        </p:txBody>
+      </p:sp>
+      <p:sp>
+        <p:nvSpPr>
+          <p:cNvPr id="74" name="Rectangle 73"/>
+          <p:cNvSpPr/>
+          <p:nvPr/>
+        </p:nvSpPr>
+        <p:spPr>
+          <a:xfrm>
+            <a:off x="7035622" y="3776472"/>
+            <a:ext cx="2819323" cy="256032"/>
+          </a:xfrm>
+          <a:prstGeom prst="rect">
+            <a:avLst/>
+          </a:prstGeom>
+          <a:solidFill>
+            <a:srgbClr val="334155"/>
+          </a:solidFill>
+          <a:ln>
+            <a:noFill/>
+          </a:ln>
+        </p:spPr>
+        <p:style>
+          <a:lnRef idx="1">
+            <a:schemeClr val="accent1"/>
+          </a:lnRef>
+          <a:fillRef idx="3">
+            <a:schemeClr val="accent1"/>
+          </a:fillRef>
+          <a:effectRef idx="2">
+            <a:schemeClr val="accent1"/>
+          </a:effectRef>
+          <a:fontRef idx="minor">
+            <a:schemeClr val="lt1"/>
+          </a:fontRef>
+        </p:style>
+        <p:txBody>
+          <a:bodyPr rtlCol="0" anchor="ctr"/>
+          <a:lstStyle/>
+          <a:p>
+            <a:pPr algn="ctr"/>
+          </a:p>
+        </p:txBody>
+      </p:sp>
+      <p:sp>
+        <p:nvSpPr>
+          <p:cNvPr id="75" name="TextBox 74"/>
+          <p:cNvSpPr txBox="1"/>
+          <p:nvPr/>
+        </p:nvSpPr>
+        <p:spPr>
+          <a:xfrm>
+            <a:off x="7081342" y="3794760"/>
+            <a:ext cx="2727883" cy="219456"/>
+          </a:xfrm>
+          <a:prstGeom prst="rect">
+            <a:avLst/>
+          </a:prstGeom>
+          <a:noFill/>
+        </p:spPr>
+        <p:txBody>
+          <a:bodyPr wrap="square" lIns="0" tIns="0" rIns="0" bIns="0">
+            <a:spAutoFit/>
+          </a:bodyPr>
+          <a:lstStyle/>
+          <a:p>
+            <a:pPr algn="l"/>
+            <a:r>
+              <a:rPr sz="1000" b="1" i="0">
+                <a:solidFill>
+                  <a:srgbClr val="94A3B8"/>
+                </a:solidFill>
+                <a:latin typeface="Calibri"/>
+              </a:rPr>
+              <a:t>$425M</a:t>
+            </a:r>
+          </a:p>
+        </p:txBody>
+      </p:sp>
+      <p:sp>
+        <p:nvSpPr>
+          <p:cNvPr id="76" name="Rectangle 75"/>
+          <p:cNvSpPr/>
+          <p:nvPr/>
+        </p:nvSpPr>
+        <p:spPr>
+          <a:xfrm>
+            <a:off x="9854946" y="3776472"/>
+            <a:ext cx="1879549" cy="256032"/>
+          </a:xfrm>
+          <a:prstGeom prst="rect">
+            <a:avLst/>
+          </a:prstGeom>
+          <a:solidFill>
+            <a:srgbClr val="334155"/>
+          </a:solidFill>
+          <a:ln>
+            <a:noFill/>
+          </a:ln>
+        </p:spPr>
+        <p:style>
+          <a:lnRef idx="1">
+            <a:schemeClr val="accent1"/>
+          </a:lnRef>
+          <a:fillRef idx="3">
+            <a:schemeClr val="accent1"/>
+          </a:fillRef>
+          <a:effectRef idx="2">
+            <a:schemeClr val="accent1"/>
+          </a:effectRef>
+          <a:fontRef idx="minor">
+            <a:schemeClr val="lt1"/>
+          </a:fontRef>
+        </p:style>
+        <p:txBody>
+          <a:bodyPr rtlCol="0" anchor="ctr"/>
+          <a:lstStyle/>
+          <a:p>
+            <a:pPr algn="ctr"/>
+          </a:p>
+        </p:txBody>
+      </p:sp>
+      <p:sp>
+        <p:nvSpPr>
+          <p:cNvPr id="77" name="TextBox 76"/>
+          <p:cNvSpPr txBox="1"/>
+          <p:nvPr/>
+        </p:nvSpPr>
+        <p:spPr>
+          <a:xfrm>
+            <a:off x="9900666" y="3794760"/>
+            <a:ext cx="1788109" cy="219456"/>
+          </a:xfrm>
+          <a:prstGeom prst="rect">
+            <a:avLst/>
+          </a:prstGeom>
+          <a:noFill/>
+        </p:spPr>
+        <p:txBody>
+          <a:bodyPr wrap="square" lIns="0" tIns="0" rIns="0" bIns="0">
+            <a:spAutoFit/>
+          </a:bodyPr>
+          <a:lstStyle/>
+          <a:p>
+            <a:pPr algn="l"/>
+            <a:r>
+              <a:rPr sz="1000" b="1" i="0">
+                <a:solidFill>
+                  <a:srgbClr val="94A3B8"/>
+                </a:solidFill>
+                <a:latin typeface="Calibri"/>
+              </a:rPr>
+              <a:t>+21%</a:t>
+            </a:r>
+          </a:p>
+        </p:txBody>
+      </p:sp>
+      <p:sp>
+        <p:nvSpPr>
+          <p:cNvPr id="78" name="Rectangle 77"/>
+          <p:cNvSpPr/>
+          <p:nvPr/>
+        </p:nvSpPr>
+        <p:spPr>
+          <a:xfrm>
+            <a:off x="457200" y="4123944"/>
+            <a:ext cx="3759098" cy="256032"/>
+          </a:xfrm>
+          <a:prstGeom prst="rect">
+            <a:avLst/>
+          </a:prstGeom>
+          <a:solidFill>
+            <a:srgbClr val="334155"/>
+          </a:solidFill>
+          <a:ln>
+            <a:noFill/>
+          </a:ln>
+        </p:spPr>
+        <p:style>
+          <a:lnRef idx="1">
+            <a:schemeClr val="accent1"/>
+          </a:lnRef>
+          <a:fillRef idx="3">
+            <a:schemeClr val="accent1"/>
+          </a:fillRef>
+          <a:effectRef idx="2">
+            <a:schemeClr val="accent1"/>
+          </a:effectRef>
+          <a:fontRef idx="minor">
+            <a:schemeClr val="lt1"/>
+          </a:fontRef>
+        </p:style>
+        <p:txBody>
+          <a:bodyPr rtlCol="0" anchor="ctr"/>
+          <a:lstStyle/>
+          <a:p>
+            <a:pPr algn="ctr"/>
+          </a:p>
+        </p:txBody>
+      </p:sp>
+      <p:sp>
+        <p:nvSpPr>
+          <p:cNvPr id="79" name="TextBox 78"/>
+          <p:cNvSpPr txBox="1"/>
+          <p:nvPr/>
+        </p:nvSpPr>
+        <p:spPr>
+          <a:xfrm>
+            <a:off x="502920" y="4142232"/>
+            <a:ext cx="3667658" cy="219456"/>
+          </a:xfrm>
+          <a:prstGeom prst="rect">
+            <a:avLst/>
+          </a:prstGeom>
+          <a:noFill/>
+        </p:spPr>
+        <p:txBody>
+          <a:bodyPr wrap="square" lIns="0" tIns="0" rIns="0" bIns="0">
+            <a:spAutoFit/>
+          </a:bodyPr>
+          <a:lstStyle/>
+          <a:p>
+            <a:pPr algn="l"/>
+            <a:r>
+              <a:rPr sz="1100" b="1" i="0">
+                <a:solidFill>
+                  <a:srgbClr val="F8FAFC"/>
+                </a:solidFill>
+                <a:latin typeface="Calibri"/>
+              </a:rPr>
+              <a:t>APAC</a:t>
+            </a:r>
+          </a:p>
+        </p:txBody>
+      </p:sp>
+      <p:sp>
+        <p:nvSpPr>
+          <p:cNvPr id="80" name="Rectangle 79"/>
+          <p:cNvSpPr/>
+          <p:nvPr/>
+        </p:nvSpPr>
+        <p:spPr>
+          <a:xfrm>
+            <a:off x="4216298" y="4123944"/>
+            <a:ext cx="2819323" cy="256032"/>
+          </a:xfrm>
+          <a:prstGeom prst="rect">
+            <a:avLst/>
+          </a:prstGeom>
+          <a:solidFill>
+            <a:srgbClr val="334155"/>
+          </a:solidFill>
+          <a:ln>
+            <a:noFill/>
+          </a:ln>
+        </p:spPr>
+        <p:style>
+          <a:lnRef idx="1">
+            <a:schemeClr val="accent1"/>
+          </a:lnRef>
+          <a:fillRef idx="3">
+            <a:schemeClr val="accent1"/>
+          </a:fillRef>
+          <a:effectRef idx="2">
+            <a:schemeClr val="accent1"/>
+          </a:effectRef>
+          <a:fontRef idx="minor">
+            <a:schemeClr val="lt1"/>
+          </a:fontRef>
+        </p:style>
+        <p:txBody>
+          <a:bodyPr rtlCol="0" anchor="ctr"/>
+          <a:lstStyle/>
+          <a:p>
+            <a:pPr algn="ctr"/>
+          </a:p>
+        </p:txBody>
+      </p:sp>
+      <p:sp>
+        <p:nvSpPr>
+          <p:cNvPr id="81" name="TextBox 80"/>
+          <p:cNvSpPr txBox="1"/>
+          <p:nvPr/>
+        </p:nvSpPr>
+        <p:spPr>
+          <a:xfrm>
+            <a:off x="4262018" y="4142232"/>
+            <a:ext cx="2727883" cy="219456"/>
+          </a:xfrm>
+          <a:prstGeom prst="rect">
+            <a:avLst/>
+          </a:prstGeom>
+          <a:noFill/>
+        </p:spPr>
+        <p:txBody>
+          <a:bodyPr wrap="square" lIns="0" tIns="0" rIns="0" bIns="0">
+            <a:spAutoFit/>
+          </a:bodyPr>
+          <a:lstStyle/>
+          <a:p>
+            <a:pPr algn="l"/>
+            <a:r>
+              <a:rPr sz="1100" b="1" i="0">
+                <a:solidFill>
+                  <a:srgbClr val="F8FAFC"/>
+                </a:solidFill>
+                <a:latin typeface="Calibri"/>
+              </a:rPr>
+              <a:t>$220M</a:t>
+            </a:r>
+          </a:p>
+        </p:txBody>
+      </p:sp>
+      <p:sp>
+        <p:nvSpPr>
+          <p:cNvPr id="82" name="Rectangle 81"/>
+          <p:cNvSpPr/>
+          <p:nvPr/>
+        </p:nvSpPr>
+        <p:spPr>
+          <a:xfrm>
+            <a:off x="7035622" y="4123944"/>
+            <a:ext cx="2819323" cy="256032"/>
+          </a:xfrm>
+          <a:prstGeom prst="rect">
+            <a:avLst/>
+          </a:prstGeom>
+          <a:solidFill>
+            <a:srgbClr val="334155"/>
+          </a:solidFill>
+          <a:ln>
+            <a:noFill/>
+          </a:ln>
+        </p:spPr>
+        <p:style>
+          <a:lnRef idx="1">
+            <a:schemeClr val="accent1"/>
+          </a:lnRef>
+          <a:fillRef idx="3">
+            <a:schemeClr val="accent1"/>
+          </a:fillRef>
+          <a:effectRef idx="2">
+            <a:schemeClr val="accent1"/>
+          </a:effectRef>
+          <a:fontRef idx="minor">
+            <a:schemeClr val="lt1"/>
+          </a:fontRef>
+        </p:style>
+        <p:txBody>
+          <a:bodyPr rtlCol="0" anchor="ctr"/>
+          <a:lstStyle/>
+          <a:p>
+            <a:pPr algn="ctr"/>
+          </a:p>
+        </p:txBody>
+      </p:sp>
+      <p:sp>
+        <p:nvSpPr>
+          <p:cNvPr id="83" name="TextBox 82"/>
+          <p:cNvSpPr txBox="1"/>
+          <p:nvPr/>
+        </p:nvSpPr>
+        <p:spPr>
+          <a:xfrm>
+            <a:off x="7081342" y="4142232"/>
+            <a:ext cx="2727883" cy="219456"/>
+          </a:xfrm>
+          <a:prstGeom prst="rect">
+            <a:avLst/>
+          </a:prstGeom>
+          <a:noFill/>
+        </p:spPr>
+        <p:txBody>
+          <a:bodyPr wrap="square" lIns="0" tIns="0" rIns="0" bIns="0">
+            <a:spAutoFit/>
+          </a:bodyPr>
+          <a:lstStyle/>
+          <a:p>
+            <a:pPr algn="l"/>
+            <a:r>
+              <a:rPr sz="1100" b="1" i="0">
+                <a:solidFill>
+                  <a:srgbClr val="F8FAFC"/>
+                </a:solidFill>
+                <a:latin typeface="Calibri"/>
+              </a:rPr>
+              <a:t>$285M</a:t>
+            </a:r>
+          </a:p>
+        </p:txBody>
+      </p:sp>
+      <p:sp>
+        <p:nvSpPr>
+          <p:cNvPr id="84" name="Rectangle 83"/>
+          <p:cNvSpPr/>
+          <p:nvPr/>
+        </p:nvSpPr>
+        <p:spPr>
+          <a:xfrm>
+            <a:off x="9854946" y="4123944"/>
+            <a:ext cx="1879549" cy="256032"/>
+          </a:xfrm>
+          <a:prstGeom prst="rect">
+            <a:avLst/>
+          </a:prstGeom>
+          <a:solidFill>
+            <a:srgbClr val="334155"/>
+          </a:solidFill>
+          <a:ln>
+            <a:noFill/>
+          </a:ln>
+        </p:spPr>
+        <p:style>
+          <a:lnRef idx="1">
+            <a:schemeClr val="accent1"/>
+          </a:lnRef>
+          <a:fillRef idx="3">
+            <a:schemeClr val="accent1"/>
+          </a:fillRef>
+          <a:effectRef idx="2">
+            <a:schemeClr val="accent1"/>
+          </a:effectRef>
+          <a:fontRef idx="minor">
+            <a:schemeClr val="lt1"/>
+          </a:fontRef>
+        </p:style>
+        <p:txBody>
+          <a:bodyPr rtlCol="0" anchor="ctr"/>
+          <a:lstStyle/>
+          <a:p>
+            <a:pPr algn="ctr"/>
+          </a:p>
+        </p:txBody>
+      </p:sp>
+      <p:sp>
+        <p:nvSpPr>
+          <p:cNvPr id="85" name="TextBox 84"/>
+          <p:cNvSpPr txBox="1"/>
+          <p:nvPr/>
+        </p:nvSpPr>
+        <p:spPr>
+          <a:xfrm>
+            <a:off x="9900666" y="4142232"/>
+            <a:ext cx="1788109" cy="219456"/>
+          </a:xfrm>
+          <a:prstGeom prst="rect">
+            <a:avLst/>
+          </a:prstGeom>
+          <a:noFill/>
+        </p:spPr>
+        <p:txBody>
+          <a:bodyPr wrap="square" lIns="0" tIns="0" rIns="0" bIns="0">
+            <a:spAutoFit/>
+          </a:bodyPr>
+          <a:lstStyle/>
+          <a:p>
+            <a:pPr algn="l"/>
+            <a:r>
+              <a:rPr sz="1100" b="1" i="0">
+                <a:solidFill>
+                  <a:srgbClr val="F8FAFC"/>
+                </a:solidFill>
+                <a:latin typeface="Calibri"/>
+              </a:rPr>
+              <a:t>+30%</a:t>
+            </a:r>
+          </a:p>
+        </p:txBody>
+      </p:sp>
+      <p:sp>
+        <p:nvSpPr>
+          <p:cNvPr id="86" name="Rectangle 85"/>
+          <p:cNvSpPr/>
+          <p:nvPr/>
+        </p:nvSpPr>
+        <p:spPr>
+          <a:xfrm>
+            <a:off x="457200" y="4379976"/>
+            <a:ext cx="3759098" cy="256032"/>
+          </a:xfrm>
+          <a:prstGeom prst="rect">
+            <a:avLst/>
+          </a:prstGeom>
+          <a:solidFill>
+            <a:srgbClr val="1E293B"/>
+          </a:solidFill>
+          <a:ln>
+            <a:noFill/>
+          </a:ln>
+        </p:spPr>
+        <p:style>
+          <a:lnRef idx="1">
+            <a:schemeClr val="accent1"/>
+          </a:lnRef>
+          <a:fillRef idx="3">
+            <a:schemeClr val="accent1"/>
+          </a:fillRef>
+          <a:effectRef idx="2">
+            <a:schemeClr val="accent1"/>
+          </a:effectRef>
+          <a:fontRef idx="minor">
+            <a:schemeClr val="lt1"/>
+          </a:fontRef>
+        </p:style>
+        <p:txBody>
+          <a:bodyPr rtlCol="0" anchor="ctr"/>
+          <a:lstStyle/>
+          <a:p>
+            <a:pPr algn="ctr"/>
+          </a:p>
+        </p:txBody>
+      </p:sp>
+      <p:sp>
+        <p:nvSpPr>
+          <p:cNvPr id="87" name="TextBox 86"/>
+          <p:cNvSpPr txBox="1"/>
+          <p:nvPr/>
+        </p:nvSpPr>
+        <p:spPr>
+          <a:xfrm>
+            <a:off x="502920" y="4398264"/>
+            <a:ext cx="3667658" cy="219456"/>
+          </a:xfrm>
+          <a:prstGeom prst="rect">
+            <a:avLst/>
+          </a:prstGeom>
+          <a:noFill/>
+        </p:spPr>
+        <p:txBody>
+          <a:bodyPr wrap="square" lIns="0" tIns="0" rIns="0" bIns="0">
+            <a:spAutoFit/>
+          </a:bodyPr>
+          <a:lstStyle/>
+          <a:p>
+            <a:pPr algn="l"/>
+            <a:r>
+              <a:rPr sz="1000" b="0" i="0">
+                <a:solidFill>
+                  <a:srgbClr val="F8FAFC"/>
+                </a:solidFill>
+                <a:latin typeface="Calibri"/>
+              </a:rPr>
+              <a:t>    India</a:t>
+            </a:r>
+          </a:p>
+        </p:txBody>
+      </p:sp>
+      <p:sp>
+        <p:nvSpPr>
+          <p:cNvPr id="88" name="Rectangle 87"/>
+          <p:cNvSpPr/>
+          <p:nvPr/>
+        </p:nvSpPr>
+        <p:spPr>
+          <a:xfrm>
+            <a:off x="4216298" y="4379976"/>
+            <a:ext cx="2819323" cy="256032"/>
+          </a:xfrm>
+          <a:prstGeom prst="rect">
+            <a:avLst/>
+          </a:prstGeom>
+          <a:solidFill>
+            <a:srgbClr val="1E293B"/>
+          </a:solidFill>
+          <a:ln>
+            <a:noFill/>
+          </a:ln>
+        </p:spPr>
+        <p:style>
+          <a:lnRef idx="1">
+            <a:schemeClr val="accent1"/>
+          </a:lnRef>
+          <a:fillRef idx="3">
+            <a:schemeClr val="accent1"/>
+          </a:fillRef>
+          <a:effectRef idx="2">
+            <a:schemeClr val="accent1"/>
+          </a:effectRef>
+          <a:fontRef idx="minor">
+            <a:schemeClr val="lt1"/>
+          </a:fontRef>
+        </p:style>
+        <p:txBody>
+          <a:bodyPr rtlCol="0" anchor="ctr"/>
+          <a:lstStyle/>
+          <a:p>
+            <a:pPr algn="ctr"/>
+          </a:p>
+        </p:txBody>
+      </p:sp>
+      <p:sp>
+        <p:nvSpPr>
+          <p:cNvPr id="89" name="TextBox 88"/>
+          <p:cNvSpPr txBox="1"/>
+          <p:nvPr/>
+        </p:nvSpPr>
+        <p:spPr>
+          <a:xfrm>
+            <a:off x="4262018" y="4398264"/>
+            <a:ext cx="2727883" cy="219456"/>
+          </a:xfrm>
+          <a:prstGeom prst="rect">
+            <a:avLst/>
+          </a:prstGeom>
+          <a:noFill/>
+        </p:spPr>
+        <p:txBody>
+          <a:bodyPr wrap="square" lIns="0" tIns="0" rIns="0" bIns="0">
+            <a:spAutoFit/>
+          </a:bodyPr>
+          <a:lstStyle/>
+          <a:p>
+            <a:pPr algn="l"/>
+            <a:r>
+              <a:rPr sz="1000" b="0" i="0">
+                <a:solidFill>
+                  <a:srgbClr val="F8FAFC"/>
+                </a:solidFill>
+                <a:latin typeface="Calibri"/>
+              </a:rPr>
+              <a:t>$120M</a:t>
+            </a:r>
+          </a:p>
+        </p:txBody>
+      </p:sp>
+      <p:sp>
+        <p:nvSpPr>
+          <p:cNvPr id="90" name="Rectangle 89"/>
+          <p:cNvSpPr/>
+          <p:nvPr/>
+        </p:nvSpPr>
+        <p:spPr>
+          <a:xfrm>
+            <a:off x="7035622" y="4379976"/>
+            <a:ext cx="2819323" cy="256032"/>
+          </a:xfrm>
+          <a:prstGeom prst="rect">
+            <a:avLst/>
+          </a:prstGeom>
+          <a:solidFill>
+            <a:srgbClr val="1E293B"/>
+          </a:solidFill>
+          <a:ln>
+            <a:noFill/>
+          </a:ln>
+        </p:spPr>
+        <p:style>
+          <a:lnRef idx="1">
+            <a:schemeClr val="accent1"/>
+          </a:lnRef>
+          <a:fillRef idx="3">
+            <a:schemeClr val="accent1"/>
+          </a:fillRef>
+          <a:effectRef idx="2">
+            <a:schemeClr val="accent1"/>
+          </a:effectRef>
+          <a:fontRef idx="minor">
+            <a:schemeClr val="lt1"/>
+          </a:fontRef>
+        </p:style>
+        <p:txBody>
+          <a:bodyPr rtlCol="0" anchor="ctr"/>
+          <a:lstStyle/>
+          <a:p>
+            <a:pPr algn="ctr"/>
+          </a:p>
+        </p:txBody>
+      </p:sp>
+      <p:sp>
+        <p:nvSpPr>
+          <p:cNvPr id="91" name="TextBox 90"/>
+          <p:cNvSpPr txBox="1"/>
+          <p:nvPr/>
+        </p:nvSpPr>
+        <p:spPr>
+          <a:xfrm>
+            <a:off x="7081342" y="4398264"/>
+            <a:ext cx="2727883" cy="219456"/>
+          </a:xfrm>
+          <a:prstGeom prst="rect">
+            <a:avLst/>
+          </a:prstGeom>
+          <a:noFill/>
+        </p:spPr>
+        <p:txBody>
+          <a:bodyPr wrap="square" lIns="0" tIns="0" rIns="0" bIns="0">
+            <a:spAutoFit/>
+          </a:bodyPr>
+          <a:lstStyle/>
+          <a:p>
+            <a:pPr algn="l"/>
+            <a:r>
+              <a:rPr sz="1000" b="0" i="0">
+                <a:solidFill>
+                  <a:srgbClr val="F8FAFC"/>
+                </a:solidFill>
+                <a:latin typeface="Calibri"/>
+              </a:rPr>
+              <a:t>$165M</a:t>
+            </a:r>
+          </a:p>
+        </p:txBody>
+      </p:sp>
+      <p:sp>
+        <p:nvSpPr>
+          <p:cNvPr id="92" name="Rectangle 91"/>
+          <p:cNvSpPr/>
+          <p:nvPr/>
+        </p:nvSpPr>
+        <p:spPr>
+          <a:xfrm>
+            <a:off x="9854946" y="4379976"/>
+            <a:ext cx="1879549" cy="256032"/>
+          </a:xfrm>
+          <a:prstGeom prst="rect">
+            <a:avLst/>
+          </a:prstGeom>
+          <a:solidFill>
+            <a:srgbClr val="1E293B"/>
+          </a:solidFill>
+          <a:ln>
+            <a:noFill/>
+          </a:ln>
+        </p:spPr>
+        <p:style>
+          <a:lnRef idx="1">
+            <a:schemeClr val="accent1"/>
+          </a:lnRef>
+          <a:fillRef idx="3">
+            <a:schemeClr val="accent1"/>
+          </a:fillRef>
+          <a:effectRef idx="2">
+            <a:schemeClr val="accent1"/>
+          </a:effectRef>
+          <a:fontRef idx="minor">
+            <a:schemeClr val="lt1"/>
+          </a:fontRef>
+        </p:style>
+        <p:txBody>
+          <a:bodyPr rtlCol="0" anchor="ctr"/>
+          <a:lstStyle/>
+          <a:p>
+            <a:pPr algn="ctr"/>
+          </a:p>
+        </p:txBody>
+      </p:sp>
+      <p:sp>
+        <p:nvSpPr>
+          <p:cNvPr id="93" name="TextBox 92"/>
+          <p:cNvSpPr txBox="1"/>
+          <p:nvPr/>
+        </p:nvSpPr>
+        <p:spPr>
+          <a:xfrm>
+            <a:off x="9900666" y="4398264"/>
+            <a:ext cx="1788109" cy="219456"/>
+          </a:xfrm>
+          <a:prstGeom prst="rect">
+            <a:avLst/>
+          </a:prstGeom>
+          <a:noFill/>
+        </p:spPr>
+        <p:txBody>
+          <a:bodyPr wrap="square" lIns="0" tIns="0" rIns="0" bIns="0">
+            <a:spAutoFit/>
+          </a:bodyPr>
+          <a:lstStyle/>
+          <a:p>
+            <a:pPr algn="l"/>
+            <a:r>
+              <a:rPr sz="1000" b="0" i="0">
+                <a:solidFill>
+                  <a:srgbClr val="F8FAFC"/>
+                </a:solidFill>
+                <a:latin typeface="Calibri"/>
+              </a:rPr>
+              <a:t>+38%</a:t>
+            </a:r>
+          </a:p>
+        </p:txBody>
+      </p:sp>
+      <p:sp>
+        <p:nvSpPr>
+          <p:cNvPr id="94" name="Rectangle 93"/>
+          <p:cNvSpPr/>
+          <p:nvPr/>
+        </p:nvSpPr>
+        <p:spPr>
+          <a:xfrm>
+            <a:off x="457200" y="4636008"/>
+            <a:ext cx="3759098" cy="256032"/>
+          </a:xfrm>
+          <a:prstGeom prst="rect">
+            <a:avLst/>
+          </a:prstGeom>
+          <a:solidFill>
+            <a:srgbClr val="1E293B"/>
+          </a:solidFill>
+          <a:ln>
+            <a:noFill/>
+          </a:ln>
+        </p:spPr>
+        <p:style>
+          <a:lnRef idx="1">
+            <a:schemeClr val="accent1"/>
+          </a:lnRef>
+          <a:fillRef idx="3">
+            <a:schemeClr val="accent1"/>
+          </a:fillRef>
+          <a:effectRef idx="2">
+            <a:schemeClr val="accent1"/>
+          </a:effectRef>
+          <a:fontRef idx="minor">
+            <a:schemeClr val="lt1"/>
+          </a:fontRef>
+        </p:style>
+        <p:txBody>
+          <a:bodyPr rtlCol="0" anchor="ctr"/>
+          <a:lstStyle/>
+          <a:p>
+            <a:pPr algn="ctr"/>
+          </a:p>
+        </p:txBody>
+      </p:sp>
+      <p:sp>
+        <p:nvSpPr>
+          <p:cNvPr id="95" name="TextBox 94"/>
+          <p:cNvSpPr txBox="1"/>
+          <p:nvPr/>
+        </p:nvSpPr>
+        <p:spPr>
+          <a:xfrm>
+            <a:off x="502920" y="4654296"/>
+            <a:ext cx="3667658" cy="219456"/>
+          </a:xfrm>
+          <a:prstGeom prst="rect">
+            <a:avLst/>
+          </a:prstGeom>
+          <a:noFill/>
+        </p:spPr>
+        <p:txBody>
+          <a:bodyPr wrap="square" lIns="0" tIns="0" rIns="0" bIns="0">
+            <a:spAutoFit/>
+          </a:bodyPr>
+          <a:lstStyle/>
+          <a:p>
+            <a:pPr algn="l"/>
+            <a:r>
+              <a:rPr sz="1000" b="0" i="0">
+                <a:solidFill>
+                  <a:srgbClr val="F8FAFC"/>
+                </a:solidFill>
+                <a:latin typeface="Calibri"/>
+              </a:rPr>
+              <a:t>    Australia</a:t>
+            </a:r>
+          </a:p>
+        </p:txBody>
+      </p:sp>
+      <p:sp>
+        <p:nvSpPr>
+          <p:cNvPr id="96" name="Rectangle 95"/>
+          <p:cNvSpPr/>
+          <p:nvPr/>
+        </p:nvSpPr>
+        <p:spPr>
+          <a:xfrm>
+            <a:off x="4216298" y="4636008"/>
+            <a:ext cx="2819323" cy="256032"/>
+          </a:xfrm>
+          <a:prstGeom prst="rect">
+            <a:avLst/>
+          </a:prstGeom>
+          <a:solidFill>
+            <a:srgbClr val="1E293B"/>
+          </a:solidFill>
+          <a:ln>
+            <a:noFill/>
+          </a:ln>
+        </p:spPr>
+        <p:style>
+          <a:lnRef idx="1">
+            <a:schemeClr val="accent1"/>
+          </a:lnRef>
+          <a:fillRef idx="3">
+            <a:schemeClr val="accent1"/>
+          </a:fillRef>
+          <a:effectRef idx="2">
+            <a:schemeClr val="accent1"/>
+          </a:effectRef>
+          <a:fontRef idx="minor">
+            <a:schemeClr val="lt1"/>
+          </a:fontRef>
+        </p:style>
+        <p:txBody>
+          <a:bodyPr rtlCol="0" anchor="ctr"/>
+          <a:lstStyle/>
+          <a:p>
+            <a:pPr algn="ctr"/>
+          </a:p>
+        </p:txBody>
+      </p:sp>
+      <p:sp>
+        <p:nvSpPr>
+          <p:cNvPr id="97" name="TextBox 96"/>
+          <p:cNvSpPr txBox="1"/>
+          <p:nvPr/>
+        </p:nvSpPr>
+        <p:spPr>
+          <a:xfrm>
+            <a:off x="4262018" y="4654296"/>
+            <a:ext cx="2727883" cy="219456"/>
+          </a:xfrm>
+          <a:prstGeom prst="rect">
+            <a:avLst/>
+          </a:prstGeom>
+          <a:noFill/>
+        </p:spPr>
+        <p:txBody>
+          <a:bodyPr wrap="square" lIns="0" tIns="0" rIns="0" bIns="0">
+            <a:spAutoFit/>
+          </a:bodyPr>
+          <a:lstStyle/>
+          <a:p>
+            <a:pPr algn="l"/>
+            <a:r>
+              <a:rPr sz="1000" b="0" i="0">
+                <a:solidFill>
+                  <a:srgbClr val="F8FAFC"/>
+                </a:solidFill>
+                <a:latin typeface="Calibri"/>
+              </a:rPr>
+              <a:t>$100M</a:t>
+            </a:r>
+          </a:p>
+        </p:txBody>
+      </p:sp>
+      <p:sp>
+        <p:nvSpPr>
+          <p:cNvPr id="98" name="Rectangle 97"/>
+          <p:cNvSpPr/>
+          <p:nvPr/>
+        </p:nvSpPr>
+        <p:spPr>
+          <a:xfrm>
+            <a:off x="7035622" y="4636008"/>
+            <a:ext cx="2819323" cy="256032"/>
+          </a:xfrm>
+          <a:prstGeom prst="rect">
+            <a:avLst/>
+          </a:prstGeom>
+          <a:solidFill>
+            <a:srgbClr val="1E293B"/>
+          </a:solidFill>
+          <a:ln>
+            <a:noFill/>
+          </a:ln>
+        </p:spPr>
+        <p:style>
+          <a:lnRef idx="1">
+            <a:schemeClr val="accent1"/>
+          </a:lnRef>
+          <a:fillRef idx="3">
+            <a:schemeClr val="accent1"/>
+          </a:fillRef>
+          <a:effectRef idx="2">
+            <a:schemeClr val="accent1"/>
+          </a:effectRef>
+          <a:fontRef idx="minor">
+            <a:schemeClr val="lt1"/>
+          </a:fontRef>
+        </p:style>
+        <p:txBody>
+          <a:bodyPr rtlCol="0" anchor="ctr"/>
+          <a:lstStyle/>
+          <a:p>
+            <a:pPr algn="ctr"/>
+          </a:p>
+        </p:txBody>
+      </p:sp>
+      <p:sp>
+        <p:nvSpPr>
+          <p:cNvPr id="99" name="TextBox 98"/>
+          <p:cNvSpPr txBox="1"/>
+          <p:nvPr/>
+        </p:nvSpPr>
+        <p:spPr>
+          <a:xfrm>
+            <a:off x="7081342" y="4654296"/>
+            <a:ext cx="2727883" cy="219456"/>
+          </a:xfrm>
+          <a:prstGeom prst="rect">
+            <a:avLst/>
+          </a:prstGeom>
+          <a:noFill/>
+        </p:spPr>
+        <p:txBody>
+          <a:bodyPr wrap="square" lIns="0" tIns="0" rIns="0" bIns="0">
+            <a:spAutoFit/>
+          </a:bodyPr>
+          <a:lstStyle/>
+          <a:p>
+            <a:pPr algn="l"/>
+            <a:r>
+              <a:rPr sz="1000" b="0" i="0">
+                <a:solidFill>
+                  <a:srgbClr val="F8FAFC"/>
+                </a:solidFill>
+                <a:latin typeface="Calibri"/>
+              </a:rPr>
+              <a:t>$120M</a:t>
+            </a:r>
+          </a:p>
+        </p:txBody>
+      </p:sp>
+      <p:sp>
+        <p:nvSpPr>
+          <p:cNvPr id="100" name="Rectangle 99"/>
+          <p:cNvSpPr/>
+          <p:nvPr/>
+        </p:nvSpPr>
+        <p:spPr>
+          <a:xfrm>
+            <a:off x="9854946" y="4636008"/>
+            <a:ext cx="1879549" cy="256032"/>
+          </a:xfrm>
+          <a:prstGeom prst="rect">
+            <a:avLst/>
+          </a:prstGeom>
+          <a:solidFill>
+            <a:srgbClr val="1E293B"/>
+          </a:solidFill>
+          <a:ln>
+            <a:noFill/>
+          </a:ln>
+        </p:spPr>
+        <p:style>
+          <a:lnRef idx="1">
+            <a:schemeClr val="accent1"/>
+          </a:lnRef>
+          <a:fillRef idx="3">
+            <a:schemeClr val="accent1"/>
+          </a:fillRef>
+          <a:effectRef idx="2">
+            <a:schemeClr val="accent1"/>
+          </a:effectRef>
+          <a:fontRef idx="minor">
+            <a:schemeClr val="lt1"/>
+          </a:fontRef>
+        </p:style>
+        <p:txBody>
+          <a:bodyPr rtlCol="0" anchor="ctr"/>
+          <a:lstStyle/>
+          <a:p>
+            <a:pPr algn="ctr"/>
+          </a:p>
+        </p:txBody>
+      </p:sp>
+      <p:sp>
+        <p:nvSpPr>
+          <p:cNvPr id="101" name="TextBox 100"/>
+          <p:cNvSpPr txBox="1"/>
+          <p:nvPr/>
+        </p:nvSpPr>
+        <p:spPr>
+          <a:xfrm>
+            <a:off x="9900666" y="4654296"/>
+            <a:ext cx="1788109" cy="219456"/>
+          </a:xfrm>
+          <a:prstGeom prst="rect">
+            <a:avLst/>
+          </a:prstGeom>
+          <a:noFill/>
+        </p:spPr>
+        <p:txBody>
+          <a:bodyPr wrap="square" lIns="0" tIns="0" rIns="0" bIns="0">
+            <a:spAutoFit/>
+          </a:bodyPr>
+          <a:lstStyle/>
+          <a:p>
+            <a:pPr algn="l"/>
+            <a:r>
+              <a:rPr sz="1000" b="0" i="0">
+                <a:solidFill>
+                  <a:srgbClr val="F8FAFC"/>
+                </a:solidFill>
+                <a:latin typeface="Calibri"/>
+              </a:rPr>
+              <a:t>+20%</a:t>
+            </a:r>
+          </a:p>
+        </p:txBody>
+      </p:sp>
+      <p:sp>
+        <p:nvSpPr>
+          <p:cNvPr id="102" name="Rectangle 101"/>
+          <p:cNvSpPr/>
+          <p:nvPr/>
+        </p:nvSpPr>
+        <p:spPr>
+          <a:xfrm>
+            <a:off x="457200" y="4892040"/>
+            <a:ext cx="3759098" cy="256032"/>
+          </a:xfrm>
+          <a:prstGeom prst="rect">
+            <a:avLst/>
+          </a:prstGeom>
+          <a:solidFill>
+            <a:srgbClr val="334155"/>
+          </a:solidFill>
+          <a:ln>
+            <a:noFill/>
+          </a:ln>
+        </p:spPr>
+        <p:style>
+          <a:lnRef idx="1">
+            <a:schemeClr val="accent1"/>
+          </a:lnRef>
+          <a:fillRef idx="3">
+            <a:schemeClr val="accent1"/>
+          </a:fillRef>
+          <a:effectRef idx="2">
+            <a:schemeClr val="accent1"/>
+          </a:effectRef>
+          <a:fontRef idx="minor">
+            <a:schemeClr val="lt1"/>
+          </a:fontRef>
+        </p:style>
+        <p:txBody>
+          <a:bodyPr rtlCol="0" anchor="ctr"/>
+          <a:lstStyle/>
+          <a:p>
+            <a:pPr algn="ctr"/>
+          </a:p>
+        </p:txBody>
+      </p:sp>
+      <p:sp>
+        <p:nvSpPr>
+          <p:cNvPr id="103" name="TextBox 102"/>
+          <p:cNvSpPr txBox="1"/>
+          <p:nvPr/>
+        </p:nvSpPr>
+        <p:spPr>
+          <a:xfrm>
+            <a:off x="502920" y="4910328"/>
+            <a:ext cx="3667658" cy="219456"/>
+          </a:xfrm>
+          <a:prstGeom prst="rect">
+            <a:avLst/>
+          </a:prstGeom>
+          <a:noFill/>
+        </p:spPr>
+        <p:txBody>
+          <a:bodyPr wrap="square" lIns="0" tIns="0" rIns="0" bIns="0">
+            <a:spAutoFit/>
+          </a:bodyPr>
+          <a:lstStyle/>
+          <a:p>
+            <a:pPr algn="l"/>
+            <a:r>
+              <a:rPr sz="1000" b="1" i="0">
+                <a:solidFill>
+                  <a:srgbClr val="94A3B8"/>
+                </a:solidFill>
+                <a:latin typeface="Calibri"/>
+              </a:rPr>
+              <a:t>SubtotalAPAC</a:t>
+            </a:r>
+          </a:p>
+        </p:txBody>
+      </p:sp>
+      <p:sp>
+        <p:nvSpPr>
+          <p:cNvPr id="104" name="Rectangle 103"/>
+          <p:cNvSpPr/>
+          <p:nvPr/>
+        </p:nvSpPr>
+        <p:spPr>
+          <a:xfrm>
+            <a:off x="4216298" y="4892040"/>
+            <a:ext cx="2819323" cy="256032"/>
+          </a:xfrm>
+          <a:prstGeom prst="rect">
+            <a:avLst/>
+          </a:prstGeom>
+          <a:solidFill>
+            <a:srgbClr val="334155"/>
+          </a:solidFill>
+          <a:ln>
+            <a:noFill/>
+          </a:ln>
+        </p:spPr>
+        <p:style>
+          <a:lnRef idx="1">
+            <a:schemeClr val="accent1"/>
+          </a:lnRef>
+          <a:fillRef idx="3">
+            <a:schemeClr val="accent1"/>
+          </a:fillRef>
+          <a:effectRef idx="2">
+            <a:schemeClr val="accent1"/>
+          </a:effectRef>
+          <a:fontRef idx="minor">
+            <a:schemeClr val="lt1"/>
+          </a:fontRef>
+        </p:style>
+        <p:txBody>
+          <a:bodyPr rtlCol="0" anchor="ctr"/>
+          <a:lstStyle/>
+          <a:p>
+            <a:pPr algn="ctr"/>
+          </a:p>
+        </p:txBody>
+      </p:sp>
+      <p:sp>
+        <p:nvSpPr>
+          <p:cNvPr id="105" name="TextBox 104"/>
+          <p:cNvSpPr txBox="1"/>
+          <p:nvPr/>
+        </p:nvSpPr>
+        <p:spPr>
+          <a:xfrm>
+            <a:off x="4262018" y="4910328"/>
+            <a:ext cx="2727883" cy="219456"/>
+          </a:xfrm>
+          <a:prstGeom prst="rect">
+            <a:avLst/>
+          </a:prstGeom>
+          <a:noFill/>
+        </p:spPr>
+        <p:txBody>
+          <a:bodyPr wrap="square" lIns="0" tIns="0" rIns="0" bIns="0">
+            <a:spAutoFit/>
+          </a:bodyPr>
+          <a:lstStyle/>
+          <a:p>
+            <a:pPr algn="l"/>
+            <a:r>
+              <a:rPr sz="1000" b="1" i="0">
+                <a:solidFill>
+                  <a:srgbClr val="94A3B8"/>
+                </a:solidFill>
+                <a:latin typeface="Calibri"/>
+              </a:rPr>
+              <a:t>$220M</a:t>
+            </a:r>
+          </a:p>
+        </p:txBody>
+      </p:sp>
+      <p:sp>
+        <p:nvSpPr>
+          <p:cNvPr id="106" name="Rectangle 105"/>
+          <p:cNvSpPr/>
+          <p:nvPr/>
+        </p:nvSpPr>
+        <p:spPr>
+          <a:xfrm>
+            <a:off x="7035622" y="4892040"/>
+            <a:ext cx="2819323" cy="256032"/>
+          </a:xfrm>
+          <a:prstGeom prst="rect">
+            <a:avLst/>
+          </a:prstGeom>
+          <a:solidFill>
+            <a:srgbClr val="334155"/>
+          </a:solidFill>
+          <a:ln>
+            <a:noFill/>
+          </a:ln>
+        </p:spPr>
+        <p:style>
+          <a:lnRef idx="1">
+            <a:schemeClr val="accent1"/>
+          </a:lnRef>
+          <a:fillRef idx="3">
+            <a:schemeClr val="accent1"/>
+          </a:fillRef>
+          <a:effectRef idx="2">
+            <a:schemeClr val="accent1"/>
+          </a:effectRef>
+          <a:fontRef idx="minor">
+            <a:schemeClr val="lt1"/>
+          </a:fontRef>
+        </p:style>
+        <p:txBody>
+          <a:bodyPr rtlCol="0" anchor="ctr"/>
+          <a:lstStyle/>
+          <a:p>
+            <a:pPr algn="ctr"/>
+          </a:p>
+        </p:txBody>
+      </p:sp>
+      <p:sp>
+        <p:nvSpPr>
+          <p:cNvPr id="107" name="TextBox 106"/>
+          <p:cNvSpPr txBox="1"/>
+          <p:nvPr/>
+        </p:nvSpPr>
+        <p:spPr>
+          <a:xfrm>
+            <a:off x="7081342" y="4910328"/>
+            <a:ext cx="2727883" cy="219456"/>
+          </a:xfrm>
+          <a:prstGeom prst="rect">
+            <a:avLst/>
+          </a:prstGeom>
+          <a:noFill/>
+        </p:spPr>
+        <p:txBody>
+          <a:bodyPr wrap="square" lIns="0" tIns="0" rIns="0" bIns="0">
+            <a:spAutoFit/>
+          </a:bodyPr>
+          <a:lstStyle/>
+          <a:p>
+            <a:pPr algn="l"/>
+            <a:r>
+              <a:rPr sz="1000" b="1" i="0">
+                <a:solidFill>
+                  <a:srgbClr val="94A3B8"/>
+                </a:solidFill>
+                <a:latin typeface="Calibri"/>
+              </a:rPr>
+              <a:t>$285M</a:t>
+            </a:r>
+          </a:p>
+        </p:txBody>
+      </p:sp>
+      <p:sp>
+        <p:nvSpPr>
+          <p:cNvPr id="108" name="Rectangle 107"/>
+          <p:cNvSpPr/>
+          <p:nvPr/>
+        </p:nvSpPr>
+        <p:spPr>
+          <a:xfrm>
+            <a:off x="9854946" y="4892040"/>
+            <a:ext cx="1879549" cy="256032"/>
+          </a:xfrm>
+          <a:prstGeom prst="rect">
+            <a:avLst/>
+          </a:prstGeom>
+          <a:solidFill>
+            <a:srgbClr val="334155"/>
+          </a:solidFill>
+          <a:ln>
+            <a:noFill/>
+          </a:ln>
+        </p:spPr>
+        <p:style>
+          <a:lnRef idx="1">
+            <a:schemeClr val="accent1"/>
+          </a:lnRef>
+          <a:fillRef idx="3">
+            <a:schemeClr val="accent1"/>
+          </a:fillRef>
+          <a:effectRef idx="2">
+            <a:schemeClr val="accent1"/>
+          </a:effectRef>
+          <a:fontRef idx="minor">
+            <a:schemeClr val="lt1"/>
+          </a:fontRef>
+        </p:style>
+        <p:txBody>
+          <a:bodyPr rtlCol="0" anchor="ctr"/>
+          <a:lstStyle/>
+          <a:p>
+            <a:pPr algn="ctr"/>
+          </a:p>
+        </p:txBody>
+      </p:sp>
+      <p:sp>
+        <p:nvSpPr>
+          <p:cNvPr id="109" name="TextBox 108"/>
+          <p:cNvSpPr txBox="1"/>
+          <p:nvPr/>
+        </p:nvSpPr>
+        <p:spPr>
+          <a:xfrm>
+            <a:off x="9900666" y="4910328"/>
+            <a:ext cx="1788109" cy="219456"/>
+          </a:xfrm>
+          <a:prstGeom prst="rect">
+            <a:avLst/>
+          </a:prstGeom>
+          <a:noFill/>
+        </p:spPr>
+        <p:txBody>
+          <a:bodyPr wrap="square" lIns="0" tIns="0" rIns="0" bIns="0">
+            <a:spAutoFit/>
+          </a:bodyPr>
+          <a:lstStyle/>
+          <a:p>
+            <a:pPr algn="l"/>
+            <a:r>
+              <a:rPr sz="1000" b="1" i="0">
+                <a:solidFill>
+                  <a:srgbClr val="94A3B8"/>
+                </a:solidFill>
+                <a:latin typeface="Calibri"/>
+              </a:rPr>
+              <a:t>+30%</a:t>
+            </a:r>
+          </a:p>
+        </p:txBody>
+      </p:sp>
+    </p:spTree>
+  </p:cSld>
+  <p:clrMapOvr>
+    <a:masterClrMapping/>
+  </p:clrMapOvr>
+</p:sld>
+</file>
+
+<file path=ppt/slides/slide18.xml><?xml version="1.0" encoding="utf-8"?>
+<p:sld xmlns:a="http://schemas.openxmlformats.org/drawingml/2006/main" xmlns:p="http://schemas.openxmlformats.org/presentationml/2006/main" xmlns:r="http://schemas.openxmlformats.org/officeDocument/2006/relationships">
+  <p:cSld>
+    <p:bg>
+      <p:bgPr>
+        <a:solidFill>
+          <a:srgbClr val="0F172A"/>
+        </a:solidFill>
+        <a:effectLst/>
+      </p:bgPr>
+    </p:bg>
+    <p:spTree>
+      <p:nvGrpSpPr>
+        <p:cNvPr id="1" name=""/>
+        <p:cNvGrpSpPr/>
+        <p:nvPr/>
+      </p:nvGrpSpPr>
+      <p:grpSpPr/>
+      <p:sp>
+        <p:nvSpPr>
+          <p:cNvPr id="2" name="Rectangle 1"/>
+          <p:cNvSpPr/>
+          <p:nvPr/>
+        </p:nvSpPr>
+        <p:spPr>
+          <a:xfrm>
+            <a:off x="457200" y="457200"/>
+            <a:ext cx="45720" cy="548640"/>
+          </a:xfrm>
+          <a:prstGeom prst="rect">
+            <a:avLst/>
+          </a:prstGeom>
+          <a:solidFill>
+            <a:srgbClr val="3B82F6"/>
+          </a:solidFill>
+          <a:ln>
+            <a:noFill/>
+          </a:ln>
+        </p:spPr>
+        <p:style>
+          <a:lnRef idx="1">
+            <a:schemeClr val="accent1"/>
+          </a:lnRef>
+          <a:fillRef idx="3">
+            <a:schemeClr val="accent1"/>
+          </a:fillRef>
+          <a:effectRef idx="2">
+            <a:schemeClr val="accent1"/>
+          </a:effectRef>
+          <a:fontRef idx="minor">
+            <a:schemeClr val="lt1"/>
+          </a:fontRef>
+        </p:style>
+        <p:txBody>
+          <a:bodyPr rtlCol="0" anchor="ctr"/>
+          <a:lstStyle/>
+          <a:p>
+            <a:pPr algn="ctr"/>
+          </a:p>
+        </p:txBody>
+      </p:sp>
+      <p:sp>
+        <p:nvSpPr>
+          <p:cNvPr id="3" name="TextBox 2"/>
+          <p:cNvSpPr txBox="1"/>
+          <p:nvPr/>
+        </p:nvSpPr>
+        <p:spPr>
+          <a:xfrm>
+            <a:off x="685800" y="457200"/>
+            <a:ext cx="9677095" cy="548640"/>
+          </a:xfrm>
+          <a:prstGeom prst="rect">
+            <a:avLst/>
+          </a:prstGeom>
+          <a:noFill/>
+        </p:spPr>
+        <p:txBody>
+          <a:bodyPr wrap="square" lIns="0" tIns="0" rIns="0" bIns="0">
+            <a:spAutoFit/>
+          </a:bodyPr>
+          <a:lstStyle/>
+          <a:p>
+            <a:pPr algn="l"/>
+            <a:r>
+              <a:rPr sz="2800" b="1" i="0">
+                <a:solidFill>
+                  <a:srgbClr val="F8FAFC"/>
+                </a:solidFill>
+                <a:latin typeface="Calibri Light"/>
+              </a:rPr>
+              <a:t>Phase 4: Animation &amp; Transitions</a:t>
+            </a:r>
+          </a:p>
+        </p:txBody>
+      </p:sp>
+      <p:sp>
+        <p:nvSpPr>
+          <p:cNvPr id="4" name="Rounded Rectangle 3"/>
+          <p:cNvSpPr/>
+          <p:nvPr/>
+        </p:nvSpPr>
+        <p:spPr>
+          <a:xfrm>
+            <a:off x="10545775" y="571500"/>
+            <a:ext cx="1188720" cy="320040"/>
+          </a:xfrm>
+          <a:prstGeom prst="roundRect">
+            <a:avLst>
+              <a:gd name="adj" fmla="val 50000"/>
+            </a:avLst>
+          </a:prstGeom>
+          <a:solidFill>
+            <a:srgbClr val="3B82F6"/>
+          </a:solidFill>
+          <a:ln>
+            <a:noFill/>
+          </a:ln>
+        </p:spPr>
+        <p:style>
+          <a:lnRef idx="1">
+            <a:schemeClr val="accent1"/>
+          </a:lnRef>
+          <a:fillRef idx="3">
+            <a:schemeClr val="accent1"/>
+          </a:fillRef>
+          <a:effectRef idx="2">
+            <a:schemeClr val="accent1"/>
+          </a:effectRef>
+          <a:fontRef idx="minor">
+            <a:schemeClr val="lt1"/>
+          </a:fontRef>
+        </p:style>
+        <p:txBody>
+          <a:bodyPr rtlCol="0" anchor="ctr" wrap="none"/>
+          <a:lstStyle/>
+          <a:p>
+            <a:pPr algn="ctr"/>
+            <a:r>
+              <a:rPr sz="1100" b="1">
+                <a:solidFill>
+                  <a:srgbClr val="FFFFFF"/>
+                </a:solidFill>
+                <a:latin typeface="Calibri"/>
+              </a:rPr>
+              <a:t>Effects</a:t>
+            </a:r>
+          </a:p>
+        </p:txBody>
+      </p:sp>
+      <p:sp>
+        <p:nvSpPr>
+          <p:cNvPr id="5" name="Rectangle 4"/>
+          <p:cNvSpPr/>
+          <p:nvPr/>
+        </p:nvSpPr>
+        <p:spPr>
+          <a:xfrm>
+            <a:off x="457200" y="1325880"/>
+            <a:ext cx="11277295" cy="64008"/>
+          </a:xfrm>
+          <a:prstGeom prst="rect">
+            <a:avLst/>
+          </a:prstGeom>
+          <a:solidFill>
+            <a:srgbClr val="3B82F6"/>
+          </a:solidFill>
+          <a:ln>
+            <a:noFill/>
+          </a:ln>
+        </p:spPr>
+        <p:style>
+          <a:lnRef idx="1">
+            <a:schemeClr val="accent1"/>
+          </a:lnRef>
+          <a:fillRef idx="3">
+            <a:schemeClr val="accent1"/>
+          </a:fillRef>
+          <a:effectRef idx="2">
+            <a:schemeClr val="accent1"/>
+          </a:effectRef>
+          <a:fontRef idx="minor">
+            <a:schemeClr val="lt1"/>
+          </a:fontRef>
+        </p:style>
+        <p:txBody>
+          <a:bodyPr rtlCol="0" anchor="ctr"/>
+          <a:lstStyle/>
+          <a:p>
+            <a:pPr algn="ctr"/>
+          </a:p>
+        </p:txBody>
+      </p:sp>
+      <p:sp>
+        <p:nvSpPr>
+          <p:cNvPr id="6" name="TextBox 5"/>
+          <p:cNvSpPr txBox="1"/>
+          <p:nvPr/>
+        </p:nvSpPr>
+        <p:spPr>
+          <a:xfrm>
+            <a:off x="457200" y="1481328"/>
+            <a:ext cx="11277295" cy="352044"/>
+          </a:xfrm>
+          <a:prstGeom prst="rect">
+            <a:avLst/>
+          </a:prstGeom>
+          <a:noFill/>
+        </p:spPr>
+        <p:txBody>
+          <a:bodyPr wrap="square" lIns="0" tIns="0" rIns="0" bIns="0">
+            <a:spAutoFit/>
+          </a:bodyPr>
+          <a:lstStyle/>
+          <a:p>
+            <a:pPr algn="l"/>
+            <a:r>
+              <a:rPr sz="4000" b="1" i="0">
+                <a:solidFill>
+                  <a:srgbClr val="F8FAFC"/>
+                </a:solidFill>
+                <a:latin typeface="Calibri Light"/>
+              </a:rPr>
+              <a:t>Welcome!</a:t>
+            </a:r>
+          </a:p>
+        </p:txBody>
+      </p:sp>
+      <p:sp>
+        <p:nvSpPr>
+          <p:cNvPr id="7" name="TextBox 6"/>
+          <p:cNvSpPr txBox="1"/>
+          <p:nvPr/>
+        </p:nvSpPr>
+        <p:spPr>
+          <a:xfrm>
+            <a:off x="457200" y="1833372"/>
+            <a:ext cx="11277295" cy="132587"/>
+          </a:xfrm>
+          <a:prstGeom prst="rect">
+            <a:avLst/>
+          </a:prstGeom>
+          <a:noFill/>
+        </p:spPr>
+        <p:txBody>
+          <a:bodyPr wrap="square" lIns="0" tIns="0" rIns="0" bIns="0">
+            <a:spAutoFit/>
+          </a:bodyPr>
+          <a:lstStyle/>
+          <a:p>
+            <a:pPr algn="l"/>
+            <a:r>
+              <a:rPr sz="2000" b="0" i="0">
+                <a:solidFill>
+                  <a:srgbClr val="CBD5E1"/>
+                </a:solidFill>
+                <a:latin typeface="Calibri Light"/>
+              </a:rPr>
+              <a:t>This title fades in (static → see rendered output)</a:t>
+            </a:r>
+          </a:p>
+        </p:txBody>
+      </p:sp>
+      <p:sp>
+        <p:nvSpPr>
+          <p:cNvPr id="8" name="Rounded Rectangle 7"/>
+          <p:cNvSpPr/>
+          <p:nvPr/>
+        </p:nvSpPr>
+        <p:spPr>
+          <a:xfrm>
+            <a:off x="457200" y="2331720"/>
+            <a:ext cx="3637178" cy="1097280"/>
+          </a:xfrm>
+          <a:prstGeom prst="roundRect">
+            <a:avLst>
+              <a:gd name="adj" fmla="val 4166"/>
+            </a:avLst>
+          </a:prstGeom>
+          <a:solidFill>
+            <a:srgbClr val="1E293B"/>
+          </a:solidFill>
+          <a:ln>
+            <a:noFill/>
+          </a:ln>
+        </p:spPr>
+        <p:style>
+          <a:lnRef idx="1">
+            <a:schemeClr val="accent1"/>
+          </a:lnRef>
+          <a:fillRef idx="3">
+            <a:schemeClr val="accent1"/>
+          </a:fillRef>
+          <a:effectRef idx="2">
+            <a:schemeClr val="accent1"/>
+          </a:effectRef>
+          <a:fontRef idx="minor">
+            <a:schemeClr val="lt1"/>
+          </a:fontRef>
+        </p:style>
+        <p:txBody>
+          <a:bodyPr rtlCol="0" anchor="ctr"/>
+          <a:lstStyle/>
+          <a:p>
+            <a:pPr algn="ctr"/>
+          </a:p>
+        </p:txBody>
+      </p:sp>
+      <p:sp>
+        <p:nvSpPr>
+          <p:cNvPr id="9" name="Rectangle 8"/>
+          <p:cNvSpPr/>
+          <p:nvPr/>
+        </p:nvSpPr>
+        <p:spPr>
+          <a:xfrm>
+            <a:off x="457200" y="2331720"/>
+            <a:ext cx="45720" cy="1097280"/>
+          </a:xfrm>
+          <a:prstGeom prst="rect">
+            <a:avLst/>
+          </a:prstGeom>
+          <a:solidFill>
+            <a:srgbClr val="3B82F6"/>
+          </a:solidFill>
+          <a:ln>
+            <a:noFill/>
+          </a:ln>
+        </p:spPr>
+        <p:style>
+          <a:lnRef idx="1">
+            <a:schemeClr val="accent1"/>
+          </a:lnRef>
+          <a:fillRef idx="3">
+            <a:schemeClr val="accent1"/>
+          </a:fillRef>
+          <a:effectRef idx="2">
+            <a:schemeClr val="accent1"/>
+          </a:effectRef>
+          <a:fontRef idx="minor">
+            <a:schemeClr val="lt1"/>
+          </a:fontRef>
+        </p:style>
+        <p:txBody>
+          <a:bodyPr rtlCol="0" anchor="ctr"/>
+          <a:lstStyle/>
+          <a:p>
+            <a:pPr algn="ctr"/>
+          </a:p>
+        </p:txBody>
+      </p:sp>
+      <p:sp>
+        <p:nvSpPr>
+          <p:cNvPr id="10" name="TextBox 9"/>
+          <p:cNvSpPr txBox="1"/>
+          <p:nvPr/>
+        </p:nvSpPr>
+        <p:spPr>
+          <a:xfrm>
+            <a:off x="685800" y="2514600"/>
+            <a:ext cx="3225698" cy="228600"/>
+          </a:xfrm>
+          <a:prstGeom prst="rect">
+            <a:avLst/>
+          </a:prstGeom>
+          <a:noFill/>
+        </p:spPr>
+        <p:txBody>
+          <a:bodyPr wrap="square" lIns="0" tIns="0" rIns="0" bIns="0">
+            <a:spAutoFit/>
+          </a:bodyPr>
+          <a:lstStyle/>
+          <a:p>
+            <a:pPr algn="l"/>
+            <a:r>
+              <a:rPr sz="1100" b="0" i="0">
+                <a:solidFill>
+                  <a:srgbClr val="94A3B8"/>
+                </a:solidFill>
+                <a:latin typeface="Calibri"/>
+              </a:rPr>
+              <a:t>ENGAGEMENT</a:t>
+            </a:r>
+          </a:p>
+        </p:txBody>
+      </p:sp>
+      <p:sp>
+        <p:nvSpPr>
+          <p:cNvPr id="11" name="TextBox 10"/>
+          <p:cNvSpPr txBox="1"/>
+          <p:nvPr/>
+        </p:nvSpPr>
+        <p:spPr>
+          <a:xfrm>
+            <a:off x="685800" y="2743200"/>
+            <a:ext cx="3225698" cy="411480"/>
+          </a:xfrm>
+          <a:prstGeom prst="rect">
+            <a:avLst/>
+          </a:prstGeom>
+          <a:noFill/>
+        </p:spPr>
+        <p:txBody>
+          <a:bodyPr wrap="square" lIns="0" tIns="0" rIns="0" bIns="0">
+            <a:spAutoFit/>
+          </a:bodyPr>
+          <a:lstStyle/>
+          <a:p>
+            <a:pPr algn="l"/>
+            <a:r>
+              <a:rPr sz="2800" b="1" i="0">
+                <a:solidFill>
+                  <a:srgbClr val="F8FAFC"/>
+                </a:solidFill>
+                <a:latin typeface="Calibri Light"/>
+              </a:rPr>
+              <a:t>92%</a:t>
+            </a:r>
+          </a:p>
+        </p:txBody>
+      </p:sp>
+      <p:sp>
+        <p:nvSpPr>
+          <p:cNvPr id="12" name="TextBox 11"/>
+          <p:cNvSpPr txBox="1"/>
+          <p:nvPr/>
+        </p:nvSpPr>
+        <p:spPr>
+          <a:xfrm>
+            <a:off x="685800" y="3154680"/>
+            <a:ext cx="3225698" cy="228600"/>
+          </a:xfrm>
+          <a:prstGeom prst="rect">
+            <a:avLst/>
+          </a:prstGeom>
+          <a:noFill/>
+        </p:spPr>
+        <p:txBody>
+          <a:bodyPr wrap="square" lIns="0" tIns="0" rIns="0" bIns="0">
+            <a:spAutoFit/>
+          </a:bodyPr>
+          <a:lstStyle/>
+          <a:p>
+            <a:pPr algn="l"/>
+            <a:r>
+              <a:rPr sz="1100" b="1" i="0">
+                <a:solidFill>
+                  <a:srgbClr val="22C55E"/>
+                </a:solidFill>
+                <a:latin typeface="Calibri"/>
+              </a:rPr>
+              <a:t>▲ +5pp</a:t>
+            </a:r>
+          </a:p>
+        </p:txBody>
+      </p:sp>
+      <p:sp>
+        <p:nvSpPr>
+          <p:cNvPr id="13" name="Rounded Rectangle 12"/>
+          <p:cNvSpPr/>
+          <p:nvPr/>
+        </p:nvSpPr>
+        <p:spPr>
+          <a:xfrm>
+            <a:off x="4277258" y="2331720"/>
+            <a:ext cx="3637178" cy="1097280"/>
+          </a:xfrm>
+          <a:prstGeom prst="roundRect">
+            <a:avLst>
+              <a:gd name="adj" fmla="val 4166"/>
+            </a:avLst>
+          </a:prstGeom>
+          <a:solidFill>
+            <a:srgbClr val="1E293B"/>
+          </a:solidFill>
+          <a:ln>
+            <a:noFill/>
+          </a:ln>
+        </p:spPr>
+        <p:style>
+          <a:lnRef idx="1">
+            <a:schemeClr val="accent1"/>
+          </a:lnRef>
+          <a:fillRef idx="3">
+            <a:schemeClr val="accent1"/>
+          </a:fillRef>
+          <a:effectRef idx="2">
+            <a:schemeClr val="accent1"/>
+          </a:effectRef>
+          <a:fontRef idx="minor">
+            <a:schemeClr val="lt1"/>
+          </a:fontRef>
+        </p:style>
+        <p:txBody>
+          <a:bodyPr rtlCol="0" anchor="ctr"/>
+          <a:lstStyle/>
+          <a:p>
+            <a:pPr algn="ctr"/>
+          </a:p>
+        </p:txBody>
+      </p:sp>
+      <p:sp>
+        <p:nvSpPr>
+          <p:cNvPr id="14" name="Rectangle 13"/>
+          <p:cNvSpPr/>
+          <p:nvPr/>
+        </p:nvSpPr>
+        <p:spPr>
+          <a:xfrm>
+            <a:off x="4277258" y="2331720"/>
+            <a:ext cx="45720" cy="1097280"/>
+          </a:xfrm>
+          <a:prstGeom prst="rect">
+            <a:avLst/>
+          </a:prstGeom>
+          <a:solidFill>
+            <a:srgbClr val="3B82F6"/>
+          </a:solidFill>
+          <a:ln>
+            <a:noFill/>
+          </a:ln>
+        </p:spPr>
+        <p:style>
+          <a:lnRef idx="1">
+            <a:schemeClr val="accent1"/>
+          </a:lnRef>
+          <a:fillRef idx="3">
+            <a:schemeClr val="accent1"/>
+          </a:fillRef>
+          <a:effectRef idx="2">
+            <a:schemeClr val="accent1"/>
+          </a:effectRef>
+          <a:fontRef idx="minor">
+            <a:schemeClr val="lt1"/>
+          </a:fontRef>
+        </p:style>
+        <p:txBody>
+          <a:bodyPr rtlCol="0" anchor="ctr"/>
+          <a:lstStyle/>
+          <a:p>
+            <a:pPr algn="ctr"/>
+          </a:p>
+        </p:txBody>
+      </p:sp>
+      <p:sp>
+        <p:nvSpPr>
+          <p:cNvPr id="15" name="TextBox 14"/>
+          <p:cNvSpPr txBox="1"/>
+          <p:nvPr/>
+        </p:nvSpPr>
+        <p:spPr>
+          <a:xfrm>
+            <a:off x="4505858" y="2514600"/>
+            <a:ext cx="3225698" cy="228600"/>
+          </a:xfrm>
+          <a:prstGeom prst="rect">
+            <a:avLst/>
+          </a:prstGeom>
+          <a:noFill/>
+        </p:spPr>
+        <p:txBody>
+          <a:bodyPr wrap="square" lIns="0" tIns="0" rIns="0" bIns="0">
+            <a:spAutoFit/>
+          </a:bodyPr>
+          <a:lstStyle/>
+          <a:p>
+            <a:pPr algn="l"/>
+            <a:r>
+              <a:rPr sz="1100" b="0" i="0">
+                <a:solidFill>
+                  <a:srgbClr val="94A3B8"/>
+                </a:solidFill>
+                <a:latin typeface="Calibri"/>
+              </a:rPr>
+              <a:t>ACCURACY</a:t>
+            </a:r>
+          </a:p>
+        </p:txBody>
+      </p:sp>
+      <p:sp>
+        <p:nvSpPr>
+          <p:cNvPr id="16" name="TextBox 15"/>
+          <p:cNvSpPr txBox="1"/>
+          <p:nvPr/>
+        </p:nvSpPr>
+        <p:spPr>
+          <a:xfrm>
+            <a:off x="4505858" y="2743200"/>
+            <a:ext cx="3225698" cy="411480"/>
+          </a:xfrm>
+          <a:prstGeom prst="rect">
+            <a:avLst/>
+          </a:prstGeom>
+          <a:noFill/>
+        </p:spPr>
+        <p:txBody>
+          <a:bodyPr wrap="square" lIns="0" tIns="0" rIns="0" bIns="0">
+            <a:spAutoFit/>
+          </a:bodyPr>
+          <a:lstStyle/>
+          <a:p>
+            <a:pPr algn="l"/>
+            <a:r>
+              <a:rPr sz="2800" b="1" i="0">
+                <a:solidFill>
+                  <a:srgbClr val="F8FAFC"/>
+                </a:solidFill>
+                <a:latin typeface="Calibri Light"/>
+              </a:rPr>
+              <a:t>87%</a:t>
+            </a:r>
+          </a:p>
+        </p:txBody>
+      </p:sp>
+      <p:sp>
+        <p:nvSpPr>
+          <p:cNvPr id="17" name="TextBox 16"/>
+          <p:cNvSpPr txBox="1"/>
+          <p:nvPr/>
+        </p:nvSpPr>
+        <p:spPr>
+          <a:xfrm>
+            <a:off x="4505858" y="3154680"/>
+            <a:ext cx="3225698" cy="228600"/>
+          </a:xfrm>
+          <a:prstGeom prst="rect">
+            <a:avLst/>
+          </a:prstGeom>
+          <a:noFill/>
+        </p:spPr>
+        <p:txBody>
+          <a:bodyPr wrap="square" lIns="0" tIns="0" rIns="0" bIns="0">
+            <a:spAutoFit/>
+          </a:bodyPr>
+          <a:lstStyle/>
+          <a:p>
+            <a:pPr algn="l"/>
+            <a:r>
+              <a:rPr sz="1100" b="1" i="0">
+                <a:solidFill>
+                  <a:srgbClr val="22C55E"/>
+                </a:solidFill>
+                <a:latin typeface="Calibri"/>
+              </a:rPr>
+              <a:t>▲ +8%</a:t>
+            </a:r>
+          </a:p>
+        </p:txBody>
+      </p:sp>
+      <p:sp>
+        <p:nvSpPr>
+          <p:cNvPr id="18" name="Rounded Rectangle 17"/>
+          <p:cNvSpPr/>
+          <p:nvPr/>
+        </p:nvSpPr>
+        <p:spPr>
+          <a:xfrm>
+            <a:off x="8097316" y="2331720"/>
+            <a:ext cx="3637178" cy="1097280"/>
+          </a:xfrm>
+          <a:prstGeom prst="roundRect">
+            <a:avLst>
+              <a:gd name="adj" fmla="val 4166"/>
+            </a:avLst>
+          </a:prstGeom>
+          <a:solidFill>
+            <a:srgbClr val="1E293B"/>
+          </a:solidFill>
+          <a:ln>
+            <a:noFill/>
+          </a:ln>
+        </p:spPr>
+        <p:style>
+          <a:lnRef idx="1">
+            <a:schemeClr val="accent1"/>
+          </a:lnRef>
+          <a:fillRef idx="3">
+            <a:schemeClr val="accent1"/>
+          </a:fillRef>
+          <a:effectRef idx="2">
+            <a:schemeClr val="accent1"/>
+          </a:effectRef>
+          <a:fontRef idx="minor">
+            <a:schemeClr val="lt1"/>
+          </a:fontRef>
+        </p:style>
+        <p:txBody>
+          <a:bodyPr rtlCol="0" anchor="ctr"/>
+          <a:lstStyle/>
+          <a:p>
+            <a:pPr algn="ctr"/>
+          </a:p>
+        </p:txBody>
+      </p:sp>
+      <p:sp>
+        <p:nvSpPr>
+          <p:cNvPr id="19" name="Rectangle 18"/>
+          <p:cNvSpPr/>
+          <p:nvPr/>
+        </p:nvSpPr>
+        <p:spPr>
+          <a:xfrm>
+            <a:off x="8097316" y="2331720"/>
+            <a:ext cx="45720" cy="1097280"/>
+          </a:xfrm>
+          <a:prstGeom prst="rect">
+            <a:avLst/>
+          </a:prstGeom>
+          <a:solidFill>
+            <a:srgbClr val="3B82F6"/>
+          </a:solidFill>
+          <a:ln>
+            <a:noFill/>
+          </a:ln>
+        </p:spPr>
+        <p:style>
+          <a:lnRef idx="1">
+            <a:schemeClr val="accent1"/>
+          </a:lnRef>
+          <a:fillRef idx="3">
+            <a:schemeClr val="accent1"/>
+          </a:fillRef>
+          <a:effectRef idx="2">
+            <a:schemeClr val="accent1"/>
+          </a:effectRef>
+          <a:fontRef idx="minor">
+            <a:schemeClr val="lt1"/>
+          </a:fontRef>
+        </p:style>
+        <p:txBody>
+          <a:bodyPr rtlCol="0" anchor="ctr"/>
+          <a:lstStyle/>
+          <a:p>
+            <a:pPr algn="ctr"/>
+          </a:p>
+        </p:txBody>
+      </p:sp>
+      <p:sp>
+        <p:nvSpPr>
+          <p:cNvPr id="20" name="TextBox 19"/>
+          <p:cNvSpPr txBox="1"/>
+          <p:nvPr/>
+        </p:nvSpPr>
+        <p:spPr>
+          <a:xfrm>
+            <a:off x="8325916" y="2514600"/>
+            <a:ext cx="3225698" cy="228600"/>
+          </a:xfrm>
+          <a:prstGeom prst="rect">
+            <a:avLst/>
+          </a:prstGeom>
+          <a:noFill/>
+        </p:spPr>
+        <p:txBody>
+          <a:bodyPr wrap="square" lIns="0" tIns="0" rIns="0" bIns="0">
+            <a:spAutoFit/>
+          </a:bodyPr>
+          <a:lstStyle/>
+          <a:p>
+            <a:pPr algn="l"/>
+            <a:r>
+              <a:rPr sz="1100" b="0" i="0">
+                <a:solidFill>
+                  <a:srgbClr val="94A3B8"/>
+                </a:solidFill>
+                <a:latin typeface="Calibri"/>
+              </a:rPr>
+              <a:t>ADOPTION</a:t>
+            </a:r>
+          </a:p>
+        </p:txBody>
+      </p:sp>
+      <p:sp>
+        <p:nvSpPr>
+          <p:cNvPr id="21" name="TextBox 20"/>
+          <p:cNvSpPr txBox="1"/>
+          <p:nvPr/>
+        </p:nvSpPr>
+        <p:spPr>
+          <a:xfrm>
+            <a:off x="8325916" y="2743200"/>
+            <a:ext cx="3225698" cy="411480"/>
+          </a:xfrm>
+          <a:prstGeom prst="rect">
+            <a:avLst/>
+          </a:prstGeom>
+          <a:noFill/>
+        </p:spPr>
+        <p:txBody>
+          <a:bodyPr wrap="square" lIns="0" tIns="0" rIns="0" bIns="0">
+            <a:spAutoFit/>
+          </a:bodyPr>
+          <a:lstStyle/>
+          <a:p>
+            <a:pPr algn="l"/>
+            <a:r>
+              <a:rPr sz="2800" b="1" i="0">
+                <a:solidFill>
+                  <a:srgbClr val="F8FAFC"/>
+                </a:solidFill>
+                <a:latin typeface="Calibri Light"/>
+              </a:rPr>
+              <a:t>72%</a:t>
+            </a:r>
+          </a:p>
+        </p:txBody>
+      </p:sp>
+      <p:sp>
+        <p:nvSpPr>
+          <p:cNvPr id="22" name="TextBox 21"/>
+          <p:cNvSpPr txBox="1"/>
+          <p:nvPr/>
+        </p:nvSpPr>
+        <p:spPr>
+          <a:xfrm>
+            <a:off x="8325916" y="3154680"/>
+            <a:ext cx="3225698" cy="228600"/>
+          </a:xfrm>
+          <a:prstGeom prst="rect">
+            <a:avLst/>
+          </a:prstGeom>
+          <a:noFill/>
+        </p:spPr>
+        <p:txBody>
+          <a:bodyPr wrap="square" lIns="0" tIns="0" rIns="0" bIns="0">
+            <a:spAutoFit/>
+          </a:bodyPr>
+          <a:lstStyle/>
+          <a:p>
+            <a:pPr algn="l"/>
+            <a:r>
+              <a:rPr sz="1100" b="1" i="0">
+                <a:solidFill>
+                  <a:srgbClr val="22C55E"/>
+                </a:solidFill>
+                <a:latin typeface="Calibri"/>
+              </a:rPr>
+              <a:t>▲ +12%</a:t>
+            </a:r>
+          </a:p>
+        </p:txBody>
+      </p:sp>
+      <p:sp>
+        <p:nvSpPr>
+          <p:cNvPr id="23" name="Rounded Rectangle 22"/>
+          <p:cNvSpPr/>
+          <p:nvPr/>
+        </p:nvSpPr>
+        <p:spPr>
+          <a:xfrm>
+            <a:off x="457200" y="3840479"/>
+            <a:ext cx="11277295" cy="914400"/>
+          </a:xfrm>
+          <a:prstGeom prst="roundRect">
+            <a:avLst>
+              <a:gd name="adj" fmla="val 5000"/>
+            </a:avLst>
+          </a:prstGeom>
+          <a:solidFill>
+            <a:srgbClr val="334155"/>
+          </a:solidFill>
+          <a:ln>
+            <a:noFill/>
+          </a:ln>
+        </p:spPr>
+        <p:style>
+          <a:lnRef idx="1">
+            <a:schemeClr val="accent1"/>
+          </a:lnRef>
+          <a:fillRef idx="3">
+            <a:schemeClr val="accent1"/>
+          </a:fillRef>
+          <a:effectRef idx="2">
+            <a:schemeClr val="accent1"/>
+          </a:effectRef>
+          <a:fontRef idx="minor">
+            <a:schemeClr val="lt1"/>
+          </a:fontRef>
+        </p:style>
+        <p:txBody>
+          <a:bodyPr rtlCol="0" anchor="ctr"/>
+          <a:lstStyle/>
+          <a:p>
+            <a:pPr algn="ctr"/>
+          </a:p>
+        </p:txBody>
+      </p:sp>
+      <p:sp>
+        <p:nvSpPr>
+          <p:cNvPr id="24" name="Rectangle 23"/>
+          <p:cNvSpPr/>
+          <p:nvPr/>
+        </p:nvSpPr>
+        <p:spPr>
+          <a:xfrm>
+            <a:off x="457200" y="3840479"/>
+            <a:ext cx="45720" cy="914400"/>
+          </a:xfrm>
+          <a:prstGeom prst="rect">
+            <a:avLst/>
+          </a:prstGeom>
+          <a:solidFill>
+            <a:srgbClr val="3B82F6"/>
+          </a:solidFill>
+          <a:ln>
+            <a:noFill/>
+          </a:ln>
+        </p:spPr>
+        <p:style>
+          <a:lnRef idx="1">
+            <a:schemeClr val="accent1"/>
+          </a:lnRef>
+          <a:fillRef idx="3">
+            <a:schemeClr val="accent1"/>
+          </a:fillRef>
+          <a:effectRef idx="2">
+            <a:schemeClr val="accent1"/>
+          </a:effectRef>
+          <a:fontRef idx="minor">
+            <a:schemeClr val="lt1"/>
+          </a:fontRef>
+        </p:style>
+        <p:txBody>
+          <a:bodyPr rtlCol="0" anchor="ctr"/>
+          <a:lstStyle/>
+          <a:p>
+            <a:pPr algn="ctr"/>
+          </a:p>
+        </p:txBody>
+      </p:sp>
+      <p:sp>
+        <p:nvSpPr>
+          <p:cNvPr id="25" name="TextBox 24"/>
+          <p:cNvSpPr txBox="1"/>
+          <p:nvPr/>
+        </p:nvSpPr>
+        <p:spPr>
+          <a:xfrm>
+            <a:off x="685800" y="4023359"/>
+            <a:ext cx="10957255" cy="548639"/>
+          </a:xfrm>
+          <a:prstGeom prst="rect">
+            <a:avLst/>
+          </a:prstGeom>
+          <a:noFill/>
+        </p:spPr>
+        <p:txBody>
+          <a:bodyPr wrap="square" lIns="0" tIns="0" rIns="0" bIns="0">
+            <a:spAutoFit/>
+          </a:bodyPr>
+          <a:lstStyle/>
+          <a:p>
+            <a:pPr algn="l"/>
+            <a:r>
+              <a:rPr sz="1400" b="0" i="0">
+                <a:solidFill>
+                  <a:srgbClr val="94A3B8"/>
+                </a:solidFill>
+                <a:latin typeface="Calibri"/>
+              </a:rPr>
+              <a:t>Note: python-pptx does not natively support embedded slide animations. Animation effects render at their end state in static PowerPoint. For true animations, export slides to PNG via render_frame() or use PowerPoint GUI.</a:t>
             </a:r>
           </a:p>
         </p:txBody>

--- a/examples/demo_dark.pptx
+++ b/examples/demo_dark.pptx
@@ -23,6 +23,11 @@
     <p:sldId id="271" r:id="rId22"/>
     <p:sldId id="272" r:id="rId23"/>
     <p:sldId id="273" r:id="rId24"/>
+    <p:sldId id="274" r:id="rId25"/>
+    <p:sldId id="275" r:id="rId26"/>
+    <p:sldId id="276" r:id="rId27"/>
+    <p:sldId id="277" r:id="rId28"/>
+    <p:sldId id="278" r:id="rId29"/>
   </p:sldIdLst>
   <p:sldSz cx="12191695" cy="6858000" type="screen4x3"/>
   <p:notesSz cx="6858000" cy="9144000"/>
@@ -22273,6 +22278,590 @@
 </p:sld>
 </file>
 
+<file path=ppt/slides/slide19.xml><?xml version="1.0" encoding="utf-8"?>
+<p:sld xmlns:a="http://schemas.openxmlformats.org/drawingml/2006/main" xmlns:p="http://schemas.openxmlformats.org/presentationml/2006/main" xmlns:r="http://schemas.openxmlformats.org/officeDocument/2006/relationships">
+  <p:cSld>
+    <p:bg>
+      <p:bgPr>
+        <a:solidFill>
+          <a:srgbClr val="0F172A"/>
+        </a:solidFill>
+        <a:effectLst/>
+      </p:bgPr>
+    </p:bg>
+    <p:spTree>
+      <p:nvGrpSpPr>
+        <p:cNvPr id="1" name=""/>
+        <p:cNvGrpSpPr/>
+        <p:nvPr/>
+      </p:nvGrpSpPr>
+      <p:grpSpPr/>
+      <p:sp>
+        <p:nvSpPr>
+          <p:cNvPr id="2" name="Rectangle 1"/>
+          <p:cNvSpPr/>
+          <p:nvPr/>
+        </p:nvSpPr>
+        <p:spPr>
+          <a:xfrm>
+            <a:off x="457200" y="457200"/>
+            <a:ext cx="45720" cy="548640"/>
+          </a:xfrm>
+          <a:prstGeom prst="rect">
+            <a:avLst/>
+          </a:prstGeom>
+          <a:solidFill>
+            <a:srgbClr val="3B82F6"/>
+          </a:solidFill>
+          <a:ln>
+            <a:noFill/>
+          </a:ln>
+        </p:spPr>
+        <p:style>
+          <a:lnRef idx="1">
+            <a:schemeClr val="accent1"/>
+          </a:lnRef>
+          <a:fillRef idx="3">
+            <a:schemeClr val="accent1"/>
+          </a:fillRef>
+          <a:effectRef idx="2">
+            <a:schemeClr val="accent1"/>
+          </a:effectRef>
+          <a:fontRef idx="minor">
+            <a:schemeClr val="lt1"/>
+          </a:fontRef>
+        </p:style>
+        <p:txBody>
+          <a:bodyPr rtlCol="0" anchor="ctr"/>
+          <a:lstStyle/>
+          <a:p>
+            <a:pPr algn="ctr"/>
+          </a:p>
+        </p:txBody>
+      </p:sp>
+      <p:sp>
+        <p:nvSpPr>
+          <p:cNvPr id="3" name="TextBox 2"/>
+          <p:cNvSpPr txBox="1"/>
+          <p:nvPr/>
+        </p:nvSpPr>
+        <p:spPr>
+          <a:xfrm>
+            <a:off x="685800" y="457200"/>
+            <a:ext cx="9677095" cy="548640"/>
+          </a:xfrm>
+          <a:prstGeom prst="rect">
+            <a:avLst/>
+          </a:prstGeom>
+          <a:noFill/>
+        </p:spPr>
+        <p:txBody>
+          <a:bodyPr wrap="square" lIns="0" tIns="0" rIns="0" bIns="0">
+            <a:spAutoFit/>
+          </a:bodyPr>
+          <a:lstStyle/>
+          <a:p>
+            <a:pPr algn="l"/>
+            <a:r>
+              <a:rPr sz="2800" b="1" i="0">
+                <a:solidFill>
+                  <a:srgbClr val="F8FAFC"/>
+                </a:solidFill>
+                <a:latin typeface="Calibri Light"/>
+              </a:rPr>
+              <a:t>Phase 5: Long-form Storytelling</a:t>
+            </a:r>
+          </a:p>
+        </p:txBody>
+      </p:sp>
+      <p:sp>
+        <p:nvSpPr>
+          <p:cNvPr id="4" name="Rounded Rectangle 3"/>
+          <p:cNvSpPr/>
+          <p:nvPr/>
+        </p:nvSpPr>
+        <p:spPr>
+          <a:xfrm>
+            <a:off x="10545775" y="571500"/>
+            <a:ext cx="1188720" cy="320040"/>
+          </a:xfrm>
+          <a:prstGeom prst="roundRect">
+            <a:avLst>
+              <a:gd name="adj" fmla="val 50000"/>
+            </a:avLst>
+          </a:prstGeom>
+          <a:solidFill>
+            <a:srgbClr val="3B82F6"/>
+          </a:solidFill>
+          <a:ln>
+            <a:noFill/>
+          </a:ln>
+        </p:spPr>
+        <p:style>
+          <a:lnRef idx="1">
+            <a:schemeClr val="accent1"/>
+          </a:lnRef>
+          <a:fillRef idx="3">
+            <a:schemeClr val="accent1"/>
+          </a:fillRef>
+          <a:effectRef idx="2">
+            <a:schemeClr val="accent1"/>
+          </a:effectRef>
+          <a:fontRef idx="minor">
+            <a:schemeClr val="lt1"/>
+          </a:fontRef>
+        </p:style>
+        <p:txBody>
+          <a:bodyPr rtlCol="0" anchor="ctr" wrap="none"/>
+          <a:lstStyle/>
+          <a:p>
+            <a:pPr algn="ctr"/>
+            <a:r>
+              <a:rPr sz="1100" b="1">
+                <a:solidFill>
+                  <a:srgbClr val="FFFFFF"/>
+                </a:solidFill>
+                <a:latin typeface="Calibri"/>
+              </a:rPr>
+              <a:t>Narrative</a:t>
+            </a:r>
+          </a:p>
+        </p:txBody>
+      </p:sp>
+      <p:sp>
+        <p:nvSpPr>
+          <p:cNvPr id="5" name="Rounded Rectangle 4"/>
+          <p:cNvSpPr/>
+          <p:nvPr/>
+        </p:nvSpPr>
+        <p:spPr>
+          <a:xfrm>
+            <a:off x="457200" y="1298448"/>
+            <a:ext cx="11277295" cy="4480560"/>
+          </a:xfrm>
+          <a:prstGeom prst="roundRect">
+            <a:avLst>
+              <a:gd name="adj" fmla="val 1020"/>
+            </a:avLst>
+          </a:prstGeom>
+          <a:solidFill>
+            <a:srgbClr val="1E293B"/>
+          </a:solidFill>
+          <a:ln>
+            <a:noFill/>
+          </a:ln>
+        </p:spPr>
+        <p:style>
+          <a:lnRef idx="1">
+            <a:schemeClr val="accent1"/>
+          </a:lnRef>
+          <a:fillRef idx="3">
+            <a:schemeClr val="accent1"/>
+          </a:fillRef>
+          <a:effectRef idx="2">
+            <a:schemeClr val="accent1"/>
+          </a:effectRef>
+          <a:fontRef idx="minor">
+            <a:schemeClr val="lt1"/>
+          </a:fontRef>
+        </p:style>
+        <p:txBody>
+          <a:bodyPr rtlCol="0" anchor="ctr"/>
+          <a:lstStyle/>
+          <a:p>
+            <a:pPr algn="ctr"/>
+          </a:p>
+        </p:txBody>
+      </p:sp>
+      <p:sp>
+        <p:nvSpPr>
+          <p:cNvPr id="6" name="Rectangle 5"/>
+          <p:cNvSpPr/>
+          <p:nvPr/>
+        </p:nvSpPr>
+        <p:spPr>
+          <a:xfrm>
+            <a:off x="457200" y="1298448"/>
+            <a:ext cx="11277295" cy="45720"/>
+          </a:xfrm>
+          <a:prstGeom prst="rect">
+            <a:avLst/>
+          </a:prstGeom>
+          <a:solidFill>
+            <a:srgbClr val="3B82F6"/>
+          </a:solidFill>
+          <a:ln>
+            <a:noFill/>
+          </a:ln>
+        </p:spPr>
+        <p:style>
+          <a:lnRef idx="1">
+            <a:schemeClr val="accent1"/>
+          </a:lnRef>
+          <a:fillRef idx="3">
+            <a:schemeClr val="accent1"/>
+          </a:fillRef>
+          <a:effectRef idx="2">
+            <a:schemeClr val="accent1"/>
+          </a:effectRef>
+          <a:fontRef idx="minor">
+            <a:schemeClr val="lt1"/>
+          </a:fontRef>
+        </p:style>
+        <p:txBody>
+          <a:bodyPr rtlCol="0" anchor="ctr"/>
+          <a:lstStyle/>
+          <a:p>
+            <a:pPr algn="ctr"/>
+          </a:p>
+        </p:txBody>
+      </p:sp>
+      <p:sp>
+        <p:nvSpPr>
+          <p:cNvPr id="7" name="TextBox 6"/>
+          <p:cNvSpPr txBox="1"/>
+          <p:nvPr/>
+        </p:nvSpPr>
+        <p:spPr>
+          <a:xfrm>
+            <a:off x="10637215" y="1481328"/>
+            <a:ext cx="914400" cy="228600"/>
+          </a:xfrm>
+          <a:prstGeom prst="rect">
+            <a:avLst/>
+          </a:prstGeom>
+          <a:noFill/>
+        </p:spPr>
+        <p:txBody>
+          <a:bodyPr wrap="square" lIns="0" tIns="0" rIns="0" bIns="0">
+            <a:spAutoFit/>
+          </a:bodyPr>
+          <a:lstStyle/>
+          <a:p>
+            <a:pPr algn="r"/>
+            <a:r>
+              <a:rPr sz="1100" b="1" i="0">
+                <a:solidFill>
+                  <a:srgbClr val="94A3B8"/>
+                </a:solidFill>
+                <a:latin typeface="Calibri"/>
+              </a:rPr>
+              <a:t>Page 1/1</a:t>
+            </a:r>
+          </a:p>
+        </p:txBody>
+      </p:sp>
+      <p:sp>
+        <p:nvSpPr>
+          <p:cNvPr id="8" name="TextBox 7"/>
+          <p:cNvSpPr txBox="1"/>
+          <p:nvPr/>
+        </p:nvSpPr>
+        <p:spPr>
+          <a:xfrm>
+            <a:off x="640080" y="1481328"/>
+            <a:ext cx="9997135" cy="320040"/>
+          </a:xfrm>
+          <a:prstGeom prst="rect">
+            <a:avLst/>
+          </a:prstGeom>
+          <a:noFill/>
+        </p:spPr>
+        <p:txBody>
+          <a:bodyPr wrap="square" lIns="0" tIns="0" rIns="0" bIns="0">
+            <a:spAutoFit/>
+          </a:bodyPr>
+          <a:lstStyle/>
+          <a:p>
+            <a:pPr algn="l"/>
+            <a:r>
+              <a:rPr sz="2000" b="1" i="0">
+                <a:solidFill>
+                  <a:srgbClr val="F8FAFC"/>
+                </a:solidFill>
+                <a:latin typeface="Calibri Light"/>
+              </a:rPr>
+              <a:t>Executive Narrative - Structured View</a:t>
+            </a:r>
+          </a:p>
+        </p:txBody>
+      </p:sp>
+      <p:sp>
+        <p:nvSpPr>
+          <p:cNvPr id="9" name="TextBox 8"/>
+          <p:cNvSpPr txBox="1"/>
+          <p:nvPr/>
+        </p:nvSpPr>
+        <p:spPr>
+          <a:xfrm>
+            <a:off x="640080" y="1801367"/>
+            <a:ext cx="10911535" cy="256032"/>
+          </a:xfrm>
+          <a:prstGeom prst="rect">
+            <a:avLst/>
+          </a:prstGeom>
+          <a:noFill/>
+        </p:spPr>
+        <p:txBody>
+          <a:bodyPr wrap="square" lIns="0" tIns="0" rIns="0" bIns="0">
+            <a:spAutoFit/>
+          </a:bodyPr>
+          <a:lstStyle/>
+          <a:p>
+            <a:pPr algn="l"/>
+            <a:r>
+              <a:rPr sz="1100" b="0" i="0">
+                <a:solidFill>
+                  <a:srgbClr val="94A3B8"/>
+                </a:solidFill>
+                <a:latin typeface="Calibri"/>
+              </a:rPr>
+              <a:t>Narrative in one slide with decision support rail.</a:t>
+            </a:r>
+          </a:p>
+        </p:txBody>
+      </p:sp>
+      <p:sp>
+        <p:nvSpPr>
+          <p:cNvPr id="10" name="Rounded Rectangle 9"/>
+          <p:cNvSpPr/>
+          <p:nvPr/>
+        </p:nvSpPr>
+        <p:spPr>
+          <a:xfrm>
+            <a:off x="640080" y="2093975"/>
+            <a:ext cx="7485680" cy="3502152"/>
+          </a:xfrm>
+          <a:prstGeom prst="roundRect">
+            <a:avLst>
+              <a:gd name="adj" fmla="val 783"/>
+            </a:avLst>
+          </a:prstGeom>
+          <a:solidFill>
+            <a:srgbClr val="0F172A"/>
+          </a:solidFill>
+          <a:ln>
+            <a:noFill/>
+          </a:ln>
+        </p:spPr>
+        <p:style>
+          <a:lnRef idx="1">
+            <a:schemeClr val="accent1"/>
+          </a:lnRef>
+          <a:fillRef idx="3">
+            <a:schemeClr val="accent1"/>
+          </a:fillRef>
+          <a:effectRef idx="2">
+            <a:schemeClr val="accent1"/>
+          </a:effectRef>
+          <a:fontRef idx="minor">
+            <a:schemeClr val="lt1"/>
+          </a:fontRef>
+        </p:style>
+        <p:txBody>
+          <a:bodyPr rtlCol="0" anchor="ctr"/>
+          <a:lstStyle/>
+          <a:p>
+            <a:pPr algn="ctr"/>
+          </a:p>
+        </p:txBody>
+      </p:sp>
+      <p:sp>
+        <p:nvSpPr>
+          <p:cNvPr id="11" name="TextBox 10"/>
+          <p:cNvSpPr txBox="1"/>
+          <p:nvPr/>
+        </p:nvSpPr>
+        <p:spPr>
+          <a:xfrm>
+            <a:off x="768096" y="2203703"/>
+            <a:ext cx="7229648" cy="3282696"/>
+          </a:xfrm>
+          <a:prstGeom prst="rect">
+            <a:avLst/>
+          </a:prstGeom>
+          <a:noFill/>
+        </p:spPr>
+        <p:txBody>
+          <a:bodyPr wrap="square" lIns="0" tIns="0" rIns="0" bIns="0">
+            <a:spAutoFit/>
+          </a:bodyPr>
+          <a:lstStyle/>
+          <a:p>
+            <a:pPr algn="l"/>
+            <a:r>
+              <a:rPr sz="1400" b="0" i="0">
+                <a:solidFill>
+                  <a:srgbClr val="CBD5E1"/>
+                </a:solidFill>
+                <a:latin typeface="Calibri"/>
+              </a:rPr>
+              <a:t>Q2 performance stabilized after concentration risk mitigation and onboarding process redesign. Margin expansion creates room for selective reinvestment, but service quality and migration complexity still require focused execution through Q3.</a:t>
+            </a:r>
+          </a:p>
+        </p:txBody>
+      </p:sp>
+      <p:sp>
+        <p:nvSpPr>
+          <p:cNvPr id="12" name="Rounded Rectangle 11"/>
+          <p:cNvSpPr/>
+          <p:nvPr/>
+        </p:nvSpPr>
+        <p:spPr>
+          <a:xfrm>
+            <a:off x="8144048" y="2093975"/>
+            <a:ext cx="3242974" cy="3502152"/>
+          </a:xfrm>
+          <a:prstGeom prst="roundRect">
+            <a:avLst>
+              <a:gd name="adj" fmla="val 844"/>
+            </a:avLst>
+          </a:prstGeom>
+          <a:solidFill>
+            <a:srgbClr val="334155"/>
+          </a:solidFill>
+          <a:ln>
+            <a:noFill/>
+          </a:ln>
+        </p:spPr>
+        <p:style>
+          <a:lnRef idx="1">
+            <a:schemeClr val="accent1"/>
+          </a:lnRef>
+          <a:fillRef idx="3">
+            <a:schemeClr val="accent1"/>
+          </a:fillRef>
+          <a:effectRef idx="2">
+            <a:schemeClr val="accent1"/>
+          </a:effectRef>
+          <a:fontRef idx="minor">
+            <a:schemeClr val="lt1"/>
+          </a:fontRef>
+        </p:style>
+        <p:txBody>
+          <a:bodyPr rtlCol="0" anchor="ctr"/>
+          <a:lstStyle/>
+          <a:p>
+            <a:pPr algn="ctr"/>
+          </a:p>
+        </p:txBody>
+      </p:sp>
+      <p:sp>
+        <p:nvSpPr>
+          <p:cNvPr id="13" name="TextBox 12"/>
+          <p:cNvSpPr txBox="1"/>
+          <p:nvPr/>
+        </p:nvSpPr>
+        <p:spPr>
+          <a:xfrm>
+            <a:off x="8253776" y="2185415"/>
+            <a:ext cx="3023518" cy="228600"/>
+          </a:xfrm>
+          <a:prstGeom prst="rect">
+            <a:avLst/>
+          </a:prstGeom>
+          <a:noFill/>
+        </p:spPr>
+        <p:txBody>
+          <a:bodyPr wrap="square" lIns="0" tIns="0" rIns="0" bIns="0">
+            <a:spAutoFit/>
+          </a:bodyPr>
+          <a:lstStyle/>
+          <a:p>
+            <a:pPr algn="l"/>
+            <a:r>
+              <a:rPr sz="1100" b="1" i="0">
+                <a:solidFill>
+                  <a:srgbClr val="F8FAFC"/>
+                </a:solidFill>
+                <a:latin typeface="Calibri"/>
+              </a:rPr>
+              <a:t>Decision Lens</a:t>
+            </a:r>
+          </a:p>
+        </p:txBody>
+      </p:sp>
+      <p:sp>
+        <p:nvSpPr>
+          <p:cNvPr id="14" name="TextBox 13"/>
+          <p:cNvSpPr txBox="1"/>
+          <p:nvPr/>
+        </p:nvSpPr>
+        <p:spPr>
+          <a:xfrm>
+            <a:off x="8253776" y="2404871"/>
+            <a:ext cx="3023518" cy="2311420"/>
+          </a:xfrm>
+          <a:prstGeom prst="rect">
+            <a:avLst/>
+          </a:prstGeom>
+          <a:noFill/>
+        </p:spPr>
+        <p:txBody>
+          <a:bodyPr wrap="square" lIns="0" tIns="0" rIns="0" bIns="0">
+            <a:spAutoFit/>
+          </a:bodyPr>
+          <a:lstStyle/>
+          <a:p>
+            <a:pPr algn="l"/>
+            <a:r>
+              <a:rPr sz="1100" b="0" i="0">
+                <a:solidFill>
+                  <a:srgbClr val="CBD5E1"/>
+                </a:solidFill>
+                <a:latin typeface="Calibri"/>
+              </a:rPr>
+              <a:t>- Protect margin gains
+- Reduce support load
+- Prioritize retention levers
+- Tighten ownership by workflow</a:t>
+            </a:r>
+          </a:p>
+        </p:txBody>
+      </p:sp>
+      <p:sp>
+        <p:nvSpPr>
+          <p:cNvPr id="15" name="TextBox 14"/>
+          <p:cNvSpPr txBox="1"/>
+          <p:nvPr/>
+        </p:nvSpPr>
+        <p:spPr>
+          <a:xfrm>
+            <a:off x="8253776" y="4956048"/>
+            <a:ext cx="3023518" cy="530352"/>
+          </a:xfrm>
+          <a:prstGeom prst="rect">
+            <a:avLst/>
+          </a:prstGeom>
+          <a:noFill/>
+        </p:spPr>
+        <p:txBody>
+          <a:bodyPr wrap="square" lIns="0" tIns="0" rIns="0" bIns="0">
+            <a:spAutoFit/>
+          </a:bodyPr>
+          <a:lstStyle/>
+          <a:p>
+            <a:pPr algn="l"/>
+            <a:r>
+              <a:rPr sz="1100" b="1" i="0">
+                <a:solidFill>
+                  <a:srgbClr val="3B82F6"/>
+                </a:solidFill>
+                <a:latin typeface="Calibri"/>
+              </a:rPr>
+              <a:t>Next review: validate churn trend by segment.</a:t>
+            </a:r>
+          </a:p>
+        </p:txBody>
+      </p:sp>
+    </p:spTree>
+  </p:cSld>
+  <p:clrMapOvr>
+    <a:masterClrMapping/>
+  </p:clrMapOvr>
+</p:sld>
+</file>
+
 <file path=ppt/slides/slide2.xml><?xml version="1.0" encoding="utf-8"?>
 <p:sld xmlns:a="http://schemas.openxmlformats.org/drawingml/2006/main" xmlns:p="http://schemas.openxmlformats.org/presentationml/2006/main" xmlns:r="http://schemas.openxmlformats.org/officeDocument/2006/relationships">
   <p:cSld>
@@ -23313,6 +23902,2442 @@
                 <a:latin typeface="Calibri"/>
               </a:rPr>
               <a:t>Customer acquisition cost</a:t>
+            </a:r>
+          </a:p>
+        </p:txBody>
+      </p:sp>
+    </p:spTree>
+  </p:cSld>
+  <p:clrMapOvr>
+    <a:masterClrMapping/>
+  </p:clrMapOvr>
+</p:sld>
+</file>
+
+<file path=ppt/slides/slide20.xml><?xml version="1.0" encoding="utf-8"?>
+<p:sld xmlns:a="http://schemas.openxmlformats.org/drawingml/2006/main" xmlns:p="http://schemas.openxmlformats.org/presentationml/2006/main" xmlns:r="http://schemas.openxmlformats.org/officeDocument/2006/relationships">
+  <p:cSld>
+    <p:bg>
+      <p:bgPr>
+        <a:solidFill>
+          <a:srgbClr val="0F172A"/>
+        </a:solidFill>
+        <a:effectLst/>
+      </p:bgPr>
+    </p:bg>
+    <p:spTree>
+      <p:nvGrpSpPr>
+        <p:cNvPr id="1" name=""/>
+        <p:cNvGrpSpPr/>
+        <p:nvPr/>
+      </p:nvGrpSpPr>
+      <p:grpSpPr/>
+      <p:sp>
+        <p:nvSpPr>
+          <p:cNvPr id="2" name="Rounded Rectangle 1"/>
+          <p:cNvSpPr/>
+          <p:nvPr/>
+        </p:nvSpPr>
+        <p:spPr>
+          <a:xfrm>
+            <a:off x="457200" y="457200"/>
+            <a:ext cx="11277295" cy="5943600"/>
+          </a:xfrm>
+          <a:prstGeom prst="roundRect">
+            <a:avLst>
+              <a:gd name="adj" fmla="val 769"/>
+            </a:avLst>
+          </a:prstGeom>
+          <a:solidFill>
+            <a:srgbClr val="1E293B"/>
+          </a:solidFill>
+          <a:ln>
+            <a:noFill/>
+          </a:ln>
+        </p:spPr>
+        <p:style>
+          <a:lnRef idx="1">
+            <a:schemeClr val="accent1"/>
+          </a:lnRef>
+          <a:fillRef idx="3">
+            <a:schemeClr val="accent1"/>
+          </a:fillRef>
+          <a:effectRef idx="2">
+            <a:schemeClr val="accent1"/>
+          </a:effectRef>
+          <a:fontRef idx="minor">
+            <a:schemeClr val="lt1"/>
+          </a:fontRef>
+        </p:style>
+        <p:txBody>
+          <a:bodyPr rtlCol="0" anchor="ctr"/>
+          <a:lstStyle/>
+          <a:p>
+            <a:pPr algn="ctr"/>
+          </a:p>
+        </p:txBody>
+      </p:sp>
+      <p:sp>
+        <p:nvSpPr>
+          <p:cNvPr id="3" name="Rectangle 2"/>
+          <p:cNvSpPr/>
+          <p:nvPr/>
+        </p:nvSpPr>
+        <p:spPr>
+          <a:xfrm>
+            <a:off x="457200" y="457200"/>
+            <a:ext cx="11277295" cy="45720"/>
+          </a:xfrm>
+          <a:prstGeom prst="rect">
+            <a:avLst/>
+          </a:prstGeom>
+          <a:solidFill>
+            <a:srgbClr val="3B82F6"/>
+          </a:solidFill>
+          <a:ln>
+            <a:noFill/>
+          </a:ln>
+        </p:spPr>
+        <p:style>
+          <a:lnRef idx="1">
+            <a:schemeClr val="accent1"/>
+          </a:lnRef>
+          <a:fillRef idx="3">
+            <a:schemeClr val="accent1"/>
+          </a:fillRef>
+          <a:effectRef idx="2">
+            <a:schemeClr val="accent1"/>
+          </a:effectRef>
+          <a:fontRef idx="minor">
+            <a:schemeClr val="lt1"/>
+          </a:fontRef>
+        </p:style>
+        <p:txBody>
+          <a:bodyPr rtlCol="0" anchor="ctr"/>
+          <a:lstStyle/>
+          <a:p>
+            <a:pPr algn="ctr"/>
+          </a:p>
+        </p:txBody>
+      </p:sp>
+      <p:sp>
+        <p:nvSpPr>
+          <p:cNvPr id="4" name="TextBox 3"/>
+          <p:cNvSpPr txBox="1"/>
+          <p:nvPr/>
+        </p:nvSpPr>
+        <p:spPr>
+          <a:xfrm>
+            <a:off x="10637215" y="640080"/>
+            <a:ext cx="914400" cy="228600"/>
+          </a:xfrm>
+          <a:prstGeom prst="rect">
+            <a:avLst/>
+          </a:prstGeom>
+          <a:noFill/>
+        </p:spPr>
+        <p:txBody>
+          <a:bodyPr wrap="square" lIns="0" tIns="0" rIns="0" bIns="0">
+            <a:spAutoFit/>
+          </a:bodyPr>
+          <a:lstStyle/>
+          <a:p>
+            <a:pPr algn="r"/>
+            <a:r>
+              <a:rPr sz="1100" b="1" i="0">
+                <a:solidFill>
+                  <a:srgbClr val="94A3B8"/>
+                </a:solidFill>
+                <a:latin typeface="Calibri"/>
+              </a:rPr>
+              <a:t>Page 1/3</a:t>
+            </a:r>
+          </a:p>
+        </p:txBody>
+      </p:sp>
+      <p:sp>
+        <p:nvSpPr>
+          <p:cNvPr id="5" name="TextBox 4"/>
+          <p:cNvSpPr txBox="1"/>
+          <p:nvPr/>
+        </p:nvSpPr>
+        <p:spPr>
+          <a:xfrm>
+            <a:off x="640080" y="640080"/>
+            <a:ext cx="9997135" cy="320040"/>
+          </a:xfrm>
+          <a:prstGeom prst="rect">
+            <a:avLst/>
+          </a:prstGeom>
+          <a:noFill/>
+        </p:spPr>
+        <p:txBody>
+          <a:bodyPr wrap="square" lIns="0" tIns="0" rIns="0" bIns="0">
+            <a:spAutoFit/>
+          </a:bodyPr>
+          <a:lstStyle/>
+          <a:p>
+            <a:pPr algn="l"/>
+            <a:r>
+              <a:rPr sz="2000" b="1" i="0">
+                <a:solidFill>
+                  <a:srgbClr val="F8FAFC"/>
+                </a:solidFill>
+                <a:latin typeface="Calibri Light"/>
+              </a:rPr>
+              <a:t>Executive Narrative - Auto Paginated</a:t>
+            </a:r>
+          </a:p>
+        </p:txBody>
+      </p:sp>
+      <p:sp>
+        <p:nvSpPr>
+          <p:cNvPr id="6" name="TextBox 5"/>
+          <p:cNvSpPr txBox="1"/>
+          <p:nvPr/>
+        </p:nvSpPr>
+        <p:spPr>
+          <a:xfrm>
+            <a:off x="640080" y="960119"/>
+            <a:ext cx="10911535" cy="256032"/>
+          </a:xfrm>
+          <a:prstGeom prst="rect">
+            <a:avLst/>
+          </a:prstGeom>
+          <a:noFill/>
+        </p:spPr>
+        <p:txBody>
+          <a:bodyPr wrap="square" lIns="0" tIns="0" rIns="0" bIns="0">
+            <a:spAutoFit/>
+          </a:bodyPr>
+          <a:lstStyle/>
+          <a:p>
+            <a:pPr algn="l"/>
+            <a:r>
+              <a:rPr sz="1100" b="0" i="0">
+                <a:solidFill>
+                  <a:srgbClr val="94A3B8"/>
+                </a:solidFill>
+                <a:latin typeface="Calibri"/>
+              </a:rPr>
+              <a:t>Long text automatically split into multiple slides.</a:t>
+            </a:r>
+          </a:p>
+        </p:txBody>
+      </p:sp>
+      <p:sp>
+        <p:nvSpPr>
+          <p:cNvPr id="7" name="Rounded Rectangle 6"/>
+          <p:cNvSpPr/>
+          <p:nvPr/>
+        </p:nvSpPr>
+        <p:spPr>
+          <a:xfrm>
+            <a:off x="640080" y="1252728"/>
+            <a:ext cx="7485680" cy="4965192"/>
+          </a:xfrm>
+          <a:prstGeom prst="roundRect">
+            <a:avLst>
+              <a:gd name="adj" fmla="val 552"/>
+            </a:avLst>
+          </a:prstGeom>
+          <a:solidFill>
+            <a:srgbClr val="0F172A"/>
+          </a:solidFill>
+          <a:ln>
+            <a:noFill/>
+          </a:ln>
+        </p:spPr>
+        <p:style>
+          <a:lnRef idx="1">
+            <a:schemeClr val="accent1"/>
+          </a:lnRef>
+          <a:fillRef idx="3">
+            <a:schemeClr val="accent1"/>
+          </a:fillRef>
+          <a:effectRef idx="2">
+            <a:schemeClr val="accent1"/>
+          </a:effectRef>
+          <a:fontRef idx="minor">
+            <a:schemeClr val="lt1"/>
+          </a:fontRef>
+        </p:style>
+        <p:txBody>
+          <a:bodyPr rtlCol="0" anchor="ctr"/>
+          <a:lstStyle/>
+          <a:p>
+            <a:pPr algn="ctr"/>
+          </a:p>
+        </p:txBody>
+      </p:sp>
+      <p:sp>
+        <p:nvSpPr>
+          <p:cNvPr id="8" name="TextBox 7"/>
+          <p:cNvSpPr txBox="1"/>
+          <p:nvPr/>
+        </p:nvSpPr>
+        <p:spPr>
+          <a:xfrm>
+            <a:off x="768096" y="1362455"/>
+            <a:ext cx="7229648" cy="4745736"/>
+          </a:xfrm>
+          <a:prstGeom prst="rect">
+            <a:avLst/>
+          </a:prstGeom>
+          <a:noFill/>
+        </p:spPr>
+        <p:txBody>
+          <a:bodyPr wrap="square" lIns="0" tIns="0" rIns="0" bIns="0">
+            <a:spAutoFit/>
+          </a:bodyPr>
+          <a:lstStyle/>
+          <a:p>
+            <a:pPr algn="l"/>
+            <a:r>
+              <a:rPr sz="1400" b="0" i="0">
+                <a:solidFill>
+                  <a:srgbClr val="CBD5E1"/>
+                </a:solidFill>
+                <a:latin typeface="Calibri"/>
+              </a:rPr>
+              <a:t>Q2 opened with concentrated enterprise exposure: two strategic accounts represented 28% of net new ARR and introduced procurement timing risk. The commercial team reduced dependency by improving mid-market coverage, tightening qualification standards, and rebalancing outbound sequences toward faster-velocity segments.
+(continued on next slide)</a:t>
+            </a:r>
+          </a:p>
+        </p:txBody>
+      </p:sp>
+      <p:sp>
+        <p:nvSpPr>
+          <p:cNvPr id="9" name="Rounded Rectangle 8"/>
+          <p:cNvSpPr/>
+          <p:nvPr/>
+        </p:nvSpPr>
+        <p:spPr>
+          <a:xfrm>
+            <a:off x="8144048" y="1252728"/>
+            <a:ext cx="3242974" cy="4965192"/>
+          </a:xfrm>
+          <a:prstGeom prst="roundRect">
+            <a:avLst>
+              <a:gd name="adj" fmla="val 844"/>
+            </a:avLst>
+          </a:prstGeom>
+          <a:solidFill>
+            <a:srgbClr val="334155"/>
+          </a:solidFill>
+          <a:ln>
+            <a:noFill/>
+          </a:ln>
+        </p:spPr>
+        <p:style>
+          <a:lnRef idx="1">
+            <a:schemeClr val="accent1"/>
+          </a:lnRef>
+          <a:fillRef idx="3">
+            <a:schemeClr val="accent1"/>
+          </a:fillRef>
+          <a:effectRef idx="2">
+            <a:schemeClr val="accent1"/>
+          </a:effectRef>
+          <a:fontRef idx="minor">
+            <a:schemeClr val="lt1"/>
+          </a:fontRef>
+        </p:style>
+        <p:txBody>
+          <a:bodyPr rtlCol="0" anchor="ctr"/>
+          <a:lstStyle/>
+          <a:p>
+            <a:pPr algn="ctr"/>
+          </a:p>
+        </p:txBody>
+      </p:sp>
+      <p:sp>
+        <p:nvSpPr>
+          <p:cNvPr id="10" name="TextBox 9"/>
+          <p:cNvSpPr txBox="1"/>
+          <p:nvPr/>
+        </p:nvSpPr>
+        <p:spPr>
+          <a:xfrm>
+            <a:off x="8253776" y="1344168"/>
+            <a:ext cx="3023518" cy="228600"/>
+          </a:xfrm>
+          <a:prstGeom prst="rect">
+            <a:avLst/>
+          </a:prstGeom>
+          <a:noFill/>
+        </p:spPr>
+        <p:txBody>
+          <a:bodyPr wrap="square" lIns="0" tIns="0" rIns="0" bIns="0">
+            <a:spAutoFit/>
+          </a:bodyPr>
+          <a:lstStyle/>
+          <a:p>
+            <a:pPr algn="l"/>
+            <a:r>
+              <a:rPr sz="1100" b="1" i="0">
+                <a:solidFill>
+                  <a:srgbClr val="F8FAFC"/>
+                </a:solidFill>
+                <a:latin typeface="Calibri"/>
+              </a:rPr>
+              <a:t>Steering Notes</a:t>
+            </a:r>
+          </a:p>
+        </p:txBody>
+      </p:sp>
+      <p:sp>
+        <p:nvSpPr>
+          <p:cNvPr id="11" name="TextBox 10"/>
+          <p:cNvSpPr txBox="1"/>
+          <p:nvPr/>
+        </p:nvSpPr>
+        <p:spPr>
+          <a:xfrm>
+            <a:off x="8253776" y="1563624"/>
+            <a:ext cx="3023518" cy="3277026"/>
+          </a:xfrm>
+          <a:prstGeom prst="rect">
+            <a:avLst/>
+          </a:prstGeom>
+          <a:noFill/>
+        </p:spPr>
+        <p:txBody>
+          <a:bodyPr wrap="square" lIns="0" tIns="0" rIns="0" bIns="0">
+            <a:spAutoFit/>
+          </a:bodyPr>
+          <a:lstStyle/>
+          <a:p>
+            <a:pPr algn="l"/>
+            <a:r>
+              <a:rPr sz="1100" b="0" i="0">
+                <a:solidFill>
+                  <a:srgbClr val="CBD5E1"/>
+                </a:solidFill>
+                <a:latin typeface="Calibri"/>
+              </a:rPr>
+              <a:t>- Watch enterprise concentration
+- Keep onboarding gains sticky
+- Fund observability upgrades
+- Track p95 latency weekly</a:t>
+            </a:r>
+          </a:p>
+        </p:txBody>
+      </p:sp>
+      <p:sp>
+        <p:nvSpPr>
+          <p:cNvPr id="12" name="TextBox 11"/>
+          <p:cNvSpPr txBox="1"/>
+          <p:nvPr/>
+        </p:nvSpPr>
+        <p:spPr>
+          <a:xfrm>
+            <a:off x="8253776" y="5577840"/>
+            <a:ext cx="3023518" cy="530352"/>
+          </a:xfrm>
+          <a:prstGeom prst="rect">
+            <a:avLst/>
+          </a:prstGeom>
+          <a:noFill/>
+        </p:spPr>
+        <p:txBody>
+          <a:bodyPr wrap="square" lIns="0" tIns="0" rIns="0" bIns="0">
+            <a:spAutoFit/>
+          </a:bodyPr>
+          <a:lstStyle/>
+          <a:p>
+            <a:pPr algn="l"/>
+            <a:r>
+              <a:rPr sz="1100" b="1" i="0">
+                <a:solidFill>
+                  <a:srgbClr val="3B82F6"/>
+                </a:solidFill>
+                <a:latin typeface="Calibri"/>
+              </a:rPr>
+              <a:t>Auto-generated narrative section</a:t>
+            </a:r>
+          </a:p>
+        </p:txBody>
+      </p:sp>
+    </p:spTree>
+  </p:cSld>
+  <p:clrMapOvr>
+    <a:masterClrMapping/>
+  </p:clrMapOvr>
+</p:sld>
+</file>
+
+<file path=ppt/slides/slide21.xml><?xml version="1.0" encoding="utf-8"?>
+<p:sld xmlns:a="http://schemas.openxmlformats.org/drawingml/2006/main" xmlns:p="http://schemas.openxmlformats.org/presentationml/2006/main" xmlns:r="http://schemas.openxmlformats.org/officeDocument/2006/relationships">
+  <p:cSld>
+    <p:bg>
+      <p:bgPr>
+        <a:solidFill>
+          <a:srgbClr val="0F172A"/>
+        </a:solidFill>
+        <a:effectLst/>
+      </p:bgPr>
+    </p:bg>
+    <p:spTree>
+      <p:nvGrpSpPr>
+        <p:cNvPr id="1" name=""/>
+        <p:cNvGrpSpPr/>
+        <p:nvPr/>
+      </p:nvGrpSpPr>
+      <p:grpSpPr/>
+      <p:sp>
+        <p:nvSpPr>
+          <p:cNvPr id="2" name="Rounded Rectangle 1"/>
+          <p:cNvSpPr/>
+          <p:nvPr/>
+        </p:nvSpPr>
+        <p:spPr>
+          <a:xfrm>
+            <a:off x="457200" y="457200"/>
+            <a:ext cx="11277295" cy="5943600"/>
+          </a:xfrm>
+          <a:prstGeom prst="roundRect">
+            <a:avLst>
+              <a:gd name="adj" fmla="val 769"/>
+            </a:avLst>
+          </a:prstGeom>
+          <a:solidFill>
+            <a:srgbClr val="1E293B"/>
+          </a:solidFill>
+          <a:ln>
+            <a:noFill/>
+          </a:ln>
+        </p:spPr>
+        <p:style>
+          <a:lnRef idx="1">
+            <a:schemeClr val="accent1"/>
+          </a:lnRef>
+          <a:fillRef idx="3">
+            <a:schemeClr val="accent1"/>
+          </a:fillRef>
+          <a:effectRef idx="2">
+            <a:schemeClr val="accent1"/>
+          </a:effectRef>
+          <a:fontRef idx="minor">
+            <a:schemeClr val="lt1"/>
+          </a:fontRef>
+        </p:style>
+        <p:txBody>
+          <a:bodyPr rtlCol="0" anchor="ctr"/>
+          <a:lstStyle/>
+          <a:p>
+            <a:pPr algn="ctr"/>
+          </a:p>
+        </p:txBody>
+      </p:sp>
+      <p:sp>
+        <p:nvSpPr>
+          <p:cNvPr id="3" name="Rectangle 2"/>
+          <p:cNvSpPr/>
+          <p:nvPr/>
+        </p:nvSpPr>
+        <p:spPr>
+          <a:xfrm>
+            <a:off x="457200" y="457200"/>
+            <a:ext cx="11277295" cy="45720"/>
+          </a:xfrm>
+          <a:prstGeom prst="rect">
+            <a:avLst/>
+          </a:prstGeom>
+          <a:solidFill>
+            <a:srgbClr val="3B82F6"/>
+          </a:solidFill>
+          <a:ln>
+            <a:noFill/>
+          </a:ln>
+        </p:spPr>
+        <p:style>
+          <a:lnRef idx="1">
+            <a:schemeClr val="accent1"/>
+          </a:lnRef>
+          <a:fillRef idx="3">
+            <a:schemeClr val="accent1"/>
+          </a:fillRef>
+          <a:effectRef idx="2">
+            <a:schemeClr val="accent1"/>
+          </a:effectRef>
+          <a:fontRef idx="minor">
+            <a:schemeClr val="lt1"/>
+          </a:fontRef>
+        </p:style>
+        <p:txBody>
+          <a:bodyPr rtlCol="0" anchor="ctr"/>
+          <a:lstStyle/>
+          <a:p>
+            <a:pPr algn="ctr"/>
+          </a:p>
+        </p:txBody>
+      </p:sp>
+      <p:sp>
+        <p:nvSpPr>
+          <p:cNvPr id="4" name="TextBox 3"/>
+          <p:cNvSpPr txBox="1"/>
+          <p:nvPr/>
+        </p:nvSpPr>
+        <p:spPr>
+          <a:xfrm>
+            <a:off x="10637215" y="640080"/>
+            <a:ext cx="914400" cy="228600"/>
+          </a:xfrm>
+          <a:prstGeom prst="rect">
+            <a:avLst/>
+          </a:prstGeom>
+          <a:noFill/>
+        </p:spPr>
+        <p:txBody>
+          <a:bodyPr wrap="square" lIns="0" tIns="0" rIns="0" bIns="0">
+            <a:spAutoFit/>
+          </a:bodyPr>
+          <a:lstStyle/>
+          <a:p>
+            <a:pPr algn="r"/>
+            <a:r>
+              <a:rPr sz="1100" b="1" i="0">
+                <a:solidFill>
+                  <a:srgbClr val="94A3B8"/>
+                </a:solidFill>
+                <a:latin typeface="Calibri"/>
+              </a:rPr>
+              <a:t>Page 2/3</a:t>
+            </a:r>
+          </a:p>
+        </p:txBody>
+      </p:sp>
+      <p:sp>
+        <p:nvSpPr>
+          <p:cNvPr id="5" name="TextBox 4"/>
+          <p:cNvSpPr txBox="1"/>
+          <p:nvPr/>
+        </p:nvSpPr>
+        <p:spPr>
+          <a:xfrm>
+            <a:off x="640080" y="640080"/>
+            <a:ext cx="9997135" cy="320040"/>
+          </a:xfrm>
+          <a:prstGeom prst="rect">
+            <a:avLst/>
+          </a:prstGeom>
+          <a:noFill/>
+        </p:spPr>
+        <p:txBody>
+          <a:bodyPr wrap="square" lIns="0" tIns="0" rIns="0" bIns="0">
+            <a:spAutoFit/>
+          </a:bodyPr>
+          <a:lstStyle/>
+          <a:p>
+            <a:pPr algn="l"/>
+            <a:r>
+              <a:rPr sz="2000" b="1" i="0">
+                <a:solidFill>
+                  <a:srgbClr val="F8FAFC"/>
+                </a:solidFill>
+                <a:latin typeface="Calibri Light"/>
+              </a:rPr>
+              <a:t>Executive Narrative - Auto Paginated</a:t>
+            </a:r>
+          </a:p>
+        </p:txBody>
+      </p:sp>
+      <p:sp>
+        <p:nvSpPr>
+          <p:cNvPr id="6" name="TextBox 5"/>
+          <p:cNvSpPr txBox="1"/>
+          <p:nvPr/>
+        </p:nvSpPr>
+        <p:spPr>
+          <a:xfrm>
+            <a:off x="640080" y="960119"/>
+            <a:ext cx="10911535" cy="256032"/>
+          </a:xfrm>
+          <a:prstGeom prst="rect">
+            <a:avLst/>
+          </a:prstGeom>
+          <a:noFill/>
+        </p:spPr>
+        <p:txBody>
+          <a:bodyPr wrap="square" lIns="0" tIns="0" rIns="0" bIns="0">
+            <a:spAutoFit/>
+          </a:bodyPr>
+          <a:lstStyle/>
+          <a:p>
+            <a:pPr algn="l"/>
+            <a:r>
+              <a:rPr sz="1100" b="0" i="0">
+                <a:solidFill>
+                  <a:srgbClr val="94A3B8"/>
+                </a:solidFill>
+                <a:latin typeface="Calibri"/>
+              </a:rPr>
+              <a:t>Long text automatically split into multiple slides.</a:t>
+            </a:r>
+          </a:p>
+        </p:txBody>
+      </p:sp>
+      <p:sp>
+        <p:nvSpPr>
+          <p:cNvPr id="7" name="Rounded Rectangle 6"/>
+          <p:cNvSpPr/>
+          <p:nvPr/>
+        </p:nvSpPr>
+        <p:spPr>
+          <a:xfrm>
+            <a:off x="640080" y="1252728"/>
+            <a:ext cx="7485680" cy="4965192"/>
+          </a:xfrm>
+          <a:prstGeom prst="roundRect">
+            <a:avLst>
+              <a:gd name="adj" fmla="val 552"/>
+            </a:avLst>
+          </a:prstGeom>
+          <a:solidFill>
+            <a:srgbClr val="0F172A"/>
+          </a:solidFill>
+          <a:ln>
+            <a:noFill/>
+          </a:ln>
+        </p:spPr>
+        <p:style>
+          <a:lnRef idx="1">
+            <a:schemeClr val="accent1"/>
+          </a:lnRef>
+          <a:fillRef idx="3">
+            <a:schemeClr val="accent1"/>
+          </a:fillRef>
+          <a:effectRef idx="2">
+            <a:schemeClr val="accent1"/>
+          </a:effectRef>
+          <a:fontRef idx="minor">
+            <a:schemeClr val="lt1"/>
+          </a:fontRef>
+        </p:style>
+        <p:txBody>
+          <a:bodyPr rtlCol="0" anchor="ctr"/>
+          <a:lstStyle/>
+          <a:p>
+            <a:pPr algn="ctr"/>
+          </a:p>
+        </p:txBody>
+      </p:sp>
+      <p:sp>
+        <p:nvSpPr>
+          <p:cNvPr id="8" name="TextBox 7"/>
+          <p:cNvSpPr txBox="1"/>
+          <p:nvPr/>
+        </p:nvSpPr>
+        <p:spPr>
+          <a:xfrm>
+            <a:off x="768096" y="1362455"/>
+            <a:ext cx="7229648" cy="4745736"/>
+          </a:xfrm>
+          <a:prstGeom prst="rect">
+            <a:avLst/>
+          </a:prstGeom>
+          <a:noFill/>
+        </p:spPr>
+        <p:txBody>
+          <a:bodyPr wrap="square" lIns="0" tIns="0" rIns="0" bIns="0">
+            <a:spAutoFit/>
+          </a:bodyPr>
+          <a:lstStyle/>
+          <a:p>
+            <a:pPr algn="l"/>
+            <a:r>
+              <a:rPr sz="1400" b="0" i="0">
+                <a:solidFill>
+                  <a:srgbClr val="CBD5E1"/>
+                </a:solidFill>
+                <a:latin typeface="Calibri"/>
+              </a:rPr>
+              <a:t>Execution improved in the operating model. Onboarding cycle time dropped 19% after workflow simplification and proactive implementation playbooks. At the same time, migration volume increased support load, highlighting where product instrumentation and self-service diagnostics were still too shallow.
+(continued on next slide)</a:t>
+            </a:r>
+          </a:p>
+        </p:txBody>
+      </p:sp>
+      <p:sp>
+        <p:nvSpPr>
+          <p:cNvPr id="9" name="Rounded Rectangle 8"/>
+          <p:cNvSpPr/>
+          <p:nvPr/>
+        </p:nvSpPr>
+        <p:spPr>
+          <a:xfrm>
+            <a:off x="8144048" y="1252728"/>
+            <a:ext cx="3242974" cy="4965192"/>
+          </a:xfrm>
+          <a:prstGeom prst="roundRect">
+            <a:avLst>
+              <a:gd name="adj" fmla="val 844"/>
+            </a:avLst>
+          </a:prstGeom>
+          <a:solidFill>
+            <a:srgbClr val="334155"/>
+          </a:solidFill>
+          <a:ln>
+            <a:noFill/>
+          </a:ln>
+        </p:spPr>
+        <p:style>
+          <a:lnRef idx="1">
+            <a:schemeClr val="accent1"/>
+          </a:lnRef>
+          <a:fillRef idx="3">
+            <a:schemeClr val="accent1"/>
+          </a:fillRef>
+          <a:effectRef idx="2">
+            <a:schemeClr val="accent1"/>
+          </a:effectRef>
+          <a:fontRef idx="minor">
+            <a:schemeClr val="lt1"/>
+          </a:fontRef>
+        </p:style>
+        <p:txBody>
+          <a:bodyPr rtlCol="0" anchor="ctr"/>
+          <a:lstStyle/>
+          <a:p>
+            <a:pPr algn="ctr"/>
+          </a:p>
+        </p:txBody>
+      </p:sp>
+      <p:sp>
+        <p:nvSpPr>
+          <p:cNvPr id="10" name="TextBox 9"/>
+          <p:cNvSpPr txBox="1"/>
+          <p:nvPr/>
+        </p:nvSpPr>
+        <p:spPr>
+          <a:xfrm>
+            <a:off x="8253776" y="1344168"/>
+            <a:ext cx="3023518" cy="228600"/>
+          </a:xfrm>
+          <a:prstGeom prst="rect">
+            <a:avLst/>
+          </a:prstGeom>
+          <a:noFill/>
+        </p:spPr>
+        <p:txBody>
+          <a:bodyPr wrap="square" lIns="0" tIns="0" rIns="0" bIns="0">
+            <a:spAutoFit/>
+          </a:bodyPr>
+          <a:lstStyle/>
+          <a:p>
+            <a:pPr algn="l"/>
+            <a:r>
+              <a:rPr sz="1100" b="1" i="0">
+                <a:solidFill>
+                  <a:srgbClr val="F8FAFC"/>
+                </a:solidFill>
+                <a:latin typeface="Calibri"/>
+              </a:rPr>
+              <a:t>Steering Notes</a:t>
+            </a:r>
+          </a:p>
+        </p:txBody>
+      </p:sp>
+      <p:sp>
+        <p:nvSpPr>
+          <p:cNvPr id="11" name="TextBox 10"/>
+          <p:cNvSpPr txBox="1"/>
+          <p:nvPr/>
+        </p:nvSpPr>
+        <p:spPr>
+          <a:xfrm>
+            <a:off x="8253776" y="1563624"/>
+            <a:ext cx="3023518" cy="3277026"/>
+          </a:xfrm>
+          <a:prstGeom prst="rect">
+            <a:avLst/>
+          </a:prstGeom>
+          <a:noFill/>
+        </p:spPr>
+        <p:txBody>
+          <a:bodyPr wrap="square" lIns="0" tIns="0" rIns="0" bIns="0">
+            <a:spAutoFit/>
+          </a:bodyPr>
+          <a:lstStyle/>
+          <a:p>
+            <a:pPr algn="l"/>
+            <a:r>
+              <a:rPr sz="1100" b="0" i="0">
+                <a:solidFill>
+                  <a:srgbClr val="CBD5E1"/>
+                </a:solidFill>
+                <a:latin typeface="Calibri"/>
+              </a:rPr>
+              <a:t>- Watch enterprise concentration
+- Keep onboarding gains sticky
+- Fund observability upgrades
+- Track p95 latency weekly</a:t>
+            </a:r>
+          </a:p>
+        </p:txBody>
+      </p:sp>
+      <p:sp>
+        <p:nvSpPr>
+          <p:cNvPr id="12" name="TextBox 11"/>
+          <p:cNvSpPr txBox="1"/>
+          <p:nvPr/>
+        </p:nvSpPr>
+        <p:spPr>
+          <a:xfrm>
+            <a:off x="8253776" y="5577840"/>
+            <a:ext cx="3023518" cy="530352"/>
+          </a:xfrm>
+          <a:prstGeom prst="rect">
+            <a:avLst/>
+          </a:prstGeom>
+          <a:noFill/>
+        </p:spPr>
+        <p:txBody>
+          <a:bodyPr wrap="square" lIns="0" tIns="0" rIns="0" bIns="0">
+            <a:spAutoFit/>
+          </a:bodyPr>
+          <a:lstStyle/>
+          <a:p>
+            <a:pPr algn="l"/>
+            <a:r>
+              <a:rPr sz="1100" b="1" i="0">
+                <a:solidFill>
+                  <a:srgbClr val="3B82F6"/>
+                </a:solidFill>
+                <a:latin typeface="Calibri"/>
+              </a:rPr>
+              <a:t>Auto-generated narrative section</a:t>
+            </a:r>
+          </a:p>
+        </p:txBody>
+      </p:sp>
+    </p:spTree>
+  </p:cSld>
+  <p:clrMapOvr>
+    <a:masterClrMapping/>
+  </p:clrMapOvr>
+</p:sld>
+</file>
+
+<file path=ppt/slides/slide22.xml><?xml version="1.0" encoding="utf-8"?>
+<p:sld xmlns:a="http://schemas.openxmlformats.org/drawingml/2006/main" xmlns:p="http://schemas.openxmlformats.org/presentationml/2006/main" xmlns:r="http://schemas.openxmlformats.org/officeDocument/2006/relationships">
+  <p:cSld>
+    <p:bg>
+      <p:bgPr>
+        <a:solidFill>
+          <a:srgbClr val="0F172A"/>
+        </a:solidFill>
+        <a:effectLst/>
+      </p:bgPr>
+    </p:bg>
+    <p:spTree>
+      <p:nvGrpSpPr>
+        <p:cNvPr id="1" name=""/>
+        <p:cNvGrpSpPr/>
+        <p:nvPr/>
+      </p:nvGrpSpPr>
+      <p:grpSpPr/>
+      <p:sp>
+        <p:nvSpPr>
+          <p:cNvPr id="2" name="Rounded Rectangle 1"/>
+          <p:cNvSpPr/>
+          <p:nvPr/>
+        </p:nvSpPr>
+        <p:spPr>
+          <a:xfrm>
+            <a:off x="457200" y="457200"/>
+            <a:ext cx="11277295" cy="5943600"/>
+          </a:xfrm>
+          <a:prstGeom prst="roundRect">
+            <a:avLst>
+              <a:gd name="adj" fmla="val 769"/>
+            </a:avLst>
+          </a:prstGeom>
+          <a:solidFill>
+            <a:srgbClr val="1E293B"/>
+          </a:solidFill>
+          <a:ln>
+            <a:noFill/>
+          </a:ln>
+        </p:spPr>
+        <p:style>
+          <a:lnRef idx="1">
+            <a:schemeClr val="accent1"/>
+          </a:lnRef>
+          <a:fillRef idx="3">
+            <a:schemeClr val="accent1"/>
+          </a:fillRef>
+          <a:effectRef idx="2">
+            <a:schemeClr val="accent1"/>
+          </a:effectRef>
+          <a:fontRef idx="minor">
+            <a:schemeClr val="lt1"/>
+          </a:fontRef>
+        </p:style>
+        <p:txBody>
+          <a:bodyPr rtlCol="0" anchor="ctr"/>
+          <a:lstStyle/>
+          <a:p>
+            <a:pPr algn="ctr"/>
+          </a:p>
+        </p:txBody>
+      </p:sp>
+      <p:sp>
+        <p:nvSpPr>
+          <p:cNvPr id="3" name="Rectangle 2"/>
+          <p:cNvSpPr/>
+          <p:nvPr/>
+        </p:nvSpPr>
+        <p:spPr>
+          <a:xfrm>
+            <a:off x="457200" y="457200"/>
+            <a:ext cx="11277295" cy="45720"/>
+          </a:xfrm>
+          <a:prstGeom prst="rect">
+            <a:avLst/>
+          </a:prstGeom>
+          <a:solidFill>
+            <a:srgbClr val="3B82F6"/>
+          </a:solidFill>
+          <a:ln>
+            <a:noFill/>
+          </a:ln>
+        </p:spPr>
+        <p:style>
+          <a:lnRef idx="1">
+            <a:schemeClr val="accent1"/>
+          </a:lnRef>
+          <a:fillRef idx="3">
+            <a:schemeClr val="accent1"/>
+          </a:fillRef>
+          <a:effectRef idx="2">
+            <a:schemeClr val="accent1"/>
+          </a:effectRef>
+          <a:fontRef idx="minor">
+            <a:schemeClr val="lt1"/>
+          </a:fontRef>
+        </p:style>
+        <p:txBody>
+          <a:bodyPr rtlCol="0" anchor="ctr"/>
+          <a:lstStyle/>
+          <a:p>
+            <a:pPr algn="ctr"/>
+          </a:p>
+        </p:txBody>
+      </p:sp>
+      <p:sp>
+        <p:nvSpPr>
+          <p:cNvPr id="4" name="TextBox 3"/>
+          <p:cNvSpPr txBox="1"/>
+          <p:nvPr/>
+        </p:nvSpPr>
+        <p:spPr>
+          <a:xfrm>
+            <a:off x="10637215" y="640080"/>
+            <a:ext cx="914400" cy="228600"/>
+          </a:xfrm>
+          <a:prstGeom prst="rect">
+            <a:avLst/>
+          </a:prstGeom>
+          <a:noFill/>
+        </p:spPr>
+        <p:txBody>
+          <a:bodyPr wrap="square" lIns="0" tIns="0" rIns="0" bIns="0">
+            <a:spAutoFit/>
+          </a:bodyPr>
+          <a:lstStyle/>
+          <a:p>
+            <a:pPr algn="r"/>
+            <a:r>
+              <a:rPr sz="1100" b="1" i="0">
+                <a:solidFill>
+                  <a:srgbClr val="94A3B8"/>
+                </a:solidFill>
+                <a:latin typeface="Calibri"/>
+              </a:rPr>
+              <a:t>Page 3/3</a:t>
+            </a:r>
+          </a:p>
+        </p:txBody>
+      </p:sp>
+      <p:sp>
+        <p:nvSpPr>
+          <p:cNvPr id="5" name="TextBox 4"/>
+          <p:cNvSpPr txBox="1"/>
+          <p:nvPr/>
+        </p:nvSpPr>
+        <p:spPr>
+          <a:xfrm>
+            <a:off x="640080" y="640080"/>
+            <a:ext cx="9997135" cy="320040"/>
+          </a:xfrm>
+          <a:prstGeom prst="rect">
+            <a:avLst/>
+          </a:prstGeom>
+          <a:noFill/>
+        </p:spPr>
+        <p:txBody>
+          <a:bodyPr wrap="square" lIns="0" tIns="0" rIns="0" bIns="0">
+            <a:spAutoFit/>
+          </a:bodyPr>
+          <a:lstStyle/>
+          <a:p>
+            <a:pPr algn="l"/>
+            <a:r>
+              <a:rPr sz="2000" b="1" i="0">
+                <a:solidFill>
+                  <a:srgbClr val="F8FAFC"/>
+                </a:solidFill>
+                <a:latin typeface="Calibri Light"/>
+              </a:rPr>
+              <a:t>Executive Narrative - Auto Paginated</a:t>
+            </a:r>
+          </a:p>
+        </p:txBody>
+      </p:sp>
+      <p:sp>
+        <p:nvSpPr>
+          <p:cNvPr id="6" name="TextBox 5"/>
+          <p:cNvSpPr txBox="1"/>
+          <p:nvPr/>
+        </p:nvSpPr>
+        <p:spPr>
+          <a:xfrm>
+            <a:off x="640080" y="960119"/>
+            <a:ext cx="10911535" cy="256032"/>
+          </a:xfrm>
+          <a:prstGeom prst="rect">
+            <a:avLst/>
+          </a:prstGeom>
+          <a:noFill/>
+        </p:spPr>
+        <p:txBody>
+          <a:bodyPr wrap="square" lIns="0" tIns="0" rIns="0" bIns="0">
+            <a:spAutoFit/>
+          </a:bodyPr>
+          <a:lstStyle/>
+          <a:p>
+            <a:pPr algn="l"/>
+            <a:r>
+              <a:rPr sz="1100" b="0" i="0">
+                <a:solidFill>
+                  <a:srgbClr val="94A3B8"/>
+                </a:solidFill>
+                <a:latin typeface="Calibri"/>
+              </a:rPr>
+              <a:t>Long text automatically split into multiple slides.</a:t>
+            </a:r>
+          </a:p>
+        </p:txBody>
+      </p:sp>
+      <p:sp>
+        <p:nvSpPr>
+          <p:cNvPr id="7" name="Rounded Rectangle 6"/>
+          <p:cNvSpPr/>
+          <p:nvPr/>
+        </p:nvSpPr>
+        <p:spPr>
+          <a:xfrm>
+            <a:off x="640080" y="1252728"/>
+            <a:ext cx="7485680" cy="4965192"/>
+          </a:xfrm>
+          <a:prstGeom prst="roundRect">
+            <a:avLst>
+              <a:gd name="adj" fmla="val 552"/>
+            </a:avLst>
+          </a:prstGeom>
+          <a:solidFill>
+            <a:srgbClr val="0F172A"/>
+          </a:solidFill>
+          <a:ln>
+            <a:noFill/>
+          </a:ln>
+        </p:spPr>
+        <p:style>
+          <a:lnRef idx="1">
+            <a:schemeClr val="accent1"/>
+          </a:lnRef>
+          <a:fillRef idx="3">
+            <a:schemeClr val="accent1"/>
+          </a:fillRef>
+          <a:effectRef idx="2">
+            <a:schemeClr val="accent1"/>
+          </a:effectRef>
+          <a:fontRef idx="minor">
+            <a:schemeClr val="lt1"/>
+          </a:fontRef>
+        </p:style>
+        <p:txBody>
+          <a:bodyPr rtlCol="0" anchor="ctr"/>
+          <a:lstStyle/>
+          <a:p>
+            <a:pPr algn="ctr"/>
+          </a:p>
+        </p:txBody>
+      </p:sp>
+      <p:sp>
+        <p:nvSpPr>
+          <p:cNvPr id="8" name="TextBox 7"/>
+          <p:cNvSpPr txBox="1"/>
+          <p:nvPr/>
+        </p:nvSpPr>
+        <p:spPr>
+          <a:xfrm>
+            <a:off x="768096" y="1362455"/>
+            <a:ext cx="7229648" cy="4745736"/>
+          </a:xfrm>
+          <a:prstGeom prst="rect">
+            <a:avLst/>
+          </a:prstGeom>
+          <a:noFill/>
+        </p:spPr>
+        <p:txBody>
+          <a:bodyPr wrap="square" lIns="0" tIns="0" rIns="0" bIns="0">
+            <a:spAutoFit/>
+          </a:bodyPr>
+          <a:lstStyle/>
+          <a:p>
+            <a:pPr algn="l"/>
+            <a:r>
+              <a:rPr sz="1400" b="0" i="0">
+                <a:solidFill>
+                  <a:srgbClr val="CBD5E1"/>
+                </a:solidFill>
+                <a:latin typeface="Calibri"/>
+              </a:rPr>
+              <a:t>Financially, gross margin improved by 2.3 points due to infrastructure right-sizing and contract renegotiation in third-party services. This gain is expected to partially normalize in Q3 while regional failover hardening and observability upgrades are in flight.
+The second-half plan focuses on durable retention drivers, expansion motion enablement, and service-quality stabilization. Decision velocity and cross-functional accountability are now the central execution constraints, not strategy clarity.</a:t>
+            </a:r>
+          </a:p>
+        </p:txBody>
+      </p:sp>
+      <p:sp>
+        <p:nvSpPr>
+          <p:cNvPr id="9" name="Rounded Rectangle 8"/>
+          <p:cNvSpPr/>
+          <p:nvPr/>
+        </p:nvSpPr>
+        <p:spPr>
+          <a:xfrm>
+            <a:off x="8144048" y="1252728"/>
+            <a:ext cx="3242974" cy="4965192"/>
+          </a:xfrm>
+          <a:prstGeom prst="roundRect">
+            <a:avLst>
+              <a:gd name="adj" fmla="val 844"/>
+            </a:avLst>
+          </a:prstGeom>
+          <a:solidFill>
+            <a:srgbClr val="334155"/>
+          </a:solidFill>
+          <a:ln>
+            <a:noFill/>
+          </a:ln>
+        </p:spPr>
+        <p:style>
+          <a:lnRef idx="1">
+            <a:schemeClr val="accent1"/>
+          </a:lnRef>
+          <a:fillRef idx="3">
+            <a:schemeClr val="accent1"/>
+          </a:fillRef>
+          <a:effectRef idx="2">
+            <a:schemeClr val="accent1"/>
+          </a:effectRef>
+          <a:fontRef idx="minor">
+            <a:schemeClr val="lt1"/>
+          </a:fontRef>
+        </p:style>
+        <p:txBody>
+          <a:bodyPr rtlCol="0" anchor="ctr"/>
+          <a:lstStyle/>
+          <a:p>
+            <a:pPr algn="ctr"/>
+          </a:p>
+        </p:txBody>
+      </p:sp>
+      <p:sp>
+        <p:nvSpPr>
+          <p:cNvPr id="10" name="TextBox 9"/>
+          <p:cNvSpPr txBox="1"/>
+          <p:nvPr/>
+        </p:nvSpPr>
+        <p:spPr>
+          <a:xfrm>
+            <a:off x="8253776" y="1344168"/>
+            <a:ext cx="3023518" cy="228600"/>
+          </a:xfrm>
+          <a:prstGeom prst="rect">
+            <a:avLst/>
+          </a:prstGeom>
+          <a:noFill/>
+        </p:spPr>
+        <p:txBody>
+          <a:bodyPr wrap="square" lIns="0" tIns="0" rIns="0" bIns="0">
+            <a:spAutoFit/>
+          </a:bodyPr>
+          <a:lstStyle/>
+          <a:p>
+            <a:pPr algn="l"/>
+            <a:r>
+              <a:rPr sz="1100" b="1" i="0">
+                <a:solidFill>
+                  <a:srgbClr val="F8FAFC"/>
+                </a:solidFill>
+                <a:latin typeface="Calibri"/>
+              </a:rPr>
+              <a:t>Steering Notes</a:t>
+            </a:r>
+          </a:p>
+        </p:txBody>
+      </p:sp>
+      <p:sp>
+        <p:nvSpPr>
+          <p:cNvPr id="11" name="TextBox 10"/>
+          <p:cNvSpPr txBox="1"/>
+          <p:nvPr/>
+        </p:nvSpPr>
+        <p:spPr>
+          <a:xfrm>
+            <a:off x="8253776" y="1563624"/>
+            <a:ext cx="3023518" cy="3277026"/>
+          </a:xfrm>
+          <a:prstGeom prst="rect">
+            <a:avLst/>
+          </a:prstGeom>
+          <a:noFill/>
+        </p:spPr>
+        <p:txBody>
+          <a:bodyPr wrap="square" lIns="0" tIns="0" rIns="0" bIns="0">
+            <a:spAutoFit/>
+          </a:bodyPr>
+          <a:lstStyle/>
+          <a:p>
+            <a:pPr algn="l"/>
+            <a:r>
+              <a:rPr sz="1100" b="0" i="0">
+                <a:solidFill>
+                  <a:srgbClr val="CBD5E1"/>
+                </a:solidFill>
+                <a:latin typeface="Calibri"/>
+              </a:rPr>
+              <a:t>- Watch enterprise concentration
+- Keep onboarding gains sticky
+- Fund observability upgrades
+- Track p95 latency weekly</a:t>
+            </a:r>
+          </a:p>
+        </p:txBody>
+      </p:sp>
+      <p:sp>
+        <p:nvSpPr>
+          <p:cNvPr id="12" name="TextBox 11"/>
+          <p:cNvSpPr txBox="1"/>
+          <p:nvPr/>
+        </p:nvSpPr>
+        <p:spPr>
+          <a:xfrm>
+            <a:off x="8253776" y="5577840"/>
+            <a:ext cx="3023518" cy="530352"/>
+          </a:xfrm>
+          <a:prstGeom prst="rect">
+            <a:avLst/>
+          </a:prstGeom>
+          <a:noFill/>
+        </p:spPr>
+        <p:txBody>
+          <a:bodyPr wrap="square" lIns="0" tIns="0" rIns="0" bIns="0">
+            <a:spAutoFit/>
+          </a:bodyPr>
+          <a:lstStyle/>
+          <a:p>
+            <a:pPr algn="l"/>
+            <a:r>
+              <a:rPr sz="1100" b="1" i="0">
+                <a:solidFill>
+                  <a:srgbClr val="3B82F6"/>
+                </a:solidFill>
+                <a:latin typeface="Calibri"/>
+              </a:rPr>
+              <a:t>Auto-generated narrative section</a:t>
+            </a:r>
+          </a:p>
+        </p:txBody>
+      </p:sp>
+    </p:spTree>
+  </p:cSld>
+  <p:clrMapOvr>
+    <a:masterClrMapping/>
+  </p:clrMapOvr>
+</p:sld>
+</file>
+
+<file path=ppt/slides/slide23.xml><?xml version="1.0" encoding="utf-8"?>
+<p:sld xmlns:a="http://schemas.openxmlformats.org/drawingml/2006/main" xmlns:p="http://schemas.openxmlformats.org/presentationml/2006/main" xmlns:r="http://schemas.openxmlformats.org/officeDocument/2006/relationships">
+  <p:cSld>
+    <p:bg>
+      <p:bgPr>
+        <a:solidFill>
+          <a:srgbClr val="0F172A"/>
+        </a:solidFill>
+        <a:effectLst/>
+      </p:bgPr>
+    </p:bg>
+    <p:spTree>
+      <p:nvGrpSpPr>
+        <p:cNvPr id="1" name=""/>
+        <p:cNvGrpSpPr/>
+        <p:nvPr/>
+      </p:nvGrpSpPr>
+      <p:grpSpPr/>
+      <p:sp>
+        <p:nvSpPr>
+          <p:cNvPr id="2" name="Rectangle 1"/>
+          <p:cNvSpPr/>
+          <p:nvPr/>
+        </p:nvSpPr>
+        <p:spPr>
+          <a:xfrm>
+            <a:off x="457200" y="457200"/>
+            <a:ext cx="45720" cy="548640"/>
+          </a:xfrm>
+          <a:prstGeom prst="rect">
+            <a:avLst/>
+          </a:prstGeom>
+          <a:solidFill>
+            <a:srgbClr val="3B82F6"/>
+          </a:solidFill>
+          <a:ln>
+            <a:noFill/>
+          </a:ln>
+        </p:spPr>
+        <p:style>
+          <a:lnRef idx="1">
+            <a:schemeClr val="accent1"/>
+          </a:lnRef>
+          <a:fillRef idx="3">
+            <a:schemeClr val="accent1"/>
+          </a:fillRef>
+          <a:effectRef idx="2">
+            <a:schemeClr val="accent1"/>
+          </a:effectRef>
+          <a:fontRef idx="minor">
+            <a:schemeClr val="lt1"/>
+          </a:fontRef>
+        </p:style>
+        <p:txBody>
+          <a:bodyPr rtlCol="0" anchor="ctr"/>
+          <a:lstStyle/>
+          <a:p>
+            <a:pPr algn="ctr"/>
+          </a:p>
+        </p:txBody>
+      </p:sp>
+      <p:sp>
+        <p:nvSpPr>
+          <p:cNvPr id="3" name="TextBox 2"/>
+          <p:cNvSpPr txBox="1"/>
+          <p:nvPr/>
+        </p:nvSpPr>
+        <p:spPr>
+          <a:xfrm>
+            <a:off x="685800" y="457200"/>
+            <a:ext cx="9183319" cy="548640"/>
+          </a:xfrm>
+          <a:prstGeom prst="rect">
+            <a:avLst/>
+          </a:prstGeom>
+          <a:noFill/>
+        </p:spPr>
+        <p:txBody>
+          <a:bodyPr wrap="square" lIns="0" tIns="0" rIns="0" bIns="0">
+            <a:spAutoFit/>
+          </a:bodyPr>
+          <a:lstStyle/>
+          <a:p>
+            <a:pPr algn="l"/>
+            <a:r>
+              <a:rPr sz="2800" b="1" i="0">
+                <a:solidFill>
+                  <a:srgbClr val="F8FAFC"/>
+                </a:solidFill>
+                <a:latin typeface="Calibri Light"/>
+              </a:rPr>
+              <a:t>Theme Cascade QA</a:t>
+            </a:r>
+          </a:p>
+        </p:txBody>
+      </p:sp>
+      <p:sp>
+        <p:nvSpPr>
+          <p:cNvPr id="4" name="Rounded Rectangle 3"/>
+          <p:cNvSpPr/>
+          <p:nvPr/>
+        </p:nvSpPr>
+        <p:spPr>
+          <a:xfrm>
+            <a:off x="10051999" y="571500"/>
+            <a:ext cx="1682496" cy="320040"/>
+          </a:xfrm>
+          <a:prstGeom prst="roundRect">
+            <a:avLst>
+              <a:gd name="adj" fmla="val 50000"/>
+            </a:avLst>
+          </a:prstGeom>
+          <a:solidFill>
+            <a:srgbClr val="3B82F6"/>
+          </a:solidFill>
+          <a:ln>
+            <a:noFill/>
+          </a:ln>
+        </p:spPr>
+        <p:style>
+          <a:lnRef idx="1">
+            <a:schemeClr val="accent1"/>
+          </a:lnRef>
+          <a:fillRef idx="3">
+            <a:schemeClr val="accent1"/>
+          </a:fillRef>
+          <a:effectRef idx="2">
+            <a:schemeClr val="accent1"/>
+          </a:effectRef>
+          <a:fontRef idx="minor">
+            <a:schemeClr val="lt1"/>
+          </a:fontRef>
+        </p:style>
+        <p:txBody>
+          <a:bodyPr rtlCol="0" anchor="ctr" wrap="none"/>
+          <a:lstStyle/>
+          <a:p>
+            <a:pPr algn="ctr"/>
+            <a:r>
+              <a:rPr sz="1100" b="1">
+                <a:solidFill>
+                  <a:srgbClr val="FFFFFF"/>
+                </a:solidFill>
+                <a:latin typeface="Calibri"/>
+              </a:rPr>
+              <a:t>Section Overrides</a:t>
+            </a:r>
+          </a:p>
+        </p:txBody>
+      </p:sp>
+      <p:sp>
+        <p:nvSpPr>
+          <p:cNvPr id="5" name="Rounded Rectangle 4"/>
+          <p:cNvSpPr/>
+          <p:nvPr/>
+        </p:nvSpPr>
+        <p:spPr>
+          <a:xfrm>
+            <a:off x="457200" y="1298448"/>
+            <a:ext cx="5547207" cy="3474720"/>
+          </a:xfrm>
+          <a:prstGeom prst="roundRect">
+            <a:avLst>
+              <a:gd name="adj" fmla="val 1315"/>
+            </a:avLst>
+          </a:prstGeom>
+          <a:solidFill>
+            <a:srgbClr val="FFF7EA"/>
+          </a:solidFill>
+          <a:ln w="12700">
+            <a:solidFill>
+              <a:srgbClr val="C69768"/>
+            </a:solidFill>
+          </a:ln>
+        </p:spPr>
+        <p:style>
+          <a:lnRef idx="1">
+            <a:schemeClr val="accent1"/>
+          </a:lnRef>
+          <a:fillRef idx="3">
+            <a:schemeClr val="accent1"/>
+          </a:fillRef>
+          <a:effectRef idx="2">
+            <a:schemeClr val="accent1"/>
+          </a:effectRef>
+          <a:fontRef idx="minor">
+            <a:schemeClr val="lt1"/>
+          </a:fontRef>
+        </p:style>
+        <p:txBody>
+          <a:bodyPr rtlCol="0" anchor="ctr"/>
+          <a:lstStyle/>
+          <a:p>
+            <a:pPr algn="ctr"/>
+          </a:p>
+        </p:txBody>
+      </p:sp>
+      <p:sp>
+        <p:nvSpPr>
+          <p:cNvPr id="6" name="Rounded Rectangle 5"/>
+          <p:cNvSpPr/>
+          <p:nvPr/>
+        </p:nvSpPr>
+        <p:spPr>
+          <a:xfrm>
+            <a:off x="621792" y="1463039"/>
+            <a:ext cx="5218023" cy="1463040"/>
+          </a:xfrm>
+          <a:prstGeom prst="roundRect">
+            <a:avLst>
+              <a:gd name="adj" fmla="val 3125"/>
+            </a:avLst>
+          </a:prstGeom>
+          <a:solidFill>
+            <a:srgbClr val="FFF7EA"/>
+          </a:solidFill>
+          <a:ln>
+            <a:noFill/>
+          </a:ln>
+        </p:spPr>
+        <p:style>
+          <a:lnRef idx="1">
+            <a:schemeClr val="accent1"/>
+          </a:lnRef>
+          <a:fillRef idx="3">
+            <a:schemeClr val="accent1"/>
+          </a:fillRef>
+          <a:effectRef idx="2">
+            <a:schemeClr val="accent1"/>
+          </a:effectRef>
+          <a:fontRef idx="minor">
+            <a:schemeClr val="lt1"/>
+          </a:fontRef>
+        </p:style>
+        <p:txBody>
+          <a:bodyPr rtlCol="0" anchor="ctr"/>
+          <a:lstStyle/>
+          <a:p>
+            <a:pPr algn="ctr"/>
+          </a:p>
+        </p:txBody>
+      </p:sp>
+      <p:sp>
+        <p:nvSpPr>
+          <p:cNvPr id="7" name="Rectangle 6"/>
+          <p:cNvSpPr/>
+          <p:nvPr/>
+        </p:nvSpPr>
+        <p:spPr>
+          <a:xfrm>
+            <a:off x="621792" y="1463039"/>
+            <a:ext cx="45720" cy="1463040"/>
+          </a:xfrm>
+          <a:prstGeom prst="rect">
+            <a:avLst/>
+          </a:prstGeom>
+          <a:solidFill>
+            <a:srgbClr val="C16B29"/>
+          </a:solidFill>
+          <a:ln>
+            <a:noFill/>
+          </a:ln>
+        </p:spPr>
+        <p:style>
+          <a:lnRef idx="1">
+            <a:schemeClr val="accent1"/>
+          </a:lnRef>
+          <a:fillRef idx="3">
+            <a:schemeClr val="accent1"/>
+          </a:fillRef>
+          <a:effectRef idx="2">
+            <a:schemeClr val="accent1"/>
+          </a:effectRef>
+          <a:fontRef idx="minor">
+            <a:schemeClr val="lt1"/>
+          </a:fontRef>
+        </p:style>
+        <p:txBody>
+          <a:bodyPr rtlCol="0" anchor="ctr"/>
+          <a:lstStyle/>
+          <a:p>
+            <a:pPr algn="ctr"/>
+          </a:p>
+        </p:txBody>
+      </p:sp>
+      <p:sp>
+        <p:nvSpPr>
+          <p:cNvPr id="8" name="TextBox 7"/>
+          <p:cNvSpPr txBox="1"/>
+          <p:nvPr/>
+        </p:nvSpPr>
+        <p:spPr>
+          <a:xfrm>
+            <a:off x="850392" y="1645919"/>
+            <a:ext cx="4897983" cy="256032"/>
+          </a:xfrm>
+          <a:prstGeom prst="rect">
+            <a:avLst/>
+          </a:prstGeom>
+          <a:noFill/>
+        </p:spPr>
+        <p:txBody>
+          <a:bodyPr wrap="square" lIns="0" tIns="0" rIns="0" bIns="0">
+            <a:spAutoFit/>
+          </a:bodyPr>
+          <a:lstStyle/>
+          <a:p>
+            <a:pPr algn="l"/>
+            <a:r>
+              <a:rPr sz="1400" b="1" i="0">
+                <a:solidFill>
+                  <a:srgbClr val="4A2C16"/>
+                </a:solidFill>
+                <a:latin typeface="Calibri"/>
+              </a:rPr>
+              <a:t>Local theme patch: editorial warm palette.</a:t>
+            </a:r>
+          </a:p>
+        </p:txBody>
+      </p:sp>
+      <p:sp>
+        <p:nvSpPr>
+          <p:cNvPr id="9" name="TextBox 8"/>
+          <p:cNvSpPr txBox="1"/>
+          <p:nvPr/>
+        </p:nvSpPr>
+        <p:spPr>
+          <a:xfrm>
+            <a:off x="850392" y="2084831"/>
+            <a:ext cx="4897983" cy="658368"/>
+          </a:xfrm>
+          <a:prstGeom prst="rect">
+            <a:avLst/>
+          </a:prstGeom>
+          <a:noFill/>
+        </p:spPr>
+        <p:txBody>
+          <a:bodyPr wrap="square" lIns="0" tIns="0" rIns="0" bIns="0">
+            <a:spAutoFit/>
+          </a:bodyPr>
+          <a:lstStyle/>
+          <a:p>
+            <a:pPr algn="l"/>
+            <a:r>
+              <a:rPr sz="1400" b="0" i="0">
+                <a:solidFill>
+                  <a:srgbClr val="6F4828"/>
+                </a:solidFill>
+                <a:latin typeface="Calibri"/>
+              </a:rPr>
+              <a:t>Warm Section</a:t>
+            </a:r>
+          </a:p>
+        </p:txBody>
+      </p:sp>
+      <p:sp>
+        <p:nvSpPr>
+          <p:cNvPr id="10" name="Rounded Rectangle 9"/>
+          <p:cNvSpPr/>
+          <p:nvPr/>
+        </p:nvSpPr>
+        <p:spPr>
+          <a:xfrm>
+            <a:off x="621792" y="3035808"/>
+            <a:ext cx="5218023" cy="1371600"/>
+          </a:xfrm>
+          <a:prstGeom prst="roundRect">
+            <a:avLst>
+              <a:gd name="adj" fmla="val 3333"/>
+            </a:avLst>
+          </a:prstGeom>
+          <a:solidFill>
+            <a:srgbClr val="FFF7EA"/>
+          </a:solidFill>
+          <a:ln>
+            <a:noFill/>
+          </a:ln>
+        </p:spPr>
+        <p:style>
+          <a:lnRef idx="1">
+            <a:schemeClr val="accent1"/>
+          </a:lnRef>
+          <a:fillRef idx="3">
+            <a:schemeClr val="accent1"/>
+          </a:fillRef>
+          <a:effectRef idx="2">
+            <a:schemeClr val="accent1"/>
+          </a:effectRef>
+          <a:fontRef idx="minor">
+            <a:schemeClr val="lt1"/>
+          </a:fontRef>
+        </p:style>
+        <p:txBody>
+          <a:bodyPr rtlCol="0" anchor="ctr"/>
+          <a:lstStyle/>
+          <a:p>
+            <a:pPr algn="ctr"/>
+          </a:p>
+        </p:txBody>
+      </p:sp>
+      <p:sp>
+        <p:nvSpPr>
+          <p:cNvPr id="11" name="Rectangle 10"/>
+          <p:cNvSpPr/>
+          <p:nvPr/>
+        </p:nvSpPr>
+        <p:spPr>
+          <a:xfrm>
+            <a:off x="621792" y="3035808"/>
+            <a:ext cx="45720" cy="1371600"/>
+          </a:xfrm>
+          <a:prstGeom prst="rect">
+            <a:avLst/>
+          </a:prstGeom>
+          <a:solidFill>
+            <a:srgbClr val="C16B29"/>
+          </a:solidFill>
+          <a:ln>
+            <a:noFill/>
+          </a:ln>
+        </p:spPr>
+        <p:style>
+          <a:lnRef idx="1">
+            <a:schemeClr val="accent1"/>
+          </a:lnRef>
+          <a:fillRef idx="3">
+            <a:schemeClr val="accent1"/>
+          </a:fillRef>
+          <a:effectRef idx="2">
+            <a:schemeClr val="accent1"/>
+          </a:effectRef>
+          <a:fontRef idx="minor">
+            <a:schemeClr val="lt1"/>
+          </a:fontRef>
+        </p:style>
+        <p:txBody>
+          <a:bodyPr rtlCol="0" anchor="ctr"/>
+          <a:lstStyle/>
+          <a:p>
+            <a:pPr algn="ctr"/>
+          </a:p>
+        </p:txBody>
+      </p:sp>
+      <p:sp>
+        <p:nvSpPr>
+          <p:cNvPr id="12" name="TextBox 11"/>
+          <p:cNvSpPr txBox="1"/>
+          <p:nvPr/>
+        </p:nvSpPr>
+        <p:spPr>
+          <a:xfrm>
+            <a:off x="850392" y="3218688"/>
+            <a:ext cx="4806543" cy="228600"/>
+          </a:xfrm>
+          <a:prstGeom prst="rect">
+            <a:avLst/>
+          </a:prstGeom>
+          <a:noFill/>
+        </p:spPr>
+        <p:txBody>
+          <a:bodyPr wrap="square" lIns="0" tIns="0" rIns="0" bIns="0">
+            <a:spAutoFit/>
+          </a:bodyPr>
+          <a:lstStyle/>
+          <a:p>
+            <a:pPr algn="l"/>
+            <a:r>
+              <a:rPr sz="1100" b="0" i="0">
+                <a:solidFill>
+                  <a:srgbClr val="94A3B8"/>
+                </a:solidFill>
+                <a:latin typeface="Calibri"/>
+              </a:rPr>
+              <a:t>RETENTION</a:t>
+            </a:r>
+          </a:p>
+        </p:txBody>
+      </p:sp>
+      <p:sp>
+        <p:nvSpPr>
+          <p:cNvPr id="13" name="TextBox 12"/>
+          <p:cNvSpPr txBox="1"/>
+          <p:nvPr/>
+        </p:nvSpPr>
+        <p:spPr>
+          <a:xfrm>
+            <a:off x="850392" y="3447288"/>
+            <a:ext cx="4806543" cy="411480"/>
+          </a:xfrm>
+          <a:prstGeom prst="rect">
+            <a:avLst/>
+          </a:prstGeom>
+          <a:noFill/>
+        </p:spPr>
+        <p:txBody>
+          <a:bodyPr wrap="square" lIns="0" tIns="0" rIns="0" bIns="0">
+            <a:spAutoFit/>
+          </a:bodyPr>
+          <a:lstStyle/>
+          <a:p>
+            <a:pPr algn="l"/>
+            <a:r>
+              <a:rPr sz="2800" b="1" i="0">
+                <a:solidFill>
+                  <a:srgbClr val="4A2C16"/>
+                </a:solidFill>
+                <a:latin typeface="Calibri Light"/>
+              </a:rPr>
+              <a:t>94%</a:t>
+            </a:r>
+          </a:p>
+        </p:txBody>
+      </p:sp>
+      <p:sp>
+        <p:nvSpPr>
+          <p:cNvPr id="14" name="TextBox 13"/>
+          <p:cNvSpPr txBox="1"/>
+          <p:nvPr/>
+        </p:nvSpPr>
+        <p:spPr>
+          <a:xfrm>
+            <a:off x="850392" y="3858768"/>
+            <a:ext cx="4806543" cy="228600"/>
+          </a:xfrm>
+          <a:prstGeom prst="rect">
+            <a:avLst/>
+          </a:prstGeom>
+          <a:noFill/>
+        </p:spPr>
+        <p:txBody>
+          <a:bodyPr wrap="square" lIns="0" tIns="0" rIns="0" bIns="0">
+            <a:spAutoFit/>
+          </a:bodyPr>
+          <a:lstStyle/>
+          <a:p>
+            <a:pPr algn="l"/>
+            <a:r>
+              <a:rPr sz="1100" b="1" i="0">
+                <a:solidFill>
+                  <a:srgbClr val="22C55E"/>
+                </a:solidFill>
+                <a:latin typeface="Calibri"/>
+              </a:rPr>
+              <a:t>▲ +2pp</a:t>
+            </a:r>
+          </a:p>
+        </p:txBody>
+      </p:sp>
+      <p:sp>
+        <p:nvSpPr>
+          <p:cNvPr id="15" name="Rounded Rectangle 14"/>
+          <p:cNvSpPr/>
+          <p:nvPr/>
+        </p:nvSpPr>
+        <p:spPr>
+          <a:xfrm>
+            <a:off x="6187287" y="1298448"/>
+            <a:ext cx="5547207" cy="3474720"/>
+          </a:xfrm>
+          <a:prstGeom prst="roundRect">
+            <a:avLst>
+              <a:gd name="adj" fmla="val 1315"/>
+            </a:avLst>
+          </a:prstGeom>
+          <a:solidFill>
+            <a:srgbClr val="E8F5FF"/>
+          </a:solidFill>
+          <a:ln w="12700">
+            <a:solidFill>
+              <a:srgbClr val="7399CA"/>
+            </a:solidFill>
+          </a:ln>
+        </p:spPr>
+        <p:style>
+          <a:lnRef idx="1">
+            <a:schemeClr val="accent1"/>
+          </a:lnRef>
+          <a:fillRef idx="3">
+            <a:schemeClr val="accent1"/>
+          </a:fillRef>
+          <a:effectRef idx="2">
+            <a:schemeClr val="accent1"/>
+          </a:effectRef>
+          <a:fontRef idx="minor">
+            <a:schemeClr val="lt1"/>
+          </a:fontRef>
+        </p:style>
+        <p:txBody>
+          <a:bodyPr rtlCol="0" anchor="ctr"/>
+          <a:lstStyle/>
+          <a:p>
+            <a:pPr algn="ctr"/>
+          </a:p>
+        </p:txBody>
+      </p:sp>
+      <p:sp>
+        <p:nvSpPr>
+          <p:cNvPr id="16" name="Rounded Rectangle 15"/>
+          <p:cNvSpPr/>
+          <p:nvPr/>
+        </p:nvSpPr>
+        <p:spPr>
+          <a:xfrm>
+            <a:off x="6351879" y="1463039"/>
+            <a:ext cx="5218023" cy="1463040"/>
+          </a:xfrm>
+          <a:prstGeom prst="roundRect">
+            <a:avLst>
+              <a:gd name="adj" fmla="val 3125"/>
+            </a:avLst>
+          </a:prstGeom>
+          <a:solidFill>
+            <a:srgbClr val="E8F5FF"/>
+          </a:solidFill>
+          <a:ln>
+            <a:noFill/>
+          </a:ln>
+        </p:spPr>
+        <p:style>
+          <a:lnRef idx="1">
+            <a:schemeClr val="accent1"/>
+          </a:lnRef>
+          <a:fillRef idx="3">
+            <a:schemeClr val="accent1"/>
+          </a:fillRef>
+          <a:effectRef idx="2">
+            <a:schemeClr val="accent1"/>
+          </a:effectRef>
+          <a:fontRef idx="minor">
+            <a:schemeClr val="lt1"/>
+          </a:fontRef>
+        </p:style>
+        <p:txBody>
+          <a:bodyPr rtlCol="0" anchor="ctr"/>
+          <a:lstStyle/>
+          <a:p>
+            <a:pPr algn="ctr"/>
+          </a:p>
+        </p:txBody>
+      </p:sp>
+      <p:sp>
+        <p:nvSpPr>
+          <p:cNvPr id="17" name="Rectangle 16"/>
+          <p:cNvSpPr/>
+          <p:nvPr/>
+        </p:nvSpPr>
+        <p:spPr>
+          <a:xfrm>
+            <a:off x="6351879" y="1463039"/>
+            <a:ext cx="45720" cy="1463040"/>
+          </a:xfrm>
+          <a:prstGeom prst="rect">
+            <a:avLst/>
+          </a:prstGeom>
+          <a:solidFill>
+            <a:srgbClr val="1A63C2"/>
+          </a:solidFill>
+          <a:ln>
+            <a:noFill/>
+          </a:ln>
+        </p:spPr>
+        <p:style>
+          <a:lnRef idx="1">
+            <a:schemeClr val="accent1"/>
+          </a:lnRef>
+          <a:fillRef idx="3">
+            <a:schemeClr val="accent1"/>
+          </a:fillRef>
+          <a:effectRef idx="2">
+            <a:schemeClr val="accent1"/>
+          </a:effectRef>
+          <a:fontRef idx="minor">
+            <a:schemeClr val="lt1"/>
+          </a:fontRef>
+        </p:style>
+        <p:txBody>
+          <a:bodyPr rtlCol="0" anchor="ctr"/>
+          <a:lstStyle/>
+          <a:p>
+            <a:pPr algn="ctr"/>
+          </a:p>
+        </p:txBody>
+      </p:sp>
+      <p:sp>
+        <p:nvSpPr>
+          <p:cNvPr id="18" name="TextBox 17"/>
+          <p:cNvSpPr txBox="1"/>
+          <p:nvPr/>
+        </p:nvSpPr>
+        <p:spPr>
+          <a:xfrm>
+            <a:off x="6580479" y="1645919"/>
+            <a:ext cx="4897983" cy="256032"/>
+          </a:xfrm>
+          <a:prstGeom prst="rect">
+            <a:avLst/>
+          </a:prstGeom>
+          <a:noFill/>
+        </p:spPr>
+        <p:txBody>
+          <a:bodyPr wrap="square" lIns="0" tIns="0" rIns="0" bIns="0">
+            <a:spAutoFit/>
+          </a:bodyPr>
+          <a:lstStyle/>
+          <a:p>
+            <a:pPr algn="l"/>
+            <a:r>
+              <a:rPr sz="1400" b="1" i="0">
+                <a:solidFill>
+                  <a:srgbClr val="122B4C"/>
+                </a:solidFill>
+                <a:latin typeface="Calibri"/>
+              </a:rPr>
+              <a:t>Local theme patch: corporate blue palette.</a:t>
+            </a:r>
+          </a:p>
+        </p:txBody>
+      </p:sp>
+      <p:sp>
+        <p:nvSpPr>
+          <p:cNvPr id="19" name="TextBox 18"/>
+          <p:cNvSpPr txBox="1"/>
+          <p:nvPr/>
+        </p:nvSpPr>
+        <p:spPr>
+          <a:xfrm>
+            <a:off x="6580479" y="2084831"/>
+            <a:ext cx="4897983" cy="658368"/>
+          </a:xfrm>
+          <a:prstGeom prst="rect">
+            <a:avLst/>
+          </a:prstGeom>
+          <a:noFill/>
+        </p:spPr>
+        <p:txBody>
+          <a:bodyPr wrap="square" lIns="0" tIns="0" rIns="0" bIns="0">
+            <a:spAutoFit/>
+          </a:bodyPr>
+          <a:lstStyle/>
+          <a:p>
+            <a:pPr algn="l"/>
+            <a:r>
+              <a:rPr sz="1400" b="0" i="0">
+                <a:solidFill>
+                  <a:srgbClr val="2F4D74"/>
+                </a:solidFill>
+                <a:latin typeface="Calibri"/>
+              </a:rPr>
+              <a:t>Cool Section</a:t>
+            </a:r>
+          </a:p>
+        </p:txBody>
+      </p:sp>
+      <p:sp>
+        <p:nvSpPr>
+          <p:cNvPr id="20" name="Rounded Rectangle 19"/>
+          <p:cNvSpPr/>
+          <p:nvPr/>
+        </p:nvSpPr>
+        <p:spPr>
+          <a:xfrm>
+            <a:off x="6351879" y="3035808"/>
+            <a:ext cx="5218023" cy="1371600"/>
+          </a:xfrm>
+          <a:prstGeom prst="roundRect">
+            <a:avLst>
+              <a:gd name="adj" fmla="val 3333"/>
+            </a:avLst>
+          </a:prstGeom>
+          <a:solidFill>
+            <a:srgbClr val="E8F5FF"/>
+          </a:solidFill>
+          <a:ln>
+            <a:noFill/>
+          </a:ln>
+        </p:spPr>
+        <p:style>
+          <a:lnRef idx="1">
+            <a:schemeClr val="accent1"/>
+          </a:lnRef>
+          <a:fillRef idx="3">
+            <a:schemeClr val="accent1"/>
+          </a:fillRef>
+          <a:effectRef idx="2">
+            <a:schemeClr val="accent1"/>
+          </a:effectRef>
+          <a:fontRef idx="minor">
+            <a:schemeClr val="lt1"/>
+          </a:fontRef>
+        </p:style>
+        <p:txBody>
+          <a:bodyPr rtlCol="0" anchor="ctr"/>
+          <a:lstStyle/>
+          <a:p>
+            <a:pPr algn="ctr"/>
+          </a:p>
+        </p:txBody>
+      </p:sp>
+      <p:sp>
+        <p:nvSpPr>
+          <p:cNvPr id="21" name="Rectangle 20"/>
+          <p:cNvSpPr/>
+          <p:nvPr/>
+        </p:nvSpPr>
+        <p:spPr>
+          <a:xfrm>
+            <a:off x="6351879" y="3035808"/>
+            <a:ext cx="45720" cy="1371600"/>
+          </a:xfrm>
+          <a:prstGeom prst="rect">
+            <a:avLst/>
+          </a:prstGeom>
+          <a:solidFill>
+            <a:srgbClr val="1A63C2"/>
+          </a:solidFill>
+          <a:ln>
+            <a:noFill/>
+          </a:ln>
+        </p:spPr>
+        <p:style>
+          <a:lnRef idx="1">
+            <a:schemeClr val="accent1"/>
+          </a:lnRef>
+          <a:fillRef idx="3">
+            <a:schemeClr val="accent1"/>
+          </a:fillRef>
+          <a:effectRef idx="2">
+            <a:schemeClr val="accent1"/>
+          </a:effectRef>
+          <a:fontRef idx="minor">
+            <a:schemeClr val="lt1"/>
+          </a:fontRef>
+        </p:style>
+        <p:txBody>
+          <a:bodyPr rtlCol="0" anchor="ctr"/>
+          <a:lstStyle/>
+          <a:p>
+            <a:pPr algn="ctr"/>
+          </a:p>
+        </p:txBody>
+      </p:sp>
+      <p:sp>
+        <p:nvSpPr>
+          <p:cNvPr id="22" name="TextBox 21"/>
+          <p:cNvSpPr txBox="1"/>
+          <p:nvPr/>
+        </p:nvSpPr>
+        <p:spPr>
+          <a:xfrm>
+            <a:off x="6580479" y="3218688"/>
+            <a:ext cx="4806543" cy="228600"/>
+          </a:xfrm>
+          <a:prstGeom prst="rect">
+            <a:avLst/>
+          </a:prstGeom>
+          <a:noFill/>
+        </p:spPr>
+        <p:txBody>
+          <a:bodyPr wrap="square" lIns="0" tIns="0" rIns="0" bIns="0">
+            <a:spAutoFit/>
+          </a:bodyPr>
+          <a:lstStyle/>
+          <a:p>
+            <a:pPr algn="l"/>
+            <a:r>
+              <a:rPr sz="1100" b="0" i="0">
+                <a:solidFill>
+                  <a:srgbClr val="94A3B8"/>
+                </a:solidFill>
+                <a:latin typeface="Calibri"/>
+              </a:rPr>
+              <a:t>UPTIME</a:t>
+            </a:r>
+          </a:p>
+        </p:txBody>
+      </p:sp>
+      <p:sp>
+        <p:nvSpPr>
+          <p:cNvPr id="23" name="TextBox 22"/>
+          <p:cNvSpPr txBox="1"/>
+          <p:nvPr/>
+        </p:nvSpPr>
+        <p:spPr>
+          <a:xfrm>
+            <a:off x="6580479" y="3447288"/>
+            <a:ext cx="4806543" cy="411480"/>
+          </a:xfrm>
+          <a:prstGeom prst="rect">
+            <a:avLst/>
+          </a:prstGeom>
+          <a:noFill/>
+        </p:spPr>
+        <p:txBody>
+          <a:bodyPr wrap="square" lIns="0" tIns="0" rIns="0" bIns="0">
+            <a:spAutoFit/>
+          </a:bodyPr>
+          <a:lstStyle/>
+          <a:p>
+            <a:pPr algn="l"/>
+            <a:r>
+              <a:rPr sz="2800" b="1" i="0">
+                <a:solidFill>
+                  <a:srgbClr val="122B4C"/>
+                </a:solidFill>
+                <a:latin typeface="Calibri Light"/>
+              </a:rPr>
+              <a:t>99.97%</a:t>
+            </a:r>
+          </a:p>
+        </p:txBody>
+      </p:sp>
+      <p:sp>
+        <p:nvSpPr>
+          <p:cNvPr id="24" name="TextBox 23"/>
+          <p:cNvSpPr txBox="1"/>
+          <p:nvPr/>
+        </p:nvSpPr>
+        <p:spPr>
+          <a:xfrm>
+            <a:off x="6580479" y="3858768"/>
+            <a:ext cx="4806543" cy="228600"/>
+          </a:xfrm>
+          <a:prstGeom prst="rect">
+            <a:avLst/>
+          </a:prstGeom>
+          <a:noFill/>
+        </p:spPr>
+        <p:txBody>
+          <a:bodyPr wrap="square" lIns="0" tIns="0" rIns="0" bIns="0">
+            <a:spAutoFit/>
+          </a:bodyPr>
+          <a:lstStyle/>
+          <a:p>
+            <a:pPr algn="l"/>
+            <a:r>
+              <a:rPr sz="1100" b="1" i="0">
+                <a:solidFill>
+                  <a:srgbClr val="22C55E"/>
+                </a:solidFill>
+                <a:latin typeface="Calibri"/>
+              </a:rPr>
+              <a:t>▲ +0.04pp</a:t>
+            </a:r>
+          </a:p>
+        </p:txBody>
+      </p:sp>
+      <p:sp>
+        <p:nvSpPr>
+          <p:cNvPr id="25" name="Rounded Rectangle 24"/>
+          <p:cNvSpPr/>
+          <p:nvPr/>
+        </p:nvSpPr>
+        <p:spPr>
+          <a:xfrm>
+            <a:off x="457200" y="5138928"/>
+            <a:ext cx="11277295" cy="960120"/>
+          </a:xfrm>
+          <a:prstGeom prst="roundRect">
+            <a:avLst>
+              <a:gd name="adj" fmla="val 4761"/>
+            </a:avLst>
+          </a:prstGeom>
+          <a:solidFill>
+            <a:srgbClr val="334155"/>
+          </a:solidFill>
+          <a:ln>
+            <a:noFill/>
+          </a:ln>
+        </p:spPr>
+        <p:style>
+          <a:lnRef idx="1">
+            <a:schemeClr val="accent1"/>
+          </a:lnRef>
+          <a:fillRef idx="3">
+            <a:schemeClr val="accent1"/>
+          </a:fillRef>
+          <a:effectRef idx="2">
+            <a:schemeClr val="accent1"/>
+          </a:effectRef>
+          <a:fontRef idx="minor">
+            <a:schemeClr val="lt1"/>
+          </a:fontRef>
+        </p:style>
+        <p:txBody>
+          <a:bodyPr rtlCol="0" anchor="ctr"/>
+          <a:lstStyle/>
+          <a:p>
+            <a:pPr algn="ctr"/>
+          </a:p>
+        </p:txBody>
+      </p:sp>
+      <p:sp>
+        <p:nvSpPr>
+          <p:cNvPr id="26" name="Rectangle 25"/>
+          <p:cNvSpPr/>
+          <p:nvPr/>
+        </p:nvSpPr>
+        <p:spPr>
+          <a:xfrm>
+            <a:off x="457200" y="5138928"/>
+            <a:ext cx="45720" cy="960120"/>
+          </a:xfrm>
+          <a:prstGeom prst="rect">
+            <a:avLst/>
+          </a:prstGeom>
+          <a:solidFill>
+            <a:srgbClr val="3B82F6"/>
+          </a:solidFill>
+          <a:ln>
+            <a:noFill/>
+          </a:ln>
+        </p:spPr>
+        <p:style>
+          <a:lnRef idx="1">
+            <a:schemeClr val="accent1"/>
+          </a:lnRef>
+          <a:fillRef idx="3">
+            <a:schemeClr val="accent1"/>
+          </a:fillRef>
+          <a:effectRef idx="2">
+            <a:schemeClr val="accent1"/>
+          </a:effectRef>
+          <a:fontRef idx="minor">
+            <a:schemeClr val="lt1"/>
+          </a:fontRef>
+        </p:style>
+        <p:txBody>
+          <a:bodyPr rtlCol="0" anchor="ctr"/>
+          <a:lstStyle/>
+          <a:p>
+            <a:pPr algn="ctr"/>
+          </a:p>
+        </p:txBody>
+      </p:sp>
+      <p:sp>
+        <p:nvSpPr>
+          <p:cNvPr id="27" name="TextBox 26"/>
+          <p:cNvSpPr txBox="1"/>
+          <p:nvPr/>
+        </p:nvSpPr>
+        <p:spPr>
+          <a:xfrm>
+            <a:off x="685800" y="5321808"/>
+            <a:ext cx="10957255" cy="594359"/>
+          </a:xfrm>
+          <a:prstGeom prst="rect">
+            <a:avLst/>
+          </a:prstGeom>
+          <a:noFill/>
+        </p:spPr>
+        <p:txBody>
+          <a:bodyPr wrap="square" lIns="0" tIns="0" rIns="0" bIns="0">
+            <a:spAutoFit/>
+          </a:bodyPr>
+          <a:lstStyle/>
+          <a:p>
+            <a:pPr algn="l"/>
+            <a:r>
+              <a:rPr sz="1400" b="0" i="0">
+                <a:solidFill>
+                  <a:srgbClr val="94A3B8"/>
+                </a:solidFill>
+                <a:latin typeface="Calibri"/>
+              </a:rPr>
+              <a:t>Both cards inherit the slide theme, then apply container-scoped token patches. Use this slide to check contrast, spacing, and callout consistency across local overrides.</a:t>
             </a:r>
           </a:p>
         </p:txBody>
@@ -26454,7 +29479,7 @@
             <a:avLst/>
           </a:prstGeom>
           <a:solidFill>
-            <a:srgbClr val="3B82F6"/>
+            <a:srgbClr val="2563EB"/>
           </a:solidFill>
           <a:ln>
             <a:noFill/>
@@ -26592,7 +29617,7 @@
             <a:avLst/>
           </a:prstGeom>
           <a:solidFill>
-            <a:srgbClr val="3B82F6"/>
+            <a:srgbClr val="B45309"/>
           </a:solidFill>
           <a:ln>
             <a:noFill/>
@@ -26730,7 +29755,7 @@
             <a:avLst/>
           </a:prstGeom>
           <a:solidFill>
-            <a:srgbClr val="3B82F6"/>
+            <a:srgbClr val="15803D"/>
           </a:solidFill>
           <a:ln>
             <a:noFill/>
@@ -26868,7 +29893,7 @@
             <a:avLst/>
           </a:prstGeom>
           <a:solidFill>
-            <a:srgbClr val="3B82F6"/>
+            <a:srgbClr val="B91C1C"/>
           </a:solidFill>
           <a:ln>
             <a:noFill/>

--- a/examples/demo_dark.pptx
+++ b/examples/demo_dark.pptx
@@ -253,7 +253,7 @@
           </c:tx>
           <c:spPr>
             <a:solidFill>
-              <a:srgbClr val="2563EB"/>
+              <a:srgbClr val="10B981"/>
             </a:solidFill>
             <a:ln>
               <a:noFill/>
@@ -546,7 +546,7 @@
           <c:spPr>
             <a:ln w="31750">
               <a:solidFill>
-                <a:srgbClr val="2563EB"/>
+                <a:srgbClr val="10B981"/>
               </a:solidFill>
             </a:ln>
           </c:spPr>
@@ -807,7 +807,7 @@
             <c:idx val="3"/>
             <c:spPr>
               <a:solidFill>
-                <a:srgbClr val="8B5CF6"/>
+                <a:srgbClr val="2563EB"/>
               </a:solidFill>
             </c:spPr>
           </c:dPt>
@@ -1196,7 +1196,7 @@
           </c:tx>
           <c:spPr>
             <a:solidFill>
-              <a:srgbClr val="2563EB"/>
+              <a:srgbClr val="10B981"/>
             </a:solidFill>
             <a:ln>
               <a:noFill/>
@@ -1418,7 +1418,7 @@
             <c:idx val="3"/>
             <c:spPr>
               <a:solidFill>
-                <a:srgbClr val="8B5CF6"/>
+                <a:srgbClr val="2563EB"/>
               </a:solidFill>
             </c:spPr>
           </c:dPt>
@@ -1648,7 +1648,7 @@
           <c:spPr>
             <a:ln w="31750">
               <a:solidFill>
-                <a:srgbClr val="2563EB"/>
+                <a:srgbClr val="10B981"/>
               </a:solidFill>
             </a:ln>
           </c:spPr>
@@ -11875,7 +11875,7 @@
             </a:avLst>
           </a:prstGeom>
           <a:solidFill>
-            <a:srgbClr val="3870CA"/>
+            <a:srgbClr val="E3791F"/>
           </a:solidFill>
           <a:ln>
             <a:noFill/>
@@ -11955,7 +11955,7 @@
             </a:avLst>
           </a:prstGeom>
           <a:solidFill>
-            <a:srgbClr val="3976D8"/>
+            <a:srgbClr val="BF6E50"/>
           </a:solidFill>
           <a:ln>
             <a:noFill/>
@@ -12035,7 +12035,7 @@
             </a:avLst>
           </a:prstGeom>
           <a:solidFill>
-            <a:srgbClr val="3762A9"/>
+            <a:srgbClr val="25B277"/>
           </a:solidFill>
           <a:ln>
             <a:noFill/>
@@ -12115,7 +12115,7 @@
             </a:avLst>
           </a:prstGeom>
           <a:solidFill>
-            <a:srgbClr val="3A7CE7"/>
+            <a:srgbClr val="72689D"/>
           </a:solidFill>
           <a:ln>
             <a:noFill/>
@@ -12230,7 +12230,7 @@
             </a:avLst>
           </a:prstGeom>
           <a:solidFill>
-            <a:srgbClr val="365A93"/>
+            <a:srgbClr val="23A0B6"/>
           </a:solidFill>
           <a:ln>
             <a:noFill/>
@@ -12310,7 +12310,7 @@
             </a:avLst>
           </a:prstGeom>
           <a:solidFill>
-            <a:srgbClr val="355484"/>
+            <a:srgbClr val="338CE0"/>
           </a:solidFill>
           <a:ln>
             <a:noFill/>
@@ -12390,7 +12390,7 @@
             </a:avLst>
           </a:prstGeom>
           <a:solidFill>
-            <a:srgbClr val="3767B4"/>
+            <a:srgbClr val="649F5A"/>
           </a:solidFill>
           <a:ln>
             <a:noFill/>
@@ -12470,7 +12470,7 @@
             </a:avLst>
           </a:prstGeom>
           <a:solidFill>
-            <a:srgbClr val="365D9A"/>
+            <a:srgbClr val="1BAAA0"/>
           </a:solidFill>
           <a:ln>
             <a:noFill/>
@@ -12585,7 +12585,7 @@
             </a:avLst>
           </a:prstGeom>
           <a:solidFill>
-            <a:srgbClr val="3A7CE7"/>
+            <a:srgbClr val="72689D"/>
           </a:solidFill>
           <a:ln>
             <a:noFill/>
@@ -12665,7 +12665,7 @@
             </a:avLst>
           </a:prstGeom>
           <a:solidFill>
-            <a:srgbClr val="3A7FEE"/>
+            <a:srgbClr val="4B65C4"/>
           </a:solidFill>
           <a:ln>
             <a:noFill/>
@@ -12745,7 +12745,7 @@
             </a:avLst>
           </a:prstGeom>
           <a:solidFill>
-            <a:srgbClr val="3979E0"/>
+            <a:srgbClr val="986B76"/>
           </a:solidFill>
           <a:ln>
             <a:noFill/>
@@ -12825,7 +12825,7 @@
             </a:avLst>
           </a:prstGeom>
           <a:solidFill>
-            <a:srgbClr val="3B82F6"/>
+            <a:srgbClr val="2563EB"/>
           </a:solidFill>
           <a:ln>
             <a:noFill/>
@@ -12940,7 +12940,7 @@
             </a:avLst>
           </a:prstGeom>
           <a:solidFill>
-            <a:srgbClr val="34496A"/>
+            <a:srgbClr val="3764AC"/>
           </a:solidFill>
           <a:ln>
             <a:noFill/>
@@ -13100,7 +13100,7 @@
             </a:avLst>
           </a:prstGeom>
           <a:solidFill>
-            <a:srgbClr val="35578B"/>
+            <a:srgbClr val="2B96CB"/>
           </a:solidFill>
           <a:ln>
             <a:noFill/>
@@ -13180,7 +13180,7 @@
             </a:avLst>
           </a:prstGeom>
           <a:solidFill>
-            <a:srgbClr val="344C72"/>
+            <a:srgbClr val="3870CA"/>
           </a:solidFill>
           <a:ln>
             <a:noFill/>
